--- a/SKO_COMERCIO_IMPORTACAO_E_EXP.pptx
+++ b/SKO_COMERCIO_IMPORTACAO_E_EXP.pptx
@@ -143,29 +143,23 @@
           </c:spPr>
           <c:cat>
             <c:strRef>
-              <c:f>Sheet1!$A$2:$A$3</c:f>
+              <c:f>Sheet1!$A$2:$A$2</c:f>
               <c:strCache>
-                <c:ptCount val="2"/>
+                <c:ptCount val="1"/>
                 <c:pt idx="0">
                   <c:v>Abril 2026</c:v>
-                </c:pt>
-                <c:pt idx="1">
-                  <c:v>Maio 2026</c:v>
                 </c:pt>
               </c:strCache>
             </c:strRef>
           </c:cat>
           <c:val>
             <c:numRef>
-              <c:f>Sheet1!$B$2:$B$3</c:f>
+              <c:f>Sheet1!$B$2:$B$2</c:f>
               <c:numCache>
                 <c:formatCode>General</c:formatCode>
-                <c:ptCount val="2"/>
+                <c:ptCount val="1"/>
                 <c:pt idx="0">
-                  <c:v>202</c:v>
-                </c:pt>
-                <c:pt idx="1">
-                  <c:v>152</c:v>
+                  <c:v>246</c:v>
                 </c:pt>
               </c:numCache>
             </c:numRef>
@@ -192,29 +186,23 @@
           </c:spPr>
           <c:cat>
             <c:strRef>
-              <c:f>Sheet1!$A$2:$A$3</c:f>
+              <c:f>Sheet1!$A$2:$A$2</c:f>
               <c:strCache>
-                <c:ptCount val="2"/>
+                <c:ptCount val="1"/>
                 <c:pt idx="0">
                   <c:v>Abril 2026</c:v>
-                </c:pt>
-                <c:pt idx="1">
-                  <c:v>Maio 2026</c:v>
                 </c:pt>
               </c:strCache>
             </c:strRef>
           </c:cat>
           <c:val>
             <c:numRef>
-              <c:f>Sheet1!$C$2:$C$3</c:f>
+              <c:f>Sheet1!$C$2:$C$2</c:f>
               <c:numCache>
                 <c:formatCode>General</c:formatCode>
-                <c:ptCount val="2"/>
+                <c:ptCount val="1"/>
                 <c:pt idx="0">
                   <c:v>23</c:v>
-                </c:pt>
-                <c:pt idx="1">
-                  <c:v>24</c:v>
                 </c:pt>
               </c:numCache>
             </c:numRef>
@@ -3387,7 +3375,7 @@
                 </a:solidFill>
                 <a:latin typeface="Calibri"/>
               </a:rPr>
-              <a:t>INDICADORES MAIO 2026</a:t>
+              <a:t>INDICADORES ABRIL 2026</a:t>
             </a:r>
           </a:p>
         </p:txBody>
@@ -3494,14 +3482,13 @@
           <a:p>
             <a:pPr algn="ctr"/>
             <a:r>
-              <a:rPr sz="1600" b="1">
+              <a:rPr sz="1400" b="1">
                 <a:solidFill>
                   <a:srgbClr val="FFFFFF"/>
                 </a:solidFill>
                 <a:latin typeface="Calibri"/>
               </a:rPr>
-              <a:t>Nossa rota e ir alem das
-entregas!</a:t>
+              <a:t>Nossa rota e ir alem das entregas!</a:t>
             </a:r>
           </a:p>
         </p:txBody>
@@ -3709,7 +3696,7 @@
                 </a:solidFill>
                 <a:latin typeface="Calibri"/>
               </a:rPr>
-              <a:t>176</a:t>
+              <a:t>269</a:t>
             </a:r>
           </a:p>
         </p:txBody>
@@ -3824,7 +3811,7 @@
                 </a:solidFill>
                 <a:latin typeface="Calibri"/>
               </a:rPr>
-              <a:t>152</a:t>
+              <a:t>246</a:t>
             </a:r>
           </a:p>
         </p:txBody>
@@ -3939,7 +3926,7 @@
                 </a:solidFill>
                 <a:latin typeface="Calibri"/>
               </a:rPr>
-              <a:t>24</a:t>
+              <a:t>23</a:t>
             </a:r>
           </a:p>
         </p:txBody>
@@ -4054,7 +4041,7 @@
                 </a:solidFill>
                 <a:latin typeface="Calibri"/>
               </a:rPr>
-              <a:t>86.4%</a:t>
+              <a:t>91.4%</a:t>
             </a:r>
           </a:p>
         </p:txBody>
@@ -4155,30 +4142,30 @@
                           </a:solidFill>
                           <a:latin typeface="Calibri"/>
                         </a:rPr>
+                        <a:t>Marco 2026</a:t>
+                      </a:r>
+                    </a:p>
+                  </a:txBody>
+                  <a:tcPr>
+                    <a:solidFill>
+                      <a:srgbClr val="1D1B43"/>
+                    </a:solidFill>
+                  </a:tcPr>
+                </a:tc>
+                <a:tc>
+                  <a:txBody>
+                    <a:bodyPr/>
+                    <a:lstStyle/>
+                    <a:p>
+                      <a:pPr algn="ctr"/>
+                      <a:r>
+                        <a:rPr sz="1100" b="1">
+                          <a:solidFill>
+                            <a:srgbClr val="FFFFFF"/>
+                          </a:solidFill>
+                          <a:latin typeface="Calibri"/>
+                        </a:rPr>
                         <a:t>Abril 2026</a:t>
-                      </a:r>
-                    </a:p>
-                  </a:txBody>
-                  <a:tcPr>
-                    <a:solidFill>
-                      <a:srgbClr val="1D1B43"/>
-                    </a:solidFill>
-                  </a:tcPr>
-                </a:tc>
-                <a:tc>
-                  <a:txBody>
-                    <a:bodyPr/>
-                    <a:lstStyle/>
-                    <a:p>
-                      <a:pPr algn="ctr"/>
-                      <a:r>
-                        <a:rPr sz="1100" b="1">
-                          <a:solidFill>
-                            <a:srgbClr val="FFFFFF"/>
-                          </a:solidFill>
-                          <a:latin typeface="Calibri"/>
-                        </a:rPr>
-                        <a:t>Maio 2026</a:t>
                       </a:r>
                     </a:p>
                   </a:txBody>
@@ -4249,53 +4236,53 @@
                           </a:solidFill>
                           <a:latin typeface="Calibri"/>
                         </a:rPr>
-                        <a:t>225</a:t>
-                      </a:r>
-                    </a:p>
-                  </a:txBody>
-                  <a:tcPr>
-                    <a:solidFill>
-                      <a:srgbClr val="FFFFFF"/>
-                    </a:solidFill>
-                  </a:tcPr>
-                </a:tc>
-                <a:tc>
-                  <a:txBody>
-                    <a:bodyPr/>
-                    <a:lstStyle/>
-                    <a:p>
-                      <a:pPr algn="l"/>
-                      <a:r>
-                        <a:rPr sz="1000" b="0">
-                          <a:solidFill>
-                            <a:srgbClr val="1D1B43"/>
-                          </a:solidFill>
-                          <a:latin typeface="Calibri"/>
-                        </a:rPr>
-                        <a:t>176</a:t>
-                      </a:r>
-                    </a:p>
-                  </a:txBody>
-                  <a:tcPr>
-                    <a:solidFill>
-                      <a:srgbClr val="FFFFFF"/>
-                    </a:solidFill>
-                  </a:tcPr>
-                </a:tc>
-                <a:tc>
-                  <a:txBody>
-                    <a:bodyPr/>
-                    <a:lstStyle/>
-                    <a:p>
-                      <a:pPr algn="l"/>
-                      <a:r>
-                        <a:rPr sz="1000" b="0">
-                          <a:solidFill>
-                            <a:srgbClr val="1D1B43"/>
-                          </a:solidFill>
-                          <a:latin typeface="Calibri"/>
-                        </a:rPr>
-                        <a:t>- 49</a:t>
+                        <a:t>-</a:t>
+                      </a:r>
+                    </a:p>
+                  </a:txBody>
+                  <a:tcPr>
+                    <a:solidFill>
+                      <a:srgbClr val="FFFFFF"/>
+                    </a:solidFill>
+                  </a:tcPr>
+                </a:tc>
+                <a:tc>
+                  <a:txBody>
+                    <a:bodyPr/>
+                    <a:lstStyle/>
+                    <a:p>
+                      <a:pPr algn="l"/>
+                      <a:r>
+                        <a:rPr sz="1000" b="0">
+                          <a:solidFill>
+                            <a:srgbClr val="1D1B43"/>
+                          </a:solidFill>
+                          <a:latin typeface="Calibri"/>
+                        </a:rPr>
+                        <a:t>269</a:t>
+                      </a:r>
+                    </a:p>
+                  </a:txBody>
+                  <a:tcPr>
+                    <a:solidFill>
+                      <a:srgbClr val="FFFFFF"/>
+                    </a:solidFill>
+                  </a:tcPr>
+                </a:tc>
+                <a:tc>
+                  <a:txBody>
+                    <a:bodyPr/>
+                    <a:lstStyle/>
+                    <a:p>
+                      <a:pPr algn="l"/>
+                      <a:r>
+                        <a:rPr sz="1000" b="0">
+                          <a:solidFill>
+                            <a:srgbClr val="1D1B43"/>
+                          </a:solidFill>
+                          <a:latin typeface="Calibri"/>
+                        </a:rPr>
+                        <a:t>-</a:t>
                       </a:r>
                     </a:p>
                   </a:txBody>
@@ -4343,53 +4330,53 @@
                           </a:solidFill>
                           <a:latin typeface="Calibri"/>
                         </a:rPr>
-                        <a:t>202</a:t>
-                      </a:r>
-                    </a:p>
-                  </a:txBody>
-                  <a:tcPr>
-                    <a:solidFill>
-                      <a:srgbClr val="F2F2F2"/>
-                    </a:solidFill>
-                  </a:tcPr>
-                </a:tc>
-                <a:tc>
-                  <a:txBody>
-                    <a:bodyPr/>
-                    <a:lstStyle/>
-                    <a:p>
-                      <a:pPr algn="l"/>
-                      <a:r>
-                        <a:rPr sz="1000" b="0">
-                          <a:solidFill>
-                            <a:srgbClr val="1D1B43"/>
-                          </a:solidFill>
-                          <a:latin typeface="Calibri"/>
-                        </a:rPr>
-                        <a:t>152</a:t>
-                      </a:r>
-                    </a:p>
-                  </a:txBody>
-                  <a:tcPr>
-                    <a:solidFill>
-                      <a:srgbClr val="F2F2F2"/>
-                    </a:solidFill>
-                  </a:tcPr>
-                </a:tc>
-                <a:tc>
-                  <a:txBody>
-                    <a:bodyPr/>
-                    <a:lstStyle/>
-                    <a:p>
-                      <a:pPr algn="l"/>
-                      <a:r>
-                        <a:rPr sz="1000" b="0">
-                          <a:solidFill>
-                            <a:srgbClr val="1D1B43"/>
-                          </a:solidFill>
-                          <a:latin typeface="Calibri"/>
-                        </a:rPr>
-                        <a:t>- 50</a:t>
+                        <a:t>-</a:t>
+                      </a:r>
+                    </a:p>
+                  </a:txBody>
+                  <a:tcPr>
+                    <a:solidFill>
+                      <a:srgbClr val="F2F2F2"/>
+                    </a:solidFill>
+                  </a:tcPr>
+                </a:tc>
+                <a:tc>
+                  <a:txBody>
+                    <a:bodyPr/>
+                    <a:lstStyle/>
+                    <a:p>
+                      <a:pPr algn="l"/>
+                      <a:r>
+                        <a:rPr sz="1000" b="0">
+                          <a:solidFill>
+                            <a:srgbClr val="1D1B43"/>
+                          </a:solidFill>
+                          <a:latin typeface="Calibri"/>
+                        </a:rPr>
+                        <a:t>246</a:t>
+                      </a:r>
+                    </a:p>
+                  </a:txBody>
+                  <a:tcPr>
+                    <a:solidFill>
+                      <a:srgbClr val="F2F2F2"/>
+                    </a:solidFill>
+                  </a:tcPr>
+                </a:tc>
+                <a:tc>
+                  <a:txBody>
+                    <a:bodyPr/>
+                    <a:lstStyle/>
+                    <a:p>
+                      <a:pPr algn="l"/>
+                      <a:r>
+                        <a:rPr sz="1000" b="0">
+                          <a:solidFill>
+                            <a:srgbClr val="1D1B43"/>
+                          </a:solidFill>
+                          <a:latin typeface="Calibri"/>
+                        </a:rPr>
+                        <a:t>-</a:t>
                       </a:r>
                     </a:p>
                   </a:txBody>
@@ -4437,6 +4424,29 @@
                           </a:solidFill>
                           <a:latin typeface="Calibri"/>
                         </a:rPr>
+                        <a:t>-</a:t>
+                      </a:r>
+                    </a:p>
+                  </a:txBody>
+                  <a:tcPr>
+                    <a:solidFill>
+                      <a:srgbClr val="FFFFFF"/>
+                    </a:solidFill>
+                  </a:tcPr>
+                </a:tc>
+                <a:tc>
+                  <a:txBody>
+                    <a:bodyPr/>
+                    <a:lstStyle/>
+                    <a:p>
+                      <a:pPr algn="l"/>
+                      <a:r>
+                        <a:rPr sz="1000" b="0">
+                          <a:solidFill>
+                            <a:srgbClr val="1D1B43"/>
+                          </a:solidFill>
+                          <a:latin typeface="Calibri"/>
+                        </a:rPr>
                         <a:t>23</a:t>
                       </a:r>
                     </a:p>
@@ -4460,30 +4470,7 @@
                           </a:solidFill>
                           <a:latin typeface="Calibri"/>
                         </a:rPr>
-                        <a:t>24</a:t>
-                      </a:r>
-                    </a:p>
-                  </a:txBody>
-                  <a:tcPr>
-                    <a:solidFill>
-                      <a:srgbClr val="FFFFFF"/>
-                    </a:solidFill>
-                  </a:tcPr>
-                </a:tc>
-                <a:tc>
-                  <a:txBody>
-                    <a:bodyPr/>
-                    <a:lstStyle/>
-                    <a:p>
-                      <a:pPr algn="l"/>
-                      <a:r>
-                        <a:rPr sz="1000" b="0">
-                          <a:solidFill>
-                            <a:srgbClr val="1D1B43"/>
-                          </a:solidFill>
-                          <a:latin typeface="Calibri"/>
-                        </a:rPr>
-                        <a:t>+ 1</a:t>
+                        <a:t>-</a:t>
                       </a:r>
                     </a:p>
                   </a:txBody>
@@ -4531,53 +4518,53 @@
                           </a:solidFill>
                           <a:latin typeface="Calibri"/>
                         </a:rPr>
-                        <a:t>89.8%</a:t>
-                      </a:r>
-                    </a:p>
-                  </a:txBody>
-                  <a:tcPr>
-                    <a:solidFill>
-                      <a:srgbClr val="F2F2F2"/>
-                    </a:solidFill>
-                  </a:tcPr>
-                </a:tc>
-                <a:tc>
-                  <a:txBody>
-                    <a:bodyPr/>
-                    <a:lstStyle/>
-                    <a:p>
-                      <a:pPr algn="l"/>
-                      <a:r>
-                        <a:rPr sz="1000" b="0">
-                          <a:solidFill>
-                            <a:srgbClr val="1D1B43"/>
-                          </a:solidFill>
-                          <a:latin typeface="Calibri"/>
-                        </a:rPr>
-                        <a:t>86.4%</a:t>
-                      </a:r>
-                    </a:p>
-                  </a:txBody>
-                  <a:tcPr>
-                    <a:solidFill>
-                      <a:srgbClr val="F2F2F2"/>
-                    </a:solidFill>
-                  </a:tcPr>
-                </a:tc>
-                <a:tc>
-                  <a:txBody>
-                    <a:bodyPr/>
-                    <a:lstStyle/>
-                    <a:p>
-                      <a:pPr algn="l"/>
-                      <a:r>
-                        <a:rPr sz="1000" b="0">
-                          <a:solidFill>
-                            <a:srgbClr val="1D1B43"/>
-                          </a:solidFill>
-                          <a:latin typeface="Calibri"/>
-                        </a:rPr>
-                        <a:t>- 3.4pp</a:t>
+                        <a:t>-</a:t>
+                      </a:r>
+                    </a:p>
+                  </a:txBody>
+                  <a:tcPr>
+                    <a:solidFill>
+                      <a:srgbClr val="F2F2F2"/>
+                    </a:solidFill>
+                  </a:tcPr>
+                </a:tc>
+                <a:tc>
+                  <a:txBody>
+                    <a:bodyPr/>
+                    <a:lstStyle/>
+                    <a:p>
+                      <a:pPr algn="l"/>
+                      <a:r>
+                        <a:rPr sz="1000" b="0">
+                          <a:solidFill>
+                            <a:srgbClr val="1D1B43"/>
+                          </a:solidFill>
+                          <a:latin typeface="Calibri"/>
+                        </a:rPr>
+                        <a:t>91.4%</a:t>
+                      </a:r>
+                    </a:p>
+                  </a:txBody>
+                  <a:tcPr>
+                    <a:solidFill>
+                      <a:srgbClr val="F2F2F2"/>
+                    </a:solidFill>
+                  </a:tcPr>
+                </a:tc>
+                <a:tc>
+                  <a:txBody>
+                    <a:bodyPr/>
+                    <a:lstStyle/>
+                    <a:p>
+                      <a:pPr algn="l"/>
+                      <a:r>
+                        <a:rPr sz="1000" b="0">
+                          <a:solidFill>
+                            <a:srgbClr val="1D1B43"/>
+                          </a:solidFill>
+                          <a:latin typeface="Calibri"/>
+                        </a:rPr>
+                        <a:t>-</a:t>
                       </a:r>
                     </a:p>
                   </a:txBody>
@@ -4748,7 +4735,7 @@
         </p:nvGraphicFramePr>
         <p:xfrm>
           <a:off x="7955279" y="2286000"/>
-          <a:ext cx="4480560" cy="1316736"/>
+          <a:ext cx="4480560" cy="877824"/>
         </p:xfrm>
         <a:graphic>
           <a:graphicData uri="http://schemas.openxmlformats.org/drawingml/2006/table">
@@ -4917,30 +4904,30 @@
                           </a:solidFill>
                           <a:latin typeface="Calibri"/>
                         </a:rPr>
-                        <a:t>225</a:t>
-                      </a:r>
-                    </a:p>
-                  </a:txBody>
-                  <a:tcPr>
-                    <a:solidFill>
-                      <a:srgbClr val="FFFFFF"/>
-                    </a:solidFill>
-                  </a:tcPr>
-                </a:tc>
-                <a:tc>
-                  <a:txBody>
-                    <a:bodyPr/>
-                    <a:lstStyle/>
-                    <a:p>
-                      <a:pPr algn="l"/>
-                      <a:r>
-                        <a:rPr sz="1000" b="0">
-                          <a:solidFill>
-                            <a:srgbClr val="1D1B43"/>
-                          </a:solidFill>
-                          <a:latin typeface="Calibri"/>
-                        </a:rPr>
-                        <a:t>202</a:t>
+                        <a:t>269</a:t>
+                      </a:r>
+                    </a:p>
+                  </a:txBody>
+                  <a:tcPr>
+                    <a:solidFill>
+                      <a:srgbClr val="FFFFFF"/>
+                    </a:solidFill>
+                  </a:tcPr>
+                </a:tc>
+                <a:tc>
+                  <a:txBody>
+                    <a:bodyPr/>
+                    <a:lstStyle/>
+                    <a:p>
+                      <a:pPr algn="l"/>
+                      <a:r>
+                        <a:rPr sz="1000" b="0">
+                          <a:solidFill>
+                            <a:srgbClr val="1D1B43"/>
+                          </a:solidFill>
+                          <a:latin typeface="Calibri"/>
+                        </a:rPr>
+                        <a:t>246</a:t>
                       </a:r>
                     </a:p>
                   </a:txBody>
@@ -4986,130 +4973,13 @@
                           </a:solidFill>
                           <a:latin typeface="Calibri"/>
                         </a:rPr>
-                        <a:t>89.8%</a:t>
-                      </a:r>
-                    </a:p>
-                  </a:txBody>
-                  <a:tcPr>
-                    <a:solidFill>
-                      <a:srgbClr val="FFFFFF"/>
-                    </a:solidFill>
-                  </a:tcPr>
-                </a:tc>
-              </a:tr>
-              <a:tr h="438912">
-                <a:tc>
-                  <a:txBody>
-                    <a:bodyPr/>
-                    <a:lstStyle/>
-                    <a:p>
-                      <a:pPr algn="l"/>
-                      <a:r>
-                        <a:rPr sz="1000" b="0">
-                          <a:solidFill>
-                            <a:srgbClr val="1D1B43"/>
-                          </a:solidFill>
-                          <a:latin typeface="Calibri"/>
-                        </a:rPr>
-                        <a:t>Maio 2026</a:t>
-                      </a:r>
-                    </a:p>
-                  </a:txBody>
-                  <a:tcPr>
-                    <a:solidFill>
-                      <a:srgbClr val="F2F2F2"/>
-                    </a:solidFill>
-                  </a:tcPr>
-                </a:tc>
-                <a:tc>
-                  <a:txBody>
-                    <a:bodyPr/>
-                    <a:lstStyle/>
-                    <a:p>
-                      <a:pPr algn="l"/>
-                      <a:r>
-                        <a:rPr sz="1000" b="0">
-                          <a:solidFill>
-                            <a:srgbClr val="1D1B43"/>
-                          </a:solidFill>
-                          <a:latin typeface="Calibri"/>
-                        </a:rPr>
-                        <a:t>176</a:t>
-                      </a:r>
-                    </a:p>
-                  </a:txBody>
-                  <a:tcPr>
-                    <a:solidFill>
-                      <a:srgbClr val="F2F2F2"/>
-                    </a:solidFill>
-                  </a:tcPr>
-                </a:tc>
-                <a:tc>
-                  <a:txBody>
-                    <a:bodyPr/>
-                    <a:lstStyle/>
-                    <a:p>
-                      <a:pPr algn="l"/>
-                      <a:r>
-                        <a:rPr sz="1000" b="0">
-                          <a:solidFill>
-                            <a:srgbClr val="1D1B43"/>
-                          </a:solidFill>
-                          <a:latin typeface="Calibri"/>
-                        </a:rPr>
-                        <a:t>152</a:t>
-                      </a:r>
-                    </a:p>
-                  </a:txBody>
-                  <a:tcPr>
-                    <a:solidFill>
-                      <a:srgbClr val="F2F2F2"/>
-                    </a:solidFill>
-                  </a:tcPr>
-                </a:tc>
-                <a:tc>
-                  <a:txBody>
-                    <a:bodyPr/>
-                    <a:lstStyle/>
-                    <a:p>
-                      <a:pPr algn="l"/>
-                      <a:r>
-                        <a:rPr sz="1000" b="0">
-                          <a:solidFill>
-                            <a:srgbClr val="1D1B43"/>
-                          </a:solidFill>
-                          <a:latin typeface="Calibri"/>
-                        </a:rPr>
-                        <a:t>24</a:t>
-                      </a:r>
-                    </a:p>
-                  </a:txBody>
-                  <a:tcPr>
-                    <a:solidFill>
-                      <a:srgbClr val="F2F2F2"/>
-                    </a:solidFill>
-                  </a:tcPr>
-                </a:tc>
-                <a:tc>
-                  <a:txBody>
-                    <a:bodyPr/>
-                    <a:lstStyle/>
-                    <a:p>
-                      <a:pPr algn="l"/>
-                      <a:r>
-                        <a:rPr sz="1000" b="0">
-                          <a:solidFill>
-                            <a:srgbClr val="1D1B43"/>
-                          </a:solidFill>
-                          <a:latin typeface="Calibri"/>
-                        </a:rPr>
-                        <a:t>86.4%</a:t>
-                      </a:r>
-                    </a:p>
-                  </a:txBody>
-                  <a:tcPr>
-                    <a:solidFill>
-                      <a:srgbClr val="F2F2F2"/>
+                        <a:t>91.4%</a:t>
+                      </a:r>
+                    </a:p>
+                  </a:txBody>
+                  <a:tcPr>
+                    <a:solidFill>
+                      <a:srgbClr val="FFFFFF"/>
                     </a:solidFill>
                   </a:tcPr>
                 </a:tc>
@@ -5191,7 +5061,7 @@
                 </a:solidFill>
                 <a:latin typeface="Calibri"/>
               </a:rPr>
-              <a:t>PERFORMANCE: 86.4% - REGULAR</a:t>
+              <a:t>PERFORMANCE: 91.4% - REGULAR</a:t>
             </a:r>
           </a:p>
         </p:txBody>
@@ -5276,7 +5146,7 @@
                 </a:solidFill>
                 <a:latin typeface="Calibri"/>
               </a:rPr>
-              <a:t>OCORRENCIAS FORA DO PRAZO (24)</a:t>
+              <a:t>OCORRENCIAS FORA DO PRAZO (23)</a:t>
             </a:r>
           </a:p>
         </p:txBody>
@@ -5349,7 +5219,7 @@
                 <a:gridCol w="1554480"/>
                 <a:gridCol w="2743200"/>
               </a:tblGrid>
-              <a:tr h="182880">
+              <a:tr h="190500">
                 <a:tc>
                   <a:txBody>
                     <a:bodyPr/>
@@ -5466,90 +5336,90 @@
                   </a:tcPr>
                 </a:tc>
               </a:tr>
-              <a:tr h="182880">
-                <a:tc>
-                  <a:txBody>
-                    <a:bodyPr/>
-                    <a:lstStyle/>
-                    <a:p>
-                      <a:pPr algn="l"/>
-                      <a:r>
-                        <a:rPr sz="1000" b="0">
-                          <a:solidFill>
-                            <a:srgbClr val="1D1B43"/>
-                          </a:solidFill>
-                          <a:latin typeface="Calibri"/>
-                        </a:rPr>
-                        <a:t>279708</a:t>
-                      </a:r>
-                    </a:p>
-                  </a:txBody>
-                  <a:tcPr>
-                    <a:solidFill>
-                      <a:srgbClr val="FFFFFF"/>
-                    </a:solidFill>
-                  </a:tcPr>
-                </a:tc>
-                <a:tc>
-                  <a:txBody>
-                    <a:bodyPr/>
-                    <a:lstStyle/>
-                    <a:p>
-                      <a:pPr algn="l"/>
-                      <a:r>
-                        <a:rPr sz="1000" b="0">
-                          <a:solidFill>
-                            <a:srgbClr val="1D1B43"/>
-                          </a:solidFill>
-                          <a:latin typeface="Calibri"/>
-                        </a:rPr>
-                        <a:t>LAURENTIZ - COMERCIO - JABOTICABAL / SP</a:t>
-                      </a:r>
-                    </a:p>
-                  </a:txBody>
-                  <a:tcPr>
-                    <a:solidFill>
-                      <a:srgbClr val="FFFFFF"/>
-                    </a:solidFill>
-                  </a:tcPr>
-                </a:tc>
-                <a:tc>
-                  <a:txBody>
-                    <a:bodyPr/>
-                    <a:lstStyle/>
-                    <a:p>
-                      <a:pPr algn="l"/>
-                      <a:r>
-                        <a:rPr sz="1000" b="0">
-                          <a:solidFill>
-                            <a:srgbClr val="1D1B43"/>
-                          </a:solidFill>
-                          <a:latin typeface="Calibri"/>
-                        </a:rPr>
-                        <a:t>JABOTICABAL/SP</a:t>
-                      </a:r>
-                    </a:p>
-                  </a:txBody>
-                  <a:tcPr>
-                    <a:solidFill>
-                      <a:srgbClr val="FFFFFF"/>
-                    </a:solidFill>
-                  </a:tcPr>
-                </a:tc>
-                <a:tc>
-                  <a:txBody>
-                    <a:bodyPr/>
-                    <a:lstStyle/>
-                    <a:p>
-                      <a:pPr algn="l"/>
-                      <a:r>
-                        <a:rPr sz="1000" b="0">
-                          <a:solidFill>
-                            <a:srgbClr val="1D1B43"/>
-                          </a:solidFill>
-                          <a:latin typeface="Calibri"/>
-                        </a:rPr>
-                        <a:t>04/05/2026</a:t>
+              <a:tr h="190500">
+                <a:tc>
+                  <a:txBody>
+                    <a:bodyPr/>
+                    <a:lstStyle/>
+                    <a:p>
+                      <a:pPr algn="l"/>
+                      <a:r>
+                        <a:rPr sz="1000" b="0">
+                          <a:solidFill>
+                            <a:srgbClr val="1D1B43"/>
+                          </a:solidFill>
+                          <a:latin typeface="Calibri"/>
+                        </a:rPr>
+                        <a:t>279417</a:t>
+                      </a:r>
+                    </a:p>
+                  </a:txBody>
+                  <a:tcPr>
+                    <a:solidFill>
+                      <a:srgbClr val="FFFFFF"/>
+                    </a:solidFill>
+                  </a:tcPr>
+                </a:tc>
+                <a:tc>
+                  <a:txBody>
+                    <a:bodyPr/>
+                    <a:lstStyle/>
+                    <a:p>
+                      <a:pPr algn="l"/>
+                      <a:r>
+                        <a:rPr sz="1000" b="0">
+                          <a:solidFill>
+                            <a:srgbClr val="1D1B43"/>
+                          </a:solidFill>
+                          <a:latin typeface="Calibri"/>
+                        </a:rPr>
+                        <a:t>LUNALO CALCADOS E AC - OUROESTE / SP</a:t>
+                      </a:r>
+                    </a:p>
+                  </a:txBody>
+                  <a:tcPr>
+                    <a:solidFill>
+                      <a:srgbClr val="FFFFFF"/>
+                    </a:solidFill>
+                  </a:tcPr>
+                </a:tc>
+                <a:tc>
+                  <a:txBody>
+                    <a:bodyPr/>
+                    <a:lstStyle/>
+                    <a:p>
+                      <a:pPr algn="l"/>
+                      <a:r>
+                        <a:rPr sz="1000" b="0">
+                          <a:solidFill>
+                            <a:srgbClr val="1D1B43"/>
+                          </a:solidFill>
+                          <a:latin typeface="Calibri"/>
+                        </a:rPr>
+                        <a:t>OUROESTE/SP</a:t>
+                      </a:r>
+                    </a:p>
+                  </a:txBody>
+                  <a:tcPr>
+                    <a:solidFill>
+                      <a:srgbClr val="FFFFFF"/>
+                    </a:solidFill>
+                  </a:tcPr>
+                </a:tc>
+                <a:tc>
+                  <a:txBody>
+                    <a:bodyPr/>
+                    <a:lstStyle/>
+                    <a:p>
+                      <a:pPr algn="l"/>
+                      <a:r>
+                        <a:rPr sz="1000" b="0">
+                          <a:solidFill>
+                            <a:srgbClr val="1D1B43"/>
+                          </a:solidFill>
+                          <a:latin typeface="Calibri"/>
+                        </a:rPr>
+                        <a:t>28/04/2026</a:t>
                       </a:r>
                     </a:p>
                   </a:txBody>
@@ -5583,90 +5453,90 @@
                   </a:tcPr>
                 </a:tc>
               </a:tr>
-              <a:tr h="182880">
-                <a:tc>
-                  <a:txBody>
-                    <a:bodyPr/>
-                    <a:lstStyle/>
-                    <a:p>
-                      <a:pPr algn="l"/>
-                      <a:r>
-                        <a:rPr sz="1000" b="0">
-                          <a:solidFill>
-                            <a:srgbClr val="1D1B43"/>
-                          </a:solidFill>
-                          <a:latin typeface="Calibri"/>
-                        </a:rPr>
-                        <a:t>279722</a:t>
-                      </a:r>
-                    </a:p>
-                  </a:txBody>
-                  <a:tcPr>
-                    <a:solidFill>
-                      <a:srgbClr val="F2F2F2"/>
-                    </a:solidFill>
-                  </a:tcPr>
-                </a:tc>
-                <a:tc>
-                  <a:txBody>
-                    <a:bodyPr/>
-                    <a:lstStyle/>
-                    <a:p>
-                      <a:pPr algn="l"/>
-                      <a:r>
-                        <a:rPr sz="1000" b="0">
-                          <a:solidFill>
-                            <a:srgbClr val="1D1B43"/>
-                          </a:solidFill>
-                          <a:latin typeface="Calibri"/>
-                        </a:rPr>
-                        <a:t>INLUX CALCADOS LTDA - ASSIS / SP</a:t>
-                      </a:r>
-                    </a:p>
-                  </a:txBody>
-                  <a:tcPr>
-                    <a:solidFill>
-                      <a:srgbClr val="F2F2F2"/>
-                    </a:solidFill>
-                  </a:tcPr>
-                </a:tc>
-                <a:tc>
-                  <a:txBody>
-                    <a:bodyPr/>
-                    <a:lstStyle/>
-                    <a:p>
-                      <a:pPr algn="l"/>
-                      <a:r>
-                        <a:rPr sz="1000" b="0">
-                          <a:solidFill>
-                            <a:srgbClr val="1D1B43"/>
-                          </a:solidFill>
-                          <a:latin typeface="Calibri"/>
-                        </a:rPr>
-                        <a:t>ASSIS/SP</a:t>
-                      </a:r>
-                    </a:p>
-                  </a:txBody>
-                  <a:tcPr>
-                    <a:solidFill>
-                      <a:srgbClr val="F2F2F2"/>
-                    </a:solidFill>
-                  </a:tcPr>
-                </a:tc>
-                <a:tc>
-                  <a:txBody>
-                    <a:bodyPr/>
-                    <a:lstStyle/>
-                    <a:p>
-                      <a:pPr algn="l"/>
-                      <a:r>
-                        <a:rPr sz="1000" b="0">
-                          <a:solidFill>
-                            <a:srgbClr val="1D1B43"/>
-                          </a:solidFill>
-                          <a:latin typeface="Calibri"/>
-                        </a:rPr>
-                        <a:t>04/05/2026</a:t>
+              <a:tr h="190500">
+                <a:tc>
+                  <a:txBody>
+                    <a:bodyPr/>
+                    <a:lstStyle/>
+                    <a:p>
+                      <a:pPr algn="l"/>
+                      <a:r>
+                        <a:rPr sz="1000" b="0">
+                          <a:solidFill>
+                            <a:srgbClr val="1D1B43"/>
+                          </a:solidFill>
+                          <a:latin typeface="Calibri"/>
+                        </a:rPr>
+                        <a:t>279723</a:t>
+                      </a:r>
+                    </a:p>
+                  </a:txBody>
+                  <a:tcPr>
+                    <a:solidFill>
+                      <a:srgbClr val="F2F2F2"/>
+                    </a:solidFill>
+                  </a:tcPr>
+                </a:tc>
+                <a:tc>
+                  <a:txBody>
+                    <a:bodyPr/>
+                    <a:lstStyle/>
+                    <a:p>
+                      <a:pPr algn="l"/>
+                      <a:r>
+                        <a:rPr sz="1000" b="0">
+                          <a:solidFill>
+                            <a:srgbClr val="1D1B43"/>
+                          </a:solidFill>
+                          <a:latin typeface="Calibri"/>
+                        </a:rPr>
+                        <a:t>MG CIDADE LTDA - BELO HORIZONTE / MG</a:t>
+                      </a:r>
+                    </a:p>
+                  </a:txBody>
+                  <a:tcPr>
+                    <a:solidFill>
+                      <a:srgbClr val="F2F2F2"/>
+                    </a:solidFill>
+                  </a:tcPr>
+                </a:tc>
+                <a:tc>
+                  <a:txBody>
+                    <a:bodyPr/>
+                    <a:lstStyle/>
+                    <a:p>
+                      <a:pPr algn="l"/>
+                      <a:r>
+                        <a:rPr sz="1000" b="0">
+                          <a:solidFill>
+                            <a:srgbClr val="1D1B43"/>
+                          </a:solidFill>
+                          <a:latin typeface="Calibri"/>
+                        </a:rPr>
+                        <a:t>BELO HORIZONTE/MG</a:t>
+                      </a:r>
+                    </a:p>
+                  </a:txBody>
+                  <a:tcPr>
+                    <a:solidFill>
+                      <a:srgbClr val="F2F2F2"/>
+                    </a:solidFill>
+                  </a:tcPr>
+                </a:tc>
+                <a:tc>
+                  <a:txBody>
+                    <a:bodyPr/>
+                    <a:lstStyle/>
+                    <a:p>
+                      <a:pPr algn="l"/>
+                      <a:r>
+                        <a:rPr sz="1000" b="0">
+                          <a:solidFill>
+                            <a:srgbClr val="1D1B43"/>
+                          </a:solidFill>
+                          <a:latin typeface="Calibri"/>
+                        </a:rPr>
+                        <a:t>29/04/2026</a:t>
                       </a:r>
                     </a:p>
                   </a:txBody>
@@ -5700,90 +5570,324 @@
                   </a:tcPr>
                 </a:tc>
               </a:tr>
-              <a:tr h="182880">
-                <a:tc>
-                  <a:txBody>
-                    <a:bodyPr/>
-                    <a:lstStyle/>
-                    <a:p>
-                      <a:pPr algn="l"/>
-                      <a:r>
-                        <a:rPr sz="1000" b="0">
-                          <a:solidFill>
-                            <a:srgbClr val="1D1B43"/>
-                          </a:solidFill>
-                          <a:latin typeface="Calibri"/>
-                        </a:rPr>
-                        <a:t>279755</a:t>
-                      </a:r>
-                    </a:p>
-                  </a:txBody>
-                  <a:tcPr>
-                    <a:solidFill>
-                      <a:srgbClr val="FFFFFF"/>
-                    </a:solidFill>
-                  </a:tcPr>
-                </a:tc>
-                <a:tc>
-                  <a:txBody>
-                    <a:bodyPr/>
-                    <a:lstStyle/>
-                    <a:p>
-                      <a:pPr algn="l"/>
-                      <a:r>
-                        <a:rPr sz="1000" b="0">
-                          <a:solidFill>
-                            <a:srgbClr val="1D1B43"/>
-                          </a:solidFill>
-                          <a:latin typeface="Calibri"/>
-                        </a:rPr>
-                        <a:t>ANA VICTORIA GUARIEN - NEVES PAULISTA / SP</a:t>
-                      </a:r>
-                    </a:p>
-                  </a:txBody>
-                  <a:tcPr>
-                    <a:solidFill>
-                      <a:srgbClr val="FFFFFF"/>
-                    </a:solidFill>
-                  </a:tcPr>
-                </a:tc>
-                <a:tc>
-                  <a:txBody>
-                    <a:bodyPr/>
-                    <a:lstStyle/>
-                    <a:p>
-                      <a:pPr algn="l"/>
-                      <a:r>
-                        <a:rPr sz="1000" b="0">
-                          <a:solidFill>
-                            <a:srgbClr val="1D1B43"/>
-                          </a:solidFill>
-                          <a:latin typeface="Calibri"/>
-                        </a:rPr>
-                        <a:t>NEVES PAULISTA/SP</a:t>
-                      </a:r>
-                    </a:p>
-                  </a:txBody>
-                  <a:tcPr>
-                    <a:solidFill>
-                      <a:srgbClr val="FFFFFF"/>
-                    </a:solidFill>
-                  </a:tcPr>
-                </a:tc>
-                <a:tc>
-                  <a:txBody>
-                    <a:bodyPr/>
-                    <a:lstStyle/>
-                    <a:p>
-                      <a:pPr algn="l"/>
-                      <a:r>
-                        <a:rPr sz="1000" b="0">
-                          <a:solidFill>
-                            <a:srgbClr val="1D1B43"/>
-                          </a:solidFill>
-                          <a:latin typeface="Calibri"/>
-                        </a:rPr>
-                        <a:t>04/05/2026</a:t>
+              <a:tr h="190500">
+                <a:tc>
+                  <a:txBody>
+                    <a:bodyPr/>
+                    <a:lstStyle/>
+                    <a:p>
+                      <a:pPr algn="l"/>
+                      <a:r>
+                        <a:rPr sz="1000" b="0">
+                          <a:solidFill>
+                            <a:srgbClr val="1D1B43"/>
+                          </a:solidFill>
+                          <a:latin typeface="Calibri"/>
+                        </a:rPr>
+                        <a:t>279732</a:t>
+                      </a:r>
+                    </a:p>
+                  </a:txBody>
+                  <a:tcPr>
+                    <a:solidFill>
+                      <a:srgbClr val="FFFFFF"/>
+                    </a:solidFill>
+                  </a:tcPr>
+                </a:tc>
+                <a:tc>
+                  <a:txBody>
+                    <a:bodyPr/>
+                    <a:lstStyle/>
+                    <a:p>
+                      <a:pPr algn="l"/>
+                      <a:r>
+                        <a:rPr sz="1000" b="0">
+                          <a:solidFill>
+                            <a:srgbClr val="1D1B43"/>
+                          </a:solidFill>
+                          <a:latin typeface="Calibri"/>
+                        </a:rPr>
+                        <a:t>S. A. LEMOS LTDA - VILA VELHA / ES</a:t>
+                      </a:r>
+                    </a:p>
+                  </a:txBody>
+                  <a:tcPr>
+                    <a:solidFill>
+                      <a:srgbClr val="FFFFFF"/>
+                    </a:solidFill>
+                  </a:tcPr>
+                </a:tc>
+                <a:tc>
+                  <a:txBody>
+                    <a:bodyPr/>
+                    <a:lstStyle/>
+                    <a:p>
+                      <a:pPr algn="l"/>
+                      <a:r>
+                        <a:rPr sz="1000" b="0">
+                          <a:solidFill>
+                            <a:srgbClr val="1D1B43"/>
+                          </a:solidFill>
+                          <a:latin typeface="Calibri"/>
+                        </a:rPr>
+                        <a:t>VILA VELHA/ES</a:t>
+                      </a:r>
+                    </a:p>
+                  </a:txBody>
+                  <a:tcPr>
+                    <a:solidFill>
+                      <a:srgbClr val="FFFFFF"/>
+                    </a:solidFill>
+                  </a:tcPr>
+                </a:tc>
+                <a:tc>
+                  <a:txBody>
+                    <a:bodyPr/>
+                    <a:lstStyle/>
+                    <a:p>
+                      <a:pPr algn="l"/>
+                      <a:r>
+                        <a:rPr sz="1000" b="0">
+                          <a:solidFill>
+                            <a:srgbClr val="1D1B43"/>
+                          </a:solidFill>
+                          <a:latin typeface="Calibri"/>
+                        </a:rPr>
+                        <a:t>29/04/2026</a:t>
+                      </a:r>
+                    </a:p>
+                  </a:txBody>
+                  <a:tcPr>
+                    <a:solidFill>
+                      <a:srgbClr val="FFFFFF"/>
+                    </a:solidFill>
+                  </a:tcPr>
+                </a:tc>
+                <a:tc>
+                  <a:txBody>
+                    <a:bodyPr/>
+                    <a:lstStyle/>
+                    <a:p>
+                      <a:pPr algn="l"/>
+                      <a:r>
+                        <a:rPr sz="1000" b="0">
+                          <a:solidFill>
+                            <a:srgbClr val="1D1B43"/>
+                          </a:solidFill>
+                          <a:latin typeface="Calibri"/>
+                        </a:rPr>
+                        <a:t>FORA DO PRAZO</a:t>
+                      </a:r>
+                    </a:p>
+                  </a:txBody>
+                  <a:tcPr>
+                    <a:solidFill>
+                      <a:srgbClr val="FFFFFF"/>
+                    </a:solidFill>
+                  </a:tcPr>
+                </a:tc>
+              </a:tr>
+              <a:tr h="190500">
+                <a:tc>
+                  <a:txBody>
+                    <a:bodyPr/>
+                    <a:lstStyle/>
+                    <a:p>
+                      <a:pPr algn="l"/>
+                      <a:r>
+                        <a:rPr sz="1000" b="0">
+                          <a:solidFill>
+                            <a:srgbClr val="1D1B43"/>
+                          </a:solidFill>
+                          <a:latin typeface="Calibri"/>
+                        </a:rPr>
+                        <a:t>279744</a:t>
+                      </a:r>
+                    </a:p>
+                  </a:txBody>
+                  <a:tcPr>
+                    <a:solidFill>
+                      <a:srgbClr val="F2F2F2"/>
+                    </a:solidFill>
+                  </a:tcPr>
+                </a:tc>
+                <a:tc>
+                  <a:txBody>
+                    <a:bodyPr/>
+                    <a:lstStyle/>
+                    <a:p>
+                      <a:pPr algn="l"/>
+                      <a:r>
+                        <a:rPr sz="1000" b="0">
+                          <a:solidFill>
+                            <a:srgbClr val="1D1B43"/>
+                          </a:solidFill>
+                          <a:latin typeface="Calibri"/>
+                        </a:rPr>
+                        <a:t>SV BOLSAS E SAPATOS - VITORIA / ES</a:t>
+                      </a:r>
+                    </a:p>
+                  </a:txBody>
+                  <a:tcPr>
+                    <a:solidFill>
+                      <a:srgbClr val="F2F2F2"/>
+                    </a:solidFill>
+                  </a:tcPr>
+                </a:tc>
+                <a:tc>
+                  <a:txBody>
+                    <a:bodyPr/>
+                    <a:lstStyle/>
+                    <a:p>
+                      <a:pPr algn="l"/>
+                      <a:r>
+                        <a:rPr sz="1000" b="0">
+                          <a:solidFill>
+                            <a:srgbClr val="1D1B43"/>
+                          </a:solidFill>
+                          <a:latin typeface="Calibri"/>
+                        </a:rPr>
+                        <a:t>VITORIA/ES</a:t>
+                      </a:r>
+                    </a:p>
+                  </a:txBody>
+                  <a:tcPr>
+                    <a:solidFill>
+                      <a:srgbClr val="F2F2F2"/>
+                    </a:solidFill>
+                  </a:tcPr>
+                </a:tc>
+                <a:tc>
+                  <a:txBody>
+                    <a:bodyPr/>
+                    <a:lstStyle/>
+                    <a:p>
+                      <a:pPr algn="l"/>
+                      <a:r>
+                        <a:rPr sz="1000" b="0">
+                          <a:solidFill>
+                            <a:srgbClr val="1D1B43"/>
+                          </a:solidFill>
+                          <a:latin typeface="Calibri"/>
+                        </a:rPr>
+                        <a:t>29/04/2026</a:t>
+                      </a:r>
+                    </a:p>
+                  </a:txBody>
+                  <a:tcPr>
+                    <a:solidFill>
+                      <a:srgbClr val="F2F2F2"/>
+                    </a:solidFill>
+                  </a:tcPr>
+                </a:tc>
+                <a:tc>
+                  <a:txBody>
+                    <a:bodyPr/>
+                    <a:lstStyle/>
+                    <a:p>
+                      <a:pPr algn="l"/>
+                      <a:r>
+                        <a:rPr sz="1000" b="0">
+                          <a:solidFill>
+                            <a:srgbClr val="1D1B43"/>
+                          </a:solidFill>
+                          <a:latin typeface="Calibri"/>
+                        </a:rPr>
+                        <a:t>FORA DO PRAZO</a:t>
+                      </a:r>
+                    </a:p>
+                  </a:txBody>
+                  <a:tcPr>
+                    <a:solidFill>
+                      <a:srgbClr val="F2F2F2"/>
+                    </a:solidFill>
+                  </a:tcPr>
+                </a:tc>
+              </a:tr>
+              <a:tr h="190500">
+                <a:tc>
+                  <a:txBody>
+                    <a:bodyPr/>
+                    <a:lstStyle/>
+                    <a:p>
+                      <a:pPr algn="l"/>
+                      <a:r>
+                        <a:rPr sz="1000" b="0">
+                          <a:solidFill>
+                            <a:srgbClr val="1D1B43"/>
+                          </a:solidFill>
+                          <a:latin typeface="Calibri"/>
+                        </a:rPr>
+                        <a:t>279746</a:t>
+                      </a:r>
+                    </a:p>
+                  </a:txBody>
+                  <a:tcPr>
+                    <a:solidFill>
+                      <a:srgbClr val="FFFFFF"/>
+                    </a:solidFill>
+                  </a:tcPr>
+                </a:tc>
+                <a:tc>
+                  <a:txBody>
+                    <a:bodyPr/>
+                    <a:lstStyle/>
+                    <a:p>
+                      <a:pPr algn="l"/>
+                      <a:r>
+                        <a:rPr sz="1000" b="0">
+                          <a:solidFill>
+                            <a:srgbClr val="1D1B43"/>
+                          </a:solidFill>
+                          <a:latin typeface="Calibri"/>
+                        </a:rPr>
+                        <a:t>R4 COMERCIO DE SAPAT - VITORIA / ES</a:t>
+                      </a:r>
+                    </a:p>
+                  </a:txBody>
+                  <a:tcPr>
+                    <a:solidFill>
+                      <a:srgbClr val="FFFFFF"/>
+                    </a:solidFill>
+                  </a:tcPr>
+                </a:tc>
+                <a:tc>
+                  <a:txBody>
+                    <a:bodyPr/>
+                    <a:lstStyle/>
+                    <a:p>
+                      <a:pPr algn="l"/>
+                      <a:r>
+                        <a:rPr sz="1000" b="0">
+                          <a:solidFill>
+                            <a:srgbClr val="1D1B43"/>
+                          </a:solidFill>
+                          <a:latin typeface="Calibri"/>
+                        </a:rPr>
+                        <a:t>VITORIA/ES</a:t>
+                      </a:r>
+                    </a:p>
+                  </a:txBody>
+                  <a:tcPr>
+                    <a:solidFill>
+                      <a:srgbClr val="FFFFFF"/>
+                    </a:solidFill>
+                  </a:tcPr>
+                </a:tc>
+                <a:tc>
+                  <a:txBody>
+                    <a:bodyPr/>
+                    <a:lstStyle/>
+                    <a:p>
+                      <a:pPr algn="l"/>
+                      <a:r>
+                        <a:rPr sz="1000" b="0">
+                          <a:solidFill>
+                            <a:srgbClr val="1D1B43"/>
+                          </a:solidFill>
+                          <a:latin typeface="Calibri"/>
+                        </a:rPr>
+                        <a:t>29/04/2026</a:t>
                       </a:r>
                     </a:p>
                   </a:txBody>
@@ -5817,90 +5921,90 @@
                   </a:tcPr>
                 </a:tc>
               </a:tr>
-              <a:tr h="182880">
-                <a:tc>
-                  <a:txBody>
-                    <a:bodyPr/>
-                    <a:lstStyle/>
-                    <a:p>
-                      <a:pPr algn="l"/>
-                      <a:r>
-                        <a:rPr sz="1000" b="0">
-                          <a:solidFill>
-                            <a:srgbClr val="1D1B43"/>
-                          </a:solidFill>
-                          <a:latin typeface="Calibri"/>
-                        </a:rPr>
-                        <a:t>279757</a:t>
-                      </a:r>
-                    </a:p>
-                  </a:txBody>
-                  <a:tcPr>
-                    <a:solidFill>
-                      <a:srgbClr val="F2F2F2"/>
-                    </a:solidFill>
-                  </a:tcPr>
-                </a:tc>
-                <a:tc>
-                  <a:txBody>
-                    <a:bodyPr/>
-                    <a:lstStyle/>
-                    <a:p>
-                      <a:pPr algn="l"/>
-                      <a:r>
-                        <a:rPr sz="1000" b="0">
-                          <a:solidFill>
-                            <a:srgbClr val="1D1B43"/>
-                          </a:solidFill>
-                          <a:latin typeface="Calibri"/>
-                        </a:rPr>
-                        <a:t>MARIA L. G. ALMEIDA - PALMITAL / SP</a:t>
-                      </a:r>
-                    </a:p>
-                  </a:txBody>
-                  <a:tcPr>
-                    <a:solidFill>
-                      <a:srgbClr val="F2F2F2"/>
-                    </a:solidFill>
-                  </a:tcPr>
-                </a:tc>
-                <a:tc>
-                  <a:txBody>
-                    <a:bodyPr/>
-                    <a:lstStyle/>
-                    <a:p>
-                      <a:pPr algn="l"/>
-                      <a:r>
-                        <a:rPr sz="1000" b="0">
-                          <a:solidFill>
-                            <a:srgbClr val="1D1B43"/>
-                          </a:solidFill>
-                          <a:latin typeface="Calibri"/>
-                        </a:rPr>
-                        <a:t>PALMITAL/SP</a:t>
-                      </a:r>
-                    </a:p>
-                  </a:txBody>
-                  <a:tcPr>
-                    <a:solidFill>
-                      <a:srgbClr val="F2F2F2"/>
-                    </a:solidFill>
-                  </a:tcPr>
-                </a:tc>
-                <a:tc>
-                  <a:txBody>
-                    <a:bodyPr/>
-                    <a:lstStyle/>
-                    <a:p>
-                      <a:pPr algn="l"/>
-                      <a:r>
-                        <a:rPr sz="1000" b="0">
-                          <a:solidFill>
-                            <a:srgbClr val="1D1B43"/>
-                          </a:solidFill>
-                          <a:latin typeface="Calibri"/>
-                        </a:rPr>
-                        <a:t>04/05/2026</a:t>
+              <a:tr h="190500">
+                <a:tc>
+                  <a:txBody>
+                    <a:bodyPr/>
+                    <a:lstStyle/>
+                    <a:p>
+                      <a:pPr algn="l"/>
+                      <a:r>
+                        <a:rPr sz="1000" b="0">
+                          <a:solidFill>
+                            <a:srgbClr val="1D1B43"/>
+                          </a:solidFill>
+                          <a:latin typeface="Calibri"/>
+                        </a:rPr>
+                        <a:t>279762</a:t>
+                      </a:r>
+                    </a:p>
+                  </a:txBody>
+                  <a:tcPr>
+                    <a:solidFill>
+                      <a:srgbClr val="F2F2F2"/>
+                    </a:solidFill>
+                  </a:tcPr>
+                </a:tc>
+                <a:tc>
+                  <a:txBody>
+                    <a:bodyPr/>
+                    <a:lstStyle/>
+                    <a:p>
+                      <a:pPr algn="l"/>
+                      <a:r>
+                        <a:rPr sz="1000" b="0">
+                          <a:solidFill>
+                            <a:srgbClr val="1D1B43"/>
+                          </a:solidFill>
+                          <a:latin typeface="Calibri"/>
+                        </a:rPr>
+                        <a:t>ARI COMERCIO E SERVI - SERRA / ES</a:t>
+                      </a:r>
+                    </a:p>
+                  </a:txBody>
+                  <a:tcPr>
+                    <a:solidFill>
+                      <a:srgbClr val="F2F2F2"/>
+                    </a:solidFill>
+                  </a:tcPr>
+                </a:tc>
+                <a:tc>
+                  <a:txBody>
+                    <a:bodyPr/>
+                    <a:lstStyle/>
+                    <a:p>
+                      <a:pPr algn="l"/>
+                      <a:r>
+                        <a:rPr sz="1000" b="0">
+                          <a:solidFill>
+                            <a:srgbClr val="1D1B43"/>
+                          </a:solidFill>
+                          <a:latin typeface="Calibri"/>
+                        </a:rPr>
+                        <a:t>SERRA/ES</a:t>
+                      </a:r>
+                    </a:p>
+                  </a:txBody>
+                  <a:tcPr>
+                    <a:solidFill>
+                      <a:srgbClr val="F2F2F2"/>
+                    </a:solidFill>
+                  </a:tcPr>
+                </a:tc>
+                <a:tc>
+                  <a:txBody>
+                    <a:bodyPr/>
+                    <a:lstStyle/>
+                    <a:p>
+                      <a:pPr algn="l"/>
+                      <a:r>
+                        <a:rPr sz="1000" b="0">
+                          <a:solidFill>
+                            <a:srgbClr val="1D1B43"/>
+                          </a:solidFill>
+                          <a:latin typeface="Calibri"/>
+                        </a:rPr>
+                        <a:t>29/04/2026</a:t>
                       </a:r>
                     </a:p>
                   </a:txBody>
@@ -5934,96 +6038,213 @@
                   </a:tcPr>
                 </a:tc>
               </a:tr>
-              <a:tr h="182880">
-                <a:tc>
-                  <a:txBody>
-                    <a:bodyPr/>
-                    <a:lstStyle/>
-                    <a:p>
-                      <a:pPr algn="l"/>
-                      <a:r>
-                        <a:rPr sz="1000" b="0">
-                          <a:solidFill>
-                            <a:srgbClr val="1D1B43"/>
-                          </a:solidFill>
-                          <a:latin typeface="Calibri"/>
-                        </a:rPr>
-                        <a:t>279759</a:t>
-                      </a:r>
-                    </a:p>
-                  </a:txBody>
-                  <a:tcPr>
-                    <a:solidFill>
-                      <a:srgbClr val="FFFFFF"/>
-                    </a:solidFill>
-                  </a:tcPr>
-                </a:tc>
-                <a:tc>
-                  <a:txBody>
-                    <a:bodyPr/>
-                    <a:lstStyle/>
-                    <a:p>
-                      <a:pPr algn="l"/>
-                      <a:r>
-                        <a:rPr sz="1000" b="0">
-                          <a:solidFill>
-                            <a:srgbClr val="1D1B43"/>
-                          </a:solidFill>
-                          <a:latin typeface="Calibri"/>
-                        </a:rPr>
-                        <a:t>AMMIRARE CALCADOS EI - JABOTICABAL / SP</a:t>
-                      </a:r>
-                    </a:p>
-                  </a:txBody>
-                  <a:tcPr>
-                    <a:solidFill>
-                      <a:srgbClr val="FFFFFF"/>
-                    </a:solidFill>
-                  </a:tcPr>
-                </a:tc>
-                <a:tc>
-                  <a:txBody>
-                    <a:bodyPr/>
-                    <a:lstStyle/>
-                    <a:p>
-                      <a:pPr algn="l"/>
-                      <a:r>
-                        <a:rPr sz="1000" b="0">
-                          <a:solidFill>
-                            <a:srgbClr val="1D1B43"/>
-                          </a:solidFill>
-                          <a:latin typeface="Calibri"/>
-                        </a:rPr>
-                        <a:t>JABOTICABAL/SP</a:t>
-                      </a:r>
-                    </a:p>
-                  </a:txBody>
-                  <a:tcPr>
-                    <a:solidFill>
-                      <a:srgbClr val="FFFFFF"/>
-                    </a:solidFill>
-                  </a:tcPr>
-                </a:tc>
-                <a:tc>
-                  <a:txBody>
-                    <a:bodyPr/>
-                    <a:lstStyle/>
-                    <a:p>
-                      <a:pPr algn="l"/>
-                      <a:r>
-                        <a:rPr sz="1000" b="0">
-                          <a:solidFill>
-                            <a:srgbClr val="1D1B43"/>
-                          </a:solidFill>
-                          <a:latin typeface="Calibri"/>
-                        </a:rPr>
-                        <a:t>04/05/2026</a:t>
-                      </a:r>
-                    </a:p>
-                  </a:txBody>
-                  <a:tcPr>
-                    <a:solidFill>
-                      <a:srgbClr val="FFFFFF"/>
+              <a:tr h="190500">
+                <a:tc>
+                  <a:txBody>
+                    <a:bodyPr/>
+                    <a:lstStyle/>
+                    <a:p>
+                      <a:pPr algn="l"/>
+                      <a:r>
+                        <a:rPr sz="1000" b="0">
+                          <a:solidFill>
+                            <a:srgbClr val="1D1B43"/>
+                          </a:solidFill>
+                          <a:latin typeface="Calibri"/>
+                        </a:rPr>
+                        <a:t>279774</a:t>
+                      </a:r>
+                    </a:p>
+                  </a:txBody>
+                  <a:tcPr>
+                    <a:solidFill>
+                      <a:srgbClr val="FFFFFF"/>
+                    </a:solidFill>
+                  </a:tcPr>
+                </a:tc>
+                <a:tc>
+                  <a:txBody>
+                    <a:bodyPr/>
+                    <a:lstStyle/>
+                    <a:p>
+                      <a:pPr algn="l"/>
+                      <a:r>
+                        <a:rPr sz="1000" b="0">
+                          <a:solidFill>
+                            <a:srgbClr val="1D1B43"/>
+                          </a:solidFill>
+                          <a:latin typeface="Calibri"/>
+                        </a:rPr>
+                        <a:t>LARISSA LUZIA ALVES - PIRAJUBA / MG</a:t>
+                      </a:r>
+                    </a:p>
+                  </a:txBody>
+                  <a:tcPr>
+                    <a:solidFill>
+                      <a:srgbClr val="FFFFFF"/>
+                    </a:solidFill>
+                  </a:tcPr>
+                </a:tc>
+                <a:tc>
+                  <a:txBody>
+                    <a:bodyPr/>
+                    <a:lstStyle/>
+                    <a:p>
+                      <a:pPr algn="l"/>
+                      <a:r>
+                        <a:rPr sz="1000" b="0">
+                          <a:solidFill>
+                            <a:srgbClr val="1D1B43"/>
+                          </a:solidFill>
+                          <a:latin typeface="Calibri"/>
+                        </a:rPr>
+                        <a:t>PIRAJUBA/MG</a:t>
+                      </a:r>
+                    </a:p>
+                  </a:txBody>
+                  <a:tcPr>
+                    <a:solidFill>
+                      <a:srgbClr val="FFFFFF"/>
+                    </a:solidFill>
+                  </a:tcPr>
+                </a:tc>
+                <a:tc>
+                  <a:txBody>
+                    <a:bodyPr/>
+                    <a:lstStyle/>
+                    <a:p>
+                      <a:pPr algn="l"/>
+                      <a:r>
+                        <a:rPr sz="1000" b="0">
+                          <a:solidFill>
+                            <a:srgbClr val="1D1B43"/>
+                          </a:solidFill>
+                          <a:latin typeface="Calibri"/>
+                        </a:rPr>
+                        <a:t>29/04/2026</a:t>
+                      </a:r>
+                    </a:p>
+                  </a:txBody>
+                  <a:tcPr>
+                    <a:solidFill>
+                      <a:srgbClr val="FFFFFF"/>
+                    </a:solidFill>
+                  </a:tcPr>
+                </a:tc>
+                <a:tc>
+                  <a:txBody>
+                    <a:bodyPr/>
+                    <a:lstStyle/>
+                    <a:p>
+                      <a:pPr algn="l"/>
+                      <a:r>
+                        <a:rPr sz="1000" b="0">
+                          <a:solidFill>
+                            <a:srgbClr val="1D1B43"/>
+                          </a:solidFill>
+                          <a:latin typeface="Calibri"/>
+                        </a:rPr>
+                        <a:t>FORA DO PRAZO</a:t>
+                      </a:r>
+                    </a:p>
+                  </a:txBody>
+                  <a:tcPr>
+                    <a:solidFill>
+                      <a:srgbClr val="FFFFFF"/>
+                    </a:solidFill>
+                  </a:tcPr>
+                </a:tc>
+              </a:tr>
+              <a:tr h="190500">
+                <a:tc>
+                  <a:txBody>
+                    <a:bodyPr/>
+                    <a:lstStyle/>
+                    <a:p>
+                      <a:pPr algn="l"/>
+                      <a:r>
+                        <a:rPr sz="1000" b="0">
+                          <a:solidFill>
+                            <a:srgbClr val="1D1B43"/>
+                          </a:solidFill>
+                          <a:latin typeface="Calibri"/>
+                        </a:rPr>
+                        <a:t>279792</a:t>
+                      </a:r>
+                    </a:p>
+                  </a:txBody>
+                  <a:tcPr>
+                    <a:solidFill>
+                      <a:srgbClr val="F2F2F2"/>
+                    </a:solidFill>
+                  </a:tcPr>
+                </a:tc>
+                <a:tc>
+                  <a:txBody>
+                    <a:bodyPr/>
+                    <a:lstStyle/>
+                    <a:p>
+                      <a:pPr algn="l"/>
+                      <a:r>
+                        <a:rPr sz="1000" b="0">
+                          <a:solidFill>
+                            <a:srgbClr val="1D1B43"/>
+                          </a:solidFill>
+                          <a:latin typeface="Calibri"/>
+                        </a:rPr>
+                        <a:t>TANIA CENTER CALCADO - RIO POMBA / MG</a:t>
+                      </a:r>
+                    </a:p>
+                  </a:txBody>
+                  <a:tcPr>
+                    <a:solidFill>
+                      <a:srgbClr val="F2F2F2"/>
+                    </a:solidFill>
+                  </a:tcPr>
+                </a:tc>
+                <a:tc>
+                  <a:txBody>
+                    <a:bodyPr/>
+                    <a:lstStyle/>
+                    <a:p>
+                      <a:pPr algn="l"/>
+                      <a:r>
+                        <a:rPr sz="1000" b="0">
+                          <a:solidFill>
+                            <a:srgbClr val="1D1B43"/>
+                          </a:solidFill>
+                          <a:latin typeface="Calibri"/>
+                        </a:rPr>
+                        <a:t>RIO POMBA/MG</a:t>
+                      </a:r>
+                    </a:p>
+                  </a:txBody>
+                  <a:tcPr>
+                    <a:solidFill>
+                      <a:srgbClr val="F2F2F2"/>
+                    </a:solidFill>
+                  </a:tcPr>
+                </a:tc>
+                <a:tc>
+                  <a:txBody>
+                    <a:bodyPr/>
+                    <a:lstStyle/>
+                    <a:p>
+                      <a:pPr algn="l"/>
+                      <a:r>
+                        <a:rPr sz="1000" b="0">
+                          <a:solidFill>
+                            <a:srgbClr val="1D1B43"/>
+                          </a:solidFill>
+                          <a:latin typeface="Calibri"/>
+                        </a:rPr>
+                        <a:t>29/04/2026</a:t>
+                      </a:r>
+                    </a:p>
+                  </a:txBody>
+                  <a:tcPr>
+                    <a:solidFill>
+                      <a:srgbClr val="F2F2F2"/>
                     </a:solidFill>
                   </a:tcPr>
                 </a:tc>
@@ -6046,101 +6267,101 @@
                   </a:txBody>
                   <a:tcPr>
                     <a:solidFill>
-                      <a:srgbClr val="FFFFFF"/>
+                      <a:srgbClr val="F2F2F2"/>
                     </a:solidFill>
                   </a:tcPr>
                 </a:tc>
               </a:tr>
-              <a:tr h="182880">
-                <a:tc>
-                  <a:txBody>
-                    <a:bodyPr/>
-                    <a:lstStyle/>
-                    <a:p>
-                      <a:pPr algn="l"/>
-                      <a:r>
-                        <a:rPr sz="1000" b="0">
-                          <a:solidFill>
-                            <a:srgbClr val="1D1B43"/>
-                          </a:solidFill>
-                          <a:latin typeface="Calibri"/>
-                        </a:rPr>
-                        <a:t>279764</a:t>
-                      </a:r>
-                    </a:p>
-                  </a:txBody>
-                  <a:tcPr>
-                    <a:solidFill>
-                      <a:srgbClr val="F2F2F2"/>
-                    </a:solidFill>
-                  </a:tcPr>
-                </a:tc>
-                <a:tc>
-                  <a:txBody>
-                    <a:bodyPr/>
-                    <a:lstStyle/>
-                    <a:p>
-                      <a:pPr algn="l"/>
-                      <a:r>
-                        <a:rPr sz="1000" b="0">
-                          <a:solidFill>
-                            <a:srgbClr val="1D1B43"/>
-                          </a:solidFill>
-                          <a:latin typeface="Calibri"/>
-                        </a:rPr>
-                        <a:t>MISTURA DA MODA COME - PEREIRA BARRETO / SP</a:t>
-                      </a:r>
-                    </a:p>
-                  </a:txBody>
-                  <a:tcPr>
-                    <a:solidFill>
-                      <a:srgbClr val="F2F2F2"/>
-                    </a:solidFill>
-                  </a:tcPr>
-                </a:tc>
-                <a:tc>
-                  <a:txBody>
-                    <a:bodyPr/>
-                    <a:lstStyle/>
-                    <a:p>
-                      <a:pPr algn="l"/>
-                      <a:r>
-                        <a:rPr sz="1000" b="0">
-                          <a:solidFill>
-                            <a:srgbClr val="1D1B43"/>
-                          </a:solidFill>
-                          <a:latin typeface="Calibri"/>
-                        </a:rPr>
-                        <a:t>PEREIRA BARRETO/SP</a:t>
-                      </a:r>
-                    </a:p>
-                  </a:txBody>
-                  <a:tcPr>
-                    <a:solidFill>
-                      <a:srgbClr val="F2F2F2"/>
-                    </a:solidFill>
-                  </a:tcPr>
-                </a:tc>
-                <a:tc>
-                  <a:txBody>
-                    <a:bodyPr/>
-                    <a:lstStyle/>
-                    <a:p>
-                      <a:pPr algn="l"/>
-                      <a:r>
-                        <a:rPr sz="1000" b="0">
-                          <a:solidFill>
-                            <a:srgbClr val="1D1B43"/>
-                          </a:solidFill>
-                          <a:latin typeface="Calibri"/>
-                        </a:rPr>
-                        <a:t>04/05/2026</a:t>
-                      </a:r>
-                    </a:p>
-                  </a:txBody>
-                  <a:tcPr>
-                    <a:solidFill>
-                      <a:srgbClr val="F2F2F2"/>
+              <a:tr h="190500">
+                <a:tc>
+                  <a:txBody>
+                    <a:bodyPr/>
+                    <a:lstStyle/>
+                    <a:p>
+                      <a:pPr algn="l"/>
+                      <a:r>
+                        <a:rPr sz="1000" b="0">
+                          <a:solidFill>
+                            <a:srgbClr val="1D1B43"/>
+                          </a:solidFill>
+                          <a:latin typeface="Calibri"/>
+                        </a:rPr>
+                        <a:t>279794</a:t>
+                      </a:r>
+                    </a:p>
+                  </a:txBody>
+                  <a:tcPr>
+                    <a:solidFill>
+                      <a:srgbClr val="FFFFFF"/>
+                    </a:solidFill>
+                  </a:tcPr>
+                </a:tc>
+                <a:tc>
+                  <a:txBody>
+                    <a:bodyPr/>
+                    <a:lstStyle/>
+                    <a:p>
+                      <a:pPr algn="l"/>
+                      <a:r>
+                        <a:rPr sz="1000" b="0">
+                          <a:solidFill>
+                            <a:srgbClr val="1D1B43"/>
+                          </a:solidFill>
+                          <a:latin typeface="Calibri"/>
+                        </a:rPr>
+                        <a:t>J B COMERCIO DE ROUP - SERRA / ES</a:t>
+                      </a:r>
+                    </a:p>
+                  </a:txBody>
+                  <a:tcPr>
+                    <a:solidFill>
+                      <a:srgbClr val="FFFFFF"/>
+                    </a:solidFill>
+                  </a:tcPr>
+                </a:tc>
+                <a:tc>
+                  <a:txBody>
+                    <a:bodyPr/>
+                    <a:lstStyle/>
+                    <a:p>
+                      <a:pPr algn="l"/>
+                      <a:r>
+                        <a:rPr sz="1000" b="0">
+                          <a:solidFill>
+                            <a:srgbClr val="1D1B43"/>
+                          </a:solidFill>
+                          <a:latin typeface="Calibri"/>
+                        </a:rPr>
+                        <a:t>SERRA/ES</a:t>
+                      </a:r>
+                    </a:p>
+                  </a:txBody>
+                  <a:tcPr>
+                    <a:solidFill>
+                      <a:srgbClr val="FFFFFF"/>
+                    </a:solidFill>
+                  </a:tcPr>
+                </a:tc>
+                <a:tc>
+                  <a:txBody>
+                    <a:bodyPr/>
+                    <a:lstStyle/>
+                    <a:p>
+                      <a:pPr algn="l"/>
+                      <a:r>
+                        <a:rPr sz="1000" b="0">
+                          <a:solidFill>
+                            <a:srgbClr val="1D1B43"/>
+                          </a:solidFill>
+                          <a:latin typeface="Calibri"/>
+                        </a:rPr>
+                        <a:t>29/04/2026</a:t>
+                      </a:r>
+                    </a:p>
+                  </a:txBody>
+                  <a:tcPr>
+                    <a:solidFill>
+                      <a:srgbClr val="FFFFFF"/>
                     </a:solidFill>
                   </a:tcPr>
                 </a:tc>
@@ -6163,95 +6384,212 @@
                   </a:txBody>
                   <a:tcPr>
                     <a:solidFill>
-                      <a:srgbClr val="F2F2F2"/>
+                      <a:srgbClr val="FFFFFF"/>
                     </a:solidFill>
                   </a:tcPr>
                 </a:tc>
               </a:tr>
-              <a:tr h="182880">
-                <a:tc>
-                  <a:txBody>
-                    <a:bodyPr/>
-                    <a:lstStyle/>
-                    <a:p>
-                      <a:pPr algn="l"/>
-                      <a:r>
-                        <a:rPr sz="1000" b="0">
-                          <a:solidFill>
-                            <a:srgbClr val="1D1B43"/>
-                          </a:solidFill>
-                          <a:latin typeface="Calibri"/>
-                        </a:rPr>
-                        <a:t>279765</a:t>
-                      </a:r>
-                    </a:p>
-                  </a:txBody>
-                  <a:tcPr>
-                    <a:solidFill>
-                      <a:srgbClr val="FFFFFF"/>
-                    </a:solidFill>
-                  </a:tcPr>
-                </a:tc>
-                <a:tc>
-                  <a:txBody>
-                    <a:bodyPr/>
-                    <a:lstStyle/>
-                    <a:p>
-                      <a:pPr algn="l"/>
-                      <a:r>
-                        <a:rPr sz="1000" b="0">
-                          <a:solidFill>
-                            <a:srgbClr val="1D1B43"/>
-                          </a:solidFill>
-                          <a:latin typeface="Calibri"/>
-                        </a:rPr>
-                        <a:t>NAKOLINY CALCADOS LT - NOVO HORIZONTE / SP</a:t>
-                      </a:r>
-                    </a:p>
-                  </a:txBody>
-                  <a:tcPr>
-                    <a:solidFill>
-                      <a:srgbClr val="FFFFFF"/>
-                    </a:solidFill>
-                  </a:tcPr>
-                </a:tc>
-                <a:tc>
-                  <a:txBody>
-                    <a:bodyPr/>
-                    <a:lstStyle/>
-                    <a:p>
-                      <a:pPr algn="l"/>
-                      <a:r>
-                        <a:rPr sz="1000" b="0">
-                          <a:solidFill>
-                            <a:srgbClr val="1D1B43"/>
-                          </a:solidFill>
-                          <a:latin typeface="Calibri"/>
-                        </a:rPr>
-                        <a:t>NOVO HORIZONTE/SP</a:t>
-                      </a:r>
-                    </a:p>
-                  </a:txBody>
-                  <a:tcPr>
-                    <a:solidFill>
-                      <a:srgbClr val="FFFFFF"/>
-                    </a:solidFill>
-                  </a:tcPr>
-                </a:tc>
-                <a:tc>
-                  <a:txBody>
-                    <a:bodyPr/>
-                    <a:lstStyle/>
-                    <a:p>
-                      <a:pPr algn="l"/>
-                      <a:r>
-                        <a:rPr sz="1000" b="0">
-                          <a:solidFill>
-                            <a:srgbClr val="1D1B43"/>
-                          </a:solidFill>
-                          <a:latin typeface="Calibri"/>
-                        </a:rPr>
-                        <a:t>04/05/2026</a:t>
+              <a:tr h="190500">
+                <a:tc>
+                  <a:txBody>
+                    <a:bodyPr/>
+                    <a:lstStyle/>
+                    <a:p>
+                      <a:pPr algn="l"/>
+                      <a:r>
+                        <a:rPr sz="1000" b="0">
+                          <a:solidFill>
+                            <a:srgbClr val="1D1B43"/>
+                          </a:solidFill>
+                          <a:latin typeface="Calibri"/>
+                        </a:rPr>
+                        <a:t>279799</a:t>
+                      </a:r>
+                    </a:p>
+                  </a:txBody>
+                  <a:tcPr>
+                    <a:solidFill>
+                      <a:srgbClr val="F2F2F2"/>
+                    </a:solidFill>
+                  </a:tcPr>
+                </a:tc>
+                <a:tc>
+                  <a:txBody>
+                    <a:bodyPr/>
+                    <a:lstStyle/>
+                    <a:p>
+                      <a:pPr algn="l"/>
+                      <a:r>
+                        <a:rPr sz="1000" b="0">
+                          <a:solidFill>
+                            <a:srgbClr val="1D1B43"/>
+                          </a:solidFill>
+                          <a:latin typeface="Calibri"/>
+                        </a:rPr>
+                        <a:t>C J L DE OLIVEIRA - IRUPI / ES</a:t>
+                      </a:r>
+                    </a:p>
+                  </a:txBody>
+                  <a:tcPr>
+                    <a:solidFill>
+                      <a:srgbClr val="F2F2F2"/>
+                    </a:solidFill>
+                  </a:tcPr>
+                </a:tc>
+                <a:tc>
+                  <a:txBody>
+                    <a:bodyPr/>
+                    <a:lstStyle/>
+                    <a:p>
+                      <a:pPr algn="l"/>
+                      <a:r>
+                        <a:rPr sz="1000" b="0">
+                          <a:solidFill>
+                            <a:srgbClr val="1D1B43"/>
+                          </a:solidFill>
+                          <a:latin typeface="Calibri"/>
+                        </a:rPr>
+                        <a:t>IRUPI/ES</a:t>
+                      </a:r>
+                    </a:p>
+                  </a:txBody>
+                  <a:tcPr>
+                    <a:solidFill>
+                      <a:srgbClr val="F2F2F2"/>
+                    </a:solidFill>
+                  </a:tcPr>
+                </a:tc>
+                <a:tc>
+                  <a:txBody>
+                    <a:bodyPr/>
+                    <a:lstStyle/>
+                    <a:p>
+                      <a:pPr algn="l"/>
+                      <a:r>
+                        <a:rPr sz="1000" b="0">
+                          <a:solidFill>
+                            <a:srgbClr val="1D1B43"/>
+                          </a:solidFill>
+                          <a:latin typeface="Calibri"/>
+                        </a:rPr>
+                        <a:t>29/04/2026</a:t>
+                      </a:r>
+                    </a:p>
+                  </a:txBody>
+                  <a:tcPr>
+                    <a:solidFill>
+                      <a:srgbClr val="F2F2F2"/>
+                    </a:solidFill>
+                  </a:tcPr>
+                </a:tc>
+                <a:tc>
+                  <a:txBody>
+                    <a:bodyPr/>
+                    <a:lstStyle/>
+                    <a:p>
+                      <a:pPr algn="l"/>
+                      <a:r>
+                        <a:rPr sz="1000" b="0">
+                          <a:solidFill>
+                            <a:srgbClr val="1D1B43"/>
+                          </a:solidFill>
+                          <a:latin typeface="Calibri"/>
+                        </a:rPr>
+                        <a:t>FORA DO PRAZO</a:t>
+                      </a:r>
+                    </a:p>
+                  </a:txBody>
+                  <a:tcPr>
+                    <a:solidFill>
+                      <a:srgbClr val="F2F2F2"/>
+                    </a:solidFill>
+                  </a:tcPr>
+                </a:tc>
+              </a:tr>
+              <a:tr h="190500">
+                <a:tc>
+                  <a:txBody>
+                    <a:bodyPr/>
+                    <a:lstStyle/>
+                    <a:p>
+                      <a:pPr algn="l"/>
+                      <a:r>
+                        <a:rPr sz="1000" b="0">
+                          <a:solidFill>
+                            <a:srgbClr val="1D1B43"/>
+                          </a:solidFill>
+                          <a:latin typeface="Calibri"/>
+                        </a:rPr>
+                        <a:t>279800</a:t>
+                      </a:r>
+                    </a:p>
+                  </a:txBody>
+                  <a:tcPr>
+                    <a:solidFill>
+                      <a:srgbClr val="FFFFFF"/>
+                    </a:solidFill>
+                  </a:tcPr>
+                </a:tc>
+                <a:tc>
+                  <a:txBody>
+                    <a:bodyPr/>
+                    <a:lstStyle/>
+                    <a:p>
+                      <a:pPr algn="l"/>
+                      <a:r>
+                        <a:rPr sz="1000" b="0">
+                          <a:solidFill>
+                            <a:srgbClr val="1D1B43"/>
+                          </a:solidFill>
+                          <a:latin typeface="Calibri"/>
+                        </a:rPr>
+                        <a:t>ALLURE SHOES E ACESS - JERONIMO MONTEIRO / ES</a:t>
+                      </a:r>
+                    </a:p>
+                  </a:txBody>
+                  <a:tcPr>
+                    <a:solidFill>
+                      <a:srgbClr val="FFFFFF"/>
+                    </a:solidFill>
+                  </a:tcPr>
+                </a:tc>
+                <a:tc>
+                  <a:txBody>
+                    <a:bodyPr/>
+                    <a:lstStyle/>
+                    <a:p>
+                      <a:pPr algn="l"/>
+                      <a:r>
+                        <a:rPr sz="1000" b="0">
+                          <a:solidFill>
+                            <a:srgbClr val="1D1B43"/>
+                          </a:solidFill>
+                          <a:latin typeface="Calibri"/>
+                        </a:rPr>
+                        <a:t>JERONIMO MONTEIRO/ES</a:t>
+                      </a:r>
+                    </a:p>
+                  </a:txBody>
+                  <a:tcPr>
+                    <a:solidFill>
+                      <a:srgbClr val="FFFFFF"/>
+                    </a:solidFill>
+                  </a:tcPr>
+                </a:tc>
+                <a:tc>
+                  <a:txBody>
+                    <a:bodyPr/>
+                    <a:lstStyle/>
+                    <a:p>
+                      <a:pPr algn="l"/>
+                      <a:r>
+                        <a:rPr sz="1000" b="0">
+                          <a:solidFill>
+                            <a:srgbClr val="1D1B43"/>
+                          </a:solidFill>
+                          <a:latin typeface="Calibri"/>
+                        </a:rPr>
+                        <a:t>29/04/2026</a:t>
                       </a:r>
                     </a:p>
                   </a:txBody>
@@ -6285,96 +6623,213 @@
                   </a:tcPr>
                 </a:tc>
               </a:tr>
-              <a:tr h="182880">
-                <a:tc>
-                  <a:txBody>
-                    <a:bodyPr/>
-                    <a:lstStyle/>
-                    <a:p>
-                      <a:pPr algn="l"/>
-                      <a:r>
-                        <a:rPr sz="1000" b="0">
-                          <a:solidFill>
-                            <a:srgbClr val="1D1B43"/>
-                          </a:solidFill>
-                          <a:latin typeface="Calibri"/>
-                        </a:rPr>
-                        <a:t>279771</a:t>
-                      </a:r>
-                    </a:p>
-                  </a:txBody>
-                  <a:tcPr>
-                    <a:solidFill>
-                      <a:srgbClr val="F2F2F2"/>
-                    </a:solidFill>
-                  </a:tcPr>
-                </a:tc>
-                <a:tc>
-                  <a:txBody>
-                    <a:bodyPr/>
-                    <a:lstStyle/>
-                    <a:p>
-                      <a:pPr algn="l"/>
-                      <a:r>
-                        <a:rPr sz="1000" b="0">
-                          <a:solidFill>
-                            <a:srgbClr val="1D1B43"/>
-                          </a:solidFill>
-                          <a:latin typeface="Calibri"/>
-                        </a:rPr>
-                        <a:t>SAMARA DANIELLE DA S - SENADOR AMARAL / MG</a:t>
-                      </a:r>
-                    </a:p>
-                  </a:txBody>
-                  <a:tcPr>
-                    <a:solidFill>
-                      <a:srgbClr val="F2F2F2"/>
-                    </a:solidFill>
-                  </a:tcPr>
-                </a:tc>
-                <a:tc>
-                  <a:txBody>
-                    <a:bodyPr/>
-                    <a:lstStyle/>
-                    <a:p>
-                      <a:pPr algn="l"/>
-                      <a:r>
-                        <a:rPr sz="1000" b="0">
-                          <a:solidFill>
-                            <a:srgbClr val="1D1B43"/>
-                          </a:solidFill>
-                          <a:latin typeface="Calibri"/>
-                        </a:rPr>
-                        <a:t>SENADOR AMARAL/MG</a:t>
-                      </a:r>
-                    </a:p>
-                  </a:txBody>
-                  <a:tcPr>
-                    <a:solidFill>
-                      <a:srgbClr val="F2F2F2"/>
-                    </a:solidFill>
-                  </a:tcPr>
-                </a:tc>
-                <a:tc>
-                  <a:txBody>
-                    <a:bodyPr/>
-                    <a:lstStyle/>
-                    <a:p>
-                      <a:pPr algn="l"/>
-                      <a:r>
-                        <a:rPr sz="1000" b="0">
-                          <a:solidFill>
-                            <a:srgbClr val="1D1B43"/>
-                          </a:solidFill>
-                          <a:latin typeface="Calibri"/>
-                        </a:rPr>
-                        <a:t>12/05/2026</a:t>
-                      </a:r>
-                    </a:p>
-                  </a:txBody>
-                  <a:tcPr>
-                    <a:solidFill>
-                      <a:srgbClr val="F2F2F2"/>
+              <a:tr h="190500">
+                <a:tc>
+                  <a:txBody>
+                    <a:bodyPr/>
+                    <a:lstStyle/>
+                    <a:p>
+                      <a:pPr algn="l"/>
+                      <a:r>
+                        <a:rPr sz="1000" b="0">
+                          <a:solidFill>
+                            <a:srgbClr val="1D1B43"/>
+                          </a:solidFill>
+                          <a:latin typeface="Calibri"/>
+                        </a:rPr>
+                        <a:t>279802</a:t>
+                      </a:r>
+                    </a:p>
+                  </a:txBody>
+                  <a:tcPr>
+                    <a:solidFill>
+                      <a:srgbClr val="F2F2F2"/>
+                    </a:solidFill>
+                  </a:tcPr>
+                </a:tc>
+                <a:tc>
+                  <a:txBody>
+                    <a:bodyPr/>
+                    <a:lstStyle/>
+                    <a:p>
+                      <a:pPr algn="l"/>
+                      <a:r>
+                        <a:rPr sz="1000" b="0">
+                          <a:solidFill>
+                            <a:srgbClr val="1D1B43"/>
+                          </a:solidFill>
+                          <a:latin typeface="Calibri"/>
+                        </a:rPr>
+                        <a:t>CONFECCOES BROEDEL L - CARIACICA / ES</a:t>
+                      </a:r>
+                    </a:p>
+                  </a:txBody>
+                  <a:tcPr>
+                    <a:solidFill>
+                      <a:srgbClr val="F2F2F2"/>
+                    </a:solidFill>
+                  </a:tcPr>
+                </a:tc>
+                <a:tc>
+                  <a:txBody>
+                    <a:bodyPr/>
+                    <a:lstStyle/>
+                    <a:p>
+                      <a:pPr algn="l"/>
+                      <a:r>
+                        <a:rPr sz="1000" b="0">
+                          <a:solidFill>
+                            <a:srgbClr val="1D1B43"/>
+                          </a:solidFill>
+                          <a:latin typeface="Calibri"/>
+                        </a:rPr>
+                        <a:t>CARIACICA/ES</a:t>
+                      </a:r>
+                    </a:p>
+                  </a:txBody>
+                  <a:tcPr>
+                    <a:solidFill>
+                      <a:srgbClr val="F2F2F2"/>
+                    </a:solidFill>
+                  </a:tcPr>
+                </a:tc>
+                <a:tc>
+                  <a:txBody>
+                    <a:bodyPr/>
+                    <a:lstStyle/>
+                    <a:p>
+                      <a:pPr algn="l"/>
+                      <a:r>
+                        <a:rPr sz="1000" b="0">
+                          <a:solidFill>
+                            <a:srgbClr val="1D1B43"/>
+                          </a:solidFill>
+                          <a:latin typeface="Calibri"/>
+                        </a:rPr>
+                        <a:t>29/04/2026</a:t>
+                      </a:r>
+                    </a:p>
+                  </a:txBody>
+                  <a:tcPr>
+                    <a:solidFill>
+                      <a:srgbClr val="F2F2F2"/>
+                    </a:solidFill>
+                  </a:tcPr>
+                </a:tc>
+                <a:tc>
+                  <a:txBody>
+                    <a:bodyPr/>
+                    <a:lstStyle/>
+                    <a:p>
+                      <a:pPr algn="l"/>
+                      <a:r>
+                        <a:rPr sz="1000" b="0">
+                          <a:solidFill>
+                            <a:srgbClr val="1D1B43"/>
+                          </a:solidFill>
+                          <a:latin typeface="Calibri"/>
+                        </a:rPr>
+                        <a:t>ENTREGUE FORA DO PRAZO</a:t>
+                      </a:r>
+                    </a:p>
+                  </a:txBody>
+                  <a:tcPr>
+                    <a:solidFill>
+                      <a:srgbClr val="F2F2F2"/>
+                    </a:solidFill>
+                  </a:tcPr>
+                </a:tc>
+              </a:tr>
+              <a:tr h="190500">
+                <a:tc>
+                  <a:txBody>
+                    <a:bodyPr/>
+                    <a:lstStyle/>
+                    <a:p>
+                      <a:pPr algn="l"/>
+                      <a:r>
+                        <a:rPr sz="1000" b="0">
+                          <a:solidFill>
+                            <a:srgbClr val="1D1B43"/>
+                          </a:solidFill>
+                          <a:latin typeface="Calibri"/>
+                        </a:rPr>
+                        <a:t>279805</a:t>
+                      </a:r>
+                    </a:p>
+                  </a:txBody>
+                  <a:tcPr>
+                    <a:solidFill>
+                      <a:srgbClr val="FFFFFF"/>
+                    </a:solidFill>
+                  </a:tcPr>
+                </a:tc>
+                <a:tc>
+                  <a:txBody>
+                    <a:bodyPr/>
+                    <a:lstStyle/>
+                    <a:p>
+                      <a:pPr algn="l"/>
+                      <a:r>
+                        <a:rPr sz="1000" b="0">
+                          <a:solidFill>
+                            <a:srgbClr val="1D1B43"/>
+                          </a:solidFill>
+                          <a:latin typeface="Calibri"/>
+                        </a:rPr>
+                        <a:t>GESSICA CHIEPPE 1363 - MARILANDIA / ES</a:t>
+                      </a:r>
+                    </a:p>
+                  </a:txBody>
+                  <a:tcPr>
+                    <a:solidFill>
+                      <a:srgbClr val="FFFFFF"/>
+                    </a:solidFill>
+                  </a:tcPr>
+                </a:tc>
+                <a:tc>
+                  <a:txBody>
+                    <a:bodyPr/>
+                    <a:lstStyle/>
+                    <a:p>
+                      <a:pPr algn="l"/>
+                      <a:r>
+                        <a:rPr sz="1000" b="0">
+                          <a:solidFill>
+                            <a:srgbClr val="1D1B43"/>
+                          </a:solidFill>
+                          <a:latin typeface="Calibri"/>
+                        </a:rPr>
+                        <a:t>MARILANDIA/ES</a:t>
+                      </a:r>
+                    </a:p>
+                  </a:txBody>
+                  <a:tcPr>
+                    <a:solidFill>
+                      <a:srgbClr val="FFFFFF"/>
+                    </a:solidFill>
+                  </a:tcPr>
+                </a:tc>
+                <a:tc>
+                  <a:txBody>
+                    <a:bodyPr/>
+                    <a:lstStyle/>
+                    <a:p>
+                      <a:pPr algn="l"/>
+                      <a:r>
+                        <a:rPr sz="1000" b="0">
+                          <a:solidFill>
+                            <a:srgbClr val="1D1B43"/>
+                          </a:solidFill>
+                          <a:latin typeface="Calibri"/>
+                        </a:rPr>
+                        <a:t>29/04/2026</a:t>
+                      </a:r>
+                    </a:p>
+                  </a:txBody>
+                  <a:tcPr>
+                    <a:solidFill>
+                      <a:srgbClr val="FFFFFF"/>
                     </a:solidFill>
                   </a:tcPr>
                 </a:tc>
@@ -6397,101 +6852,101 @@
                   </a:txBody>
                   <a:tcPr>
                     <a:solidFill>
-                      <a:srgbClr val="F2F2F2"/>
+                      <a:srgbClr val="FFFFFF"/>
                     </a:solidFill>
                   </a:tcPr>
                 </a:tc>
               </a:tr>
-              <a:tr h="182880">
-                <a:tc>
-                  <a:txBody>
-                    <a:bodyPr/>
-                    <a:lstStyle/>
-                    <a:p>
-                      <a:pPr algn="l"/>
-                      <a:r>
-                        <a:rPr sz="1000" b="0">
-                          <a:solidFill>
-                            <a:srgbClr val="1D1B43"/>
-                          </a:solidFill>
-                          <a:latin typeface="Calibri"/>
-                        </a:rPr>
-                        <a:t>279812</a:t>
-                      </a:r>
-                    </a:p>
-                  </a:txBody>
-                  <a:tcPr>
-                    <a:solidFill>
-                      <a:srgbClr val="FFFFFF"/>
-                    </a:solidFill>
-                  </a:tcPr>
-                </a:tc>
-                <a:tc>
-                  <a:txBody>
-                    <a:bodyPr/>
-                    <a:lstStyle/>
-                    <a:p>
-                      <a:pPr algn="l"/>
-                      <a:r>
-                        <a:rPr sz="1000" b="0">
-                          <a:solidFill>
-                            <a:srgbClr val="1D1B43"/>
-                          </a:solidFill>
-                          <a:latin typeface="Calibri"/>
-                        </a:rPr>
-                        <a:t>VITTI VITTI LTDA - E - RIO CLARO / SP</a:t>
-                      </a:r>
-                    </a:p>
-                  </a:txBody>
-                  <a:tcPr>
-                    <a:solidFill>
-                      <a:srgbClr val="FFFFFF"/>
-                    </a:solidFill>
-                  </a:tcPr>
-                </a:tc>
-                <a:tc>
-                  <a:txBody>
-                    <a:bodyPr/>
-                    <a:lstStyle/>
-                    <a:p>
-                      <a:pPr algn="l"/>
-                      <a:r>
-                        <a:rPr sz="1000" b="0">
-                          <a:solidFill>
-                            <a:srgbClr val="1D1B43"/>
-                          </a:solidFill>
-                          <a:latin typeface="Calibri"/>
-                        </a:rPr>
-                        <a:t>RIO CLARO/SP</a:t>
-                      </a:r>
-                    </a:p>
-                  </a:txBody>
-                  <a:tcPr>
-                    <a:solidFill>
-                      <a:srgbClr val="FFFFFF"/>
-                    </a:solidFill>
-                  </a:tcPr>
-                </a:tc>
-                <a:tc>
-                  <a:txBody>
-                    <a:bodyPr/>
-                    <a:lstStyle/>
-                    <a:p>
-                      <a:pPr algn="l"/>
-                      <a:r>
-                        <a:rPr sz="1000" b="0">
-                          <a:solidFill>
-                            <a:srgbClr val="1D1B43"/>
-                          </a:solidFill>
-                          <a:latin typeface="Calibri"/>
-                        </a:rPr>
-                        <a:t>04/05/2026</a:t>
-                      </a:r>
-                    </a:p>
-                  </a:txBody>
-                  <a:tcPr>
-                    <a:solidFill>
-                      <a:srgbClr val="FFFFFF"/>
+              <a:tr h="190500">
+                <a:tc>
+                  <a:txBody>
+                    <a:bodyPr/>
+                    <a:lstStyle/>
+                    <a:p>
+                      <a:pPr algn="l"/>
+                      <a:r>
+                        <a:rPr sz="1000" b="0">
+                          <a:solidFill>
+                            <a:srgbClr val="1D1B43"/>
+                          </a:solidFill>
+                          <a:latin typeface="Calibri"/>
+                        </a:rPr>
+                        <a:t>279995</a:t>
+                      </a:r>
+                    </a:p>
+                  </a:txBody>
+                  <a:tcPr>
+                    <a:solidFill>
+                      <a:srgbClr val="F2F2F2"/>
+                    </a:solidFill>
+                  </a:tcPr>
+                </a:tc>
+                <a:tc>
+                  <a:txBody>
+                    <a:bodyPr/>
+                    <a:lstStyle/>
+                    <a:p>
+                      <a:pPr algn="l"/>
+                      <a:r>
+                        <a:rPr sz="1000" b="0">
+                          <a:solidFill>
+                            <a:srgbClr val="1D1B43"/>
+                          </a:solidFill>
+                          <a:latin typeface="Calibri"/>
+                        </a:rPr>
+                        <a:t>DI DELLE CALCADOS LT - ARACRUZ / ES</a:t>
+                      </a:r>
+                    </a:p>
+                  </a:txBody>
+                  <a:tcPr>
+                    <a:solidFill>
+                      <a:srgbClr val="F2F2F2"/>
+                    </a:solidFill>
+                  </a:tcPr>
+                </a:tc>
+                <a:tc>
+                  <a:txBody>
+                    <a:bodyPr/>
+                    <a:lstStyle/>
+                    <a:p>
+                      <a:pPr algn="l"/>
+                      <a:r>
+                        <a:rPr sz="1000" b="0">
+                          <a:solidFill>
+                            <a:srgbClr val="1D1B43"/>
+                          </a:solidFill>
+                          <a:latin typeface="Calibri"/>
+                        </a:rPr>
+                        <a:t>ARACRUZ/ES</a:t>
+                      </a:r>
+                    </a:p>
+                  </a:txBody>
+                  <a:tcPr>
+                    <a:solidFill>
+                      <a:srgbClr val="F2F2F2"/>
+                    </a:solidFill>
+                  </a:tcPr>
+                </a:tc>
+                <a:tc>
+                  <a:txBody>
+                    <a:bodyPr/>
+                    <a:lstStyle/>
+                    <a:p>
+                      <a:pPr algn="l"/>
+                      <a:r>
+                        <a:rPr sz="1000" b="0">
+                          <a:solidFill>
+                            <a:srgbClr val="1D1B43"/>
+                          </a:solidFill>
+                          <a:latin typeface="Calibri"/>
+                        </a:rPr>
+                        <a:t>29/04/2026</a:t>
+                      </a:r>
+                    </a:p>
+                  </a:txBody>
+                  <a:tcPr>
+                    <a:solidFill>
+                      <a:srgbClr val="F2F2F2"/>
                     </a:solidFill>
                   </a:tcPr>
                 </a:tc>
@@ -6514,95 +6969,680 @@
                   </a:txBody>
                   <a:tcPr>
                     <a:solidFill>
-                      <a:srgbClr val="FFFFFF"/>
+                      <a:srgbClr val="F2F2F2"/>
                     </a:solidFill>
                   </a:tcPr>
                 </a:tc>
               </a:tr>
-              <a:tr h="182880">
-                <a:tc>
-                  <a:txBody>
-                    <a:bodyPr/>
-                    <a:lstStyle/>
-                    <a:p>
-                      <a:pPr algn="l"/>
-                      <a:r>
-                        <a:rPr sz="1000" b="0">
-                          <a:solidFill>
-                            <a:srgbClr val="1D1B43"/>
-                          </a:solidFill>
-                          <a:latin typeface="Calibri"/>
-                        </a:rPr>
-                        <a:t>280002</a:t>
-                      </a:r>
-                    </a:p>
-                  </a:txBody>
-                  <a:tcPr>
-                    <a:solidFill>
-                      <a:srgbClr val="F2F2F2"/>
-                    </a:solidFill>
-                  </a:tcPr>
-                </a:tc>
-                <a:tc>
-                  <a:txBody>
-                    <a:bodyPr/>
-                    <a:lstStyle/>
-                    <a:p>
-                      <a:pPr algn="l"/>
-                      <a:r>
-                        <a:rPr sz="1000" b="0">
-                          <a:solidFill>
-                            <a:srgbClr val="1D1B43"/>
-                          </a:solidFill>
-                          <a:latin typeface="Calibri"/>
-                        </a:rPr>
-                        <a:t>FAVERO URIAS E CIA L - MOCOCA / SP</a:t>
-                      </a:r>
-                    </a:p>
-                  </a:txBody>
-                  <a:tcPr>
-                    <a:solidFill>
-                      <a:srgbClr val="F2F2F2"/>
-                    </a:solidFill>
-                  </a:tcPr>
-                </a:tc>
-                <a:tc>
-                  <a:txBody>
-                    <a:bodyPr/>
-                    <a:lstStyle/>
-                    <a:p>
-                      <a:pPr algn="l"/>
-                      <a:r>
-                        <a:rPr sz="1000" b="0">
-                          <a:solidFill>
-                            <a:srgbClr val="1D1B43"/>
-                          </a:solidFill>
-                          <a:latin typeface="Calibri"/>
-                        </a:rPr>
-                        <a:t>MOCOCA/SP</a:t>
-                      </a:r>
-                    </a:p>
-                  </a:txBody>
-                  <a:tcPr>
-                    <a:solidFill>
-                      <a:srgbClr val="F2F2F2"/>
-                    </a:solidFill>
-                  </a:tcPr>
-                </a:tc>
-                <a:tc>
-                  <a:txBody>
-                    <a:bodyPr/>
-                    <a:lstStyle/>
-                    <a:p>
-                      <a:pPr algn="l"/>
-                      <a:r>
-                        <a:rPr sz="1000" b="0">
-                          <a:solidFill>
-                            <a:srgbClr val="1D1B43"/>
-                          </a:solidFill>
-                          <a:latin typeface="Calibri"/>
-                        </a:rPr>
-                        <a:t>04/05/2026</a:t>
+              <a:tr h="190500">
+                <a:tc>
+                  <a:txBody>
+                    <a:bodyPr/>
+                    <a:lstStyle/>
+                    <a:p>
+                      <a:pPr algn="l"/>
+                      <a:r>
+                        <a:rPr sz="1000" b="0">
+                          <a:solidFill>
+                            <a:srgbClr val="1D1B43"/>
+                          </a:solidFill>
+                          <a:latin typeface="Calibri"/>
+                        </a:rPr>
+                        <a:t>279997</a:t>
+                      </a:r>
+                    </a:p>
+                  </a:txBody>
+                  <a:tcPr>
+                    <a:solidFill>
+                      <a:srgbClr val="FFFFFF"/>
+                    </a:solidFill>
+                  </a:tcPr>
+                </a:tc>
+                <a:tc>
+                  <a:txBody>
+                    <a:bodyPr/>
+                    <a:lstStyle/>
+                    <a:p>
+                      <a:pPr algn="l"/>
+                      <a:r>
+                        <a:rPr sz="1000" b="0">
+                          <a:solidFill>
+                            <a:srgbClr val="1D1B43"/>
+                          </a:solidFill>
+                          <a:latin typeface="Calibri"/>
+                        </a:rPr>
+                        <a:t>STAR SHOES LTDA - GUACUI / ES</a:t>
+                      </a:r>
+                    </a:p>
+                  </a:txBody>
+                  <a:tcPr>
+                    <a:solidFill>
+                      <a:srgbClr val="FFFFFF"/>
+                    </a:solidFill>
+                  </a:tcPr>
+                </a:tc>
+                <a:tc>
+                  <a:txBody>
+                    <a:bodyPr/>
+                    <a:lstStyle/>
+                    <a:p>
+                      <a:pPr algn="l"/>
+                      <a:r>
+                        <a:rPr sz="1000" b="0">
+                          <a:solidFill>
+                            <a:srgbClr val="1D1B43"/>
+                          </a:solidFill>
+                          <a:latin typeface="Calibri"/>
+                        </a:rPr>
+                        <a:t>GUACUI/ES</a:t>
+                      </a:r>
+                    </a:p>
+                  </a:txBody>
+                  <a:tcPr>
+                    <a:solidFill>
+                      <a:srgbClr val="FFFFFF"/>
+                    </a:solidFill>
+                  </a:tcPr>
+                </a:tc>
+                <a:tc>
+                  <a:txBody>
+                    <a:bodyPr/>
+                    <a:lstStyle/>
+                    <a:p>
+                      <a:pPr algn="l"/>
+                      <a:r>
+                        <a:rPr sz="1000" b="0">
+                          <a:solidFill>
+                            <a:srgbClr val="1D1B43"/>
+                          </a:solidFill>
+                          <a:latin typeface="Calibri"/>
+                        </a:rPr>
+                        <a:t>29/04/2026</a:t>
+                      </a:r>
+                    </a:p>
+                  </a:txBody>
+                  <a:tcPr>
+                    <a:solidFill>
+                      <a:srgbClr val="FFFFFF"/>
+                    </a:solidFill>
+                  </a:tcPr>
+                </a:tc>
+                <a:tc>
+                  <a:txBody>
+                    <a:bodyPr/>
+                    <a:lstStyle/>
+                    <a:p>
+                      <a:pPr algn="l"/>
+                      <a:r>
+                        <a:rPr sz="1000" b="0">
+                          <a:solidFill>
+                            <a:srgbClr val="1D1B43"/>
+                          </a:solidFill>
+                          <a:latin typeface="Calibri"/>
+                        </a:rPr>
+                        <a:t>FORA DO PRAZO</a:t>
+                      </a:r>
+                    </a:p>
+                  </a:txBody>
+                  <a:tcPr>
+                    <a:solidFill>
+                      <a:srgbClr val="FFFFFF"/>
+                    </a:solidFill>
+                  </a:tcPr>
+                </a:tc>
+              </a:tr>
+              <a:tr h="190500">
+                <a:tc>
+                  <a:txBody>
+                    <a:bodyPr/>
+                    <a:lstStyle/>
+                    <a:p>
+                      <a:pPr algn="l"/>
+                      <a:r>
+                        <a:rPr sz="1000" b="0">
+                          <a:solidFill>
+                            <a:srgbClr val="1D1B43"/>
+                          </a:solidFill>
+                          <a:latin typeface="Calibri"/>
+                        </a:rPr>
+                        <a:t>280031</a:t>
+                      </a:r>
+                    </a:p>
+                  </a:txBody>
+                  <a:tcPr>
+                    <a:solidFill>
+                      <a:srgbClr val="F2F2F2"/>
+                    </a:solidFill>
+                  </a:tcPr>
+                </a:tc>
+                <a:tc>
+                  <a:txBody>
+                    <a:bodyPr/>
+                    <a:lstStyle/>
+                    <a:p>
+                      <a:pPr algn="l"/>
+                      <a:r>
+                        <a:rPr sz="1000" b="0">
+                          <a:solidFill>
+                            <a:srgbClr val="1D1B43"/>
+                          </a:solidFill>
+                          <a:latin typeface="Calibri"/>
+                        </a:rPr>
+                        <a:t>M STORE COMERCIO LTD - IBIRACU / ES</a:t>
+                      </a:r>
+                    </a:p>
+                  </a:txBody>
+                  <a:tcPr>
+                    <a:solidFill>
+                      <a:srgbClr val="F2F2F2"/>
+                    </a:solidFill>
+                  </a:tcPr>
+                </a:tc>
+                <a:tc>
+                  <a:txBody>
+                    <a:bodyPr/>
+                    <a:lstStyle/>
+                    <a:p>
+                      <a:pPr algn="l"/>
+                      <a:r>
+                        <a:rPr sz="1000" b="0">
+                          <a:solidFill>
+                            <a:srgbClr val="1D1B43"/>
+                          </a:solidFill>
+                          <a:latin typeface="Calibri"/>
+                        </a:rPr>
+                        <a:t>IBIRACU/ES</a:t>
+                      </a:r>
+                    </a:p>
+                  </a:txBody>
+                  <a:tcPr>
+                    <a:solidFill>
+                      <a:srgbClr val="F2F2F2"/>
+                    </a:solidFill>
+                  </a:tcPr>
+                </a:tc>
+                <a:tc>
+                  <a:txBody>
+                    <a:bodyPr/>
+                    <a:lstStyle/>
+                    <a:p>
+                      <a:pPr algn="l"/>
+                      <a:r>
+                        <a:rPr sz="1000" b="0">
+                          <a:solidFill>
+                            <a:srgbClr val="1D1B43"/>
+                          </a:solidFill>
+                          <a:latin typeface="Calibri"/>
+                        </a:rPr>
+                        <a:t>29/04/2026</a:t>
+                      </a:r>
+                    </a:p>
+                  </a:txBody>
+                  <a:tcPr>
+                    <a:solidFill>
+                      <a:srgbClr val="F2F2F2"/>
+                    </a:solidFill>
+                  </a:tcPr>
+                </a:tc>
+                <a:tc>
+                  <a:txBody>
+                    <a:bodyPr/>
+                    <a:lstStyle/>
+                    <a:p>
+                      <a:pPr algn="l"/>
+                      <a:r>
+                        <a:rPr sz="1000" b="0">
+                          <a:solidFill>
+                            <a:srgbClr val="1D1B43"/>
+                          </a:solidFill>
+                          <a:latin typeface="Calibri"/>
+                        </a:rPr>
+                        <a:t>FORA DO PRAZO</a:t>
+                      </a:r>
+                    </a:p>
+                  </a:txBody>
+                  <a:tcPr>
+                    <a:solidFill>
+                      <a:srgbClr val="F2F2F2"/>
+                    </a:solidFill>
+                  </a:tcPr>
+                </a:tc>
+              </a:tr>
+              <a:tr h="190500">
+                <a:tc>
+                  <a:txBody>
+                    <a:bodyPr/>
+                    <a:lstStyle/>
+                    <a:p>
+                      <a:pPr algn="l"/>
+                      <a:r>
+                        <a:rPr sz="1000" b="0">
+                          <a:solidFill>
+                            <a:srgbClr val="1D1B43"/>
+                          </a:solidFill>
+                          <a:latin typeface="Calibri"/>
+                        </a:rPr>
+                        <a:t>280098</a:t>
+                      </a:r>
+                    </a:p>
+                  </a:txBody>
+                  <a:tcPr>
+                    <a:solidFill>
+                      <a:srgbClr val="FFFFFF"/>
+                    </a:solidFill>
+                  </a:tcPr>
+                </a:tc>
+                <a:tc>
+                  <a:txBody>
+                    <a:bodyPr/>
+                    <a:lstStyle/>
+                    <a:p>
+                      <a:pPr algn="l"/>
+                      <a:r>
+                        <a:rPr sz="1000" b="0">
+                          <a:solidFill>
+                            <a:srgbClr val="1D1B43"/>
+                          </a:solidFill>
+                          <a:latin typeface="Calibri"/>
+                        </a:rPr>
+                        <a:t>CALCADOS E ACESSORIO - SAO JOSE DO CALCADO / ES</a:t>
+                      </a:r>
+                    </a:p>
+                  </a:txBody>
+                  <a:tcPr>
+                    <a:solidFill>
+                      <a:srgbClr val="FFFFFF"/>
+                    </a:solidFill>
+                  </a:tcPr>
+                </a:tc>
+                <a:tc>
+                  <a:txBody>
+                    <a:bodyPr/>
+                    <a:lstStyle/>
+                    <a:p>
+                      <a:pPr algn="l"/>
+                      <a:r>
+                        <a:rPr sz="1000" b="0">
+                          <a:solidFill>
+                            <a:srgbClr val="1D1B43"/>
+                          </a:solidFill>
+                          <a:latin typeface="Calibri"/>
+                        </a:rPr>
+                        <a:t>SAO JOSE DO CALCADO/ES</a:t>
+                      </a:r>
+                    </a:p>
+                  </a:txBody>
+                  <a:tcPr>
+                    <a:solidFill>
+                      <a:srgbClr val="FFFFFF"/>
+                    </a:solidFill>
+                  </a:tcPr>
+                </a:tc>
+                <a:tc>
+                  <a:txBody>
+                    <a:bodyPr/>
+                    <a:lstStyle/>
+                    <a:p>
+                      <a:pPr algn="l"/>
+                      <a:r>
+                        <a:rPr sz="1000" b="0">
+                          <a:solidFill>
+                            <a:srgbClr val="1D1B43"/>
+                          </a:solidFill>
+                          <a:latin typeface="Calibri"/>
+                        </a:rPr>
+                        <a:t>29/04/2026</a:t>
+                      </a:r>
+                    </a:p>
+                  </a:txBody>
+                  <a:tcPr>
+                    <a:solidFill>
+                      <a:srgbClr val="FFFFFF"/>
+                    </a:solidFill>
+                  </a:tcPr>
+                </a:tc>
+                <a:tc>
+                  <a:txBody>
+                    <a:bodyPr/>
+                    <a:lstStyle/>
+                    <a:p>
+                      <a:pPr algn="l"/>
+                      <a:r>
+                        <a:rPr sz="1000" b="0">
+                          <a:solidFill>
+                            <a:srgbClr val="1D1B43"/>
+                          </a:solidFill>
+                          <a:latin typeface="Calibri"/>
+                        </a:rPr>
+                        <a:t>FORA DO PRAZO</a:t>
+                      </a:r>
+                    </a:p>
+                  </a:txBody>
+                  <a:tcPr>
+                    <a:solidFill>
+                      <a:srgbClr val="FFFFFF"/>
+                    </a:solidFill>
+                  </a:tcPr>
+                </a:tc>
+              </a:tr>
+              <a:tr h="190500">
+                <a:tc>
+                  <a:txBody>
+                    <a:bodyPr/>
+                    <a:lstStyle/>
+                    <a:p>
+                      <a:pPr algn="l"/>
+                      <a:r>
+                        <a:rPr sz="1000" b="0">
+                          <a:solidFill>
+                            <a:srgbClr val="1D1B43"/>
+                          </a:solidFill>
+                          <a:latin typeface="Calibri"/>
+                        </a:rPr>
+                        <a:t>280100</a:t>
+                      </a:r>
+                    </a:p>
+                  </a:txBody>
+                  <a:tcPr>
+                    <a:solidFill>
+                      <a:srgbClr val="F2F2F2"/>
+                    </a:solidFill>
+                  </a:tcPr>
+                </a:tc>
+                <a:tc>
+                  <a:txBody>
+                    <a:bodyPr/>
+                    <a:lstStyle/>
+                    <a:p>
+                      <a:pPr algn="l"/>
+                      <a:r>
+                        <a:rPr sz="1000" b="0">
+                          <a:solidFill>
+                            <a:srgbClr val="1D1B43"/>
+                          </a:solidFill>
+                          <a:latin typeface="Calibri"/>
+                        </a:rPr>
+                        <a:t>CONFECCOES BATISTA E - ITABIRA / MG</a:t>
+                      </a:r>
+                    </a:p>
+                  </a:txBody>
+                  <a:tcPr>
+                    <a:solidFill>
+                      <a:srgbClr val="F2F2F2"/>
+                    </a:solidFill>
+                  </a:tcPr>
+                </a:tc>
+                <a:tc>
+                  <a:txBody>
+                    <a:bodyPr/>
+                    <a:lstStyle/>
+                    <a:p>
+                      <a:pPr algn="l"/>
+                      <a:r>
+                        <a:rPr sz="1000" b="0">
+                          <a:solidFill>
+                            <a:srgbClr val="1D1B43"/>
+                          </a:solidFill>
+                          <a:latin typeface="Calibri"/>
+                        </a:rPr>
+                        <a:t>ITABIRA/MG</a:t>
+                      </a:r>
+                    </a:p>
+                  </a:txBody>
+                  <a:tcPr>
+                    <a:solidFill>
+                      <a:srgbClr val="F2F2F2"/>
+                    </a:solidFill>
+                  </a:tcPr>
+                </a:tc>
+                <a:tc>
+                  <a:txBody>
+                    <a:bodyPr/>
+                    <a:lstStyle/>
+                    <a:p>
+                      <a:pPr algn="l"/>
+                      <a:r>
+                        <a:rPr sz="1000" b="0">
+                          <a:solidFill>
+                            <a:srgbClr val="1D1B43"/>
+                          </a:solidFill>
+                          <a:latin typeface="Calibri"/>
+                        </a:rPr>
+                        <a:t>29/04/2026</a:t>
+                      </a:r>
+                    </a:p>
+                  </a:txBody>
+                  <a:tcPr>
+                    <a:solidFill>
+                      <a:srgbClr val="F2F2F2"/>
+                    </a:solidFill>
+                  </a:tcPr>
+                </a:tc>
+                <a:tc>
+                  <a:txBody>
+                    <a:bodyPr/>
+                    <a:lstStyle/>
+                    <a:p>
+                      <a:pPr algn="l"/>
+                      <a:r>
+                        <a:rPr sz="1000" b="0">
+                          <a:solidFill>
+                            <a:srgbClr val="1D1B43"/>
+                          </a:solidFill>
+                          <a:latin typeface="Calibri"/>
+                        </a:rPr>
+                        <a:t>FORA DO PRAZO</a:t>
+                      </a:r>
+                    </a:p>
+                  </a:txBody>
+                  <a:tcPr>
+                    <a:solidFill>
+                      <a:srgbClr val="F2F2F2"/>
+                    </a:solidFill>
+                  </a:tcPr>
+                </a:tc>
+              </a:tr>
+              <a:tr h="190500">
+                <a:tc>
+                  <a:txBody>
+                    <a:bodyPr/>
+                    <a:lstStyle/>
+                    <a:p>
+                      <a:pPr algn="l"/>
+                      <a:r>
+                        <a:rPr sz="1000" b="0">
+                          <a:solidFill>
+                            <a:srgbClr val="1D1B43"/>
+                          </a:solidFill>
+                          <a:latin typeface="Calibri"/>
+                        </a:rPr>
+                        <a:t>280244</a:t>
+                      </a:r>
+                    </a:p>
+                  </a:txBody>
+                  <a:tcPr>
+                    <a:solidFill>
+                      <a:srgbClr val="FFFFFF"/>
+                    </a:solidFill>
+                  </a:tcPr>
+                </a:tc>
+                <a:tc>
+                  <a:txBody>
+                    <a:bodyPr/>
+                    <a:lstStyle/>
+                    <a:p>
+                      <a:pPr algn="l"/>
+                      <a:r>
+                        <a:rPr sz="1000" b="0">
+                          <a:solidFill>
+                            <a:srgbClr val="1D1B43"/>
+                          </a:solidFill>
+                          <a:latin typeface="Calibri"/>
+                        </a:rPr>
+                        <a:t>D&amp;J BOUTIQUE LTDA - - SAO GABRIEL DA PALHA / ES</a:t>
+                      </a:r>
+                    </a:p>
+                  </a:txBody>
+                  <a:tcPr>
+                    <a:solidFill>
+                      <a:srgbClr val="FFFFFF"/>
+                    </a:solidFill>
+                  </a:tcPr>
+                </a:tc>
+                <a:tc>
+                  <a:txBody>
+                    <a:bodyPr/>
+                    <a:lstStyle/>
+                    <a:p>
+                      <a:pPr algn="l"/>
+                      <a:r>
+                        <a:rPr sz="1000" b="0">
+                          <a:solidFill>
+                            <a:srgbClr val="1D1B43"/>
+                          </a:solidFill>
+                          <a:latin typeface="Calibri"/>
+                        </a:rPr>
+                        <a:t>SAO GABRIEL DA PALHA/ES</a:t>
+                      </a:r>
+                    </a:p>
+                  </a:txBody>
+                  <a:tcPr>
+                    <a:solidFill>
+                      <a:srgbClr val="FFFFFF"/>
+                    </a:solidFill>
+                  </a:tcPr>
+                </a:tc>
+                <a:tc>
+                  <a:txBody>
+                    <a:bodyPr/>
+                    <a:lstStyle/>
+                    <a:p>
+                      <a:pPr algn="l"/>
+                      <a:r>
+                        <a:rPr sz="1000" b="0">
+                          <a:solidFill>
+                            <a:srgbClr val="1D1B43"/>
+                          </a:solidFill>
+                          <a:latin typeface="Calibri"/>
+                        </a:rPr>
+                        <a:t>30/04/2026</a:t>
+                      </a:r>
+                    </a:p>
+                  </a:txBody>
+                  <a:tcPr>
+                    <a:solidFill>
+                      <a:srgbClr val="FFFFFF"/>
+                    </a:solidFill>
+                  </a:tcPr>
+                </a:tc>
+                <a:tc>
+                  <a:txBody>
+                    <a:bodyPr/>
+                    <a:lstStyle/>
+                    <a:p>
+                      <a:pPr algn="l"/>
+                      <a:r>
+                        <a:rPr sz="1000" b="0">
+                          <a:solidFill>
+                            <a:srgbClr val="1D1B43"/>
+                          </a:solidFill>
+                          <a:latin typeface="Calibri"/>
+                        </a:rPr>
+                        <a:t>FORA DO PRAZO</a:t>
+                      </a:r>
+                    </a:p>
+                  </a:txBody>
+                  <a:tcPr>
+                    <a:solidFill>
+                      <a:srgbClr val="FFFFFF"/>
+                    </a:solidFill>
+                  </a:tcPr>
+                </a:tc>
+              </a:tr>
+              <a:tr h="190500">
+                <a:tc>
+                  <a:txBody>
+                    <a:bodyPr/>
+                    <a:lstStyle/>
+                    <a:p>
+                      <a:pPr algn="l"/>
+                      <a:r>
+                        <a:rPr sz="1000" b="0">
+                          <a:solidFill>
+                            <a:srgbClr val="1D1B43"/>
+                          </a:solidFill>
+                          <a:latin typeface="Calibri"/>
+                        </a:rPr>
+                        <a:t>280247</a:t>
+                      </a:r>
+                    </a:p>
+                  </a:txBody>
+                  <a:tcPr>
+                    <a:solidFill>
+                      <a:srgbClr val="F2F2F2"/>
+                    </a:solidFill>
+                  </a:tcPr>
+                </a:tc>
+                <a:tc>
+                  <a:txBody>
+                    <a:bodyPr/>
+                    <a:lstStyle/>
+                    <a:p>
+                      <a:pPr algn="l"/>
+                      <a:r>
+                        <a:rPr sz="1000" b="0">
+                          <a:solidFill>
+                            <a:srgbClr val="1D1B43"/>
+                          </a:solidFill>
+                          <a:latin typeface="Calibri"/>
+                        </a:rPr>
+                        <a:t>SOBREIRA E ALBANI LT - ALEGRE / ES</a:t>
+                      </a:r>
+                    </a:p>
+                  </a:txBody>
+                  <a:tcPr>
+                    <a:solidFill>
+                      <a:srgbClr val="F2F2F2"/>
+                    </a:solidFill>
+                  </a:tcPr>
+                </a:tc>
+                <a:tc>
+                  <a:txBody>
+                    <a:bodyPr/>
+                    <a:lstStyle/>
+                    <a:p>
+                      <a:pPr algn="l"/>
+                      <a:r>
+                        <a:rPr sz="1000" b="0">
+                          <a:solidFill>
+                            <a:srgbClr val="1D1B43"/>
+                          </a:solidFill>
+                          <a:latin typeface="Calibri"/>
+                        </a:rPr>
+                        <a:t>ALEGRE/ES</a:t>
+                      </a:r>
+                    </a:p>
+                  </a:txBody>
+                  <a:tcPr>
+                    <a:solidFill>
+                      <a:srgbClr val="F2F2F2"/>
+                    </a:solidFill>
+                  </a:tcPr>
+                </a:tc>
+                <a:tc>
+                  <a:txBody>
+                    <a:bodyPr/>
+                    <a:lstStyle/>
+                    <a:p>
+                      <a:pPr algn="l"/>
+                      <a:r>
+                        <a:rPr sz="1000" b="0">
+                          <a:solidFill>
+                            <a:srgbClr val="1D1B43"/>
+                          </a:solidFill>
+                          <a:latin typeface="Calibri"/>
+                        </a:rPr>
+                        <a:t>30/04/2026</a:t>
                       </a:r>
                     </a:p>
                   </a:txBody>
@@ -6636,90 +7676,90 @@
                   </a:tcPr>
                 </a:tc>
               </a:tr>
-              <a:tr h="182880">
-                <a:tc>
-                  <a:txBody>
-                    <a:bodyPr/>
-                    <a:lstStyle/>
-                    <a:p>
-                      <a:pPr algn="l"/>
-                      <a:r>
-                        <a:rPr sz="1000" b="0">
-                          <a:solidFill>
-                            <a:srgbClr val="1D1B43"/>
-                          </a:solidFill>
-                          <a:latin typeface="Calibri"/>
-                        </a:rPr>
-                        <a:t>280083</a:t>
-                      </a:r>
-                    </a:p>
-                  </a:txBody>
-                  <a:tcPr>
-                    <a:solidFill>
-                      <a:srgbClr val="FFFFFF"/>
-                    </a:solidFill>
-                  </a:tcPr>
-                </a:tc>
-                <a:tc>
-                  <a:txBody>
-                    <a:bodyPr/>
-                    <a:lstStyle/>
-                    <a:p>
-                      <a:pPr algn="l"/>
-                      <a:r>
-                        <a:rPr sz="1000" b="0">
-                          <a:solidFill>
-                            <a:srgbClr val="1D1B43"/>
-                          </a:solidFill>
-                          <a:latin typeface="Calibri"/>
-                        </a:rPr>
-                        <a:t>CLEBER MANFIO - CANDIDO MOTA / SP</a:t>
-                      </a:r>
-                    </a:p>
-                  </a:txBody>
-                  <a:tcPr>
-                    <a:solidFill>
-                      <a:srgbClr val="FFFFFF"/>
-                    </a:solidFill>
-                  </a:tcPr>
-                </a:tc>
-                <a:tc>
-                  <a:txBody>
-                    <a:bodyPr/>
-                    <a:lstStyle/>
-                    <a:p>
-                      <a:pPr algn="l"/>
-                      <a:r>
-                        <a:rPr sz="1000" b="0">
-                          <a:solidFill>
-                            <a:srgbClr val="1D1B43"/>
-                          </a:solidFill>
-                          <a:latin typeface="Calibri"/>
-                        </a:rPr>
-                        <a:t>CANDIDO MOTA/SP</a:t>
-                      </a:r>
-                    </a:p>
-                  </a:txBody>
-                  <a:tcPr>
-                    <a:solidFill>
-                      <a:srgbClr val="FFFFFF"/>
-                    </a:solidFill>
-                  </a:tcPr>
-                </a:tc>
-                <a:tc>
-                  <a:txBody>
-                    <a:bodyPr/>
-                    <a:lstStyle/>
-                    <a:p>
-                      <a:pPr algn="l"/>
-                      <a:r>
-                        <a:rPr sz="1000" b="0">
-                          <a:solidFill>
-                            <a:srgbClr val="1D1B43"/>
-                          </a:solidFill>
-                          <a:latin typeface="Calibri"/>
-                        </a:rPr>
-                        <a:t>04/05/2026</a:t>
+              <a:tr h="190500">
+                <a:tc>
+                  <a:txBody>
+                    <a:bodyPr/>
+                    <a:lstStyle/>
+                    <a:p>
+                      <a:pPr algn="l"/>
+                      <a:r>
+                        <a:rPr sz="1000" b="0">
+                          <a:solidFill>
+                            <a:srgbClr val="1D1B43"/>
+                          </a:solidFill>
+                          <a:latin typeface="Calibri"/>
+                        </a:rPr>
+                        <a:t>280254</a:t>
+                      </a:r>
+                    </a:p>
+                  </a:txBody>
+                  <a:tcPr>
+                    <a:solidFill>
+                      <a:srgbClr val="FFFFFF"/>
+                    </a:solidFill>
+                  </a:tcPr>
+                </a:tc>
+                <a:tc>
+                  <a:txBody>
+                    <a:bodyPr/>
+                    <a:lstStyle/>
+                    <a:p>
+                      <a:pPr algn="l"/>
+                      <a:r>
+                        <a:rPr sz="1000" b="0">
+                          <a:solidFill>
+                            <a:srgbClr val="1D1B43"/>
+                          </a:solidFill>
+                          <a:latin typeface="Calibri"/>
+                        </a:rPr>
+                        <a:t>43.474.701 TEREZINHA - FRANCISCO MORATO / SP</a:t>
+                      </a:r>
+                    </a:p>
+                  </a:txBody>
+                  <a:tcPr>
+                    <a:solidFill>
+                      <a:srgbClr val="FFFFFF"/>
+                    </a:solidFill>
+                  </a:tcPr>
+                </a:tc>
+                <a:tc>
+                  <a:txBody>
+                    <a:bodyPr/>
+                    <a:lstStyle/>
+                    <a:p>
+                      <a:pPr algn="l"/>
+                      <a:r>
+                        <a:rPr sz="1000" b="0">
+                          <a:solidFill>
+                            <a:srgbClr val="1D1B43"/>
+                          </a:solidFill>
+                          <a:latin typeface="Calibri"/>
+                        </a:rPr>
+                        <a:t>FRANCISCO MORATO/SP</a:t>
+                      </a:r>
+                    </a:p>
+                  </a:txBody>
+                  <a:tcPr>
+                    <a:solidFill>
+                      <a:srgbClr val="FFFFFF"/>
+                    </a:solidFill>
+                  </a:tcPr>
+                </a:tc>
+                <a:tc>
+                  <a:txBody>
+                    <a:bodyPr/>
+                    <a:lstStyle/>
+                    <a:p>
+                      <a:pPr algn="l"/>
+                      <a:r>
+                        <a:rPr sz="1000" b="0">
+                          <a:solidFill>
+                            <a:srgbClr val="1D1B43"/>
+                          </a:solidFill>
+                          <a:latin typeface="Calibri"/>
+                        </a:rPr>
+                        <a:t>30/04/2026</a:t>
                       </a:r>
                     </a:p>
                   </a:txBody>
@@ -6753,96 +7793,213 @@
                   </a:tcPr>
                 </a:tc>
               </a:tr>
-              <a:tr h="182880">
-                <a:tc>
-                  <a:txBody>
-                    <a:bodyPr/>
-                    <a:lstStyle/>
-                    <a:p>
-                      <a:pPr algn="l"/>
-                      <a:r>
-                        <a:rPr sz="1000" b="0">
-                          <a:solidFill>
-                            <a:srgbClr val="1D1B43"/>
-                          </a:solidFill>
-                          <a:latin typeface="Calibri"/>
-                        </a:rPr>
-                        <a:t>280090</a:t>
-                      </a:r>
-                    </a:p>
-                  </a:txBody>
-                  <a:tcPr>
-                    <a:solidFill>
-                      <a:srgbClr val="F2F2F2"/>
-                    </a:solidFill>
-                  </a:tcPr>
-                </a:tc>
-                <a:tc>
-                  <a:txBody>
-                    <a:bodyPr/>
-                    <a:lstStyle/>
-                    <a:p>
-                      <a:pPr algn="l"/>
-                      <a:r>
-                        <a:rPr sz="1000" b="0">
-                          <a:solidFill>
-                            <a:srgbClr val="1D1B43"/>
-                          </a:solidFill>
-                          <a:latin typeface="Calibri"/>
-                        </a:rPr>
-                        <a:t>FNF COMERCIO DE CALC - PARAGUACU PAULISTA / SP</a:t>
-                      </a:r>
-                    </a:p>
-                  </a:txBody>
-                  <a:tcPr>
-                    <a:solidFill>
-                      <a:srgbClr val="F2F2F2"/>
-                    </a:solidFill>
-                  </a:tcPr>
-                </a:tc>
-                <a:tc>
-                  <a:txBody>
-                    <a:bodyPr/>
-                    <a:lstStyle/>
-                    <a:p>
-                      <a:pPr algn="l"/>
-                      <a:r>
-                        <a:rPr sz="1000" b="0">
-                          <a:solidFill>
-                            <a:srgbClr val="1D1B43"/>
-                          </a:solidFill>
-                          <a:latin typeface="Calibri"/>
-                        </a:rPr>
-                        <a:t>PARAGUACU PAULISTA/SP</a:t>
-                      </a:r>
-                    </a:p>
-                  </a:txBody>
-                  <a:tcPr>
-                    <a:solidFill>
-                      <a:srgbClr val="F2F2F2"/>
-                    </a:solidFill>
-                  </a:tcPr>
-                </a:tc>
-                <a:tc>
-                  <a:txBody>
-                    <a:bodyPr/>
-                    <a:lstStyle/>
-                    <a:p>
-                      <a:pPr algn="l"/>
-                      <a:r>
-                        <a:rPr sz="1000" b="0">
-                          <a:solidFill>
-                            <a:srgbClr val="1D1B43"/>
-                          </a:solidFill>
-                          <a:latin typeface="Calibri"/>
-                        </a:rPr>
-                        <a:t>04/05/2026</a:t>
-                      </a:r>
-                    </a:p>
-                  </a:txBody>
-                  <a:tcPr>
-                    <a:solidFill>
-                      <a:srgbClr val="F2F2F2"/>
+              <a:tr h="190500">
+                <a:tc>
+                  <a:txBody>
+                    <a:bodyPr/>
+                    <a:lstStyle/>
+                    <a:p>
+                      <a:pPr algn="l"/>
+                      <a:r>
+                        <a:rPr sz="1000" b="0">
+                          <a:solidFill>
+                            <a:srgbClr val="1D1B43"/>
+                          </a:solidFill>
+                          <a:latin typeface="Calibri"/>
+                        </a:rPr>
+                        <a:t>280262</a:t>
+                      </a:r>
+                    </a:p>
+                  </a:txBody>
+                  <a:tcPr>
+                    <a:solidFill>
+                      <a:srgbClr val="F2F2F2"/>
+                    </a:solidFill>
+                  </a:tcPr>
+                </a:tc>
+                <a:tc>
+                  <a:txBody>
+                    <a:bodyPr/>
+                    <a:lstStyle/>
+                    <a:p>
+                      <a:pPr algn="l"/>
+                      <a:r>
+                        <a:rPr sz="1000" b="0">
+                          <a:solidFill>
+                            <a:srgbClr val="1D1B43"/>
+                          </a:solidFill>
+                          <a:latin typeface="Calibri"/>
+                        </a:rPr>
+                        <a:t>62.209.212 EVELLYN A - IBITIRAMA / ES</a:t>
+                      </a:r>
+                    </a:p>
+                  </a:txBody>
+                  <a:tcPr>
+                    <a:solidFill>
+                      <a:srgbClr val="F2F2F2"/>
+                    </a:solidFill>
+                  </a:tcPr>
+                </a:tc>
+                <a:tc>
+                  <a:txBody>
+                    <a:bodyPr/>
+                    <a:lstStyle/>
+                    <a:p>
+                      <a:pPr algn="l"/>
+                      <a:r>
+                        <a:rPr sz="1000" b="0">
+                          <a:solidFill>
+                            <a:srgbClr val="1D1B43"/>
+                          </a:solidFill>
+                          <a:latin typeface="Calibri"/>
+                        </a:rPr>
+                        <a:t>IBITIRAMA/ES</a:t>
+                      </a:r>
+                    </a:p>
+                  </a:txBody>
+                  <a:tcPr>
+                    <a:solidFill>
+                      <a:srgbClr val="F2F2F2"/>
+                    </a:solidFill>
+                  </a:tcPr>
+                </a:tc>
+                <a:tc>
+                  <a:txBody>
+                    <a:bodyPr/>
+                    <a:lstStyle/>
+                    <a:p>
+                      <a:pPr algn="l"/>
+                      <a:r>
+                        <a:rPr sz="1000" b="0">
+                          <a:solidFill>
+                            <a:srgbClr val="1D1B43"/>
+                          </a:solidFill>
+                          <a:latin typeface="Calibri"/>
+                        </a:rPr>
+                        <a:t>30/04/2026</a:t>
+                      </a:r>
+                    </a:p>
+                  </a:txBody>
+                  <a:tcPr>
+                    <a:solidFill>
+                      <a:srgbClr val="F2F2F2"/>
+                    </a:solidFill>
+                  </a:tcPr>
+                </a:tc>
+                <a:tc>
+                  <a:txBody>
+                    <a:bodyPr/>
+                    <a:lstStyle/>
+                    <a:p>
+                      <a:pPr algn="l"/>
+                      <a:r>
+                        <a:rPr sz="1000" b="0">
+                          <a:solidFill>
+                            <a:srgbClr val="1D1B43"/>
+                          </a:solidFill>
+                          <a:latin typeface="Calibri"/>
+                        </a:rPr>
+                        <a:t>FORA DO PRAZO</a:t>
+                      </a:r>
+                    </a:p>
+                  </a:txBody>
+                  <a:tcPr>
+                    <a:solidFill>
+                      <a:srgbClr val="F2F2F2"/>
+                    </a:solidFill>
+                  </a:tcPr>
+                </a:tc>
+              </a:tr>
+              <a:tr h="190500">
+                <a:tc>
+                  <a:txBody>
+                    <a:bodyPr/>
+                    <a:lstStyle/>
+                    <a:p>
+                      <a:pPr algn="l"/>
+                      <a:r>
+                        <a:rPr sz="1000" b="0">
+                          <a:solidFill>
+                            <a:srgbClr val="1D1B43"/>
+                          </a:solidFill>
+                          <a:latin typeface="Calibri"/>
+                        </a:rPr>
+                        <a:t>280266</a:t>
+                      </a:r>
+                    </a:p>
+                  </a:txBody>
+                  <a:tcPr>
+                    <a:solidFill>
+                      <a:srgbClr val="FFFFFF"/>
+                    </a:solidFill>
+                  </a:tcPr>
+                </a:tc>
+                <a:tc>
+                  <a:txBody>
+                    <a:bodyPr/>
+                    <a:lstStyle/>
+                    <a:p>
+                      <a:pPr algn="l"/>
+                      <a:r>
+                        <a:rPr sz="1000" b="0">
+                          <a:solidFill>
+                            <a:srgbClr val="1D1B43"/>
+                          </a:solidFill>
+                          <a:latin typeface="Calibri"/>
+                        </a:rPr>
+                        <a:t>11.681.910 DARLENE G - BIRITIBA-MIRIM / SP</a:t>
+                      </a:r>
+                    </a:p>
+                  </a:txBody>
+                  <a:tcPr>
+                    <a:solidFill>
+                      <a:srgbClr val="FFFFFF"/>
+                    </a:solidFill>
+                  </a:tcPr>
+                </a:tc>
+                <a:tc>
+                  <a:txBody>
+                    <a:bodyPr/>
+                    <a:lstStyle/>
+                    <a:p>
+                      <a:pPr algn="l"/>
+                      <a:r>
+                        <a:rPr sz="1000" b="0">
+                          <a:solidFill>
+                            <a:srgbClr val="1D1B43"/>
+                          </a:solidFill>
+                          <a:latin typeface="Calibri"/>
+                        </a:rPr>
+                        <a:t>BIRITIBA-MIRIM/SP</a:t>
+                      </a:r>
+                    </a:p>
+                  </a:txBody>
+                  <a:tcPr>
+                    <a:solidFill>
+                      <a:srgbClr val="FFFFFF"/>
+                    </a:solidFill>
+                  </a:tcPr>
+                </a:tc>
+                <a:tc>
+                  <a:txBody>
+                    <a:bodyPr/>
+                    <a:lstStyle/>
+                    <a:p>
+                      <a:pPr algn="l"/>
+                      <a:r>
+                        <a:rPr sz="1000" b="0">
+                          <a:solidFill>
+                            <a:srgbClr val="1D1B43"/>
+                          </a:solidFill>
+                          <a:latin typeface="Calibri"/>
+                        </a:rPr>
+                        <a:t>30/04/2026</a:t>
+                      </a:r>
+                    </a:p>
+                  </a:txBody>
+                  <a:tcPr>
+                    <a:solidFill>
+                      <a:srgbClr val="FFFFFF"/>
                     </a:solidFill>
                   </a:tcPr>
                 </a:tc>
@@ -6865,1411 +8022,7 @@
                   </a:txBody>
                   <a:tcPr>
                     <a:solidFill>
-                      <a:srgbClr val="F2F2F2"/>
-                    </a:solidFill>
-                  </a:tcPr>
-                </a:tc>
-              </a:tr>
-              <a:tr h="182880">
-                <a:tc>
-                  <a:txBody>
-                    <a:bodyPr/>
-                    <a:lstStyle/>
-                    <a:p>
-                      <a:pPr algn="l"/>
-                      <a:r>
-                        <a:rPr sz="1000" b="0">
-                          <a:solidFill>
-                            <a:srgbClr val="1D1B43"/>
-                          </a:solidFill>
-                          <a:latin typeface="Calibri"/>
-                        </a:rPr>
-                        <a:t>280274</a:t>
-                      </a:r>
-                    </a:p>
-                  </a:txBody>
-                  <a:tcPr>
-                    <a:solidFill>
-                      <a:srgbClr val="FFFFFF"/>
-                    </a:solidFill>
-                  </a:tcPr>
-                </a:tc>
-                <a:tc>
-                  <a:txBody>
-                    <a:bodyPr/>
-                    <a:lstStyle/>
-                    <a:p>
-                      <a:pPr algn="l"/>
-                      <a:r>
-                        <a:rPr sz="1000" b="0">
-                          <a:solidFill>
-                            <a:srgbClr val="1D1B43"/>
-                          </a:solidFill>
-                          <a:latin typeface="Calibri"/>
-                        </a:rPr>
-                        <a:t>BLV RODRIGUES COM DE - BELO HORIZONTE / MG</a:t>
-                      </a:r>
-                    </a:p>
-                  </a:txBody>
-                  <a:tcPr>
-                    <a:solidFill>
-                      <a:srgbClr val="FFFFFF"/>
-                    </a:solidFill>
-                  </a:tcPr>
-                </a:tc>
-                <a:tc>
-                  <a:txBody>
-                    <a:bodyPr/>
-                    <a:lstStyle/>
-                    <a:p>
-                      <a:pPr algn="l"/>
-                      <a:r>
-                        <a:rPr sz="1000" b="0">
-                          <a:solidFill>
-                            <a:srgbClr val="1D1B43"/>
-                          </a:solidFill>
-                          <a:latin typeface="Calibri"/>
-                        </a:rPr>
-                        <a:t>BELO HORIZONTE/MG</a:t>
-                      </a:r>
-                    </a:p>
-                  </a:txBody>
-                  <a:tcPr>
-                    <a:solidFill>
-                      <a:srgbClr val="FFFFFF"/>
-                    </a:solidFill>
-                  </a:tcPr>
-                </a:tc>
-                <a:tc>
-                  <a:txBody>
-                    <a:bodyPr/>
-                    <a:lstStyle/>
-                    <a:p>
-                      <a:pPr algn="l"/>
-                      <a:r>
-                        <a:rPr sz="1000" b="0">
-                          <a:solidFill>
-                            <a:srgbClr val="1D1B43"/>
-                          </a:solidFill>
-                          <a:latin typeface="Calibri"/>
-                        </a:rPr>
-                        <a:t>04/05/2026</a:t>
-                      </a:r>
-                    </a:p>
-                  </a:txBody>
-                  <a:tcPr>
-                    <a:solidFill>
-                      <a:srgbClr val="FFFFFF"/>
-                    </a:solidFill>
-                  </a:tcPr>
-                </a:tc>
-                <a:tc>
-                  <a:txBody>
-                    <a:bodyPr/>
-                    <a:lstStyle/>
-                    <a:p>
-                      <a:pPr algn="l"/>
-                      <a:r>
-                        <a:rPr sz="1000" b="0">
-                          <a:solidFill>
-                            <a:srgbClr val="1D1B43"/>
-                          </a:solidFill>
-                          <a:latin typeface="Calibri"/>
-                        </a:rPr>
-                        <a:t>ENTREGUE FORA DO PRAZO</a:t>
-                      </a:r>
-                    </a:p>
-                  </a:txBody>
-                  <a:tcPr>
-                    <a:solidFill>
-                      <a:srgbClr val="FFFFFF"/>
-                    </a:solidFill>
-                  </a:tcPr>
-                </a:tc>
-              </a:tr>
-              <a:tr h="182880">
-                <a:tc>
-                  <a:txBody>
-                    <a:bodyPr/>
-                    <a:lstStyle/>
-                    <a:p>
-                      <a:pPr algn="l"/>
-                      <a:r>
-                        <a:rPr sz="1000" b="0">
-                          <a:solidFill>
-                            <a:srgbClr val="1D1B43"/>
-                          </a:solidFill>
-                          <a:latin typeface="Calibri"/>
-                        </a:rPr>
-                        <a:t>280277</a:t>
-                      </a:r>
-                    </a:p>
-                  </a:txBody>
-                  <a:tcPr>
-                    <a:solidFill>
-                      <a:srgbClr val="F2F2F2"/>
-                    </a:solidFill>
-                  </a:tcPr>
-                </a:tc>
-                <a:tc>
-                  <a:txBody>
-                    <a:bodyPr/>
-                    <a:lstStyle/>
-                    <a:p>
-                      <a:pPr algn="l"/>
-                      <a:r>
-                        <a:rPr sz="1000" b="0">
-                          <a:solidFill>
-                            <a:srgbClr val="1D1B43"/>
-                          </a:solidFill>
-                          <a:latin typeface="Calibri"/>
-                        </a:rPr>
-                        <a:t>PENIDO CALCADOS E AC - ITAUNA / MG</a:t>
-                      </a:r>
-                    </a:p>
-                  </a:txBody>
-                  <a:tcPr>
-                    <a:solidFill>
-                      <a:srgbClr val="F2F2F2"/>
-                    </a:solidFill>
-                  </a:tcPr>
-                </a:tc>
-                <a:tc>
-                  <a:txBody>
-                    <a:bodyPr/>
-                    <a:lstStyle/>
-                    <a:p>
-                      <a:pPr algn="l"/>
-                      <a:r>
-                        <a:rPr sz="1000" b="0">
-                          <a:solidFill>
-                            <a:srgbClr val="1D1B43"/>
-                          </a:solidFill>
-                          <a:latin typeface="Calibri"/>
-                        </a:rPr>
-                        <a:t>ITAUNA/MG</a:t>
-                      </a:r>
-                    </a:p>
-                  </a:txBody>
-                  <a:tcPr>
-                    <a:solidFill>
-                      <a:srgbClr val="F2F2F2"/>
-                    </a:solidFill>
-                  </a:tcPr>
-                </a:tc>
-                <a:tc>
-                  <a:txBody>
-                    <a:bodyPr/>
-                    <a:lstStyle/>
-                    <a:p>
-                      <a:pPr algn="l"/>
-                      <a:r>
-                        <a:rPr sz="1000" b="0">
-                          <a:solidFill>
-                            <a:srgbClr val="1D1B43"/>
-                          </a:solidFill>
-                          <a:latin typeface="Calibri"/>
-                        </a:rPr>
-                        <a:t>04/05/2026</a:t>
-                      </a:r>
-                    </a:p>
-                  </a:txBody>
-                  <a:tcPr>
-                    <a:solidFill>
-                      <a:srgbClr val="F2F2F2"/>
-                    </a:solidFill>
-                  </a:tcPr>
-                </a:tc>
-                <a:tc>
-                  <a:txBody>
-                    <a:bodyPr/>
-                    <a:lstStyle/>
-                    <a:p>
-                      <a:pPr algn="l"/>
-                      <a:r>
-                        <a:rPr sz="1000" b="0">
-                          <a:solidFill>
-                            <a:srgbClr val="1D1B43"/>
-                          </a:solidFill>
-                          <a:latin typeface="Calibri"/>
-                        </a:rPr>
-                        <a:t>ENTREGUE FORA DO PRAZO</a:t>
-                      </a:r>
-                    </a:p>
-                  </a:txBody>
-                  <a:tcPr>
-                    <a:solidFill>
-                      <a:srgbClr val="F2F2F2"/>
-                    </a:solidFill>
-                  </a:tcPr>
-                </a:tc>
-              </a:tr>
-              <a:tr h="182880">
-                <a:tc>
-                  <a:txBody>
-                    <a:bodyPr/>
-                    <a:lstStyle/>
-                    <a:p>
-                      <a:pPr algn="l"/>
-                      <a:r>
-                        <a:rPr sz="1000" b="0">
-                          <a:solidFill>
-                            <a:srgbClr val="1D1B43"/>
-                          </a:solidFill>
-                          <a:latin typeface="Calibri"/>
-                        </a:rPr>
-                        <a:t>280278</a:t>
-                      </a:r>
-                    </a:p>
-                  </a:txBody>
-                  <a:tcPr>
-                    <a:solidFill>
-                      <a:srgbClr val="FFFFFF"/>
-                    </a:solidFill>
-                  </a:tcPr>
-                </a:tc>
-                <a:tc>
-                  <a:txBody>
-                    <a:bodyPr/>
-                    <a:lstStyle/>
-                    <a:p>
-                      <a:pPr algn="l"/>
-                      <a:r>
-                        <a:rPr sz="1000" b="0">
-                          <a:solidFill>
-                            <a:srgbClr val="1D1B43"/>
-                          </a:solidFill>
-                          <a:latin typeface="Calibri"/>
-                        </a:rPr>
-                        <a:t>V.M. VIX - COMERCIO - SERRA / ES</a:t>
-                      </a:r>
-                    </a:p>
-                  </a:txBody>
-                  <a:tcPr>
-                    <a:solidFill>
-                      <a:srgbClr val="FFFFFF"/>
-                    </a:solidFill>
-                  </a:tcPr>
-                </a:tc>
-                <a:tc>
-                  <a:txBody>
-                    <a:bodyPr/>
-                    <a:lstStyle/>
-                    <a:p>
-                      <a:pPr algn="l"/>
-                      <a:r>
-                        <a:rPr sz="1000" b="0">
-                          <a:solidFill>
-                            <a:srgbClr val="1D1B43"/>
-                          </a:solidFill>
-                          <a:latin typeface="Calibri"/>
-                        </a:rPr>
-                        <a:t>SERRA/ES</a:t>
-                      </a:r>
-                    </a:p>
-                  </a:txBody>
-                  <a:tcPr>
-                    <a:solidFill>
-                      <a:srgbClr val="FFFFFF"/>
-                    </a:solidFill>
-                  </a:tcPr>
-                </a:tc>
-                <a:tc>
-                  <a:txBody>
-                    <a:bodyPr/>
-                    <a:lstStyle/>
-                    <a:p>
-                      <a:pPr algn="l"/>
-                      <a:r>
-                        <a:rPr sz="1000" b="0">
-                          <a:solidFill>
-                            <a:srgbClr val="1D1B43"/>
-                          </a:solidFill>
-                          <a:latin typeface="Calibri"/>
-                        </a:rPr>
-                        <a:t>04/05/2026</a:t>
-                      </a:r>
-                    </a:p>
-                  </a:txBody>
-                  <a:tcPr>
-                    <a:solidFill>
-                      <a:srgbClr val="FFFFFF"/>
-                    </a:solidFill>
-                  </a:tcPr>
-                </a:tc>
-                <a:tc>
-                  <a:txBody>
-                    <a:bodyPr/>
-                    <a:lstStyle/>
-                    <a:p>
-                      <a:pPr algn="l"/>
-                      <a:r>
-                        <a:rPr sz="1000" b="0">
-                          <a:solidFill>
-                            <a:srgbClr val="1D1B43"/>
-                          </a:solidFill>
-                          <a:latin typeface="Calibri"/>
-                        </a:rPr>
-                        <a:t>ENTREGUE FORA DO PRAZO</a:t>
-                      </a:r>
-                    </a:p>
-                  </a:txBody>
-                  <a:tcPr>
-                    <a:solidFill>
-                      <a:srgbClr val="FFFFFF"/>
-                    </a:solidFill>
-                  </a:tcPr>
-                </a:tc>
-              </a:tr>
-              <a:tr h="182880">
-                <a:tc>
-                  <a:txBody>
-                    <a:bodyPr/>
-                    <a:lstStyle/>
-                    <a:p>
-                      <a:pPr algn="l"/>
-                      <a:r>
-                        <a:rPr sz="1000" b="0">
-                          <a:solidFill>
-                            <a:srgbClr val="1D1B43"/>
-                          </a:solidFill>
-                          <a:latin typeface="Calibri"/>
-                        </a:rPr>
-                        <a:t>280282</a:t>
-                      </a:r>
-                    </a:p>
-                  </a:txBody>
-                  <a:tcPr>
-                    <a:solidFill>
-                      <a:srgbClr val="F2F2F2"/>
-                    </a:solidFill>
-                  </a:tcPr>
-                </a:tc>
-                <a:tc>
-                  <a:txBody>
-                    <a:bodyPr/>
-                    <a:lstStyle/>
-                    <a:p>
-                      <a:pPr algn="l"/>
-                      <a:r>
-                        <a:rPr sz="1000" b="0">
-                          <a:solidFill>
-                            <a:srgbClr val="1D1B43"/>
-                          </a:solidFill>
-                          <a:latin typeface="Calibri"/>
-                        </a:rPr>
-                        <a:t>HELENA MAEMORI MORI - ITURAMA / MG</a:t>
-                      </a:r>
-                    </a:p>
-                  </a:txBody>
-                  <a:tcPr>
-                    <a:solidFill>
-                      <a:srgbClr val="F2F2F2"/>
-                    </a:solidFill>
-                  </a:tcPr>
-                </a:tc>
-                <a:tc>
-                  <a:txBody>
-                    <a:bodyPr/>
-                    <a:lstStyle/>
-                    <a:p>
-                      <a:pPr algn="l"/>
-                      <a:r>
-                        <a:rPr sz="1000" b="0">
-                          <a:solidFill>
-                            <a:srgbClr val="1D1B43"/>
-                          </a:solidFill>
-                          <a:latin typeface="Calibri"/>
-                        </a:rPr>
-                        <a:t>ITURAMA/MG</a:t>
-                      </a:r>
-                    </a:p>
-                  </a:txBody>
-                  <a:tcPr>
-                    <a:solidFill>
-                      <a:srgbClr val="F2F2F2"/>
-                    </a:solidFill>
-                  </a:tcPr>
-                </a:tc>
-                <a:tc>
-                  <a:txBody>
-                    <a:bodyPr/>
-                    <a:lstStyle/>
-                    <a:p>
-                      <a:pPr algn="l"/>
-                      <a:r>
-                        <a:rPr sz="1000" b="0">
-                          <a:solidFill>
-                            <a:srgbClr val="1D1B43"/>
-                          </a:solidFill>
-                          <a:latin typeface="Calibri"/>
-                        </a:rPr>
-                        <a:t>04/05/2026</a:t>
-                      </a:r>
-                    </a:p>
-                  </a:txBody>
-                  <a:tcPr>
-                    <a:solidFill>
-                      <a:srgbClr val="F2F2F2"/>
-                    </a:solidFill>
-                  </a:tcPr>
-                </a:tc>
-                <a:tc>
-                  <a:txBody>
-                    <a:bodyPr/>
-                    <a:lstStyle/>
-                    <a:p>
-                      <a:pPr algn="l"/>
-                      <a:r>
-                        <a:rPr sz="1000" b="0">
-                          <a:solidFill>
-                            <a:srgbClr val="1D1B43"/>
-                          </a:solidFill>
-                          <a:latin typeface="Calibri"/>
-                        </a:rPr>
-                        <a:t>ENTREGUE FORA DO PRAZO</a:t>
-                      </a:r>
-                    </a:p>
-                  </a:txBody>
-                  <a:tcPr>
-                    <a:solidFill>
-                      <a:srgbClr val="F2F2F2"/>
-                    </a:solidFill>
-                  </a:tcPr>
-                </a:tc>
-              </a:tr>
-              <a:tr h="182880">
-                <a:tc>
-                  <a:txBody>
-                    <a:bodyPr/>
-                    <a:lstStyle/>
-                    <a:p>
-                      <a:pPr algn="l"/>
-                      <a:r>
-                        <a:rPr sz="1000" b="0">
-                          <a:solidFill>
-                            <a:srgbClr val="1D1B43"/>
-                          </a:solidFill>
-                          <a:latin typeface="Calibri"/>
-                        </a:rPr>
-                        <a:t>280283</a:t>
-                      </a:r>
-                    </a:p>
-                  </a:txBody>
-                  <a:tcPr>
-                    <a:solidFill>
-                      <a:srgbClr val="FFFFFF"/>
-                    </a:solidFill>
-                  </a:tcPr>
-                </a:tc>
-                <a:tc>
-                  <a:txBody>
-                    <a:bodyPr/>
-                    <a:lstStyle/>
-                    <a:p>
-                      <a:pPr algn="l"/>
-                      <a:r>
-                        <a:rPr sz="1000" b="0">
-                          <a:solidFill>
-                            <a:srgbClr val="1D1B43"/>
-                          </a:solidFill>
-                          <a:latin typeface="Calibri"/>
-                        </a:rPr>
-                        <a:t>FORT CALCADOS DE ASS - LINS / SP</a:t>
-                      </a:r>
-                    </a:p>
-                  </a:txBody>
-                  <a:tcPr>
-                    <a:solidFill>
-                      <a:srgbClr val="FFFFFF"/>
-                    </a:solidFill>
-                  </a:tcPr>
-                </a:tc>
-                <a:tc>
-                  <a:txBody>
-                    <a:bodyPr/>
-                    <a:lstStyle/>
-                    <a:p>
-                      <a:pPr algn="l"/>
-                      <a:r>
-                        <a:rPr sz="1000" b="0">
-                          <a:solidFill>
-                            <a:srgbClr val="1D1B43"/>
-                          </a:solidFill>
-                          <a:latin typeface="Calibri"/>
-                        </a:rPr>
-                        <a:t>LINS/SP</a:t>
-                      </a:r>
-                    </a:p>
-                  </a:txBody>
-                  <a:tcPr>
-                    <a:solidFill>
-                      <a:srgbClr val="FFFFFF"/>
-                    </a:solidFill>
-                  </a:tcPr>
-                </a:tc>
-                <a:tc>
-                  <a:txBody>
-                    <a:bodyPr/>
-                    <a:lstStyle/>
-                    <a:p>
-                      <a:pPr algn="l"/>
-                      <a:r>
-                        <a:rPr sz="1000" b="0">
-                          <a:solidFill>
-                            <a:srgbClr val="1D1B43"/>
-                          </a:solidFill>
-                          <a:latin typeface="Calibri"/>
-                        </a:rPr>
-                        <a:t>06/05/2026</a:t>
-                      </a:r>
-                    </a:p>
-                  </a:txBody>
-                  <a:tcPr>
-                    <a:solidFill>
-                      <a:srgbClr val="FFFFFF"/>
-                    </a:solidFill>
-                  </a:tcPr>
-                </a:tc>
-                <a:tc>
-                  <a:txBody>
-                    <a:bodyPr/>
-                    <a:lstStyle/>
-                    <a:p>
-                      <a:pPr algn="l"/>
-                      <a:r>
-                        <a:rPr sz="1000" b="0">
-                          <a:solidFill>
-                            <a:srgbClr val="1D1B43"/>
-                          </a:solidFill>
-                          <a:latin typeface="Calibri"/>
-                        </a:rPr>
-                        <a:t>ENTREGUE FORA DO PRAZO</a:t>
-                      </a:r>
-                    </a:p>
-                  </a:txBody>
-                  <a:tcPr>
-                    <a:solidFill>
-                      <a:srgbClr val="FFFFFF"/>
-                    </a:solidFill>
-                  </a:tcPr>
-                </a:tc>
-              </a:tr>
-              <a:tr h="182880">
-                <a:tc>
-                  <a:txBody>
-                    <a:bodyPr/>
-                    <a:lstStyle/>
-                    <a:p>
-                      <a:pPr algn="l"/>
-                      <a:r>
-                        <a:rPr sz="1000" b="0">
-                          <a:solidFill>
-                            <a:srgbClr val="1D1B43"/>
-                          </a:solidFill>
-                          <a:latin typeface="Calibri"/>
-                        </a:rPr>
-                        <a:t>280285</a:t>
-                      </a:r>
-                    </a:p>
-                  </a:txBody>
-                  <a:tcPr>
-                    <a:solidFill>
-                      <a:srgbClr val="F2F2F2"/>
-                    </a:solidFill>
-                  </a:tcPr>
-                </a:tc>
-                <a:tc>
-                  <a:txBody>
-                    <a:bodyPr/>
-                    <a:lstStyle/>
-                    <a:p>
-                      <a:pPr algn="l"/>
-                      <a:r>
-                        <a:rPr sz="1000" b="0">
-                          <a:solidFill>
-                            <a:srgbClr val="1D1B43"/>
-                          </a:solidFill>
-                          <a:latin typeface="Calibri"/>
-                        </a:rPr>
-                        <a:t>M P MODAS LTDA - LINS / SP</a:t>
-                      </a:r>
-                    </a:p>
-                  </a:txBody>
-                  <a:tcPr>
-                    <a:solidFill>
-                      <a:srgbClr val="F2F2F2"/>
-                    </a:solidFill>
-                  </a:tcPr>
-                </a:tc>
-                <a:tc>
-                  <a:txBody>
-                    <a:bodyPr/>
-                    <a:lstStyle/>
-                    <a:p>
-                      <a:pPr algn="l"/>
-                      <a:r>
-                        <a:rPr sz="1000" b="0">
-                          <a:solidFill>
-                            <a:srgbClr val="1D1B43"/>
-                          </a:solidFill>
-                          <a:latin typeface="Calibri"/>
-                        </a:rPr>
-                        <a:t>LINS/SP</a:t>
-                      </a:r>
-                    </a:p>
-                  </a:txBody>
-                  <a:tcPr>
-                    <a:solidFill>
-                      <a:srgbClr val="F2F2F2"/>
-                    </a:solidFill>
-                  </a:tcPr>
-                </a:tc>
-                <a:tc>
-                  <a:txBody>
-                    <a:bodyPr/>
-                    <a:lstStyle/>
-                    <a:p>
-                      <a:pPr algn="l"/>
-                      <a:r>
-                        <a:rPr sz="1000" b="0">
-                          <a:solidFill>
-                            <a:srgbClr val="1D1B43"/>
-                          </a:solidFill>
-                          <a:latin typeface="Calibri"/>
-                        </a:rPr>
-                        <a:t>06/05/2026</a:t>
-                      </a:r>
-                    </a:p>
-                  </a:txBody>
-                  <a:tcPr>
-                    <a:solidFill>
-                      <a:srgbClr val="F2F2F2"/>
-                    </a:solidFill>
-                  </a:tcPr>
-                </a:tc>
-                <a:tc>
-                  <a:txBody>
-                    <a:bodyPr/>
-                    <a:lstStyle/>
-                    <a:p>
-                      <a:pPr algn="l"/>
-                      <a:r>
-                        <a:rPr sz="1000" b="0">
-                          <a:solidFill>
-                            <a:srgbClr val="1D1B43"/>
-                          </a:solidFill>
-                          <a:latin typeface="Calibri"/>
-                        </a:rPr>
-                        <a:t>ENTREGUE FORA DO PRAZO</a:t>
-                      </a:r>
-                    </a:p>
-                  </a:txBody>
-                  <a:tcPr>
-                    <a:solidFill>
-                      <a:srgbClr val="F2F2F2"/>
-                    </a:solidFill>
-                  </a:tcPr>
-                </a:tc>
-              </a:tr>
-              <a:tr h="182880">
-                <a:tc>
-                  <a:txBody>
-                    <a:bodyPr/>
-                    <a:lstStyle/>
-                    <a:p>
-                      <a:pPr algn="l"/>
-                      <a:r>
-                        <a:rPr sz="1000" b="0">
-                          <a:solidFill>
-                            <a:srgbClr val="1D1B43"/>
-                          </a:solidFill>
-                          <a:latin typeface="Calibri"/>
-                        </a:rPr>
-                        <a:t>280289</a:t>
-                      </a:r>
-                    </a:p>
-                  </a:txBody>
-                  <a:tcPr>
-                    <a:solidFill>
-                      <a:srgbClr val="FFFFFF"/>
-                    </a:solidFill>
-                  </a:tcPr>
-                </a:tc>
-                <a:tc>
-                  <a:txBody>
-                    <a:bodyPr/>
-                    <a:lstStyle/>
-                    <a:p>
-                      <a:pPr algn="l"/>
-                      <a:r>
-                        <a:rPr sz="1000" b="0">
-                          <a:solidFill>
-                            <a:srgbClr val="1D1B43"/>
-                          </a:solidFill>
-                          <a:latin typeface="Calibri"/>
-                        </a:rPr>
-                        <a:t>ALINE APARECIDA ANDR - CRISTAIS / MG</a:t>
-                      </a:r>
-                    </a:p>
-                  </a:txBody>
-                  <a:tcPr>
-                    <a:solidFill>
-                      <a:srgbClr val="FFFFFF"/>
-                    </a:solidFill>
-                  </a:tcPr>
-                </a:tc>
-                <a:tc>
-                  <a:txBody>
-                    <a:bodyPr/>
-                    <a:lstStyle/>
-                    <a:p>
-                      <a:pPr algn="l"/>
-                      <a:r>
-                        <a:rPr sz="1000" b="0">
-                          <a:solidFill>
-                            <a:srgbClr val="1D1B43"/>
-                          </a:solidFill>
-                          <a:latin typeface="Calibri"/>
-                        </a:rPr>
-                        <a:t>CRISTAIS/MG</a:t>
-                      </a:r>
-                    </a:p>
-                  </a:txBody>
-                  <a:tcPr>
-                    <a:solidFill>
-                      <a:srgbClr val="FFFFFF"/>
-                    </a:solidFill>
-                  </a:tcPr>
-                </a:tc>
-                <a:tc>
-                  <a:txBody>
-                    <a:bodyPr/>
-                    <a:lstStyle/>
-                    <a:p>
-                      <a:pPr algn="l"/>
-                      <a:r>
-                        <a:rPr sz="1000" b="0">
-                          <a:solidFill>
-                            <a:srgbClr val="1D1B43"/>
-                          </a:solidFill>
-                          <a:latin typeface="Calibri"/>
-                        </a:rPr>
-                        <a:t>04/05/2026</a:t>
-                      </a:r>
-                    </a:p>
-                  </a:txBody>
-                  <a:tcPr>
-                    <a:solidFill>
-                      <a:srgbClr val="FFFFFF"/>
-                    </a:solidFill>
-                  </a:tcPr>
-                </a:tc>
-                <a:tc>
-                  <a:txBody>
-                    <a:bodyPr/>
-                    <a:lstStyle/>
-                    <a:p>
-                      <a:pPr algn="l"/>
-                      <a:r>
-                        <a:rPr sz="1000" b="0">
-                          <a:solidFill>
-                            <a:srgbClr val="1D1B43"/>
-                          </a:solidFill>
-                          <a:latin typeface="Calibri"/>
-                        </a:rPr>
-                        <a:t>ENTREGUE FORA DO PRAZO</a:t>
-                      </a:r>
-                    </a:p>
-                  </a:txBody>
-                  <a:tcPr>
-                    <a:solidFill>
-                      <a:srgbClr val="FFFFFF"/>
-                    </a:solidFill>
-                  </a:tcPr>
-                </a:tc>
-              </a:tr>
-              <a:tr h="182880">
-                <a:tc>
-                  <a:txBody>
-                    <a:bodyPr/>
-                    <a:lstStyle/>
-                    <a:p>
-                      <a:pPr algn="l"/>
-                      <a:r>
-                        <a:rPr sz="1000" b="0">
-                          <a:solidFill>
-                            <a:srgbClr val="1D1B43"/>
-                          </a:solidFill>
-                          <a:latin typeface="Calibri"/>
-                        </a:rPr>
-                        <a:t>280290</a:t>
-                      </a:r>
-                    </a:p>
-                  </a:txBody>
-                  <a:tcPr>
-                    <a:solidFill>
-                      <a:srgbClr val="F2F2F2"/>
-                    </a:solidFill>
-                  </a:tcPr>
-                </a:tc>
-                <a:tc>
-                  <a:txBody>
-                    <a:bodyPr/>
-                    <a:lstStyle/>
-                    <a:p>
-                      <a:pPr algn="l"/>
-                      <a:r>
-                        <a:rPr sz="1000" b="0">
-                          <a:solidFill>
-                            <a:srgbClr val="1D1B43"/>
-                          </a:solidFill>
-                          <a:latin typeface="Calibri"/>
-                        </a:rPr>
-                        <a:t>F. S. OLIVEIRA CONFE - LINS / SP</a:t>
-                      </a:r>
-                    </a:p>
-                  </a:txBody>
-                  <a:tcPr>
-                    <a:solidFill>
-                      <a:srgbClr val="F2F2F2"/>
-                    </a:solidFill>
-                  </a:tcPr>
-                </a:tc>
-                <a:tc>
-                  <a:txBody>
-                    <a:bodyPr/>
-                    <a:lstStyle/>
-                    <a:p>
-                      <a:pPr algn="l"/>
-                      <a:r>
-                        <a:rPr sz="1000" b="0">
-                          <a:solidFill>
-                            <a:srgbClr val="1D1B43"/>
-                          </a:solidFill>
-                          <a:latin typeface="Calibri"/>
-                        </a:rPr>
-                        <a:t>LINS/SP</a:t>
-                      </a:r>
-                    </a:p>
-                  </a:txBody>
-                  <a:tcPr>
-                    <a:solidFill>
-                      <a:srgbClr val="F2F2F2"/>
-                    </a:solidFill>
-                  </a:tcPr>
-                </a:tc>
-                <a:tc>
-                  <a:txBody>
-                    <a:bodyPr/>
-                    <a:lstStyle/>
-                    <a:p>
-                      <a:pPr algn="l"/>
-                      <a:r>
-                        <a:rPr sz="1000" b="0">
-                          <a:solidFill>
-                            <a:srgbClr val="1D1B43"/>
-                          </a:solidFill>
-                          <a:latin typeface="Calibri"/>
-                        </a:rPr>
-                        <a:t>06/05/2026</a:t>
-                      </a:r>
-                    </a:p>
-                  </a:txBody>
-                  <a:tcPr>
-                    <a:solidFill>
-                      <a:srgbClr val="F2F2F2"/>
-                    </a:solidFill>
-                  </a:tcPr>
-                </a:tc>
-                <a:tc>
-                  <a:txBody>
-                    <a:bodyPr/>
-                    <a:lstStyle/>
-                    <a:p>
-                      <a:pPr algn="l"/>
-                      <a:r>
-                        <a:rPr sz="1000" b="0">
-                          <a:solidFill>
-                            <a:srgbClr val="1D1B43"/>
-                          </a:solidFill>
-                          <a:latin typeface="Calibri"/>
-                        </a:rPr>
-                        <a:t>ENTREGUE FORA DO PRAZO</a:t>
-                      </a:r>
-                    </a:p>
-                  </a:txBody>
-                  <a:tcPr>
-                    <a:solidFill>
-                      <a:srgbClr val="F2F2F2"/>
-                    </a:solidFill>
-                  </a:tcPr>
-                </a:tc>
-              </a:tr>
-              <a:tr h="182880">
-                <a:tc>
-                  <a:txBody>
-                    <a:bodyPr/>
-                    <a:lstStyle/>
-                    <a:p>
-                      <a:pPr algn="l"/>
-                      <a:r>
-                        <a:rPr sz="1000" b="0">
-                          <a:solidFill>
-                            <a:srgbClr val="1D1B43"/>
-                          </a:solidFill>
-                          <a:latin typeface="Calibri"/>
-                        </a:rPr>
-                        <a:t>280292</a:t>
-                      </a:r>
-                    </a:p>
-                  </a:txBody>
-                  <a:tcPr>
-                    <a:solidFill>
-                      <a:srgbClr val="FFFFFF"/>
-                    </a:solidFill>
-                  </a:tcPr>
-                </a:tc>
-                <a:tc>
-                  <a:txBody>
-                    <a:bodyPr/>
-                    <a:lstStyle/>
-                    <a:p>
-                      <a:pPr algn="l"/>
-                      <a:r>
-                        <a:rPr sz="1000" b="0">
-                          <a:solidFill>
-                            <a:srgbClr val="1D1B43"/>
-                          </a:solidFill>
-                          <a:latin typeface="Calibri"/>
-                        </a:rPr>
-                        <a:t>SADAH ABDALLAH CALCA - CONCEICAO DAS ALAGOAS / M</a:t>
-                      </a:r>
-                    </a:p>
-                  </a:txBody>
-                  <a:tcPr>
-                    <a:solidFill>
-                      <a:srgbClr val="FFFFFF"/>
-                    </a:solidFill>
-                  </a:tcPr>
-                </a:tc>
-                <a:tc>
-                  <a:txBody>
-                    <a:bodyPr/>
-                    <a:lstStyle/>
-                    <a:p>
-                      <a:pPr algn="l"/>
-                      <a:r>
-                        <a:rPr sz="1000" b="0">
-                          <a:solidFill>
-                            <a:srgbClr val="1D1B43"/>
-                          </a:solidFill>
-                          <a:latin typeface="Calibri"/>
-                        </a:rPr>
-                        <a:t>CONCEICAO DAS ALAGOAS/MG</a:t>
-                      </a:r>
-                    </a:p>
-                  </a:txBody>
-                  <a:tcPr>
-                    <a:solidFill>
-                      <a:srgbClr val="FFFFFF"/>
-                    </a:solidFill>
-                  </a:tcPr>
-                </a:tc>
-                <a:tc>
-                  <a:txBody>
-                    <a:bodyPr/>
-                    <a:lstStyle/>
-                    <a:p>
-                      <a:pPr algn="l"/>
-                      <a:r>
-                        <a:rPr sz="1000" b="0">
-                          <a:solidFill>
-                            <a:srgbClr val="1D1B43"/>
-                          </a:solidFill>
-                          <a:latin typeface="Calibri"/>
-                        </a:rPr>
-                        <a:t>04/05/2026</a:t>
-                      </a:r>
-                    </a:p>
-                  </a:txBody>
-                  <a:tcPr>
-                    <a:solidFill>
-                      <a:srgbClr val="FFFFFF"/>
-                    </a:solidFill>
-                  </a:tcPr>
-                </a:tc>
-                <a:tc>
-                  <a:txBody>
-                    <a:bodyPr/>
-                    <a:lstStyle/>
-                    <a:p>
-                      <a:pPr algn="l"/>
-                      <a:r>
-                        <a:rPr sz="1000" b="0">
-                          <a:solidFill>
-                            <a:srgbClr val="1D1B43"/>
-                          </a:solidFill>
-                          <a:latin typeface="Calibri"/>
-                        </a:rPr>
-                        <a:t>ENTREGUE FORA DO PRAZO</a:t>
-                      </a:r>
-                    </a:p>
-                  </a:txBody>
-                  <a:tcPr>
-                    <a:solidFill>
-                      <a:srgbClr val="FFFFFF"/>
-                    </a:solidFill>
-                  </a:tcPr>
-                </a:tc>
-              </a:tr>
-              <a:tr h="182880">
-                <a:tc>
-                  <a:txBody>
-                    <a:bodyPr/>
-                    <a:lstStyle/>
-                    <a:p>
-                      <a:pPr algn="l"/>
-                      <a:r>
-                        <a:rPr sz="1000" b="0">
-                          <a:solidFill>
-                            <a:srgbClr val="1D1B43"/>
-                          </a:solidFill>
-                          <a:latin typeface="Calibri"/>
-                        </a:rPr>
-                        <a:t>280293</a:t>
-                      </a:r>
-                    </a:p>
-                  </a:txBody>
-                  <a:tcPr>
-                    <a:solidFill>
-                      <a:srgbClr val="F2F2F2"/>
-                    </a:solidFill>
-                  </a:tcPr>
-                </a:tc>
-                <a:tc>
-                  <a:txBody>
-                    <a:bodyPr/>
-                    <a:lstStyle/>
-                    <a:p>
-                      <a:pPr algn="l"/>
-                      <a:r>
-                        <a:rPr sz="1000" b="0">
-                          <a:solidFill>
-                            <a:srgbClr val="1D1B43"/>
-                          </a:solidFill>
-                          <a:latin typeface="Calibri"/>
-                        </a:rPr>
-                        <a:t>FERREIRA &amp; FERNANDES - PROMISSAO / SP</a:t>
-                      </a:r>
-                    </a:p>
-                  </a:txBody>
-                  <a:tcPr>
-                    <a:solidFill>
-                      <a:srgbClr val="F2F2F2"/>
-                    </a:solidFill>
-                  </a:tcPr>
-                </a:tc>
-                <a:tc>
-                  <a:txBody>
-                    <a:bodyPr/>
-                    <a:lstStyle/>
-                    <a:p>
-                      <a:pPr algn="l"/>
-                      <a:r>
-                        <a:rPr sz="1000" b="0">
-                          <a:solidFill>
-                            <a:srgbClr val="1D1B43"/>
-                          </a:solidFill>
-                          <a:latin typeface="Calibri"/>
-                        </a:rPr>
-                        <a:t>PROMISSAO/SP</a:t>
-                      </a:r>
-                    </a:p>
-                  </a:txBody>
-                  <a:tcPr>
-                    <a:solidFill>
-                      <a:srgbClr val="F2F2F2"/>
-                    </a:solidFill>
-                  </a:tcPr>
-                </a:tc>
-                <a:tc>
-                  <a:txBody>
-                    <a:bodyPr/>
-                    <a:lstStyle/>
-                    <a:p>
-                      <a:pPr algn="l"/>
-                      <a:r>
-                        <a:rPr sz="1000" b="0">
-                          <a:solidFill>
-                            <a:srgbClr val="1D1B43"/>
-                          </a:solidFill>
-                          <a:latin typeface="Calibri"/>
-                        </a:rPr>
-                        <a:t>06/05/2026</a:t>
-                      </a:r>
-                    </a:p>
-                  </a:txBody>
-                  <a:tcPr>
-                    <a:solidFill>
-                      <a:srgbClr val="F2F2F2"/>
-                    </a:solidFill>
-                  </a:tcPr>
-                </a:tc>
-                <a:tc>
-                  <a:txBody>
-                    <a:bodyPr/>
-                    <a:lstStyle/>
-                    <a:p>
-                      <a:pPr algn="l"/>
-                      <a:r>
-                        <a:rPr sz="1000" b="0">
-                          <a:solidFill>
-                            <a:srgbClr val="1D1B43"/>
-                          </a:solidFill>
-                          <a:latin typeface="Calibri"/>
-                        </a:rPr>
-                        <a:t>ENTREGUE FORA DO PRAZO</a:t>
-                      </a:r>
-                    </a:p>
-                  </a:txBody>
-                  <a:tcPr>
-                    <a:solidFill>
-                      <a:srgbClr val="F2F2F2"/>
-                    </a:solidFill>
-                  </a:tcPr>
-                </a:tc>
-              </a:tr>
-              <a:tr h="182880">
-                <a:tc>
-                  <a:txBody>
-                    <a:bodyPr/>
-                    <a:lstStyle/>
-                    <a:p>
-                      <a:pPr algn="l"/>
-                      <a:r>
-                        <a:rPr sz="1000" b="0">
-                          <a:solidFill>
-                            <a:srgbClr val="1D1B43"/>
-                          </a:solidFill>
-                          <a:latin typeface="Calibri"/>
-                        </a:rPr>
-                        <a:t>280297</a:t>
-                      </a:r>
-                    </a:p>
-                  </a:txBody>
-                  <a:tcPr>
-                    <a:solidFill>
-                      <a:srgbClr val="FFFFFF"/>
-                    </a:solidFill>
-                  </a:tcPr>
-                </a:tc>
-                <a:tc>
-                  <a:txBody>
-                    <a:bodyPr/>
-                    <a:lstStyle/>
-                    <a:p>
-                      <a:pPr algn="l"/>
-                      <a:r>
-                        <a:rPr sz="1000" b="0">
-                          <a:solidFill>
-                            <a:srgbClr val="1D1B43"/>
-                          </a:solidFill>
-                          <a:latin typeface="Calibri"/>
-                        </a:rPr>
-                        <a:t>J L CALCADOS E ACESS - ESPERA FELIZ / MG</a:t>
-                      </a:r>
-                    </a:p>
-                  </a:txBody>
-                  <a:tcPr>
-                    <a:solidFill>
-                      <a:srgbClr val="FFFFFF"/>
-                    </a:solidFill>
-                  </a:tcPr>
-                </a:tc>
-                <a:tc>
-                  <a:txBody>
-                    <a:bodyPr/>
-                    <a:lstStyle/>
-                    <a:p>
-                      <a:pPr algn="l"/>
-                      <a:r>
-                        <a:rPr sz="1000" b="0">
-                          <a:solidFill>
-                            <a:srgbClr val="1D1B43"/>
-                          </a:solidFill>
-                          <a:latin typeface="Calibri"/>
-                        </a:rPr>
-                        <a:t>ESPERA FELIZ/MG</a:t>
-                      </a:r>
-                    </a:p>
-                  </a:txBody>
-                  <a:tcPr>
-                    <a:solidFill>
-                      <a:srgbClr val="FFFFFF"/>
-                    </a:solidFill>
-                  </a:tcPr>
-                </a:tc>
-                <a:tc>
-                  <a:txBody>
-                    <a:bodyPr/>
-                    <a:lstStyle/>
-                    <a:p>
-                      <a:pPr algn="l"/>
-                      <a:r>
-                        <a:rPr sz="1000" b="0">
-                          <a:solidFill>
-                            <a:srgbClr val="1D1B43"/>
-                          </a:solidFill>
-                          <a:latin typeface="Calibri"/>
-                        </a:rPr>
-                        <a:t>04/05/2026</a:t>
-                      </a:r>
-                    </a:p>
-                  </a:txBody>
-                  <a:tcPr>
-                    <a:solidFill>
-                      <a:srgbClr val="FFFFFF"/>
-                    </a:solidFill>
-                  </a:tcPr>
-                </a:tc>
-                <a:tc>
-                  <a:txBody>
-                    <a:bodyPr/>
-                    <a:lstStyle/>
-                    <a:p>
-                      <a:pPr algn="l"/>
-                      <a:r>
-                        <a:rPr sz="1000" b="0">
-                          <a:solidFill>
-                            <a:srgbClr val="1D1B43"/>
-                          </a:solidFill>
-                          <a:latin typeface="Calibri"/>
-                        </a:rPr>
-                        <a:t>ENTREGUE FORA DO PRAZO</a:t>
-                      </a:r>
-                    </a:p>
-                  </a:txBody>
-                  <a:tcPr>
-                    <a:solidFill>
-                      <a:srgbClr val="FFFFFF"/>
-                    </a:solidFill>
-                  </a:tcPr>
-                </a:tc>
-              </a:tr>
-              <a:tr h="182880">
-                <a:tc>
-                  <a:txBody>
-                    <a:bodyPr/>
-                    <a:lstStyle/>
-                    <a:p>
-                      <a:pPr algn="l"/>
-                      <a:r>
-                        <a:rPr sz="1000" b="0">
-                          <a:solidFill>
-                            <a:srgbClr val="1D1B43"/>
-                          </a:solidFill>
-                          <a:latin typeface="Calibri"/>
-                        </a:rPr>
-                        <a:t>281087</a:t>
-                      </a:r>
-                    </a:p>
-                  </a:txBody>
-                  <a:tcPr>
-                    <a:solidFill>
-                      <a:srgbClr val="F2F2F2"/>
-                    </a:solidFill>
-                  </a:tcPr>
-                </a:tc>
-                <a:tc>
-                  <a:txBody>
-                    <a:bodyPr/>
-                    <a:lstStyle/>
-                    <a:p>
-                      <a:pPr algn="l"/>
-                      <a:r>
-                        <a:rPr sz="1000" b="0">
-                          <a:solidFill>
-                            <a:srgbClr val="1D1B43"/>
-                          </a:solidFill>
-                          <a:latin typeface="Calibri"/>
-                        </a:rPr>
-                        <a:t>ANA CRISTINA GUIMARA - NOVA SERRANA / MG</a:t>
-                      </a:r>
-                    </a:p>
-                  </a:txBody>
-                  <a:tcPr>
-                    <a:solidFill>
-                      <a:srgbClr val="F2F2F2"/>
-                    </a:solidFill>
-                  </a:tcPr>
-                </a:tc>
-                <a:tc>
-                  <a:txBody>
-                    <a:bodyPr/>
-                    <a:lstStyle/>
-                    <a:p>
-                      <a:pPr algn="l"/>
-                      <a:r>
-                        <a:rPr sz="1000" b="0">
-                          <a:solidFill>
-                            <a:srgbClr val="1D1B43"/>
-                          </a:solidFill>
-                          <a:latin typeface="Calibri"/>
-                        </a:rPr>
-                        <a:t>NOVA SERRANA/MG</a:t>
-                      </a:r>
-                    </a:p>
-                  </a:txBody>
-                  <a:tcPr>
-                    <a:solidFill>
-                      <a:srgbClr val="F2F2F2"/>
-                    </a:solidFill>
-                  </a:tcPr>
-                </a:tc>
-                <a:tc>
-                  <a:txBody>
-                    <a:bodyPr/>
-                    <a:lstStyle/>
-                    <a:p>
-                      <a:pPr algn="l"/>
-                      <a:r>
-                        <a:rPr sz="1000" b="0">
-                          <a:solidFill>
-                            <a:srgbClr val="1D1B43"/>
-                          </a:solidFill>
-                          <a:latin typeface="Calibri"/>
-                        </a:rPr>
-                        <a:t>06/05/2026</a:t>
-                      </a:r>
-                    </a:p>
-                  </a:txBody>
-                  <a:tcPr>
-                    <a:solidFill>
-                      <a:srgbClr val="F2F2F2"/>
-                    </a:solidFill>
-                  </a:tcPr>
-                </a:tc>
-                <a:tc>
-                  <a:txBody>
-                    <a:bodyPr/>
-                    <a:lstStyle/>
-                    <a:p>
-                      <a:pPr algn="l"/>
-                      <a:r>
-                        <a:rPr sz="1000" b="0">
-                          <a:solidFill>
-                            <a:srgbClr val="1D1B43"/>
-                          </a:solidFill>
-                          <a:latin typeface="Calibri"/>
-                        </a:rPr>
-                        <a:t>ENTREGUE FORA DO PRAZO</a:t>
-                      </a:r>
-                    </a:p>
-                  </a:txBody>
-                  <a:tcPr>
-                    <a:solidFill>
-                      <a:srgbClr val="F2F2F2"/>
+                      <a:srgbClr val="FFFFFF"/>
                     </a:solidFill>
                   </a:tcPr>
                 </a:tc>
@@ -8416,7 +8169,7 @@
         </p:nvGraphicFramePr>
         <p:xfrm>
           <a:off x="731520" y="1920240"/>
-          <a:ext cx="10698480" cy="2286000"/>
+          <a:ext cx="10698480" cy="3200400"/>
         </p:xfrm>
         <a:graphic>
           <a:graphicData uri="http://schemas.openxmlformats.org/drawingml/2006/table">
@@ -8609,99 +8362,99 @@
                           </a:solidFill>
                           <a:latin typeface="Calibri"/>
                         </a:rPr>
-                        <a:t>109</a:t>
-                      </a:r>
-                    </a:p>
-                  </a:txBody>
-                  <a:tcPr>
-                    <a:solidFill>
-                      <a:srgbClr val="FFFFFF"/>
-                    </a:solidFill>
-                  </a:tcPr>
-                </a:tc>
-                <a:tc>
-                  <a:txBody>
-                    <a:bodyPr/>
-                    <a:lstStyle/>
-                    <a:p>
-                      <a:pPr algn="l"/>
-                      <a:r>
-                        <a:rPr sz="1000" b="0">
-                          <a:solidFill>
-                            <a:srgbClr val="1D1B43"/>
-                          </a:solidFill>
-                          <a:latin typeface="Calibri"/>
-                        </a:rPr>
-                        <a:t>94</a:t>
-                      </a:r>
-                    </a:p>
-                  </a:txBody>
-                  <a:tcPr>
-                    <a:solidFill>
-                      <a:srgbClr val="FFFFFF"/>
-                    </a:solidFill>
-                  </a:tcPr>
-                </a:tc>
-                <a:tc>
-                  <a:txBody>
-                    <a:bodyPr/>
-                    <a:lstStyle/>
-                    <a:p>
-                      <a:pPr algn="l"/>
-                      <a:r>
-                        <a:rPr sz="1000" b="0">
-                          <a:solidFill>
-                            <a:srgbClr val="1D1B43"/>
-                          </a:solidFill>
-                          <a:latin typeface="Calibri"/>
-                        </a:rPr>
-                        <a:t>15</a:t>
-                      </a:r>
-                    </a:p>
-                  </a:txBody>
-                  <a:tcPr>
-                    <a:solidFill>
-                      <a:srgbClr val="FFFFFF"/>
-                    </a:solidFill>
-                  </a:tcPr>
-                </a:tc>
-                <a:tc>
-                  <a:txBody>
-                    <a:bodyPr/>
-                    <a:lstStyle/>
-                    <a:p>
-                      <a:pPr algn="l"/>
-                      <a:r>
-                        <a:rPr sz="1000" b="0">
-                          <a:solidFill>
-                            <a:srgbClr val="1D1B43"/>
-                          </a:solidFill>
-                          <a:latin typeface="Calibri"/>
-                        </a:rPr>
-                        <a:t>86.2%</a:t>
-                      </a:r>
-                    </a:p>
-                  </a:txBody>
-                  <a:tcPr>
-                    <a:solidFill>
-                      <a:srgbClr val="FFFFFF"/>
-                    </a:solidFill>
-                  </a:tcPr>
-                </a:tc>
-                <a:tc>
-                  <a:txBody>
-                    <a:bodyPr/>
-                    <a:lstStyle/>
-                    <a:p>
-                      <a:pPr algn="l"/>
-                      <a:r>
-                        <a:rPr sz="1000" b="0">
-                          <a:solidFill>
-                            <a:srgbClr val="1D1B43"/>
-                          </a:solidFill>
-                          <a:latin typeface="Calibri"/>
-                        </a:rPr>
-                        <a:t>Regular</a:t>
+                        <a:t>164</a:t>
+                      </a:r>
+                    </a:p>
+                  </a:txBody>
+                  <a:tcPr>
+                    <a:solidFill>
+                      <a:srgbClr val="FFFFFF"/>
+                    </a:solidFill>
+                  </a:tcPr>
+                </a:tc>
+                <a:tc>
+                  <a:txBody>
+                    <a:bodyPr/>
+                    <a:lstStyle/>
+                    <a:p>
+                      <a:pPr algn="l"/>
+                      <a:r>
+                        <a:rPr sz="1000" b="0">
+                          <a:solidFill>
+                            <a:srgbClr val="1D1B43"/>
+                          </a:solidFill>
+                          <a:latin typeface="Calibri"/>
+                        </a:rPr>
+                        <a:t>161</a:t>
+                      </a:r>
+                    </a:p>
+                  </a:txBody>
+                  <a:tcPr>
+                    <a:solidFill>
+                      <a:srgbClr val="FFFFFF"/>
+                    </a:solidFill>
+                  </a:tcPr>
+                </a:tc>
+                <a:tc>
+                  <a:txBody>
+                    <a:bodyPr/>
+                    <a:lstStyle/>
+                    <a:p>
+                      <a:pPr algn="l"/>
+                      <a:r>
+                        <a:rPr sz="1000" b="0">
+                          <a:solidFill>
+                            <a:srgbClr val="1D1B43"/>
+                          </a:solidFill>
+                          <a:latin typeface="Calibri"/>
+                        </a:rPr>
+                        <a:t>3</a:t>
+                      </a:r>
+                    </a:p>
+                  </a:txBody>
+                  <a:tcPr>
+                    <a:solidFill>
+                      <a:srgbClr val="FFFFFF"/>
+                    </a:solidFill>
+                  </a:tcPr>
+                </a:tc>
+                <a:tc>
+                  <a:txBody>
+                    <a:bodyPr/>
+                    <a:lstStyle/>
+                    <a:p>
+                      <a:pPr algn="l"/>
+                      <a:r>
+                        <a:rPr sz="1000" b="0">
+                          <a:solidFill>
+                            <a:srgbClr val="1D1B43"/>
+                          </a:solidFill>
+                          <a:latin typeface="Calibri"/>
+                        </a:rPr>
+                        <a:t>98.2%</a:t>
+                      </a:r>
+                    </a:p>
+                  </a:txBody>
+                  <a:tcPr>
+                    <a:solidFill>
+                      <a:srgbClr val="FFFFFF"/>
+                    </a:solidFill>
+                  </a:tcPr>
+                </a:tc>
+                <a:tc>
+                  <a:txBody>
+                    <a:bodyPr/>
+                    <a:lstStyle/>
+                    <a:p>
+                      <a:pPr algn="l"/>
+                      <a:r>
+                        <a:rPr sz="1000" b="0">
+                          <a:solidFill>
+                            <a:srgbClr val="1D1B43"/>
+                          </a:solidFill>
+                          <a:latin typeface="Calibri"/>
+                        </a:rPr>
+                        <a:t>Excelente</a:t>
                       </a:r>
                     </a:p>
                   </a:txBody>
@@ -8749,6 +8502,29 @@
                           </a:solidFill>
                           <a:latin typeface="Calibri"/>
                         </a:rPr>
+                        <a:t>59</a:t>
+                      </a:r>
+                    </a:p>
+                  </a:txBody>
+                  <a:tcPr>
+                    <a:solidFill>
+                      <a:srgbClr val="F2F2F2"/>
+                    </a:solidFill>
+                  </a:tcPr>
+                </a:tc>
+                <a:tc>
+                  <a:txBody>
+                    <a:bodyPr/>
+                    <a:lstStyle/>
+                    <a:p>
+                      <a:pPr algn="l"/>
+                      <a:r>
+                        <a:rPr sz="1000" b="0">
+                          <a:solidFill>
+                            <a:srgbClr val="1D1B43"/>
+                          </a:solidFill>
+                          <a:latin typeface="Calibri"/>
+                        </a:rPr>
                         <a:t>55</a:t>
                       </a:r>
                     </a:p>
@@ -8772,53 +8548,30 @@
                           </a:solidFill>
                           <a:latin typeface="Calibri"/>
                         </a:rPr>
-                        <a:t>47</a:t>
-                      </a:r>
-                    </a:p>
-                  </a:txBody>
-                  <a:tcPr>
-                    <a:solidFill>
-                      <a:srgbClr val="F2F2F2"/>
-                    </a:solidFill>
-                  </a:tcPr>
-                </a:tc>
-                <a:tc>
-                  <a:txBody>
-                    <a:bodyPr/>
-                    <a:lstStyle/>
-                    <a:p>
-                      <a:pPr algn="l"/>
-                      <a:r>
-                        <a:rPr sz="1000" b="0">
-                          <a:solidFill>
-                            <a:srgbClr val="1D1B43"/>
-                          </a:solidFill>
-                          <a:latin typeface="Calibri"/>
-                        </a:rPr>
-                        <a:t>8</a:t>
-                      </a:r>
-                    </a:p>
-                  </a:txBody>
-                  <a:tcPr>
-                    <a:solidFill>
-                      <a:srgbClr val="F2F2F2"/>
-                    </a:solidFill>
-                  </a:tcPr>
-                </a:tc>
-                <a:tc>
-                  <a:txBody>
-                    <a:bodyPr/>
-                    <a:lstStyle/>
-                    <a:p>
-                      <a:pPr algn="l"/>
-                      <a:r>
-                        <a:rPr sz="1000" b="0">
-                          <a:solidFill>
-                            <a:srgbClr val="1D1B43"/>
-                          </a:solidFill>
-                          <a:latin typeface="Calibri"/>
-                        </a:rPr>
-                        <a:t>85.5%</a:t>
+                        <a:t>4</a:t>
+                      </a:r>
+                    </a:p>
+                  </a:txBody>
+                  <a:tcPr>
+                    <a:solidFill>
+                      <a:srgbClr val="F2F2F2"/>
+                    </a:solidFill>
+                  </a:tcPr>
+                </a:tc>
+                <a:tc>
+                  <a:txBody>
+                    <a:bodyPr/>
+                    <a:lstStyle/>
+                    <a:p>
+                      <a:pPr algn="l"/>
+                      <a:r>
+                        <a:rPr sz="1000" b="0">
+                          <a:solidFill>
+                            <a:srgbClr val="1D1B43"/>
+                          </a:solidFill>
+                          <a:latin typeface="Calibri"/>
+                        </a:rPr>
+                        <a:t>93.2%</a:t>
                       </a:r>
                     </a:p>
                   </a:txBody>
@@ -8889,6 +8642,29 @@
                           </a:solidFill>
                           <a:latin typeface="Calibri"/>
                         </a:rPr>
+                        <a:t>27</a:t>
+                      </a:r>
+                    </a:p>
+                  </a:txBody>
+                  <a:tcPr>
+                    <a:solidFill>
+                      <a:srgbClr val="FFFFFF"/>
+                    </a:solidFill>
+                  </a:tcPr>
+                </a:tc>
+                <a:tc>
+                  <a:txBody>
+                    <a:bodyPr/>
+                    <a:lstStyle/>
+                    <a:p>
+                      <a:pPr algn="l"/>
+                      <a:r>
+                        <a:rPr sz="1000" b="0">
+                          <a:solidFill>
+                            <a:srgbClr val="1D1B43"/>
+                          </a:solidFill>
+                          <a:latin typeface="Calibri"/>
+                        </a:rPr>
                         <a:t>11</a:t>
                       </a:r>
                     </a:p>
@@ -8912,76 +8688,53 @@
                           </a:solidFill>
                           <a:latin typeface="Calibri"/>
                         </a:rPr>
-                        <a:t>10</a:t>
-                      </a:r>
-                    </a:p>
-                  </a:txBody>
-                  <a:tcPr>
-                    <a:solidFill>
-                      <a:srgbClr val="FFFFFF"/>
-                    </a:solidFill>
-                  </a:tcPr>
-                </a:tc>
-                <a:tc>
-                  <a:txBody>
-                    <a:bodyPr/>
-                    <a:lstStyle/>
-                    <a:p>
-                      <a:pPr algn="l"/>
-                      <a:r>
-                        <a:rPr sz="1000" b="0">
-                          <a:solidFill>
-                            <a:srgbClr val="1D1B43"/>
-                          </a:solidFill>
-                          <a:latin typeface="Calibri"/>
-                        </a:rPr>
-                        <a:t>1</a:t>
-                      </a:r>
-                    </a:p>
-                  </a:txBody>
-                  <a:tcPr>
-                    <a:solidFill>
-                      <a:srgbClr val="FFFFFF"/>
-                    </a:solidFill>
-                  </a:tcPr>
-                </a:tc>
-                <a:tc>
-                  <a:txBody>
-                    <a:bodyPr/>
-                    <a:lstStyle/>
-                    <a:p>
-                      <a:pPr algn="l"/>
-                      <a:r>
-                        <a:rPr sz="1000" b="0">
-                          <a:solidFill>
-                            <a:srgbClr val="1D1B43"/>
-                          </a:solidFill>
-                          <a:latin typeface="Calibri"/>
-                        </a:rPr>
-                        <a:t>90.9%</a:t>
-                      </a:r>
-                    </a:p>
-                  </a:txBody>
-                  <a:tcPr>
-                    <a:solidFill>
-                      <a:srgbClr val="FFFFFF"/>
-                    </a:solidFill>
-                  </a:tcPr>
-                </a:tc>
-                <a:tc>
-                  <a:txBody>
-                    <a:bodyPr/>
-                    <a:lstStyle/>
-                    <a:p>
-                      <a:pPr algn="l"/>
-                      <a:r>
-                        <a:rPr sz="1000" b="0">
-                          <a:solidFill>
-                            <a:srgbClr val="1D1B43"/>
-                          </a:solidFill>
-                          <a:latin typeface="Calibri"/>
-                        </a:rPr>
-                        <a:t>Regular</a:t>
+                        <a:t>16</a:t>
+                      </a:r>
+                    </a:p>
+                  </a:txBody>
+                  <a:tcPr>
+                    <a:solidFill>
+                      <a:srgbClr val="FFFFFF"/>
+                    </a:solidFill>
+                  </a:tcPr>
+                </a:tc>
+                <a:tc>
+                  <a:txBody>
+                    <a:bodyPr/>
+                    <a:lstStyle/>
+                    <a:p>
+                      <a:pPr algn="l"/>
+                      <a:r>
+                        <a:rPr sz="1000" b="0">
+                          <a:solidFill>
+                            <a:srgbClr val="1D1B43"/>
+                          </a:solidFill>
+                          <a:latin typeface="Calibri"/>
+                        </a:rPr>
+                        <a:t>40.7%</a:t>
+                      </a:r>
+                    </a:p>
+                  </a:txBody>
+                  <a:tcPr>
+                    <a:solidFill>
+                      <a:srgbClr val="FFFFFF"/>
+                    </a:solidFill>
+                  </a:tcPr>
+                </a:tc>
+                <a:tc>
+                  <a:txBody>
+                    <a:bodyPr/>
+                    <a:lstStyle/>
+                    <a:p>
+                      <a:pPr algn="l"/>
+                      <a:r>
+                        <a:rPr sz="1000" b="0">
+                          <a:solidFill>
+                            <a:srgbClr val="1D1B43"/>
+                          </a:solidFill>
+                          <a:latin typeface="Calibri"/>
+                        </a:rPr>
+                        <a:t>Atencao</a:t>
                       </a:r>
                     </a:p>
                   </a:txBody>
@@ -9029,30 +8782,310 @@
                           </a:solidFill>
                           <a:latin typeface="Calibri"/>
                         </a:rPr>
-                        <a:t>1</a:t>
-                      </a:r>
-                    </a:p>
-                  </a:txBody>
-                  <a:tcPr>
-                    <a:solidFill>
-                      <a:srgbClr val="F2F2F2"/>
-                    </a:solidFill>
-                  </a:tcPr>
-                </a:tc>
-                <a:tc>
-                  <a:txBody>
-                    <a:bodyPr/>
-                    <a:lstStyle/>
-                    <a:p>
-                      <a:pPr algn="l"/>
-                      <a:r>
-                        <a:rPr sz="1000" b="0">
-                          <a:solidFill>
-                            <a:srgbClr val="1D1B43"/>
-                          </a:solidFill>
-                          <a:latin typeface="Calibri"/>
-                        </a:rPr>
-                        <a:t>1</a:t>
+                        <a:t>11</a:t>
+                      </a:r>
+                    </a:p>
+                  </a:txBody>
+                  <a:tcPr>
+                    <a:solidFill>
+                      <a:srgbClr val="F2F2F2"/>
+                    </a:solidFill>
+                  </a:tcPr>
+                </a:tc>
+                <a:tc>
+                  <a:txBody>
+                    <a:bodyPr/>
+                    <a:lstStyle/>
+                    <a:p>
+                      <a:pPr algn="l"/>
+                      <a:r>
+                        <a:rPr sz="1000" b="0">
+                          <a:solidFill>
+                            <a:srgbClr val="1D1B43"/>
+                          </a:solidFill>
+                          <a:latin typeface="Calibri"/>
+                        </a:rPr>
+                        <a:t>11</a:t>
+                      </a:r>
+                    </a:p>
+                  </a:txBody>
+                  <a:tcPr>
+                    <a:solidFill>
+                      <a:srgbClr val="F2F2F2"/>
+                    </a:solidFill>
+                  </a:tcPr>
+                </a:tc>
+                <a:tc>
+                  <a:txBody>
+                    <a:bodyPr/>
+                    <a:lstStyle/>
+                    <a:p>
+                      <a:pPr algn="l"/>
+                      <a:r>
+                        <a:rPr sz="1000" b="0">
+                          <a:solidFill>
+                            <a:srgbClr val="1D1B43"/>
+                          </a:solidFill>
+                          <a:latin typeface="Calibri"/>
+                        </a:rPr>
+                        <a:t>0</a:t>
+                      </a:r>
+                    </a:p>
+                  </a:txBody>
+                  <a:tcPr>
+                    <a:solidFill>
+                      <a:srgbClr val="F2F2F2"/>
+                    </a:solidFill>
+                  </a:tcPr>
+                </a:tc>
+                <a:tc>
+                  <a:txBody>
+                    <a:bodyPr/>
+                    <a:lstStyle/>
+                    <a:p>
+                      <a:pPr algn="l"/>
+                      <a:r>
+                        <a:rPr sz="1000" b="0">
+                          <a:solidFill>
+                            <a:srgbClr val="1D1B43"/>
+                          </a:solidFill>
+                          <a:latin typeface="Calibri"/>
+                        </a:rPr>
+                        <a:t>100.0%</a:t>
+                      </a:r>
+                    </a:p>
+                  </a:txBody>
+                  <a:tcPr>
+                    <a:solidFill>
+                      <a:srgbClr val="F2F2F2"/>
+                    </a:solidFill>
+                  </a:tcPr>
+                </a:tc>
+                <a:tc>
+                  <a:txBody>
+                    <a:bodyPr/>
+                    <a:lstStyle/>
+                    <a:p>
+                      <a:pPr algn="l"/>
+                      <a:r>
+                        <a:rPr sz="1000" b="0">
+                          <a:solidFill>
+                            <a:srgbClr val="1D1B43"/>
+                          </a:solidFill>
+                          <a:latin typeface="Calibri"/>
+                        </a:rPr>
+                        <a:t>Excelente</a:t>
+                      </a:r>
+                    </a:p>
+                  </a:txBody>
+                  <a:tcPr>
+                    <a:solidFill>
+                      <a:srgbClr val="F2F2F2"/>
+                    </a:solidFill>
+                  </a:tcPr>
+                </a:tc>
+              </a:tr>
+              <a:tr h="457200">
+                <a:tc>
+                  <a:txBody>
+                    <a:bodyPr/>
+                    <a:lstStyle/>
+                    <a:p>
+                      <a:pPr algn="l"/>
+                      <a:r>
+                        <a:rPr sz="1000" b="0">
+                          <a:solidFill>
+                            <a:srgbClr val="1D1B43"/>
+                          </a:solidFill>
+                          <a:latin typeface="Calibri"/>
+                        </a:rPr>
+                        <a:t>RJ</a:t>
+                      </a:r>
+                    </a:p>
+                  </a:txBody>
+                  <a:tcPr>
+                    <a:solidFill>
+                      <a:srgbClr val="FFFFFF"/>
+                    </a:solidFill>
+                  </a:tcPr>
+                </a:tc>
+                <a:tc>
+                  <a:txBody>
+                    <a:bodyPr/>
+                    <a:lstStyle/>
+                    <a:p>
+                      <a:pPr algn="l"/>
+                      <a:r>
+                        <a:rPr sz="1000" b="0">
+                          <a:solidFill>
+                            <a:srgbClr val="1D1B43"/>
+                          </a:solidFill>
+                          <a:latin typeface="Calibri"/>
+                        </a:rPr>
+                        <a:t>6</a:t>
+                      </a:r>
+                    </a:p>
+                  </a:txBody>
+                  <a:tcPr>
+                    <a:solidFill>
+                      <a:srgbClr val="FFFFFF"/>
+                    </a:solidFill>
+                  </a:tcPr>
+                </a:tc>
+                <a:tc>
+                  <a:txBody>
+                    <a:bodyPr/>
+                    <a:lstStyle/>
+                    <a:p>
+                      <a:pPr algn="l"/>
+                      <a:r>
+                        <a:rPr sz="1000" b="0">
+                          <a:solidFill>
+                            <a:srgbClr val="1D1B43"/>
+                          </a:solidFill>
+                          <a:latin typeface="Calibri"/>
+                        </a:rPr>
+                        <a:t>6</a:t>
+                      </a:r>
+                    </a:p>
+                  </a:txBody>
+                  <a:tcPr>
+                    <a:solidFill>
+                      <a:srgbClr val="FFFFFF"/>
+                    </a:solidFill>
+                  </a:tcPr>
+                </a:tc>
+                <a:tc>
+                  <a:txBody>
+                    <a:bodyPr/>
+                    <a:lstStyle/>
+                    <a:p>
+                      <a:pPr algn="l"/>
+                      <a:r>
+                        <a:rPr sz="1000" b="0">
+                          <a:solidFill>
+                            <a:srgbClr val="1D1B43"/>
+                          </a:solidFill>
+                          <a:latin typeface="Calibri"/>
+                        </a:rPr>
+                        <a:t>0</a:t>
+                      </a:r>
+                    </a:p>
+                  </a:txBody>
+                  <a:tcPr>
+                    <a:solidFill>
+                      <a:srgbClr val="FFFFFF"/>
+                    </a:solidFill>
+                  </a:tcPr>
+                </a:tc>
+                <a:tc>
+                  <a:txBody>
+                    <a:bodyPr/>
+                    <a:lstStyle/>
+                    <a:p>
+                      <a:pPr algn="l"/>
+                      <a:r>
+                        <a:rPr sz="1000" b="0">
+                          <a:solidFill>
+                            <a:srgbClr val="1D1B43"/>
+                          </a:solidFill>
+                          <a:latin typeface="Calibri"/>
+                        </a:rPr>
+                        <a:t>100.0%</a:t>
+                      </a:r>
+                    </a:p>
+                  </a:txBody>
+                  <a:tcPr>
+                    <a:solidFill>
+                      <a:srgbClr val="FFFFFF"/>
+                    </a:solidFill>
+                  </a:tcPr>
+                </a:tc>
+                <a:tc>
+                  <a:txBody>
+                    <a:bodyPr/>
+                    <a:lstStyle/>
+                    <a:p>
+                      <a:pPr algn="l"/>
+                      <a:r>
+                        <a:rPr sz="1000" b="0">
+                          <a:solidFill>
+                            <a:srgbClr val="1D1B43"/>
+                          </a:solidFill>
+                          <a:latin typeface="Calibri"/>
+                        </a:rPr>
+                        <a:t>Excelente</a:t>
+                      </a:r>
+                    </a:p>
+                  </a:txBody>
+                  <a:tcPr>
+                    <a:solidFill>
+                      <a:srgbClr val="FFFFFF"/>
+                    </a:solidFill>
+                  </a:tcPr>
+                </a:tc>
+              </a:tr>
+              <a:tr h="457200">
+                <a:tc>
+                  <a:txBody>
+                    <a:bodyPr/>
+                    <a:lstStyle/>
+                    <a:p>
+                      <a:pPr algn="l"/>
+                      <a:r>
+                        <a:rPr sz="1000" b="0">
+                          <a:solidFill>
+                            <a:srgbClr val="1D1B43"/>
+                          </a:solidFill>
+                          <a:latin typeface="Calibri"/>
+                        </a:rPr>
+                        <a:t>RS</a:t>
+                      </a:r>
+                    </a:p>
+                  </a:txBody>
+                  <a:tcPr>
+                    <a:solidFill>
+                      <a:srgbClr val="F2F2F2"/>
+                    </a:solidFill>
+                  </a:tcPr>
+                </a:tc>
+                <a:tc>
+                  <a:txBody>
+                    <a:bodyPr/>
+                    <a:lstStyle/>
+                    <a:p>
+                      <a:pPr algn="l"/>
+                      <a:r>
+                        <a:rPr sz="1000" b="0">
+                          <a:solidFill>
+                            <a:srgbClr val="1D1B43"/>
+                          </a:solidFill>
+                          <a:latin typeface="Calibri"/>
+                        </a:rPr>
+                        <a:t>2</a:t>
+                      </a:r>
+                    </a:p>
+                  </a:txBody>
+                  <a:tcPr>
+                    <a:solidFill>
+                      <a:srgbClr val="F2F2F2"/>
+                    </a:solidFill>
+                  </a:tcPr>
+                </a:tc>
+                <a:tc>
+                  <a:txBody>
+                    <a:bodyPr/>
+                    <a:lstStyle/>
+                    <a:p>
+                      <a:pPr algn="l"/>
+                      <a:r>
+                        <a:rPr sz="1000" b="0">
+                          <a:solidFill>
+                            <a:srgbClr val="1D1B43"/>
+                          </a:solidFill>
+                          <a:latin typeface="Calibri"/>
+                        </a:rPr>
+                        <a:t>2</a:t>
                       </a:r>
                     </a:p>
                   </a:txBody>
@@ -9216,7 +9249,7 @@
                 </a:solidFill>
                 <a:latin typeface="Calibri"/>
               </a:rPr>
-              <a:t>TOP DESTINATARIOS (170 pontos)</a:t>
+              <a:t>TOP DESTINATARIOS (200 pontos)</a:t>
             </a:r>
           </a:p>
         </p:txBody>
@@ -9491,53 +9524,53 @@
                           </a:solidFill>
                           <a:latin typeface="Calibri"/>
                         </a:rPr>
-                        <a:t>VERDEN COMERCIO DE C - SAO PAULO / SP</a:t>
-                      </a:r>
-                    </a:p>
-                  </a:txBody>
-                  <a:tcPr>
-                    <a:solidFill>
-                      <a:srgbClr val="FFFFFF"/>
-                    </a:solidFill>
-                  </a:tcPr>
-                </a:tc>
-                <a:tc>
-                  <a:txBody>
-                    <a:bodyPr/>
-                    <a:lstStyle/>
-                    <a:p>
-                      <a:pPr algn="l"/>
-                      <a:r>
-                        <a:rPr sz="1000" b="0">
-                          <a:solidFill>
-                            <a:srgbClr val="1D1B43"/>
-                          </a:solidFill>
-                          <a:latin typeface="Calibri"/>
-                        </a:rPr>
-                        <a:t>3</a:t>
-                      </a:r>
-                    </a:p>
-                  </a:txBody>
-                  <a:tcPr>
-                    <a:solidFill>
-                      <a:srgbClr val="FFFFFF"/>
-                    </a:solidFill>
-                  </a:tcPr>
-                </a:tc>
-                <a:tc>
-                  <a:txBody>
-                    <a:bodyPr/>
-                    <a:lstStyle/>
-                    <a:p>
-                      <a:pPr algn="l"/>
-                      <a:r>
-                        <a:rPr sz="1000" b="0">
-                          <a:solidFill>
-                            <a:srgbClr val="1D1B43"/>
-                          </a:solidFill>
-                          <a:latin typeface="Calibri"/>
-                        </a:rPr>
-                        <a:t>3</a:t>
+                        <a:t>DIOGO COMERCIO DE CA - SAO PAULO / SP</a:t>
+                      </a:r>
+                    </a:p>
+                  </a:txBody>
+                  <a:tcPr>
+                    <a:solidFill>
+                      <a:srgbClr val="FFFFFF"/>
+                    </a:solidFill>
+                  </a:tcPr>
+                </a:tc>
+                <a:tc>
+                  <a:txBody>
+                    <a:bodyPr/>
+                    <a:lstStyle/>
+                    <a:p>
+                      <a:pPr algn="l"/>
+                      <a:r>
+                        <a:rPr sz="1000" b="0">
+                          <a:solidFill>
+                            <a:srgbClr val="1D1B43"/>
+                          </a:solidFill>
+                          <a:latin typeface="Calibri"/>
+                        </a:rPr>
+                        <a:t>4</a:t>
+                      </a:r>
+                    </a:p>
+                  </a:txBody>
+                  <a:tcPr>
+                    <a:solidFill>
+                      <a:srgbClr val="FFFFFF"/>
+                    </a:solidFill>
+                  </a:tcPr>
+                </a:tc>
+                <a:tc>
+                  <a:txBody>
+                    <a:bodyPr/>
+                    <a:lstStyle/>
+                    <a:p>
+                      <a:pPr algn="l"/>
+                      <a:r>
+                        <a:rPr sz="1000" b="0">
+                          <a:solidFill>
+                            <a:srgbClr val="1D1B43"/>
+                          </a:solidFill>
+                          <a:latin typeface="Calibri"/>
+                        </a:rPr>
+                        <a:t>4</a:t>
                       </a:r>
                     </a:p>
                   </a:txBody>
@@ -9654,53 +9687,53 @@
                           </a:solidFill>
                           <a:latin typeface="Calibri"/>
                         </a:rPr>
-                        <a:t>F P MEDEIROS COMERCI - CACHOEIRO DE ITAPEMIRIM /</a:t>
-                      </a:r>
-                    </a:p>
-                  </a:txBody>
-                  <a:tcPr>
-                    <a:solidFill>
-                      <a:srgbClr val="F2F2F2"/>
-                    </a:solidFill>
-                  </a:tcPr>
-                </a:tc>
-                <a:tc>
-                  <a:txBody>
-                    <a:bodyPr/>
-                    <a:lstStyle/>
-                    <a:p>
-                      <a:pPr algn="l"/>
-                      <a:r>
-                        <a:rPr sz="1000" b="0">
-                          <a:solidFill>
-                            <a:srgbClr val="1D1B43"/>
-                          </a:solidFill>
-                          <a:latin typeface="Calibri"/>
-                        </a:rPr>
-                        <a:t>2</a:t>
-                      </a:r>
-                    </a:p>
-                  </a:txBody>
-                  <a:tcPr>
-                    <a:solidFill>
-                      <a:srgbClr val="F2F2F2"/>
-                    </a:solidFill>
-                  </a:tcPr>
-                </a:tc>
-                <a:tc>
-                  <a:txBody>
-                    <a:bodyPr/>
-                    <a:lstStyle/>
-                    <a:p>
-                      <a:pPr algn="l"/>
-                      <a:r>
-                        <a:rPr sz="1000" b="0">
-                          <a:solidFill>
-                            <a:srgbClr val="1D1B43"/>
-                          </a:solidFill>
-                          <a:latin typeface="Calibri"/>
-                        </a:rPr>
-                        <a:t>2</a:t>
+                        <a:t>UMEKITA SHOES EIRELI - CAMPINAS / SP</a:t>
+                      </a:r>
+                    </a:p>
+                  </a:txBody>
+                  <a:tcPr>
+                    <a:solidFill>
+                      <a:srgbClr val="F2F2F2"/>
+                    </a:solidFill>
+                  </a:tcPr>
+                </a:tc>
+                <a:tc>
+                  <a:txBody>
+                    <a:bodyPr/>
+                    <a:lstStyle/>
+                    <a:p>
+                      <a:pPr algn="l"/>
+                      <a:r>
+                        <a:rPr sz="1000" b="0">
+                          <a:solidFill>
+                            <a:srgbClr val="1D1B43"/>
+                          </a:solidFill>
+                          <a:latin typeface="Calibri"/>
+                        </a:rPr>
+                        <a:t>4</a:t>
+                      </a:r>
+                    </a:p>
+                  </a:txBody>
+                  <a:tcPr>
+                    <a:solidFill>
+                      <a:srgbClr val="F2F2F2"/>
+                    </a:solidFill>
+                  </a:tcPr>
+                </a:tc>
+                <a:tc>
+                  <a:txBody>
+                    <a:bodyPr/>
+                    <a:lstStyle/>
+                    <a:p>
+                      <a:pPr algn="l"/>
+                      <a:r>
+                        <a:rPr sz="1000" b="0">
+                          <a:solidFill>
+                            <a:srgbClr val="1D1B43"/>
+                          </a:solidFill>
+                          <a:latin typeface="Calibri"/>
+                        </a:rPr>
+                        <a:t>4</a:t>
                       </a:r>
                     </a:p>
                   </a:txBody>
@@ -9817,53 +9850,53 @@
                           </a:solidFill>
                           <a:latin typeface="Calibri"/>
                         </a:rPr>
-                        <a:t>ISABELA MARQUES BISP - PARAPUA / SP</a:t>
-                      </a:r>
-                    </a:p>
-                  </a:txBody>
-                  <a:tcPr>
-                    <a:solidFill>
-                      <a:srgbClr val="FFFFFF"/>
-                    </a:solidFill>
-                  </a:tcPr>
-                </a:tc>
-                <a:tc>
-                  <a:txBody>
-                    <a:bodyPr/>
-                    <a:lstStyle/>
-                    <a:p>
-                      <a:pPr algn="l"/>
-                      <a:r>
-                        <a:rPr sz="1000" b="0">
-                          <a:solidFill>
-                            <a:srgbClr val="1D1B43"/>
-                          </a:solidFill>
-                          <a:latin typeface="Calibri"/>
-                        </a:rPr>
-                        <a:t>2</a:t>
-                      </a:r>
-                    </a:p>
-                  </a:txBody>
-                  <a:tcPr>
-                    <a:solidFill>
-                      <a:srgbClr val="FFFFFF"/>
-                    </a:solidFill>
-                  </a:tcPr>
-                </a:tc>
-                <a:tc>
-                  <a:txBody>
-                    <a:bodyPr/>
-                    <a:lstStyle/>
-                    <a:p>
-                      <a:pPr algn="l"/>
-                      <a:r>
-                        <a:rPr sz="1000" b="0">
-                          <a:solidFill>
-                            <a:srgbClr val="1D1B43"/>
-                          </a:solidFill>
-                          <a:latin typeface="Calibri"/>
-                        </a:rPr>
-                        <a:t>2</a:t>
+                        <a:t>NATYLILLYS COMERCIO - SAO PAULO / SP</a:t>
+                      </a:r>
+                    </a:p>
+                  </a:txBody>
+                  <a:tcPr>
+                    <a:solidFill>
+                      <a:srgbClr val="FFFFFF"/>
+                    </a:solidFill>
+                  </a:tcPr>
+                </a:tc>
+                <a:tc>
+                  <a:txBody>
+                    <a:bodyPr/>
+                    <a:lstStyle/>
+                    <a:p>
+                      <a:pPr algn="l"/>
+                      <a:r>
+                        <a:rPr sz="1000" b="0">
+                          <a:solidFill>
+                            <a:srgbClr val="1D1B43"/>
+                          </a:solidFill>
+                          <a:latin typeface="Calibri"/>
+                        </a:rPr>
+                        <a:t>4</a:t>
+                      </a:r>
+                    </a:p>
+                  </a:txBody>
+                  <a:tcPr>
+                    <a:solidFill>
+                      <a:srgbClr val="FFFFFF"/>
+                    </a:solidFill>
+                  </a:tcPr>
+                </a:tc>
+                <a:tc>
+                  <a:txBody>
+                    <a:bodyPr/>
+                    <a:lstStyle/>
+                    <a:p>
+                      <a:pPr algn="l"/>
+                      <a:r>
+                        <a:rPr sz="1000" b="0">
+                          <a:solidFill>
+                            <a:srgbClr val="1D1B43"/>
+                          </a:solidFill>
+                          <a:latin typeface="Calibri"/>
+                        </a:rPr>
+                        <a:t>4</a:t>
                       </a:r>
                     </a:p>
                   </a:txBody>
@@ -9980,53 +10013,53 @@
                           </a:solidFill>
                           <a:latin typeface="Calibri"/>
                         </a:rPr>
-                        <a:t>VIPE COMERCIO DE CAL - CATANDUVA / SP</a:t>
-                      </a:r>
-                    </a:p>
-                  </a:txBody>
-                  <a:tcPr>
-                    <a:solidFill>
-                      <a:srgbClr val="F2F2F2"/>
-                    </a:solidFill>
-                  </a:tcPr>
-                </a:tc>
-                <a:tc>
-                  <a:txBody>
-                    <a:bodyPr/>
-                    <a:lstStyle/>
-                    <a:p>
-                      <a:pPr algn="l"/>
-                      <a:r>
-                        <a:rPr sz="1000" b="0">
-                          <a:solidFill>
-                            <a:srgbClr val="1D1B43"/>
-                          </a:solidFill>
-                          <a:latin typeface="Calibri"/>
-                        </a:rPr>
-                        <a:t>2</a:t>
-                      </a:r>
-                    </a:p>
-                  </a:txBody>
-                  <a:tcPr>
-                    <a:solidFill>
-                      <a:srgbClr val="F2F2F2"/>
-                    </a:solidFill>
-                  </a:tcPr>
-                </a:tc>
-                <a:tc>
-                  <a:txBody>
-                    <a:bodyPr/>
-                    <a:lstStyle/>
-                    <a:p>
-                      <a:pPr algn="l"/>
-                      <a:r>
-                        <a:rPr sz="1000" b="0">
-                          <a:solidFill>
-                            <a:srgbClr val="1D1B43"/>
-                          </a:solidFill>
-                          <a:latin typeface="Calibri"/>
-                        </a:rPr>
-                        <a:t>2</a:t>
+                        <a:t>BLP SAPATOS E BOLSAS - GUARULHOS / SP</a:t>
+                      </a:r>
+                    </a:p>
+                  </a:txBody>
+                  <a:tcPr>
+                    <a:solidFill>
+                      <a:srgbClr val="F2F2F2"/>
+                    </a:solidFill>
+                  </a:tcPr>
+                </a:tc>
+                <a:tc>
+                  <a:txBody>
+                    <a:bodyPr/>
+                    <a:lstStyle/>
+                    <a:p>
+                      <a:pPr algn="l"/>
+                      <a:r>
+                        <a:rPr sz="1000" b="0">
+                          <a:solidFill>
+                            <a:srgbClr val="1D1B43"/>
+                          </a:solidFill>
+                          <a:latin typeface="Calibri"/>
+                        </a:rPr>
+                        <a:t>3</a:t>
+                      </a:r>
+                    </a:p>
+                  </a:txBody>
+                  <a:tcPr>
+                    <a:solidFill>
+                      <a:srgbClr val="F2F2F2"/>
+                    </a:solidFill>
+                  </a:tcPr>
+                </a:tc>
+                <a:tc>
+                  <a:txBody>
+                    <a:bodyPr/>
+                    <a:lstStyle/>
+                    <a:p>
+                      <a:pPr algn="l"/>
+                      <a:r>
+                        <a:rPr sz="1000" b="0">
+                          <a:solidFill>
+                            <a:srgbClr val="1D1B43"/>
+                          </a:solidFill>
+                          <a:latin typeface="Calibri"/>
+                        </a:rPr>
+                        <a:t>3</a:t>
                       </a:r>
                     </a:p>
                   </a:txBody>
@@ -10143,122 +10176,122 @@
                           </a:solidFill>
                           <a:latin typeface="Calibri"/>
                         </a:rPr>
-                        <a:t>VITTI VITTI LTDA - E - RIO CLARO / SP</a:t>
-                      </a:r>
-                    </a:p>
-                  </a:txBody>
-                  <a:tcPr>
-                    <a:solidFill>
-                      <a:srgbClr val="FFFFFF"/>
-                    </a:solidFill>
-                  </a:tcPr>
-                </a:tc>
-                <a:tc>
-                  <a:txBody>
-                    <a:bodyPr/>
-                    <a:lstStyle/>
-                    <a:p>
-                      <a:pPr algn="l"/>
-                      <a:r>
-                        <a:rPr sz="1000" b="0">
-                          <a:solidFill>
-                            <a:srgbClr val="1D1B43"/>
-                          </a:solidFill>
-                          <a:latin typeface="Calibri"/>
-                        </a:rPr>
-                        <a:t>2</a:t>
-                      </a:r>
-                    </a:p>
-                  </a:txBody>
-                  <a:tcPr>
-                    <a:solidFill>
-                      <a:srgbClr val="FFFFFF"/>
-                    </a:solidFill>
-                  </a:tcPr>
-                </a:tc>
-                <a:tc>
-                  <a:txBody>
-                    <a:bodyPr/>
-                    <a:lstStyle/>
-                    <a:p>
-                      <a:pPr algn="l"/>
-                      <a:r>
-                        <a:rPr sz="1000" b="0">
-                          <a:solidFill>
-                            <a:srgbClr val="1D1B43"/>
-                          </a:solidFill>
-                          <a:latin typeface="Calibri"/>
-                        </a:rPr>
-                        <a:t>1</a:t>
-                      </a:r>
-                    </a:p>
-                  </a:txBody>
-                  <a:tcPr>
-                    <a:solidFill>
-                      <a:srgbClr val="FFFFFF"/>
-                    </a:solidFill>
-                  </a:tcPr>
-                </a:tc>
-                <a:tc>
-                  <a:txBody>
-                    <a:bodyPr/>
-                    <a:lstStyle/>
-                    <a:p>
-                      <a:pPr algn="l"/>
-                      <a:r>
-                        <a:rPr sz="1000" b="0">
-                          <a:solidFill>
-                            <a:srgbClr val="1D1B43"/>
-                          </a:solidFill>
-                          <a:latin typeface="Calibri"/>
-                        </a:rPr>
-                        <a:t>1</a:t>
-                      </a:r>
-                    </a:p>
-                  </a:txBody>
-                  <a:tcPr>
-                    <a:solidFill>
-                      <a:srgbClr val="FFFFFF"/>
-                    </a:solidFill>
-                  </a:tcPr>
-                </a:tc>
-                <a:tc>
-                  <a:txBody>
-                    <a:bodyPr/>
-                    <a:lstStyle/>
-                    <a:p>
-                      <a:pPr algn="l"/>
-                      <a:r>
-                        <a:rPr sz="1000" b="0">
-                          <a:solidFill>
-                            <a:srgbClr val="1D1B43"/>
-                          </a:solidFill>
-                          <a:latin typeface="Calibri"/>
-                        </a:rPr>
-                        <a:t>50.0%</a:t>
-                      </a:r>
-                    </a:p>
-                  </a:txBody>
-                  <a:tcPr>
-                    <a:solidFill>
-                      <a:srgbClr val="FFFFFF"/>
-                    </a:solidFill>
-                  </a:tcPr>
-                </a:tc>
-                <a:tc>
-                  <a:txBody>
-                    <a:bodyPr/>
-                    <a:lstStyle/>
-                    <a:p>
-                      <a:pPr algn="l"/>
-                      <a:r>
-                        <a:rPr sz="1000" b="0">
-                          <a:solidFill>
-                            <a:srgbClr val="1D1B43"/>
-                          </a:solidFill>
-                          <a:latin typeface="Calibri"/>
-                        </a:rPr>
-                        <a:t>Atencao</a:t>
+                        <a:t>APONTE COMERCIO DE C - SAO PAULO / SP</a:t>
+                      </a:r>
+                    </a:p>
+                  </a:txBody>
+                  <a:tcPr>
+                    <a:solidFill>
+                      <a:srgbClr val="FFFFFF"/>
+                    </a:solidFill>
+                  </a:tcPr>
+                </a:tc>
+                <a:tc>
+                  <a:txBody>
+                    <a:bodyPr/>
+                    <a:lstStyle/>
+                    <a:p>
+                      <a:pPr algn="l"/>
+                      <a:r>
+                        <a:rPr sz="1000" b="0">
+                          <a:solidFill>
+                            <a:srgbClr val="1D1B43"/>
+                          </a:solidFill>
+                          <a:latin typeface="Calibri"/>
+                        </a:rPr>
+                        <a:t>3</a:t>
+                      </a:r>
+                    </a:p>
+                  </a:txBody>
+                  <a:tcPr>
+                    <a:solidFill>
+                      <a:srgbClr val="FFFFFF"/>
+                    </a:solidFill>
+                  </a:tcPr>
+                </a:tc>
+                <a:tc>
+                  <a:txBody>
+                    <a:bodyPr/>
+                    <a:lstStyle/>
+                    <a:p>
+                      <a:pPr algn="l"/>
+                      <a:r>
+                        <a:rPr sz="1000" b="0">
+                          <a:solidFill>
+                            <a:srgbClr val="1D1B43"/>
+                          </a:solidFill>
+                          <a:latin typeface="Calibri"/>
+                        </a:rPr>
+                        <a:t>3</a:t>
+                      </a:r>
+                    </a:p>
+                  </a:txBody>
+                  <a:tcPr>
+                    <a:solidFill>
+                      <a:srgbClr val="FFFFFF"/>
+                    </a:solidFill>
+                  </a:tcPr>
+                </a:tc>
+                <a:tc>
+                  <a:txBody>
+                    <a:bodyPr/>
+                    <a:lstStyle/>
+                    <a:p>
+                      <a:pPr algn="l"/>
+                      <a:r>
+                        <a:rPr sz="1000" b="0">
+                          <a:solidFill>
+                            <a:srgbClr val="1D1B43"/>
+                          </a:solidFill>
+                          <a:latin typeface="Calibri"/>
+                        </a:rPr>
+                        <a:t>0</a:t>
+                      </a:r>
+                    </a:p>
+                  </a:txBody>
+                  <a:tcPr>
+                    <a:solidFill>
+                      <a:srgbClr val="FFFFFF"/>
+                    </a:solidFill>
+                  </a:tcPr>
+                </a:tc>
+                <a:tc>
+                  <a:txBody>
+                    <a:bodyPr/>
+                    <a:lstStyle/>
+                    <a:p>
+                      <a:pPr algn="l"/>
+                      <a:r>
+                        <a:rPr sz="1000" b="0">
+                          <a:solidFill>
+                            <a:srgbClr val="1D1B43"/>
+                          </a:solidFill>
+                          <a:latin typeface="Calibri"/>
+                        </a:rPr>
+                        <a:t>100.0%</a:t>
+                      </a:r>
+                    </a:p>
+                  </a:txBody>
+                  <a:tcPr>
+                    <a:solidFill>
+                      <a:srgbClr val="FFFFFF"/>
+                    </a:solidFill>
+                  </a:tcPr>
+                </a:tc>
+                <a:tc>
+                  <a:txBody>
+                    <a:bodyPr/>
+                    <a:lstStyle/>
+                    <a:p>
+                      <a:pPr algn="l"/>
+                      <a:r>
+                        <a:rPr sz="1000" b="0">
+                          <a:solidFill>
+                            <a:srgbClr val="1D1B43"/>
+                          </a:solidFill>
+                          <a:latin typeface="Calibri"/>
+                        </a:rPr>
+                        <a:t>Excelente</a:t>
                       </a:r>
                     </a:p>
                   </a:txBody>
@@ -10306,53 +10339,53 @@
                           </a:solidFill>
                           <a:latin typeface="Calibri"/>
                         </a:rPr>
-                        <a:t>59.187.128 CLAUDIANA - CARMOPOLIS DE MINAS / MG</a:t>
-                      </a:r>
-                    </a:p>
-                  </a:txBody>
-                  <a:tcPr>
-                    <a:solidFill>
-                      <a:srgbClr val="F2F2F2"/>
-                    </a:solidFill>
-                  </a:tcPr>
-                </a:tc>
-                <a:tc>
-                  <a:txBody>
-                    <a:bodyPr/>
-                    <a:lstStyle/>
-                    <a:p>
-                      <a:pPr algn="l"/>
-                      <a:r>
-                        <a:rPr sz="1000" b="0">
-                          <a:solidFill>
-                            <a:srgbClr val="1D1B43"/>
-                          </a:solidFill>
-                          <a:latin typeface="Calibri"/>
-                        </a:rPr>
-                        <a:t>1</a:t>
-                      </a:r>
-                    </a:p>
-                  </a:txBody>
-                  <a:tcPr>
-                    <a:solidFill>
-                      <a:srgbClr val="F2F2F2"/>
-                    </a:solidFill>
-                  </a:tcPr>
-                </a:tc>
-                <a:tc>
-                  <a:txBody>
-                    <a:bodyPr/>
-                    <a:lstStyle/>
-                    <a:p>
-                      <a:pPr algn="l"/>
-                      <a:r>
-                        <a:rPr sz="1000" b="0">
-                          <a:solidFill>
-                            <a:srgbClr val="1D1B43"/>
-                          </a:solidFill>
-                          <a:latin typeface="Calibri"/>
-                        </a:rPr>
-                        <a:t>1</a:t>
+                        <a:t>BM FASHION SHOES LTD - AMERICANA / SP</a:t>
+                      </a:r>
+                    </a:p>
+                  </a:txBody>
+                  <a:tcPr>
+                    <a:solidFill>
+                      <a:srgbClr val="F2F2F2"/>
+                    </a:solidFill>
+                  </a:tcPr>
+                </a:tc>
+                <a:tc>
+                  <a:txBody>
+                    <a:bodyPr/>
+                    <a:lstStyle/>
+                    <a:p>
+                      <a:pPr algn="l"/>
+                      <a:r>
+                        <a:rPr sz="1000" b="0">
+                          <a:solidFill>
+                            <a:srgbClr val="1D1B43"/>
+                          </a:solidFill>
+                          <a:latin typeface="Calibri"/>
+                        </a:rPr>
+                        <a:t>3</a:t>
+                      </a:r>
+                    </a:p>
+                  </a:txBody>
+                  <a:tcPr>
+                    <a:solidFill>
+                      <a:srgbClr val="F2F2F2"/>
+                    </a:solidFill>
+                  </a:tcPr>
+                </a:tc>
+                <a:tc>
+                  <a:txBody>
+                    <a:bodyPr/>
+                    <a:lstStyle/>
+                    <a:p>
+                      <a:pPr algn="l"/>
+                      <a:r>
+                        <a:rPr sz="1000" b="0">
+                          <a:solidFill>
+                            <a:srgbClr val="1D1B43"/>
+                          </a:solidFill>
+                          <a:latin typeface="Calibri"/>
+                        </a:rPr>
+                        <a:t>3</a:t>
                       </a:r>
                     </a:p>
                   </a:txBody>
@@ -10469,53 +10502,53 @@
                           </a:solidFill>
                           <a:latin typeface="Calibri"/>
                         </a:rPr>
-                        <a:t>34.061.313 FABIANA L - CAPIVARI / SP</a:t>
-                      </a:r>
-                    </a:p>
-                  </a:txBody>
-                  <a:tcPr>
-                    <a:solidFill>
-                      <a:srgbClr val="FFFFFF"/>
-                    </a:solidFill>
-                  </a:tcPr>
-                </a:tc>
-                <a:tc>
-                  <a:txBody>
-                    <a:bodyPr/>
-                    <a:lstStyle/>
-                    <a:p>
-                      <a:pPr algn="l"/>
-                      <a:r>
-                        <a:rPr sz="1000" b="0">
-                          <a:solidFill>
-                            <a:srgbClr val="1D1B43"/>
-                          </a:solidFill>
-                          <a:latin typeface="Calibri"/>
-                        </a:rPr>
-                        <a:t>1</a:t>
-                      </a:r>
-                    </a:p>
-                  </a:txBody>
-                  <a:tcPr>
-                    <a:solidFill>
-                      <a:srgbClr val="FFFFFF"/>
-                    </a:solidFill>
-                  </a:tcPr>
-                </a:tc>
-                <a:tc>
-                  <a:txBody>
-                    <a:bodyPr/>
-                    <a:lstStyle/>
-                    <a:p>
-                      <a:pPr algn="l"/>
-                      <a:r>
-                        <a:rPr sz="1000" b="0">
-                          <a:solidFill>
-                            <a:srgbClr val="1D1B43"/>
-                          </a:solidFill>
-                          <a:latin typeface="Calibri"/>
-                        </a:rPr>
-                        <a:t>1</a:t>
+                        <a:t>FENIX COMERCIO DE CA - PRAIA GRANDE / SP</a:t>
+                      </a:r>
+                    </a:p>
+                  </a:txBody>
+                  <a:tcPr>
+                    <a:solidFill>
+                      <a:srgbClr val="FFFFFF"/>
+                    </a:solidFill>
+                  </a:tcPr>
+                </a:tc>
+                <a:tc>
+                  <a:txBody>
+                    <a:bodyPr/>
+                    <a:lstStyle/>
+                    <a:p>
+                      <a:pPr algn="l"/>
+                      <a:r>
+                        <a:rPr sz="1000" b="0">
+                          <a:solidFill>
+                            <a:srgbClr val="1D1B43"/>
+                          </a:solidFill>
+                          <a:latin typeface="Calibri"/>
+                        </a:rPr>
+                        <a:t>3</a:t>
+                      </a:r>
+                    </a:p>
+                  </a:txBody>
+                  <a:tcPr>
+                    <a:solidFill>
+                      <a:srgbClr val="FFFFFF"/>
+                    </a:solidFill>
+                  </a:tcPr>
+                </a:tc>
+                <a:tc>
+                  <a:txBody>
+                    <a:bodyPr/>
+                    <a:lstStyle/>
+                    <a:p>
+                      <a:pPr algn="l"/>
+                      <a:r>
+                        <a:rPr sz="1000" b="0">
+                          <a:solidFill>
+                            <a:srgbClr val="1D1B43"/>
+                          </a:solidFill>
+                          <a:latin typeface="Calibri"/>
+                        </a:rPr>
+                        <a:t>3</a:t>
                       </a:r>
                     </a:p>
                   </a:txBody>
@@ -10632,53 +10665,53 @@
                           </a:solidFill>
                           <a:latin typeface="Calibri"/>
                         </a:rPr>
-                        <a:t>36.392.973 ANA JULLI - POMPEU / MG</a:t>
-                      </a:r>
-                    </a:p>
-                  </a:txBody>
-                  <a:tcPr>
-                    <a:solidFill>
-                      <a:srgbClr val="F2F2F2"/>
-                    </a:solidFill>
-                  </a:tcPr>
-                </a:tc>
-                <a:tc>
-                  <a:txBody>
-                    <a:bodyPr/>
-                    <a:lstStyle/>
-                    <a:p>
-                      <a:pPr algn="l"/>
-                      <a:r>
-                        <a:rPr sz="1000" b="0">
-                          <a:solidFill>
-                            <a:srgbClr val="1D1B43"/>
-                          </a:solidFill>
-                          <a:latin typeface="Calibri"/>
-                        </a:rPr>
-                        <a:t>1</a:t>
-                      </a:r>
-                    </a:p>
-                  </a:txBody>
-                  <a:tcPr>
-                    <a:solidFill>
-                      <a:srgbClr val="F2F2F2"/>
-                    </a:solidFill>
-                  </a:tcPr>
-                </a:tc>
-                <a:tc>
-                  <a:txBody>
-                    <a:bodyPr/>
-                    <a:lstStyle/>
-                    <a:p>
-                      <a:pPr algn="l"/>
-                      <a:r>
-                        <a:rPr sz="1000" b="0">
-                          <a:solidFill>
-                            <a:srgbClr val="1D1B43"/>
-                          </a:solidFill>
-                          <a:latin typeface="Calibri"/>
-                        </a:rPr>
-                        <a:t>1</a:t>
+                        <a:t>CV COMERCIO DE MODAS - BARUERI / SP</a:t>
+                      </a:r>
+                    </a:p>
+                  </a:txBody>
+                  <a:tcPr>
+                    <a:solidFill>
+                      <a:srgbClr val="F2F2F2"/>
+                    </a:solidFill>
+                  </a:tcPr>
+                </a:tc>
+                <a:tc>
+                  <a:txBody>
+                    <a:bodyPr/>
+                    <a:lstStyle/>
+                    <a:p>
+                      <a:pPr algn="l"/>
+                      <a:r>
+                        <a:rPr sz="1000" b="0">
+                          <a:solidFill>
+                            <a:srgbClr val="1D1B43"/>
+                          </a:solidFill>
+                          <a:latin typeface="Calibri"/>
+                        </a:rPr>
+                        <a:t>3</a:t>
+                      </a:r>
+                    </a:p>
+                  </a:txBody>
+                  <a:tcPr>
+                    <a:solidFill>
+                      <a:srgbClr val="F2F2F2"/>
+                    </a:solidFill>
+                  </a:tcPr>
+                </a:tc>
+                <a:tc>
+                  <a:txBody>
+                    <a:bodyPr/>
+                    <a:lstStyle/>
+                    <a:p>
+                      <a:pPr algn="l"/>
+                      <a:r>
+                        <a:rPr sz="1000" b="0">
+                          <a:solidFill>
+                            <a:srgbClr val="1D1B43"/>
+                          </a:solidFill>
+                          <a:latin typeface="Calibri"/>
+                        </a:rPr>
+                        <a:t>3</a:t>
                       </a:r>
                     </a:p>
                   </a:txBody>
@@ -10795,53 +10828,53 @@
                           </a:solidFill>
                           <a:latin typeface="Calibri"/>
                         </a:rPr>
-                        <a:t>13.635.986 DANISA FA - TEOFILO OTONI / MG</a:t>
-                      </a:r>
-                    </a:p>
-                  </a:txBody>
-                  <a:tcPr>
-                    <a:solidFill>
-                      <a:srgbClr val="FFFFFF"/>
-                    </a:solidFill>
-                  </a:tcPr>
-                </a:tc>
-                <a:tc>
-                  <a:txBody>
-                    <a:bodyPr/>
-                    <a:lstStyle/>
-                    <a:p>
-                      <a:pPr algn="l"/>
-                      <a:r>
-                        <a:rPr sz="1000" b="0">
-                          <a:solidFill>
-                            <a:srgbClr val="1D1B43"/>
-                          </a:solidFill>
-                          <a:latin typeface="Calibri"/>
-                        </a:rPr>
-                        <a:t>1</a:t>
-                      </a:r>
-                    </a:p>
-                  </a:txBody>
-                  <a:tcPr>
-                    <a:solidFill>
-                      <a:srgbClr val="FFFFFF"/>
-                    </a:solidFill>
-                  </a:tcPr>
-                </a:tc>
-                <a:tc>
-                  <a:txBody>
-                    <a:bodyPr/>
-                    <a:lstStyle/>
-                    <a:p>
-                      <a:pPr algn="l"/>
-                      <a:r>
-                        <a:rPr sz="1000" b="0">
-                          <a:solidFill>
-                            <a:srgbClr val="1D1B43"/>
-                          </a:solidFill>
-                          <a:latin typeface="Calibri"/>
-                        </a:rPr>
-                        <a:t>1</a:t>
+                        <a:t>LJV COMERCIO DE CALC - SAO PAULO / SP</a:t>
+                      </a:r>
+                    </a:p>
+                  </a:txBody>
+                  <a:tcPr>
+                    <a:solidFill>
+                      <a:srgbClr val="FFFFFF"/>
+                    </a:solidFill>
+                  </a:tcPr>
+                </a:tc>
+                <a:tc>
+                  <a:txBody>
+                    <a:bodyPr/>
+                    <a:lstStyle/>
+                    <a:p>
+                      <a:pPr algn="l"/>
+                      <a:r>
+                        <a:rPr sz="1000" b="0">
+                          <a:solidFill>
+                            <a:srgbClr val="1D1B43"/>
+                          </a:solidFill>
+                          <a:latin typeface="Calibri"/>
+                        </a:rPr>
+                        <a:t>3</a:t>
+                      </a:r>
+                    </a:p>
+                  </a:txBody>
+                  <a:tcPr>
+                    <a:solidFill>
+                      <a:srgbClr val="FFFFFF"/>
+                    </a:solidFill>
+                  </a:tcPr>
+                </a:tc>
+                <a:tc>
+                  <a:txBody>
+                    <a:bodyPr/>
+                    <a:lstStyle/>
+                    <a:p>
+                      <a:pPr algn="l"/>
+                      <a:r>
+                        <a:rPr sz="1000" b="0">
+                          <a:solidFill>
+                            <a:srgbClr val="1D1B43"/>
+                          </a:solidFill>
+                          <a:latin typeface="Calibri"/>
+                        </a:rPr>
+                        <a:t>3</a:t>
                       </a:r>
                     </a:p>
                   </a:txBody>
@@ -10958,53 +10991,53 @@
                           </a:solidFill>
                           <a:latin typeface="Calibri"/>
                         </a:rPr>
-                        <a:t>21.462.326 NADIELI B - SANTOPOLIS DO AGUAPEI / S</a:t>
-                      </a:r>
-                    </a:p>
-                  </a:txBody>
-                  <a:tcPr>
-                    <a:solidFill>
-                      <a:srgbClr val="F2F2F2"/>
-                    </a:solidFill>
-                  </a:tcPr>
-                </a:tc>
-                <a:tc>
-                  <a:txBody>
-                    <a:bodyPr/>
-                    <a:lstStyle/>
-                    <a:p>
-                      <a:pPr algn="l"/>
-                      <a:r>
-                        <a:rPr sz="1000" b="0">
-                          <a:solidFill>
-                            <a:srgbClr val="1D1B43"/>
-                          </a:solidFill>
-                          <a:latin typeface="Calibri"/>
-                        </a:rPr>
-                        <a:t>1</a:t>
-                      </a:r>
-                    </a:p>
-                  </a:txBody>
-                  <a:tcPr>
-                    <a:solidFill>
-                      <a:srgbClr val="F2F2F2"/>
-                    </a:solidFill>
-                  </a:tcPr>
-                </a:tc>
-                <a:tc>
-                  <a:txBody>
-                    <a:bodyPr/>
-                    <a:lstStyle/>
-                    <a:p>
-                      <a:pPr algn="l"/>
-                      <a:r>
-                        <a:rPr sz="1000" b="0">
-                          <a:solidFill>
-                            <a:srgbClr val="1D1B43"/>
-                          </a:solidFill>
-                          <a:latin typeface="Calibri"/>
-                        </a:rPr>
-                        <a:t>1</a:t>
+                        <a:t>MANZANO COMERCIO DE - SAO PAULO / SP</a:t>
+                      </a:r>
+                    </a:p>
+                  </a:txBody>
+                  <a:tcPr>
+                    <a:solidFill>
+                      <a:srgbClr val="F2F2F2"/>
+                    </a:solidFill>
+                  </a:tcPr>
+                </a:tc>
+                <a:tc>
+                  <a:txBody>
+                    <a:bodyPr/>
+                    <a:lstStyle/>
+                    <a:p>
+                      <a:pPr algn="l"/>
+                      <a:r>
+                        <a:rPr sz="1000" b="0">
+                          <a:solidFill>
+                            <a:srgbClr val="1D1B43"/>
+                          </a:solidFill>
+                          <a:latin typeface="Calibri"/>
+                        </a:rPr>
+                        <a:t>3</a:t>
+                      </a:r>
+                    </a:p>
+                  </a:txBody>
+                  <a:tcPr>
+                    <a:solidFill>
+                      <a:srgbClr val="F2F2F2"/>
+                    </a:solidFill>
+                  </a:tcPr>
+                </a:tc>
+                <a:tc>
+                  <a:txBody>
+                    <a:bodyPr/>
+                    <a:lstStyle/>
+                    <a:p>
+                      <a:pPr algn="l"/>
+                      <a:r>
+                        <a:rPr sz="1000" b="0">
+                          <a:solidFill>
+                            <a:srgbClr val="1D1B43"/>
+                          </a:solidFill>
+                          <a:latin typeface="Calibri"/>
+                        </a:rPr>
+                        <a:t>3</a:t>
                       </a:r>
                     </a:p>
                   </a:txBody>
@@ -11121,30 +11154,53 @@
                           </a:solidFill>
                           <a:latin typeface="Calibri"/>
                         </a:rPr>
-                        <a:t>ALINE APARECIDA ANDR - CRISTAIS / MG</a:t>
-                      </a:r>
-                    </a:p>
-                  </a:txBody>
-                  <a:tcPr>
-                    <a:solidFill>
-                      <a:srgbClr val="FFFFFF"/>
-                    </a:solidFill>
-                  </a:tcPr>
-                </a:tc>
-                <a:tc>
-                  <a:txBody>
-                    <a:bodyPr/>
-                    <a:lstStyle/>
-                    <a:p>
-                      <a:pPr algn="l"/>
-                      <a:r>
-                        <a:rPr sz="1000" b="0">
-                          <a:solidFill>
-                            <a:srgbClr val="1D1B43"/>
-                          </a:solidFill>
-                          <a:latin typeface="Calibri"/>
-                        </a:rPr>
-                        <a:t>1</a:t>
+                        <a:t>RIBEIRO &amp; FONSECA CO - CAMPINAS / SP</a:t>
+                      </a:r>
+                    </a:p>
+                  </a:txBody>
+                  <a:tcPr>
+                    <a:solidFill>
+                      <a:srgbClr val="FFFFFF"/>
+                    </a:solidFill>
+                  </a:tcPr>
+                </a:tc>
+                <a:tc>
+                  <a:txBody>
+                    <a:bodyPr/>
+                    <a:lstStyle/>
+                    <a:p>
+                      <a:pPr algn="l"/>
+                      <a:r>
+                        <a:rPr sz="1000" b="0">
+                          <a:solidFill>
+                            <a:srgbClr val="1D1B43"/>
+                          </a:solidFill>
+                          <a:latin typeface="Calibri"/>
+                        </a:rPr>
+                        <a:t>3</a:t>
+                      </a:r>
+                    </a:p>
+                  </a:txBody>
+                  <a:tcPr>
+                    <a:solidFill>
+                      <a:srgbClr val="FFFFFF"/>
+                    </a:solidFill>
+                  </a:tcPr>
+                </a:tc>
+                <a:tc>
+                  <a:txBody>
+                    <a:bodyPr/>
+                    <a:lstStyle/>
+                    <a:p>
+                      <a:pPr algn="l"/>
+                      <a:r>
+                        <a:rPr sz="1000" b="0">
+                          <a:solidFill>
+                            <a:srgbClr val="1D1B43"/>
+                          </a:solidFill>
+                          <a:latin typeface="Calibri"/>
+                        </a:rPr>
+                        <a:t>3</a:t>
                       </a:r>
                     </a:p>
                   </a:txBody>
@@ -11190,53 +11246,30 @@
                           </a:solidFill>
                           <a:latin typeface="Calibri"/>
                         </a:rPr>
-                        <a:t>1</a:t>
-                      </a:r>
-                    </a:p>
-                  </a:txBody>
-                  <a:tcPr>
-                    <a:solidFill>
-                      <a:srgbClr val="FFFFFF"/>
-                    </a:solidFill>
-                  </a:tcPr>
-                </a:tc>
-                <a:tc>
-                  <a:txBody>
-                    <a:bodyPr/>
-                    <a:lstStyle/>
-                    <a:p>
-                      <a:pPr algn="l"/>
-                      <a:r>
-                        <a:rPr sz="1000" b="0">
-                          <a:solidFill>
-                            <a:srgbClr val="1D1B43"/>
-                          </a:solidFill>
-                          <a:latin typeface="Calibri"/>
-                        </a:rPr>
-                        <a:t>0.0%</a:t>
-                      </a:r>
-                    </a:p>
-                  </a:txBody>
-                  <a:tcPr>
-                    <a:solidFill>
-                      <a:srgbClr val="FFFFFF"/>
-                    </a:solidFill>
-                  </a:tcPr>
-                </a:tc>
-                <a:tc>
-                  <a:txBody>
-                    <a:bodyPr/>
-                    <a:lstStyle/>
-                    <a:p>
-                      <a:pPr algn="l"/>
-                      <a:r>
-                        <a:rPr sz="1000" b="0">
-                          <a:solidFill>
-                            <a:srgbClr val="1D1B43"/>
-                          </a:solidFill>
-                          <a:latin typeface="Calibri"/>
-                        </a:rPr>
-                        <a:t>Atencao</a:t>
+                        <a:t>100.0%</a:t>
+                      </a:r>
+                    </a:p>
+                  </a:txBody>
+                  <a:tcPr>
+                    <a:solidFill>
+                      <a:srgbClr val="FFFFFF"/>
+                    </a:solidFill>
+                  </a:tcPr>
+                </a:tc>
+                <a:tc>
+                  <a:txBody>
+                    <a:bodyPr/>
+                    <a:lstStyle/>
+                    <a:p>
+                      <a:pPr algn="l"/>
+                      <a:r>
+                        <a:rPr sz="1000" b="0">
+                          <a:solidFill>
+                            <a:srgbClr val="1D1B43"/>
+                          </a:solidFill>
+                          <a:latin typeface="Calibri"/>
+                        </a:rPr>
+                        <a:t>Excelente</a:t>
                       </a:r>
                     </a:p>
                   </a:txBody>
@@ -11284,30 +11317,53 @@
                           </a:solidFill>
                           <a:latin typeface="Calibri"/>
                         </a:rPr>
-                        <a:t>AMMIRARE CALCADOS EI - JABOTICABAL / SP</a:t>
-                      </a:r>
-                    </a:p>
-                  </a:txBody>
-                  <a:tcPr>
-                    <a:solidFill>
-                      <a:srgbClr val="F2F2F2"/>
-                    </a:solidFill>
-                  </a:tcPr>
-                </a:tc>
-                <a:tc>
-                  <a:txBody>
-                    <a:bodyPr/>
-                    <a:lstStyle/>
-                    <a:p>
-                      <a:pPr algn="l"/>
-                      <a:r>
-                        <a:rPr sz="1000" b="0">
-                          <a:solidFill>
-                            <a:srgbClr val="1D1B43"/>
-                          </a:solidFill>
-                          <a:latin typeface="Calibri"/>
-                        </a:rPr>
-                        <a:t>1</a:t>
+                        <a:t>SALTO ELEGANTE CALCA - SAO PAULO / SP</a:t>
+                      </a:r>
+                    </a:p>
+                  </a:txBody>
+                  <a:tcPr>
+                    <a:solidFill>
+                      <a:srgbClr val="F2F2F2"/>
+                    </a:solidFill>
+                  </a:tcPr>
+                </a:tc>
+                <a:tc>
+                  <a:txBody>
+                    <a:bodyPr/>
+                    <a:lstStyle/>
+                    <a:p>
+                      <a:pPr algn="l"/>
+                      <a:r>
+                        <a:rPr sz="1000" b="0">
+                          <a:solidFill>
+                            <a:srgbClr val="1D1B43"/>
+                          </a:solidFill>
+                          <a:latin typeface="Calibri"/>
+                        </a:rPr>
+                        <a:t>3</a:t>
+                      </a:r>
+                    </a:p>
+                  </a:txBody>
+                  <a:tcPr>
+                    <a:solidFill>
+                      <a:srgbClr val="F2F2F2"/>
+                    </a:solidFill>
+                  </a:tcPr>
+                </a:tc>
+                <a:tc>
+                  <a:txBody>
+                    <a:bodyPr/>
+                    <a:lstStyle/>
+                    <a:p>
+                      <a:pPr algn="l"/>
+                      <a:r>
+                        <a:rPr sz="1000" b="0">
+                          <a:solidFill>
+                            <a:srgbClr val="1D1B43"/>
+                          </a:solidFill>
+                          <a:latin typeface="Calibri"/>
+                        </a:rPr>
+                        <a:t>3</a:t>
                       </a:r>
                     </a:p>
                   </a:txBody>
@@ -11353,53 +11409,30 @@
                           </a:solidFill>
                           <a:latin typeface="Calibri"/>
                         </a:rPr>
-                        <a:t>1</a:t>
-                      </a:r>
-                    </a:p>
-                  </a:txBody>
-                  <a:tcPr>
-                    <a:solidFill>
-                      <a:srgbClr val="F2F2F2"/>
-                    </a:solidFill>
-                  </a:tcPr>
-                </a:tc>
-                <a:tc>
-                  <a:txBody>
-                    <a:bodyPr/>
-                    <a:lstStyle/>
-                    <a:p>
-                      <a:pPr algn="l"/>
-                      <a:r>
-                        <a:rPr sz="1000" b="0">
-                          <a:solidFill>
-                            <a:srgbClr val="1D1B43"/>
-                          </a:solidFill>
-                          <a:latin typeface="Calibri"/>
-                        </a:rPr>
-                        <a:t>0.0%</a:t>
-                      </a:r>
-                    </a:p>
-                  </a:txBody>
-                  <a:tcPr>
-                    <a:solidFill>
-                      <a:srgbClr val="F2F2F2"/>
-                    </a:solidFill>
-                  </a:tcPr>
-                </a:tc>
-                <a:tc>
-                  <a:txBody>
-                    <a:bodyPr/>
-                    <a:lstStyle/>
-                    <a:p>
-                      <a:pPr algn="l"/>
-                      <a:r>
-                        <a:rPr sz="1000" b="0">
-                          <a:solidFill>
-                            <a:srgbClr val="1D1B43"/>
-                          </a:solidFill>
-                          <a:latin typeface="Calibri"/>
-                        </a:rPr>
-                        <a:t>Atencao</a:t>
+                        <a:t>100.0%</a:t>
+                      </a:r>
+                    </a:p>
+                  </a:txBody>
+                  <a:tcPr>
+                    <a:solidFill>
+                      <a:srgbClr val="F2F2F2"/>
+                    </a:solidFill>
+                  </a:tcPr>
+                </a:tc>
+                <a:tc>
+                  <a:txBody>
+                    <a:bodyPr/>
+                    <a:lstStyle/>
+                    <a:p>
+                      <a:pPr algn="l"/>
+                      <a:r>
+                        <a:rPr sz="1000" b="0">
+                          <a:solidFill>
+                            <a:srgbClr val="1D1B43"/>
+                          </a:solidFill>
+                          <a:latin typeface="Calibri"/>
+                        </a:rPr>
+                        <a:t>Excelente</a:t>
                       </a:r>
                     </a:p>
                   </a:txBody>
@@ -11447,30 +11480,53 @@
                           </a:solidFill>
                           <a:latin typeface="Calibri"/>
                         </a:rPr>
-                        <a:t>ANA CRISTINA GUIMARA - NOVA SERRANA / MG</a:t>
-                      </a:r>
-                    </a:p>
-                  </a:txBody>
-                  <a:tcPr>
-                    <a:solidFill>
-                      <a:srgbClr val="FFFFFF"/>
-                    </a:solidFill>
-                  </a:tcPr>
-                </a:tc>
-                <a:tc>
-                  <a:txBody>
-                    <a:bodyPr/>
-                    <a:lstStyle/>
-                    <a:p>
-                      <a:pPr algn="l"/>
-                      <a:r>
-                        <a:rPr sz="1000" b="0">
-                          <a:solidFill>
-                            <a:srgbClr val="1D1B43"/>
-                          </a:solidFill>
-                          <a:latin typeface="Calibri"/>
-                        </a:rPr>
-                        <a:t>1</a:t>
+                        <a:t>UNITTA COMERCIO DE C - SAO PAULO / SP</a:t>
+                      </a:r>
+                    </a:p>
+                  </a:txBody>
+                  <a:tcPr>
+                    <a:solidFill>
+                      <a:srgbClr val="FFFFFF"/>
+                    </a:solidFill>
+                  </a:tcPr>
+                </a:tc>
+                <a:tc>
+                  <a:txBody>
+                    <a:bodyPr/>
+                    <a:lstStyle/>
+                    <a:p>
+                      <a:pPr algn="l"/>
+                      <a:r>
+                        <a:rPr sz="1000" b="0">
+                          <a:solidFill>
+                            <a:srgbClr val="1D1B43"/>
+                          </a:solidFill>
+                          <a:latin typeface="Calibri"/>
+                        </a:rPr>
+                        <a:t>3</a:t>
+                      </a:r>
+                    </a:p>
+                  </a:txBody>
+                  <a:tcPr>
+                    <a:solidFill>
+                      <a:srgbClr val="FFFFFF"/>
+                    </a:solidFill>
+                  </a:tcPr>
+                </a:tc>
+                <a:tc>
+                  <a:txBody>
+                    <a:bodyPr/>
+                    <a:lstStyle/>
+                    <a:p>
+                      <a:pPr algn="l"/>
+                      <a:r>
+                        <a:rPr sz="1000" b="0">
+                          <a:solidFill>
+                            <a:srgbClr val="1D1B43"/>
+                          </a:solidFill>
+                          <a:latin typeface="Calibri"/>
+                        </a:rPr>
+                        <a:t>3</a:t>
                       </a:r>
                     </a:p>
                   </a:txBody>
@@ -11516,53 +11572,30 @@
                           </a:solidFill>
                           <a:latin typeface="Calibri"/>
                         </a:rPr>
-                        <a:t>1</a:t>
-                      </a:r>
-                    </a:p>
-                  </a:txBody>
-                  <a:tcPr>
-                    <a:solidFill>
-                      <a:srgbClr val="FFFFFF"/>
-                    </a:solidFill>
-                  </a:tcPr>
-                </a:tc>
-                <a:tc>
-                  <a:txBody>
-                    <a:bodyPr/>
-                    <a:lstStyle/>
-                    <a:p>
-                      <a:pPr algn="l"/>
-                      <a:r>
-                        <a:rPr sz="1000" b="0">
-                          <a:solidFill>
-                            <a:srgbClr val="1D1B43"/>
-                          </a:solidFill>
-                          <a:latin typeface="Calibri"/>
-                        </a:rPr>
-                        <a:t>0.0%</a:t>
-                      </a:r>
-                    </a:p>
-                  </a:txBody>
-                  <a:tcPr>
-                    <a:solidFill>
-                      <a:srgbClr val="FFFFFF"/>
-                    </a:solidFill>
-                  </a:tcPr>
-                </a:tc>
-                <a:tc>
-                  <a:txBody>
-                    <a:bodyPr/>
-                    <a:lstStyle/>
-                    <a:p>
-                      <a:pPr algn="l"/>
-                      <a:r>
-                        <a:rPr sz="1000" b="0">
-                          <a:solidFill>
-                            <a:srgbClr val="1D1B43"/>
-                          </a:solidFill>
-                          <a:latin typeface="Calibri"/>
-                        </a:rPr>
-                        <a:t>Atencao</a:t>
+                        <a:t>100.0%</a:t>
+                      </a:r>
+                    </a:p>
+                  </a:txBody>
+                  <a:tcPr>
+                    <a:solidFill>
+                      <a:srgbClr val="FFFFFF"/>
+                    </a:solidFill>
+                  </a:tcPr>
+                </a:tc>
+                <a:tc>
+                  <a:txBody>
+                    <a:bodyPr/>
+                    <a:lstStyle/>
+                    <a:p>
+                      <a:pPr algn="l"/>
+                      <a:r>
+                        <a:rPr sz="1000" b="0">
+                          <a:solidFill>
+                            <a:srgbClr val="1D1B43"/>
+                          </a:solidFill>
+                          <a:latin typeface="Calibri"/>
+                        </a:rPr>
+                        <a:t>Excelente</a:t>
                       </a:r>
                     </a:p>
                   </a:txBody>
@@ -11610,53 +11643,53 @@
                           </a:solidFill>
                           <a:latin typeface="Calibri"/>
                         </a:rPr>
-                        <a:t>ANA CRISTINA PAES 19 - ARACOIABA DA SERRA / SP</a:t>
-                      </a:r>
-                    </a:p>
-                  </a:txBody>
-                  <a:tcPr>
-                    <a:solidFill>
-                      <a:srgbClr val="F2F2F2"/>
-                    </a:solidFill>
-                  </a:tcPr>
-                </a:tc>
-                <a:tc>
-                  <a:txBody>
-                    <a:bodyPr/>
-                    <a:lstStyle/>
-                    <a:p>
-                      <a:pPr algn="l"/>
-                      <a:r>
-                        <a:rPr sz="1000" b="0">
-                          <a:solidFill>
-                            <a:srgbClr val="1D1B43"/>
-                          </a:solidFill>
-                          <a:latin typeface="Calibri"/>
-                        </a:rPr>
-                        <a:t>1</a:t>
-                      </a:r>
-                    </a:p>
-                  </a:txBody>
-                  <a:tcPr>
-                    <a:solidFill>
-                      <a:srgbClr val="F2F2F2"/>
-                    </a:solidFill>
-                  </a:tcPr>
-                </a:tc>
-                <a:tc>
-                  <a:txBody>
-                    <a:bodyPr/>
-                    <a:lstStyle/>
-                    <a:p>
-                      <a:pPr algn="l"/>
-                      <a:r>
-                        <a:rPr sz="1000" b="0">
-                          <a:solidFill>
-                            <a:srgbClr val="1D1B43"/>
-                          </a:solidFill>
-                          <a:latin typeface="Calibri"/>
-                        </a:rPr>
-                        <a:t>1</a:t>
+                        <a:t>VERONICA COMERCIAL C - JUNDIAI / SP</a:t>
+                      </a:r>
+                    </a:p>
+                  </a:txBody>
+                  <a:tcPr>
+                    <a:solidFill>
+                      <a:srgbClr val="F2F2F2"/>
+                    </a:solidFill>
+                  </a:tcPr>
+                </a:tc>
+                <a:tc>
+                  <a:txBody>
+                    <a:bodyPr/>
+                    <a:lstStyle/>
+                    <a:p>
+                      <a:pPr algn="l"/>
+                      <a:r>
+                        <a:rPr sz="1000" b="0">
+                          <a:solidFill>
+                            <a:srgbClr val="1D1B43"/>
+                          </a:solidFill>
+                          <a:latin typeface="Calibri"/>
+                        </a:rPr>
+                        <a:t>3</a:t>
+                      </a:r>
+                    </a:p>
+                  </a:txBody>
+                  <a:tcPr>
+                    <a:solidFill>
+                      <a:srgbClr val="F2F2F2"/>
+                    </a:solidFill>
+                  </a:tcPr>
+                </a:tc>
+                <a:tc>
+                  <a:txBody>
+                    <a:bodyPr/>
+                    <a:lstStyle/>
+                    <a:p>
+                      <a:pPr algn="l"/>
+                      <a:r>
+                        <a:rPr sz="1000" b="0">
+                          <a:solidFill>
+                            <a:srgbClr val="1D1B43"/>
+                          </a:solidFill>
+                          <a:latin typeface="Calibri"/>
+                        </a:rPr>
+                        <a:t>3</a:t>
                       </a:r>
                     </a:p>
                   </a:txBody>

--- a/SKO_COMERCIO_IMPORTACAO_E_EXP.pptx
+++ b/SKO_COMERCIO_IMPORTACAO_E_EXP.pptx
@@ -143,10 +143,13 @@
           </c:spPr>
           <c:cat>
             <c:strRef>
-              <c:f>Sheet1!$A$2:$A$2</c:f>
+              <c:f>Sheet1!$A$2:$A$3</c:f>
               <c:strCache>
-                <c:ptCount val="1"/>
+                <c:ptCount val="2"/>
                 <c:pt idx="0">
+                  <c:v>Maio 2026</c:v>
+                </c:pt>
+                <c:pt idx="1">
                   <c:v>Abril 2026</c:v>
                 </c:pt>
               </c:strCache>
@@ -154,11 +157,14 @@
           </c:cat>
           <c:val>
             <c:numRef>
-              <c:f>Sheet1!$B$2:$B$2</c:f>
+              <c:f>Sheet1!$B$2:$B$3</c:f>
               <c:numCache>
                 <c:formatCode>General</c:formatCode>
-                <c:ptCount val="1"/>
+                <c:ptCount val="2"/>
                 <c:pt idx="0">
+                  <c:v>108</c:v>
+                </c:pt>
+                <c:pt idx="1">
                   <c:v>246</c:v>
                 </c:pt>
               </c:numCache>
@@ -186,10 +192,13 @@
           </c:spPr>
           <c:cat>
             <c:strRef>
-              <c:f>Sheet1!$A$2:$A$2</c:f>
+              <c:f>Sheet1!$A$2:$A$3</c:f>
               <c:strCache>
-                <c:ptCount val="1"/>
+                <c:ptCount val="2"/>
                 <c:pt idx="0">
+                  <c:v>Maio 2026</c:v>
+                </c:pt>
+                <c:pt idx="1">
                   <c:v>Abril 2026</c:v>
                 </c:pt>
               </c:strCache>
@@ -197,11 +206,14 @@
           </c:cat>
           <c:val>
             <c:numRef>
-              <c:f>Sheet1!$C$2:$C$2</c:f>
+              <c:f>Sheet1!$C$2:$C$3</c:f>
               <c:numCache>
                 <c:formatCode>General</c:formatCode>
-                <c:ptCount val="1"/>
+                <c:ptCount val="2"/>
                 <c:pt idx="0">
+                  <c:v>24</c:v>
+                </c:pt>
+                <c:pt idx="1">
                   <c:v>23</c:v>
                 </c:pt>
               </c:numCache>
@@ -4142,7 +4154,7 @@
                           </a:solidFill>
                           <a:latin typeface="Calibri"/>
                         </a:rPr>
-                        <a:t>Marco 2026</a:t>
+                        <a:t>Maio 2026</a:t>
                       </a:r>
                     </a:p>
                   </a:txBody>
@@ -4236,7 +4248,7 @@
                           </a:solidFill>
                           <a:latin typeface="Calibri"/>
                         </a:rPr>
-                        <a:t>-</a:t>
+                        <a:t>132</a:t>
                       </a:r>
                     </a:p>
                   </a:txBody>
@@ -4282,7 +4294,7 @@
                           </a:solidFill>
                           <a:latin typeface="Calibri"/>
                         </a:rPr>
-                        <a:t>-</a:t>
+                        <a:t>+ 137</a:t>
                       </a:r>
                     </a:p>
                   </a:txBody>
@@ -4330,7 +4342,7 @@
                           </a:solidFill>
                           <a:latin typeface="Calibri"/>
                         </a:rPr>
-                        <a:t>-</a:t>
+                        <a:t>108</a:t>
                       </a:r>
                     </a:p>
                   </a:txBody>
@@ -4376,7 +4388,7 @@
                           </a:solidFill>
                           <a:latin typeface="Calibri"/>
                         </a:rPr>
-                        <a:t>-</a:t>
+                        <a:t>+ 138</a:t>
                       </a:r>
                     </a:p>
                   </a:txBody>
@@ -4424,7 +4436,7 @@
                           </a:solidFill>
                           <a:latin typeface="Calibri"/>
                         </a:rPr>
-                        <a:t>-</a:t>
+                        <a:t>24</a:t>
                       </a:r>
                     </a:p>
                   </a:txBody>
@@ -4470,7 +4482,7 @@
                           </a:solidFill>
                           <a:latin typeface="Calibri"/>
                         </a:rPr>
-                        <a:t>-</a:t>
+                        <a:t>- 1</a:t>
                       </a:r>
                     </a:p>
                   </a:txBody>
@@ -4518,7 +4530,7 @@
                           </a:solidFill>
                           <a:latin typeface="Calibri"/>
                         </a:rPr>
-                        <a:t>-</a:t>
+                        <a:t>81.8%</a:t>
                       </a:r>
                     </a:p>
                   </a:txBody>
@@ -4564,7 +4576,7 @@
                           </a:solidFill>
                           <a:latin typeface="Calibri"/>
                         </a:rPr>
-                        <a:t>-</a:t>
+                        <a:t>+ 9.6pp</a:t>
                       </a:r>
                     </a:p>
                   </a:txBody>
@@ -4735,7 +4747,7 @@
         </p:nvGraphicFramePr>
         <p:xfrm>
           <a:off x="7955279" y="2286000"/>
-          <a:ext cx="4480560" cy="877824"/>
+          <a:ext cx="4480560" cy="1316736"/>
         </p:xfrm>
         <a:graphic>
           <a:graphicData uri="http://schemas.openxmlformats.org/drawingml/2006/table">
@@ -4881,13 +4893,130 @@
                           </a:solidFill>
                           <a:latin typeface="Calibri"/>
                         </a:rPr>
+                        <a:t>Maio 2026</a:t>
+                      </a:r>
+                    </a:p>
+                  </a:txBody>
+                  <a:tcPr>
+                    <a:solidFill>
+                      <a:srgbClr val="FFFFFF"/>
+                    </a:solidFill>
+                  </a:tcPr>
+                </a:tc>
+                <a:tc>
+                  <a:txBody>
+                    <a:bodyPr/>
+                    <a:lstStyle/>
+                    <a:p>
+                      <a:pPr algn="l"/>
+                      <a:r>
+                        <a:rPr sz="1000" b="0">
+                          <a:solidFill>
+                            <a:srgbClr val="1D1B43"/>
+                          </a:solidFill>
+                          <a:latin typeface="Calibri"/>
+                        </a:rPr>
+                        <a:t>132</a:t>
+                      </a:r>
+                    </a:p>
+                  </a:txBody>
+                  <a:tcPr>
+                    <a:solidFill>
+                      <a:srgbClr val="FFFFFF"/>
+                    </a:solidFill>
+                  </a:tcPr>
+                </a:tc>
+                <a:tc>
+                  <a:txBody>
+                    <a:bodyPr/>
+                    <a:lstStyle/>
+                    <a:p>
+                      <a:pPr algn="l"/>
+                      <a:r>
+                        <a:rPr sz="1000" b="0">
+                          <a:solidFill>
+                            <a:srgbClr val="1D1B43"/>
+                          </a:solidFill>
+                          <a:latin typeface="Calibri"/>
+                        </a:rPr>
+                        <a:t>108</a:t>
+                      </a:r>
+                    </a:p>
+                  </a:txBody>
+                  <a:tcPr>
+                    <a:solidFill>
+                      <a:srgbClr val="FFFFFF"/>
+                    </a:solidFill>
+                  </a:tcPr>
+                </a:tc>
+                <a:tc>
+                  <a:txBody>
+                    <a:bodyPr/>
+                    <a:lstStyle/>
+                    <a:p>
+                      <a:pPr algn="l"/>
+                      <a:r>
+                        <a:rPr sz="1000" b="0">
+                          <a:solidFill>
+                            <a:srgbClr val="1D1B43"/>
+                          </a:solidFill>
+                          <a:latin typeface="Calibri"/>
+                        </a:rPr>
+                        <a:t>24</a:t>
+                      </a:r>
+                    </a:p>
+                  </a:txBody>
+                  <a:tcPr>
+                    <a:solidFill>
+                      <a:srgbClr val="FFFFFF"/>
+                    </a:solidFill>
+                  </a:tcPr>
+                </a:tc>
+                <a:tc>
+                  <a:txBody>
+                    <a:bodyPr/>
+                    <a:lstStyle/>
+                    <a:p>
+                      <a:pPr algn="l"/>
+                      <a:r>
+                        <a:rPr sz="1000" b="0">
+                          <a:solidFill>
+                            <a:srgbClr val="1D1B43"/>
+                          </a:solidFill>
+                          <a:latin typeface="Calibri"/>
+                        </a:rPr>
+                        <a:t>81.8%</a:t>
+                      </a:r>
+                    </a:p>
+                  </a:txBody>
+                  <a:tcPr>
+                    <a:solidFill>
+                      <a:srgbClr val="FFFFFF"/>
+                    </a:solidFill>
+                  </a:tcPr>
+                </a:tc>
+              </a:tr>
+              <a:tr h="438912">
+                <a:tc>
+                  <a:txBody>
+                    <a:bodyPr/>
+                    <a:lstStyle/>
+                    <a:p>
+                      <a:pPr algn="l"/>
+                      <a:r>
+                        <a:rPr sz="1000" b="0">
+                          <a:solidFill>
+                            <a:srgbClr val="1D1B43"/>
+                          </a:solidFill>
+                          <a:latin typeface="Calibri"/>
+                        </a:rPr>
                         <a:t>Abril 2026</a:t>
                       </a:r>
                     </a:p>
                   </a:txBody>
                   <a:tcPr>
                     <a:solidFill>
-                      <a:srgbClr val="FFFFFF"/>
+                      <a:srgbClr val="F2F2F2"/>
                     </a:solidFill>
                   </a:tcPr>
                 </a:tc>
@@ -4910,7 +5039,7 @@
                   </a:txBody>
                   <a:tcPr>
                     <a:solidFill>
-                      <a:srgbClr val="FFFFFF"/>
+                      <a:srgbClr val="F2F2F2"/>
                     </a:solidFill>
                   </a:tcPr>
                 </a:tc>
@@ -4933,7 +5062,7 @@
                   </a:txBody>
                   <a:tcPr>
                     <a:solidFill>
-                      <a:srgbClr val="FFFFFF"/>
+                      <a:srgbClr val="F2F2F2"/>
                     </a:solidFill>
                   </a:tcPr>
                 </a:tc>
@@ -4956,7 +5085,7 @@
                   </a:txBody>
                   <a:tcPr>
                     <a:solidFill>
-                      <a:srgbClr val="FFFFFF"/>
+                      <a:srgbClr val="F2F2F2"/>
                     </a:solidFill>
                   </a:tcPr>
                 </a:tc>
@@ -4979,7 +5108,7 @@
                   </a:txBody>
                   <a:tcPr>
                     <a:solidFill>
-                      <a:srgbClr val="FFFFFF"/>
+                      <a:srgbClr val="F2F2F2"/>
                     </a:solidFill>
                   </a:tcPr>
                 </a:tc>

--- a/SKO_COMERCIO_IMPORTACAO_E_EXP.pptx
+++ b/SKO_COMERCIO_IMPORTACAO_E_EXP.pptx
@@ -162,10 +162,10 @@
                 <c:formatCode>General</c:formatCode>
                 <c:ptCount val="2"/>
                 <c:pt idx="0">
-                  <c:v>108</c:v>
+                  <c:v>113</c:v>
                 </c:pt>
                 <c:pt idx="1">
-                  <c:v>246</c:v>
+                  <c:v>247</c:v>
                 </c:pt>
               </c:numCache>
             </c:numRef>
@@ -211,10 +211,10 @@
                 <c:formatCode>General</c:formatCode>
                 <c:ptCount val="2"/>
                 <c:pt idx="0">
-                  <c:v>24</c:v>
+                  <c:v>23</c:v>
                 </c:pt>
                 <c:pt idx="1">
-                  <c:v>23</c:v>
+                  <c:v>22</c:v>
                 </c:pt>
               </c:numCache>
             </c:numRef>
@@ -3823,7 +3823,7 @@
                 </a:solidFill>
                 <a:latin typeface="Calibri"/>
               </a:rPr>
-              <a:t>246</a:t>
+              <a:t>247</a:t>
             </a:r>
           </a:p>
         </p:txBody>
@@ -3938,7 +3938,7 @@
                 </a:solidFill>
                 <a:latin typeface="Calibri"/>
               </a:rPr>
-              <a:t>23</a:t>
+              <a:t>22</a:t>
             </a:r>
           </a:p>
         </p:txBody>
@@ -4053,7 +4053,7 @@
                 </a:solidFill>
                 <a:latin typeface="Calibri"/>
               </a:rPr>
-              <a:t>91.4%</a:t>
+              <a:t>91.8%</a:t>
             </a:r>
           </a:p>
         </p:txBody>
@@ -4248,7 +4248,7 @@
                           </a:solidFill>
                           <a:latin typeface="Calibri"/>
                         </a:rPr>
-                        <a:t>132</a:t>
+                        <a:t>136</a:t>
                       </a:r>
                     </a:p>
                   </a:txBody>
@@ -4294,7 +4294,7 @@
                           </a:solidFill>
                           <a:latin typeface="Calibri"/>
                         </a:rPr>
-                        <a:t>+ 137</a:t>
+                        <a:t>+ 133</a:t>
                       </a:r>
                     </a:p>
                   </a:txBody>
@@ -4342,53 +4342,53 @@
                           </a:solidFill>
                           <a:latin typeface="Calibri"/>
                         </a:rPr>
-                        <a:t>108</a:t>
-                      </a:r>
-                    </a:p>
-                  </a:txBody>
-                  <a:tcPr>
-                    <a:solidFill>
-                      <a:srgbClr val="F2F2F2"/>
-                    </a:solidFill>
-                  </a:tcPr>
-                </a:tc>
-                <a:tc>
-                  <a:txBody>
-                    <a:bodyPr/>
-                    <a:lstStyle/>
-                    <a:p>
-                      <a:pPr algn="l"/>
-                      <a:r>
-                        <a:rPr sz="1000" b="0">
-                          <a:solidFill>
-                            <a:srgbClr val="1D1B43"/>
-                          </a:solidFill>
-                          <a:latin typeface="Calibri"/>
-                        </a:rPr>
-                        <a:t>246</a:t>
-                      </a:r>
-                    </a:p>
-                  </a:txBody>
-                  <a:tcPr>
-                    <a:solidFill>
-                      <a:srgbClr val="F2F2F2"/>
-                    </a:solidFill>
-                  </a:tcPr>
-                </a:tc>
-                <a:tc>
-                  <a:txBody>
-                    <a:bodyPr/>
-                    <a:lstStyle/>
-                    <a:p>
-                      <a:pPr algn="l"/>
-                      <a:r>
-                        <a:rPr sz="1000" b="0">
-                          <a:solidFill>
-                            <a:srgbClr val="1D1B43"/>
-                          </a:solidFill>
-                          <a:latin typeface="Calibri"/>
-                        </a:rPr>
-                        <a:t>+ 138</a:t>
+                        <a:t>113</a:t>
+                      </a:r>
+                    </a:p>
+                  </a:txBody>
+                  <a:tcPr>
+                    <a:solidFill>
+                      <a:srgbClr val="F2F2F2"/>
+                    </a:solidFill>
+                  </a:tcPr>
+                </a:tc>
+                <a:tc>
+                  <a:txBody>
+                    <a:bodyPr/>
+                    <a:lstStyle/>
+                    <a:p>
+                      <a:pPr algn="l"/>
+                      <a:r>
+                        <a:rPr sz="1000" b="0">
+                          <a:solidFill>
+                            <a:srgbClr val="1D1B43"/>
+                          </a:solidFill>
+                          <a:latin typeface="Calibri"/>
+                        </a:rPr>
+                        <a:t>247</a:t>
+                      </a:r>
+                    </a:p>
+                  </a:txBody>
+                  <a:tcPr>
+                    <a:solidFill>
+                      <a:srgbClr val="F2F2F2"/>
+                    </a:solidFill>
+                  </a:tcPr>
+                </a:tc>
+                <a:tc>
+                  <a:txBody>
+                    <a:bodyPr/>
+                    <a:lstStyle/>
+                    <a:p>
+                      <a:pPr algn="l"/>
+                      <a:r>
+                        <a:rPr sz="1000" b="0">
+                          <a:solidFill>
+                            <a:srgbClr val="1D1B43"/>
+                          </a:solidFill>
+                          <a:latin typeface="Calibri"/>
+                        </a:rPr>
+                        <a:t>+ 134</a:t>
                       </a:r>
                     </a:p>
                   </a:txBody>
@@ -4436,30 +4436,30 @@
                           </a:solidFill>
                           <a:latin typeface="Calibri"/>
                         </a:rPr>
-                        <a:t>24</a:t>
-                      </a:r>
-                    </a:p>
-                  </a:txBody>
-                  <a:tcPr>
-                    <a:solidFill>
-                      <a:srgbClr val="FFFFFF"/>
-                    </a:solidFill>
-                  </a:tcPr>
-                </a:tc>
-                <a:tc>
-                  <a:txBody>
-                    <a:bodyPr/>
-                    <a:lstStyle/>
-                    <a:p>
-                      <a:pPr algn="l"/>
-                      <a:r>
-                        <a:rPr sz="1000" b="0">
-                          <a:solidFill>
-                            <a:srgbClr val="1D1B43"/>
-                          </a:solidFill>
-                          <a:latin typeface="Calibri"/>
-                        </a:rPr>
                         <a:t>23</a:t>
+                      </a:r>
+                    </a:p>
+                  </a:txBody>
+                  <a:tcPr>
+                    <a:solidFill>
+                      <a:srgbClr val="FFFFFF"/>
+                    </a:solidFill>
+                  </a:tcPr>
+                </a:tc>
+                <a:tc>
+                  <a:txBody>
+                    <a:bodyPr/>
+                    <a:lstStyle/>
+                    <a:p>
+                      <a:pPr algn="l"/>
+                      <a:r>
+                        <a:rPr sz="1000" b="0">
+                          <a:solidFill>
+                            <a:srgbClr val="1D1B43"/>
+                          </a:solidFill>
+                          <a:latin typeface="Calibri"/>
+                        </a:rPr>
+                        <a:t>22</a:t>
                       </a:r>
                     </a:p>
                   </a:txBody>
@@ -4530,53 +4530,53 @@
                           </a:solidFill>
                           <a:latin typeface="Calibri"/>
                         </a:rPr>
-                        <a:t>81.8%</a:t>
-                      </a:r>
-                    </a:p>
-                  </a:txBody>
-                  <a:tcPr>
-                    <a:solidFill>
-                      <a:srgbClr val="F2F2F2"/>
-                    </a:solidFill>
-                  </a:tcPr>
-                </a:tc>
-                <a:tc>
-                  <a:txBody>
-                    <a:bodyPr/>
-                    <a:lstStyle/>
-                    <a:p>
-                      <a:pPr algn="l"/>
-                      <a:r>
-                        <a:rPr sz="1000" b="0">
-                          <a:solidFill>
-                            <a:srgbClr val="1D1B43"/>
-                          </a:solidFill>
-                          <a:latin typeface="Calibri"/>
-                        </a:rPr>
-                        <a:t>91.4%</a:t>
-                      </a:r>
-                    </a:p>
-                  </a:txBody>
-                  <a:tcPr>
-                    <a:solidFill>
-                      <a:srgbClr val="F2F2F2"/>
-                    </a:solidFill>
-                  </a:tcPr>
-                </a:tc>
-                <a:tc>
-                  <a:txBody>
-                    <a:bodyPr/>
-                    <a:lstStyle/>
-                    <a:p>
-                      <a:pPr algn="l"/>
-                      <a:r>
-                        <a:rPr sz="1000" b="0">
-                          <a:solidFill>
-                            <a:srgbClr val="1D1B43"/>
-                          </a:solidFill>
-                          <a:latin typeface="Calibri"/>
-                        </a:rPr>
-                        <a:t>+ 9.6pp</a:t>
+                        <a:t>83.1%</a:t>
+                      </a:r>
+                    </a:p>
+                  </a:txBody>
+                  <a:tcPr>
+                    <a:solidFill>
+                      <a:srgbClr val="F2F2F2"/>
+                    </a:solidFill>
+                  </a:tcPr>
+                </a:tc>
+                <a:tc>
+                  <a:txBody>
+                    <a:bodyPr/>
+                    <a:lstStyle/>
+                    <a:p>
+                      <a:pPr algn="l"/>
+                      <a:r>
+                        <a:rPr sz="1000" b="0">
+                          <a:solidFill>
+                            <a:srgbClr val="1D1B43"/>
+                          </a:solidFill>
+                          <a:latin typeface="Calibri"/>
+                        </a:rPr>
+                        <a:t>91.8%</a:t>
+                      </a:r>
+                    </a:p>
+                  </a:txBody>
+                  <a:tcPr>
+                    <a:solidFill>
+                      <a:srgbClr val="F2F2F2"/>
+                    </a:solidFill>
+                  </a:tcPr>
+                </a:tc>
+                <a:tc>
+                  <a:txBody>
+                    <a:bodyPr/>
+                    <a:lstStyle/>
+                    <a:p>
+                      <a:pPr algn="l"/>
+                      <a:r>
+                        <a:rPr sz="1000" b="0">
+                          <a:solidFill>
+                            <a:srgbClr val="1D1B43"/>
+                          </a:solidFill>
+                          <a:latin typeface="Calibri"/>
+                        </a:rPr>
+                        <a:t>+ 8.7pp</a:t>
                       </a:r>
                     </a:p>
                   </a:txBody>
@@ -4916,76 +4916,76 @@
                           </a:solidFill>
                           <a:latin typeface="Calibri"/>
                         </a:rPr>
-                        <a:t>132</a:t>
-                      </a:r>
-                    </a:p>
-                  </a:txBody>
-                  <a:tcPr>
-                    <a:solidFill>
-                      <a:srgbClr val="FFFFFF"/>
-                    </a:solidFill>
-                  </a:tcPr>
-                </a:tc>
-                <a:tc>
-                  <a:txBody>
-                    <a:bodyPr/>
-                    <a:lstStyle/>
-                    <a:p>
-                      <a:pPr algn="l"/>
-                      <a:r>
-                        <a:rPr sz="1000" b="0">
-                          <a:solidFill>
-                            <a:srgbClr val="1D1B43"/>
-                          </a:solidFill>
-                          <a:latin typeface="Calibri"/>
-                        </a:rPr>
-                        <a:t>108</a:t>
-                      </a:r>
-                    </a:p>
-                  </a:txBody>
-                  <a:tcPr>
-                    <a:solidFill>
-                      <a:srgbClr val="FFFFFF"/>
-                    </a:solidFill>
-                  </a:tcPr>
-                </a:tc>
-                <a:tc>
-                  <a:txBody>
-                    <a:bodyPr/>
-                    <a:lstStyle/>
-                    <a:p>
-                      <a:pPr algn="l"/>
-                      <a:r>
-                        <a:rPr sz="1000" b="0">
-                          <a:solidFill>
-                            <a:srgbClr val="1D1B43"/>
-                          </a:solidFill>
-                          <a:latin typeface="Calibri"/>
-                        </a:rPr>
-                        <a:t>24</a:t>
-                      </a:r>
-                    </a:p>
-                  </a:txBody>
-                  <a:tcPr>
-                    <a:solidFill>
-                      <a:srgbClr val="FFFFFF"/>
-                    </a:solidFill>
-                  </a:tcPr>
-                </a:tc>
-                <a:tc>
-                  <a:txBody>
-                    <a:bodyPr/>
-                    <a:lstStyle/>
-                    <a:p>
-                      <a:pPr algn="l"/>
-                      <a:r>
-                        <a:rPr sz="1000" b="0">
-                          <a:solidFill>
-                            <a:srgbClr val="1D1B43"/>
-                          </a:solidFill>
-                          <a:latin typeface="Calibri"/>
-                        </a:rPr>
-                        <a:t>81.8%</a:t>
+                        <a:t>136</a:t>
+                      </a:r>
+                    </a:p>
+                  </a:txBody>
+                  <a:tcPr>
+                    <a:solidFill>
+                      <a:srgbClr val="FFFFFF"/>
+                    </a:solidFill>
+                  </a:tcPr>
+                </a:tc>
+                <a:tc>
+                  <a:txBody>
+                    <a:bodyPr/>
+                    <a:lstStyle/>
+                    <a:p>
+                      <a:pPr algn="l"/>
+                      <a:r>
+                        <a:rPr sz="1000" b="0">
+                          <a:solidFill>
+                            <a:srgbClr val="1D1B43"/>
+                          </a:solidFill>
+                          <a:latin typeface="Calibri"/>
+                        </a:rPr>
+                        <a:t>113</a:t>
+                      </a:r>
+                    </a:p>
+                  </a:txBody>
+                  <a:tcPr>
+                    <a:solidFill>
+                      <a:srgbClr val="FFFFFF"/>
+                    </a:solidFill>
+                  </a:tcPr>
+                </a:tc>
+                <a:tc>
+                  <a:txBody>
+                    <a:bodyPr/>
+                    <a:lstStyle/>
+                    <a:p>
+                      <a:pPr algn="l"/>
+                      <a:r>
+                        <a:rPr sz="1000" b="0">
+                          <a:solidFill>
+                            <a:srgbClr val="1D1B43"/>
+                          </a:solidFill>
+                          <a:latin typeface="Calibri"/>
+                        </a:rPr>
+                        <a:t>23</a:t>
+                      </a:r>
+                    </a:p>
+                  </a:txBody>
+                  <a:tcPr>
+                    <a:solidFill>
+                      <a:srgbClr val="FFFFFF"/>
+                    </a:solidFill>
+                  </a:tcPr>
+                </a:tc>
+                <a:tc>
+                  <a:txBody>
+                    <a:bodyPr/>
+                    <a:lstStyle/>
+                    <a:p>
+                      <a:pPr algn="l"/>
+                      <a:r>
+                        <a:rPr sz="1000" b="0">
+                          <a:solidFill>
+                            <a:srgbClr val="1D1B43"/>
+                          </a:solidFill>
+                          <a:latin typeface="Calibri"/>
+                        </a:rPr>
+                        <a:t>83.1%</a:t>
                       </a:r>
                     </a:p>
                   </a:txBody>
@@ -5056,53 +5056,53 @@
                           </a:solidFill>
                           <a:latin typeface="Calibri"/>
                         </a:rPr>
-                        <a:t>246</a:t>
-                      </a:r>
-                    </a:p>
-                  </a:txBody>
-                  <a:tcPr>
-                    <a:solidFill>
-                      <a:srgbClr val="F2F2F2"/>
-                    </a:solidFill>
-                  </a:tcPr>
-                </a:tc>
-                <a:tc>
-                  <a:txBody>
-                    <a:bodyPr/>
-                    <a:lstStyle/>
-                    <a:p>
-                      <a:pPr algn="l"/>
-                      <a:r>
-                        <a:rPr sz="1000" b="0">
-                          <a:solidFill>
-                            <a:srgbClr val="1D1B43"/>
-                          </a:solidFill>
-                          <a:latin typeface="Calibri"/>
-                        </a:rPr>
-                        <a:t>23</a:t>
-                      </a:r>
-                    </a:p>
-                  </a:txBody>
-                  <a:tcPr>
-                    <a:solidFill>
-                      <a:srgbClr val="F2F2F2"/>
-                    </a:solidFill>
-                  </a:tcPr>
-                </a:tc>
-                <a:tc>
-                  <a:txBody>
-                    <a:bodyPr/>
-                    <a:lstStyle/>
-                    <a:p>
-                      <a:pPr algn="l"/>
-                      <a:r>
-                        <a:rPr sz="1000" b="0">
-                          <a:solidFill>
-                            <a:srgbClr val="1D1B43"/>
-                          </a:solidFill>
-                          <a:latin typeface="Calibri"/>
-                        </a:rPr>
-                        <a:t>91.4%</a:t>
+                        <a:t>247</a:t>
+                      </a:r>
+                    </a:p>
+                  </a:txBody>
+                  <a:tcPr>
+                    <a:solidFill>
+                      <a:srgbClr val="F2F2F2"/>
+                    </a:solidFill>
+                  </a:tcPr>
+                </a:tc>
+                <a:tc>
+                  <a:txBody>
+                    <a:bodyPr/>
+                    <a:lstStyle/>
+                    <a:p>
+                      <a:pPr algn="l"/>
+                      <a:r>
+                        <a:rPr sz="1000" b="0">
+                          <a:solidFill>
+                            <a:srgbClr val="1D1B43"/>
+                          </a:solidFill>
+                          <a:latin typeface="Calibri"/>
+                        </a:rPr>
+                        <a:t>22</a:t>
+                      </a:r>
+                    </a:p>
+                  </a:txBody>
+                  <a:tcPr>
+                    <a:solidFill>
+                      <a:srgbClr val="F2F2F2"/>
+                    </a:solidFill>
+                  </a:tcPr>
+                </a:tc>
+                <a:tc>
+                  <a:txBody>
+                    <a:bodyPr/>
+                    <a:lstStyle/>
+                    <a:p>
+                      <a:pPr algn="l"/>
+                      <a:r>
+                        <a:rPr sz="1000" b="0">
+                          <a:solidFill>
+                            <a:srgbClr val="1D1B43"/>
+                          </a:solidFill>
+                          <a:latin typeface="Calibri"/>
+                        </a:rPr>
+                        <a:t>91.8%</a:t>
                       </a:r>
                     </a:p>
                   </a:txBody>
@@ -5190,7 +5190,7 @@
                 </a:solidFill>
                 <a:latin typeface="Calibri"/>
               </a:rPr>
-              <a:t>PERFORMANCE: 91.4% - REGULAR</a:t>
+              <a:t>PERFORMANCE: 91.8% - REGULAR</a:t>
             </a:r>
           </a:p>
         </p:txBody>
@@ -5275,7 +5275,7 @@
                 </a:solidFill>
                 <a:latin typeface="Calibri"/>
               </a:rPr>
-              <a:t>OCORRENCIAS FORA DO PRAZO (23)</a:t>
+              <a:t>OCORRENCIAS FORA DO PRAZO (22)</a:t>
             </a:r>
           </a:p>
         </p:txBody>
@@ -5333,7 +5333,7 @@
         </p:nvGraphicFramePr>
         <p:xfrm>
           <a:off x="457200" y="1828800"/>
-          <a:ext cx="11429999" cy="4572000"/>
+          <a:ext cx="11429999" cy="4571986"/>
         </p:xfrm>
         <a:graphic>
           <a:graphicData uri="http://schemas.openxmlformats.org/drawingml/2006/table">
@@ -5348,7 +5348,7 @@
                 <a:gridCol w="1554480"/>
                 <a:gridCol w="2743200"/>
               </a:tblGrid>
-              <a:tr h="190500">
+              <a:tr h="198782">
                 <a:tc>
                   <a:txBody>
                     <a:bodyPr/>
@@ -5465,7 +5465,7 @@
                   </a:tcPr>
                 </a:tc>
               </a:tr>
-              <a:tr h="190500">
+              <a:tr h="198782">
                 <a:tc>
                   <a:txBody>
                     <a:bodyPr/>
@@ -5582,7 +5582,7 @@
                   </a:tcPr>
                 </a:tc>
               </a:tr>
-              <a:tr h="190500">
+              <a:tr h="198782">
                 <a:tc>
                   <a:txBody>
                     <a:bodyPr/>
@@ -5699,7 +5699,7 @@
                   </a:tcPr>
                 </a:tc>
               </a:tr>
-              <a:tr h="190500">
+              <a:tr h="198782">
                 <a:tc>
                   <a:txBody>
                     <a:bodyPr/>
@@ -5816,44 +5816,44 @@
                   </a:tcPr>
                 </a:tc>
               </a:tr>
-              <a:tr h="190500">
-                <a:tc>
-                  <a:txBody>
-                    <a:bodyPr/>
-                    <a:lstStyle/>
-                    <a:p>
-                      <a:pPr algn="l"/>
-                      <a:r>
-                        <a:rPr sz="1000" b="0">
-                          <a:solidFill>
-                            <a:srgbClr val="1D1B43"/>
-                          </a:solidFill>
-                          <a:latin typeface="Calibri"/>
-                        </a:rPr>
-                        <a:t>279744</a:t>
-                      </a:r>
-                    </a:p>
-                  </a:txBody>
-                  <a:tcPr>
-                    <a:solidFill>
-                      <a:srgbClr val="F2F2F2"/>
-                    </a:solidFill>
-                  </a:tcPr>
-                </a:tc>
-                <a:tc>
-                  <a:txBody>
-                    <a:bodyPr/>
-                    <a:lstStyle/>
-                    <a:p>
-                      <a:pPr algn="l"/>
-                      <a:r>
-                        <a:rPr sz="1000" b="0">
-                          <a:solidFill>
-                            <a:srgbClr val="1D1B43"/>
-                          </a:solidFill>
-                          <a:latin typeface="Calibri"/>
-                        </a:rPr>
-                        <a:t>SV BOLSAS E SAPATOS - VITORIA / ES</a:t>
+              <a:tr h="198782">
+                <a:tc>
+                  <a:txBody>
+                    <a:bodyPr/>
+                    <a:lstStyle/>
+                    <a:p>
+                      <a:pPr algn="l"/>
+                      <a:r>
+                        <a:rPr sz="1000" b="0">
+                          <a:solidFill>
+                            <a:srgbClr val="1D1B43"/>
+                          </a:solidFill>
+                          <a:latin typeface="Calibri"/>
+                        </a:rPr>
+                        <a:t>279746</a:t>
+                      </a:r>
+                    </a:p>
+                  </a:txBody>
+                  <a:tcPr>
+                    <a:solidFill>
+                      <a:srgbClr val="F2F2F2"/>
+                    </a:solidFill>
+                  </a:tcPr>
+                </a:tc>
+                <a:tc>
+                  <a:txBody>
+                    <a:bodyPr/>
+                    <a:lstStyle/>
+                    <a:p>
+                      <a:pPr algn="l"/>
+                      <a:r>
+                        <a:rPr sz="1000" b="0">
+                          <a:solidFill>
+                            <a:srgbClr val="1D1B43"/>
+                          </a:solidFill>
+                          <a:latin typeface="Calibri"/>
+                        </a:rPr>
+                        <a:t>R4 COMERCIO DE SAPAT - VITORIA / ES</a:t>
                       </a:r>
                     </a:p>
                   </a:txBody>
@@ -5922,84 +5922,1371 @@
                           </a:solidFill>
                           <a:latin typeface="Calibri"/>
                         </a:rPr>
+                        <a:t>ENTREGUE FORA DO PRAZO</a:t>
+                      </a:r>
+                    </a:p>
+                  </a:txBody>
+                  <a:tcPr>
+                    <a:solidFill>
+                      <a:srgbClr val="F2F2F2"/>
+                    </a:solidFill>
+                  </a:tcPr>
+                </a:tc>
+              </a:tr>
+              <a:tr h="198782">
+                <a:tc>
+                  <a:txBody>
+                    <a:bodyPr/>
+                    <a:lstStyle/>
+                    <a:p>
+                      <a:pPr algn="l"/>
+                      <a:r>
+                        <a:rPr sz="1000" b="0">
+                          <a:solidFill>
+                            <a:srgbClr val="1D1B43"/>
+                          </a:solidFill>
+                          <a:latin typeface="Calibri"/>
+                        </a:rPr>
+                        <a:t>279762</a:t>
+                      </a:r>
+                    </a:p>
+                  </a:txBody>
+                  <a:tcPr>
+                    <a:solidFill>
+                      <a:srgbClr val="FFFFFF"/>
+                    </a:solidFill>
+                  </a:tcPr>
+                </a:tc>
+                <a:tc>
+                  <a:txBody>
+                    <a:bodyPr/>
+                    <a:lstStyle/>
+                    <a:p>
+                      <a:pPr algn="l"/>
+                      <a:r>
+                        <a:rPr sz="1000" b="0">
+                          <a:solidFill>
+                            <a:srgbClr val="1D1B43"/>
+                          </a:solidFill>
+                          <a:latin typeface="Calibri"/>
+                        </a:rPr>
+                        <a:t>ARI COMERCIO E SERVI - SERRA / ES</a:t>
+                      </a:r>
+                    </a:p>
+                  </a:txBody>
+                  <a:tcPr>
+                    <a:solidFill>
+                      <a:srgbClr val="FFFFFF"/>
+                    </a:solidFill>
+                  </a:tcPr>
+                </a:tc>
+                <a:tc>
+                  <a:txBody>
+                    <a:bodyPr/>
+                    <a:lstStyle/>
+                    <a:p>
+                      <a:pPr algn="l"/>
+                      <a:r>
+                        <a:rPr sz="1000" b="0">
+                          <a:solidFill>
+                            <a:srgbClr val="1D1B43"/>
+                          </a:solidFill>
+                          <a:latin typeface="Calibri"/>
+                        </a:rPr>
+                        <a:t>SERRA/ES</a:t>
+                      </a:r>
+                    </a:p>
+                  </a:txBody>
+                  <a:tcPr>
+                    <a:solidFill>
+                      <a:srgbClr val="FFFFFF"/>
+                    </a:solidFill>
+                  </a:tcPr>
+                </a:tc>
+                <a:tc>
+                  <a:txBody>
+                    <a:bodyPr/>
+                    <a:lstStyle/>
+                    <a:p>
+                      <a:pPr algn="l"/>
+                      <a:r>
+                        <a:rPr sz="1000" b="0">
+                          <a:solidFill>
+                            <a:srgbClr val="1D1B43"/>
+                          </a:solidFill>
+                          <a:latin typeface="Calibri"/>
+                        </a:rPr>
+                        <a:t>29/04/2026</a:t>
+                      </a:r>
+                    </a:p>
+                  </a:txBody>
+                  <a:tcPr>
+                    <a:solidFill>
+                      <a:srgbClr val="FFFFFF"/>
+                    </a:solidFill>
+                  </a:tcPr>
+                </a:tc>
+                <a:tc>
+                  <a:txBody>
+                    <a:bodyPr/>
+                    <a:lstStyle/>
+                    <a:p>
+                      <a:pPr algn="l"/>
+                      <a:r>
+                        <a:rPr sz="1000" b="0">
+                          <a:solidFill>
+                            <a:srgbClr val="1D1B43"/>
+                          </a:solidFill>
+                          <a:latin typeface="Calibri"/>
+                        </a:rPr>
+                        <a:t>ENTREGUE FORA DO PRAZO</a:t>
+                      </a:r>
+                    </a:p>
+                  </a:txBody>
+                  <a:tcPr>
+                    <a:solidFill>
+                      <a:srgbClr val="FFFFFF"/>
+                    </a:solidFill>
+                  </a:tcPr>
+                </a:tc>
+              </a:tr>
+              <a:tr h="198782">
+                <a:tc>
+                  <a:txBody>
+                    <a:bodyPr/>
+                    <a:lstStyle/>
+                    <a:p>
+                      <a:pPr algn="l"/>
+                      <a:r>
+                        <a:rPr sz="1000" b="0">
+                          <a:solidFill>
+                            <a:srgbClr val="1D1B43"/>
+                          </a:solidFill>
+                          <a:latin typeface="Calibri"/>
+                        </a:rPr>
+                        <a:t>279774</a:t>
+                      </a:r>
+                    </a:p>
+                  </a:txBody>
+                  <a:tcPr>
+                    <a:solidFill>
+                      <a:srgbClr val="F2F2F2"/>
+                    </a:solidFill>
+                  </a:tcPr>
+                </a:tc>
+                <a:tc>
+                  <a:txBody>
+                    <a:bodyPr/>
+                    <a:lstStyle/>
+                    <a:p>
+                      <a:pPr algn="l"/>
+                      <a:r>
+                        <a:rPr sz="1000" b="0">
+                          <a:solidFill>
+                            <a:srgbClr val="1D1B43"/>
+                          </a:solidFill>
+                          <a:latin typeface="Calibri"/>
+                        </a:rPr>
+                        <a:t>LARISSA LUZIA ALVES - PIRAJUBA / MG</a:t>
+                      </a:r>
+                    </a:p>
+                  </a:txBody>
+                  <a:tcPr>
+                    <a:solidFill>
+                      <a:srgbClr val="F2F2F2"/>
+                    </a:solidFill>
+                  </a:tcPr>
+                </a:tc>
+                <a:tc>
+                  <a:txBody>
+                    <a:bodyPr/>
+                    <a:lstStyle/>
+                    <a:p>
+                      <a:pPr algn="l"/>
+                      <a:r>
+                        <a:rPr sz="1000" b="0">
+                          <a:solidFill>
+                            <a:srgbClr val="1D1B43"/>
+                          </a:solidFill>
+                          <a:latin typeface="Calibri"/>
+                        </a:rPr>
+                        <a:t>PIRAJUBA/MG</a:t>
+                      </a:r>
+                    </a:p>
+                  </a:txBody>
+                  <a:tcPr>
+                    <a:solidFill>
+                      <a:srgbClr val="F2F2F2"/>
+                    </a:solidFill>
+                  </a:tcPr>
+                </a:tc>
+                <a:tc>
+                  <a:txBody>
+                    <a:bodyPr/>
+                    <a:lstStyle/>
+                    <a:p>
+                      <a:pPr algn="l"/>
+                      <a:r>
+                        <a:rPr sz="1000" b="0">
+                          <a:solidFill>
+                            <a:srgbClr val="1D1B43"/>
+                          </a:solidFill>
+                          <a:latin typeface="Calibri"/>
+                        </a:rPr>
+                        <a:t>29/04/2026</a:t>
+                      </a:r>
+                    </a:p>
+                  </a:txBody>
+                  <a:tcPr>
+                    <a:solidFill>
+                      <a:srgbClr val="F2F2F2"/>
+                    </a:solidFill>
+                  </a:tcPr>
+                </a:tc>
+                <a:tc>
+                  <a:txBody>
+                    <a:bodyPr/>
+                    <a:lstStyle/>
+                    <a:p>
+                      <a:pPr algn="l"/>
+                      <a:r>
+                        <a:rPr sz="1000" b="0">
+                          <a:solidFill>
+                            <a:srgbClr val="1D1B43"/>
+                          </a:solidFill>
+                          <a:latin typeface="Calibri"/>
+                        </a:rPr>
+                        <a:t>ENTREGUE FORA DO PRAZO</a:t>
+                      </a:r>
+                    </a:p>
+                  </a:txBody>
+                  <a:tcPr>
+                    <a:solidFill>
+                      <a:srgbClr val="F2F2F2"/>
+                    </a:solidFill>
+                  </a:tcPr>
+                </a:tc>
+              </a:tr>
+              <a:tr h="198782">
+                <a:tc>
+                  <a:txBody>
+                    <a:bodyPr/>
+                    <a:lstStyle/>
+                    <a:p>
+                      <a:pPr algn="l"/>
+                      <a:r>
+                        <a:rPr sz="1000" b="0">
+                          <a:solidFill>
+                            <a:srgbClr val="1D1B43"/>
+                          </a:solidFill>
+                          <a:latin typeface="Calibri"/>
+                        </a:rPr>
+                        <a:t>279792</a:t>
+                      </a:r>
+                    </a:p>
+                  </a:txBody>
+                  <a:tcPr>
+                    <a:solidFill>
+                      <a:srgbClr val="FFFFFF"/>
+                    </a:solidFill>
+                  </a:tcPr>
+                </a:tc>
+                <a:tc>
+                  <a:txBody>
+                    <a:bodyPr/>
+                    <a:lstStyle/>
+                    <a:p>
+                      <a:pPr algn="l"/>
+                      <a:r>
+                        <a:rPr sz="1000" b="0">
+                          <a:solidFill>
+                            <a:srgbClr val="1D1B43"/>
+                          </a:solidFill>
+                          <a:latin typeface="Calibri"/>
+                        </a:rPr>
+                        <a:t>TANIA CENTER CALCADO - RIO POMBA / MG</a:t>
+                      </a:r>
+                    </a:p>
+                  </a:txBody>
+                  <a:tcPr>
+                    <a:solidFill>
+                      <a:srgbClr val="FFFFFF"/>
+                    </a:solidFill>
+                  </a:tcPr>
+                </a:tc>
+                <a:tc>
+                  <a:txBody>
+                    <a:bodyPr/>
+                    <a:lstStyle/>
+                    <a:p>
+                      <a:pPr algn="l"/>
+                      <a:r>
+                        <a:rPr sz="1000" b="0">
+                          <a:solidFill>
+                            <a:srgbClr val="1D1B43"/>
+                          </a:solidFill>
+                          <a:latin typeface="Calibri"/>
+                        </a:rPr>
+                        <a:t>RIO POMBA/MG</a:t>
+                      </a:r>
+                    </a:p>
+                  </a:txBody>
+                  <a:tcPr>
+                    <a:solidFill>
+                      <a:srgbClr val="FFFFFF"/>
+                    </a:solidFill>
+                  </a:tcPr>
+                </a:tc>
+                <a:tc>
+                  <a:txBody>
+                    <a:bodyPr/>
+                    <a:lstStyle/>
+                    <a:p>
+                      <a:pPr algn="l"/>
+                      <a:r>
+                        <a:rPr sz="1000" b="0">
+                          <a:solidFill>
+                            <a:srgbClr val="1D1B43"/>
+                          </a:solidFill>
+                          <a:latin typeface="Calibri"/>
+                        </a:rPr>
+                        <a:t>29/04/2026</a:t>
+                      </a:r>
+                    </a:p>
+                  </a:txBody>
+                  <a:tcPr>
+                    <a:solidFill>
+                      <a:srgbClr val="FFFFFF"/>
+                    </a:solidFill>
+                  </a:tcPr>
+                </a:tc>
+                <a:tc>
+                  <a:txBody>
+                    <a:bodyPr/>
+                    <a:lstStyle/>
+                    <a:p>
+                      <a:pPr algn="l"/>
+                      <a:r>
+                        <a:rPr sz="1000" b="0">
+                          <a:solidFill>
+                            <a:srgbClr val="1D1B43"/>
+                          </a:solidFill>
+                          <a:latin typeface="Calibri"/>
+                        </a:rPr>
+                        <a:t>ENTREGUE FORA DO PRAZO</a:t>
+                      </a:r>
+                    </a:p>
+                  </a:txBody>
+                  <a:tcPr>
+                    <a:solidFill>
+                      <a:srgbClr val="FFFFFF"/>
+                    </a:solidFill>
+                  </a:tcPr>
+                </a:tc>
+              </a:tr>
+              <a:tr h="198782">
+                <a:tc>
+                  <a:txBody>
+                    <a:bodyPr/>
+                    <a:lstStyle/>
+                    <a:p>
+                      <a:pPr algn="l"/>
+                      <a:r>
+                        <a:rPr sz="1000" b="0">
+                          <a:solidFill>
+                            <a:srgbClr val="1D1B43"/>
+                          </a:solidFill>
+                          <a:latin typeface="Calibri"/>
+                        </a:rPr>
+                        <a:t>279794</a:t>
+                      </a:r>
+                    </a:p>
+                  </a:txBody>
+                  <a:tcPr>
+                    <a:solidFill>
+                      <a:srgbClr val="F2F2F2"/>
+                    </a:solidFill>
+                  </a:tcPr>
+                </a:tc>
+                <a:tc>
+                  <a:txBody>
+                    <a:bodyPr/>
+                    <a:lstStyle/>
+                    <a:p>
+                      <a:pPr algn="l"/>
+                      <a:r>
+                        <a:rPr sz="1000" b="0">
+                          <a:solidFill>
+                            <a:srgbClr val="1D1B43"/>
+                          </a:solidFill>
+                          <a:latin typeface="Calibri"/>
+                        </a:rPr>
+                        <a:t>J B COMERCIO DE ROUP - SERRA / ES</a:t>
+                      </a:r>
+                    </a:p>
+                  </a:txBody>
+                  <a:tcPr>
+                    <a:solidFill>
+                      <a:srgbClr val="F2F2F2"/>
+                    </a:solidFill>
+                  </a:tcPr>
+                </a:tc>
+                <a:tc>
+                  <a:txBody>
+                    <a:bodyPr/>
+                    <a:lstStyle/>
+                    <a:p>
+                      <a:pPr algn="l"/>
+                      <a:r>
+                        <a:rPr sz="1000" b="0">
+                          <a:solidFill>
+                            <a:srgbClr val="1D1B43"/>
+                          </a:solidFill>
+                          <a:latin typeface="Calibri"/>
+                        </a:rPr>
+                        <a:t>SERRA/ES</a:t>
+                      </a:r>
+                    </a:p>
+                  </a:txBody>
+                  <a:tcPr>
+                    <a:solidFill>
+                      <a:srgbClr val="F2F2F2"/>
+                    </a:solidFill>
+                  </a:tcPr>
+                </a:tc>
+                <a:tc>
+                  <a:txBody>
+                    <a:bodyPr/>
+                    <a:lstStyle/>
+                    <a:p>
+                      <a:pPr algn="l"/>
+                      <a:r>
+                        <a:rPr sz="1000" b="0">
+                          <a:solidFill>
+                            <a:srgbClr val="1D1B43"/>
+                          </a:solidFill>
+                          <a:latin typeface="Calibri"/>
+                        </a:rPr>
+                        <a:t>29/04/2026</a:t>
+                      </a:r>
+                    </a:p>
+                  </a:txBody>
+                  <a:tcPr>
+                    <a:solidFill>
+                      <a:srgbClr val="F2F2F2"/>
+                    </a:solidFill>
+                  </a:tcPr>
+                </a:tc>
+                <a:tc>
+                  <a:txBody>
+                    <a:bodyPr/>
+                    <a:lstStyle/>
+                    <a:p>
+                      <a:pPr algn="l"/>
+                      <a:r>
+                        <a:rPr sz="1000" b="0">
+                          <a:solidFill>
+                            <a:srgbClr val="1D1B43"/>
+                          </a:solidFill>
+                          <a:latin typeface="Calibri"/>
+                        </a:rPr>
+                        <a:t>ENTREGUE FORA DO PRAZO</a:t>
+                      </a:r>
+                    </a:p>
+                  </a:txBody>
+                  <a:tcPr>
+                    <a:solidFill>
+                      <a:srgbClr val="F2F2F2"/>
+                    </a:solidFill>
+                  </a:tcPr>
+                </a:tc>
+              </a:tr>
+              <a:tr h="198782">
+                <a:tc>
+                  <a:txBody>
+                    <a:bodyPr/>
+                    <a:lstStyle/>
+                    <a:p>
+                      <a:pPr algn="l"/>
+                      <a:r>
+                        <a:rPr sz="1000" b="0">
+                          <a:solidFill>
+                            <a:srgbClr val="1D1B43"/>
+                          </a:solidFill>
+                          <a:latin typeface="Calibri"/>
+                        </a:rPr>
+                        <a:t>279799</a:t>
+                      </a:r>
+                    </a:p>
+                  </a:txBody>
+                  <a:tcPr>
+                    <a:solidFill>
+                      <a:srgbClr val="FFFFFF"/>
+                    </a:solidFill>
+                  </a:tcPr>
+                </a:tc>
+                <a:tc>
+                  <a:txBody>
+                    <a:bodyPr/>
+                    <a:lstStyle/>
+                    <a:p>
+                      <a:pPr algn="l"/>
+                      <a:r>
+                        <a:rPr sz="1000" b="0">
+                          <a:solidFill>
+                            <a:srgbClr val="1D1B43"/>
+                          </a:solidFill>
+                          <a:latin typeface="Calibri"/>
+                        </a:rPr>
+                        <a:t>C J L DE OLIVEIRA - IRUPI / ES</a:t>
+                      </a:r>
+                    </a:p>
+                  </a:txBody>
+                  <a:tcPr>
+                    <a:solidFill>
+                      <a:srgbClr val="FFFFFF"/>
+                    </a:solidFill>
+                  </a:tcPr>
+                </a:tc>
+                <a:tc>
+                  <a:txBody>
+                    <a:bodyPr/>
+                    <a:lstStyle/>
+                    <a:p>
+                      <a:pPr algn="l"/>
+                      <a:r>
+                        <a:rPr sz="1000" b="0">
+                          <a:solidFill>
+                            <a:srgbClr val="1D1B43"/>
+                          </a:solidFill>
+                          <a:latin typeface="Calibri"/>
+                        </a:rPr>
+                        <a:t>IRUPI/ES</a:t>
+                      </a:r>
+                    </a:p>
+                  </a:txBody>
+                  <a:tcPr>
+                    <a:solidFill>
+                      <a:srgbClr val="FFFFFF"/>
+                    </a:solidFill>
+                  </a:tcPr>
+                </a:tc>
+                <a:tc>
+                  <a:txBody>
+                    <a:bodyPr/>
+                    <a:lstStyle/>
+                    <a:p>
+                      <a:pPr algn="l"/>
+                      <a:r>
+                        <a:rPr sz="1000" b="0">
+                          <a:solidFill>
+                            <a:srgbClr val="1D1B43"/>
+                          </a:solidFill>
+                          <a:latin typeface="Calibri"/>
+                        </a:rPr>
+                        <a:t>29/04/2026</a:t>
+                      </a:r>
+                    </a:p>
+                  </a:txBody>
+                  <a:tcPr>
+                    <a:solidFill>
+                      <a:srgbClr val="FFFFFF"/>
+                    </a:solidFill>
+                  </a:tcPr>
+                </a:tc>
+                <a:tc>
+                  <a:txBody>
+                    <a:bodyPr/>
+                    <a:lstStyle/>
+                    <a:p>
+                      <a:pPr algn="l"/>
+                      <a:r>
+                        <a:rPr sz="1000" b="0">
+                          <a:solidFill>
+                            <a:srgbClr val="1D1B43"/>
+                          </a:solidFill>
+                          <a:latin typeface="Calibri"/>
+                        </a:rPr>
+                        <a:t>ENTREGUE FORA DO PRAZO</a:t>
+                      </a:r>
+                    </a:p>
+                  </a:txBody>
+                  <a:tcPr>
+                    <a:solidFill>
+                      <a:srgbClr val="FFFFFF"/>
+                    </a:solidFill>
+                  </a:tcPr>
+                </a:tc>
+              </a:tr>
+              <a:tr h="198782">
+                <a:tc>
+                  <a:txBody>
+                    <a:bodyPr/>
+                    <a:lstStyle/>
+                    <a:p>
+                      <a:pPr algn="l"/>
+                      <a:r>
+                        <a:rPr sz="1000" b="0">
+                          <a:solidFill>
+                            <a:srgbClr val="1D1B43"/>
+                          </a:solidFill>
+                          <a:latin typeface="Calibri"/>
+                        </a:rPr>
+                        <a:t>279800</a:t>
+                      </a:r>
+                    </a:p>
+                  </a:txBody>
+                  <a:tcPr>
+                    <a:solidFill>
+                      <a:srgbClr val="F2F2F2"/>
+                    </a:solidFill>
+                  </a:tcPr>
+                </a:tc>
+                <a:tc>
+                  <a:txBody>
+                    <a:bodyPr/>
+                    <a:lstStyle/>
+                    <a:p>
+                      <a:pPr algn="l"/>
+                      <a:r>
+                        <a:rPr sz="1000" b="0">
+                          <a:solidFill>
+                            <a:srgbClr val="1D1B43"/>
+                          </a:solidFill>
+                          <a:latin typeface="Calibri"/>
+                        </a:rPr>
+                        <a:t>ALLURE SHOES E ACESS - JERONIMO MONTEIRO / ES</a:t>
+                      </a:r>
+                    </a:p>
+                  </a:txBody>
+                  <a:tcPr>
+                    <a:solidFill>
+                      <a:srgbClr val="F2F2F2"/>
+                    </a:solidFill>
+                  </a:tcPr>
+                </a:tc>
+                <a:tc>
+                  <a:txBody>
+                    <a:bodyPr/>
+                    <a:lstStyle/>
+                    <a:p>
+                      <a:pPr algn="l"/>
+                      <a:r>
+                        <a:rPr sz="1000" b="0">
+                          <a:solidFill>
+                            <a:srgbClr val="1D1B43"/>
+                          </a:solidFill>
+                          <a:latin typeface="Calibri"/>
+                        </a:rPr>
+                        <a:t>JERONIMO MONTEIRO/ES</a:t>
+                      </a:r>
+                    </a:p>
+                  </a:txBody>
+                  <a:tcPr>
+                    <a:solidFill>
+                      <a:srgbClr val="F2F2F2"/>
+                    </a:solidFill>
+                  </a:tcPr>
+                </a:tc>
+                <a:tc>
+                  <a:txBody>
+                    <a:bodyPr/>
+                    <a:lstStyle/>
+                    <a:p>
+                      <a:pPr algn="l"/>
+                      <a:r>
+                        <a:rPr sz="1000" b="0">
+                          <a:solidFill>
+                            <a:srgbClr val="1D1B43"/>
+                          </a:solidFill>
+                          <a:latin typeface="Calibri"/>
+                        </a:rPr>
+                        <a:t>29/04/2026</a:t>
+                      </a:r>
+                    </a:p>
+                  </a:txBody>
+                  <a:tcPr>
+                    <a:solidFill>
+                      <a:srgbClr val="F2F2F2"/>
+                    </a:solidFill>
+                  </a:tcPr>
+                </a:tc>
+                <a:tc>
+                  <a:txBody>
+                    <a:bodyPr/>
+                    <a:lstStyle/>
+                    <a:p>
+                      <a:pPr algn="l"/>
+                      <a:r>
+                        <a:rPr sz="1000" b="0">
+                          <a:solidFill>
+                            <a:srgbClr val="1D1B43"/>
+                          </a:solidFill>
+                          <a:latin typeface="Calibri"/>
+                        </a:rPr>
+                        <a:t>ENTREGUE FORA DO PRAZO</a:t>
+                      </a:r>
+                    </a:p>
+                  </a:txBody>
+                  <a:tcPr>
+                    <a:solidFill>
+                      <a:srgbClr val="F2F2F2"/>
+                    </a:solidFill>
+                  </a:tcPr>
+                </a:tc>
+              </a:tr>
+              <a:tr h="198782">
+                <a:tc>
+                  <a:txBody>
+                    <a:bodyPr/>
+                    <a:lstStyle/>
+                    <a:p>
+                      <a:pPr algn="l"/>
+                      <a:r>
+                        <a:rPr sz="1000" b="0">
+                          <a:solidFill>
+                            <a:srgbClr val="1D1B43"/>
+                          </a:solidFill>
+                          <a:latin typeface="Calibri"/>
+                        </a:rPr>
+                        <a:t>279802</a:t>
+                      </a:r>
+                    </a:p>
+                  </a:txBody>
+                  <a:tcPr>
+                    <a:solidFill>
+                      <a:srgbClr val="FFFFFF"/>
+                    </a:solidFill>
+                  </a:tcPr>
+                </a:tc>
+                <a:tc>
+                  <a:txBody>
+                    <a:bodyPr/>
+                    <a:lstStyle/>
+                    <a:p>
+                      <a:pPr algn="l"/>
+                      <a:r>
+                        <a:rPr sz="1000" b="0">
+                          <a:solidFill>
+                            <a:srgbClr val="1D1B43"/>
+                          </a:solidFill>
+                          <a:latin typeface="Calibri"/>
+                        </a:rPr>
+                        <a:t>CONFECCOES BROEDEL L - CARIACICA / ES</a:t>
+                      </a:r>
+                    </a:p>
+                  </a:txBody>
+                  <a:tcPr>
+                    <a:solidFill>
+                      <a:srgbClr val="FFFFFF"/>
+                    </a:solidFill>
+                  </a:tcPr>
+                </a:tc>
+                <a:tc>
+                  <a:txBody>
+                    <a:bodyPr/>
+                    <a:lstStyle/>
+                    <a:p>
+                      <a:pPr algn="l"/>
+                      <a:r>
+                        <a:rPr sz="1000" b="0">
+                          <a:solidFill>
+                            <a:srgbClr val="1D1B43"/>
+                          </a:solidFill>
+                          <a:latin typeface="Calibri"/>
+                        </a:rPr>
+                        <a:t>CARIACICA/ES</a:t>
+                      </a:r>
+                    </a:p>
+                  </a:txBody>
+                  <a:tcPr>
+                    <a:solidFill>
+                      <a:srgbClr val="FFFFFF"/>
+                    </a:solidFill>
+                  </a:tcPr>
+                </a:tc>
+                <a:tc>
+                  <a:txBody>
+                    <a:bodyPr/>
+                    <a:lstStyle/>
+                    <a:p>
+                      <a:pPr algn="l"/>
+                      <a:r>
+                        <a:rPr sz="1000" b="0">
+                          <a:solidFill>
+                            <a:srgbClr val="1D1B43"/>
+                          </a:solidFill>
+                          <a:latin typeface="Calibri"/>
+                        </a:rPr>
+                        <a:t>29/04/2026</a:t>
+                      </a:r>
+                    </a:p>
+                  </a:txBody>
+                  <a:tcPr>
+                    <a:solidFill>
+                      <a:srgbClr val="FFFFFF"/>
+                    </a:solidFill>
+                  </a:tcPr>
+                </a:tc>
+                <a:tc>
+                  <a:txBody>
+                    <a:bodyPr/>
+                    <a:lstStyle/>
+                    <a:p>
+                      <a:pPr algn="l"/>
+                      <a:r>
+                        <a:rPr sz="1000" b="0">
+                          <a:solidFill>
+                            <a:srgbClr val="1D1B43"/>
+                          </a:solidFill>
+                          <a:latin typeface="Calibri"/>
+                        </a:rPr>
+                        <a:t>ENTREGUE FORA DO PRAZO</a:t>
+                      </a:r>
+                    </a:p>
+                  </a:txBody>
+                  <a:tcPr>
+                    <a:solidFill>
+                      <a:srgbClr val="FFFFFF"/>
+                    </a:solidFill>
+                  </a:tcPr>
+                </a:tc>
+              </a:tr>
+              <a:tr h="198782">
+                <a:tc>
+                  <a:txBody>
+                    <a:bodyPr/>
+                    <a:lstStyle/>
+                    <a:p>
+                      <a:pPr algn="l"/>
+                      <a:r>
+                        <a:rPr sz="1000" b="0">
+                          <a:solidFill>
+                            <a:srgbClr val="1D1B43"/>
+                          </a:solidFill>
+                          <a:latin typeface="Calibri"/>
+                        </a:rPr>
+                        <a:t>279805</a:t>
+                      </a:r>
+                    </a:p>
+                  </a:txBody>
+                  <a:tcPr>
+                    <a:solidFill>
+                      <a:srgbClr val="F2F2F2"/>
+                    </a:solidFill>
+                  </a:tcPr>
+                </a:tc>
+                <a:tc>
+                  <a:txBody>
+                    <a:bodyPr/>
+                    <a:lstStyle/>
+                    <a:p>
+                      <a:pPr algn="l"/>
+                      <a:r>
+                        <a:rPr sz="1000" b="0">
+                          <a:solidFill>
+                            <a:srgbClr val="1D1B43"/>
+                          </a:solidFill>
+                          <a:latin typeface="Calibri"/>
+                        </a:rPr>
+                        <a:t>GESSICA CHIEPPE 1363 - MARILANDIA / ES</a:t>
+                      </a:r>
+                    </a:p>
+                  </a:txBody>
+                  <a:tcPr>
+                    <a:solidFill>
+                      <a:srgbClr val="F2F2F2"/>
+                    </a:solidFill>
+                  </a:tcPr>
+                </a:tc>
+                <a:tc>
+                  <a:txBody>
+                    <a:bodyPr/>
+                    <a:lstStyle/>
+                    <a:p>
+                      <a:pPr algn="l"/>
+                      <a:r>
+                        <a:rPr sz="1000" b="0">
+                          <a:solidFill>
+                            <a:srgbClr val="1D1B43"/>
+                          </a:solidFill>
+                          <a:latin typeface="Calibri"/>
+                        </a:rPr>
+                        <a:t>MARILANDIA/ES</a:t>
+                      </a:r>
+                    </a:p>
+                  </a:txBody>
+                  <a:tcPr>
+                    <a:solidFill>
+                      <a:srgbClr val="F2F2F2"/>
+                    </a:solidFill>
+                  </a:tcPr>
+                </a:tc>
+                <a:tc>
+                  <a:txBody>
+                    <a:bodyPr/>
+                    <a:lstStyle/>
+                    <a:p>
+                      <a:pPr algn="l"/>
+                      <a:r>
+                        <a:rPr sz="1000" b="0">
+                          <a:solidFill>
+                            <a:srgbClr val="1D1B43"/>
+                          </a:solidFill>
+                          <a:latin typeface="Calibri"/>
+                        </a:rPr>
+                        <a:t>29/04/2026</a:t>
+                      </a:r>
+                    </a:p>
+                  </a:txBody>
+                  <a:tcPr>
+                    <a:solidFill>
+                      <a:srgbClr val="F2F2F2"/>
+                    </a:solidFill>
+                  </a:tcPr>
+                </a:tc>
+                <a:tc>
+                  <a:txBody>
+                    <a:bodyPr/>
+                    <a:lstStyle/>
+                    <a:p>
+                      <a:pPr algn="l"/>
+                      <a:r>
+                        <a:rPr sz="1000" b="0">
+                          <a:solidFill>
+                            <a:srgbClr val="1D1B43"/>
+                          </a:solidFill>
+                          <a:latin typeface="Calibri"/>
+                        </a:rPr>
+                        <a:t>ENTREGUE FORA DO PRAZO</a:t>
+                      </a:r>
+                    </a:p>
+                  </a:txBody>
+                  <a:tcPr>
+                    <a:solidFill>
+                      <a:srgbClr val="F2F2F2"/>
+                    </a:solidFill>
+                  </a:tcPr>
+                </a:tc>
+              </a:tr>
+              <a:tr h="198782">
+                <a:tc>
+                  <a:txBody>
+                    <a:bodyPr/>
+                    <a:lstStyle/>
+                    <a:p>
+                      <a:pPr algn="l"/>
+                      <a:r>
+                        <a:rPr sz="1000" b="0">
+                          <a:solidFill>
+                            <a:srgbClr val="1D1B43"/>
+                          </a:solidFill>
+                          <a:latin typeface="Calibri"/>
+                        </a:rPr>
+                        <a:t>279995</a:t>
+                      </a:r>
+                    </a:p>
+                  </a:txBody>
+                  <a:tcPr>
+                    <a:solidFill>
+                      <a:srgbClr val="FFFFFF"/>
+                    </a:solidFill>
+                  </a:tcPr>
+                </a:tc>
+                <a:tc>
+                  <a:txBody>
+                    <a:bodyPr/>
+                    <a:lstStyle/>
+                    <a:p>
+                      <a:pPr algn="l"/>
+                      <a:r>
+                        <a:rPr sz="1000" b="0">
+                          <a:solidFill>
+                            <a:srgbClr val="1D1B43"/>
+                          </a:solidFill>
+                          <a:latin typeface="Calibri"/>
+                        </a:rPr>
+                        <a:t>DI DELLE CALCADOS LT - ARACRUZ / ES</a:t>
+                      </a:r>
+                    </a:p>
+                  </a:txBody>
+                  <a:tcPr>
+                    <a:solidFill>
+                      <a:srgbClr val="FFFFFF"/>
+                    </a:solidFill>
+                  </a:tcPr>
+                </a:tc>
+                <a:tc>
+                  <a:txBody>
+                    <a:bodyPr/>
+                    <a:lstStyle/>
+                    <a:p>
+                      <a:pPr algn="l"/>
+                      <a:r>
+                        <a:rPr sz="1000" b="0">
+                          <a:solidFill>
+                            <a:srgbClr val="1D1B43"/>
+                          </a:solidFill>
+                          <a:latin typeface="Calibri"/>
+                        </a:rPr>
+                        <a:t>ARACRUZ/ES</a:t>
+                      </a:r>
+                    </a:p>
+                  </a:txBody>
+                  <a:tcPr>
+                    <a:solidFill>
+                      <a:srgbClr val="FFFFFF"/>
+                    </a:solidFill>
+                  </a:tcPr>
+                </a:tc>
+                <a:tc>
+                  <a:txBody>
+                    <a:bodyPr/>
+                    <a:lstStyle/>
+                    <a:p>
+                      <a:pPr algn="l"/>
+                      <a:r>
+                        <a:rPr sz="1000" b="0">
+                          <a:solidFill>
+                            <a:srgbClr val="1D1B43"/>
+                          </a:solidFill>
+                          <a:latin typeface="Calibri"/>
+                        </a:rPr>
+                        <a:t>29/04/2026</a:t>
+                      </a:r>
+                    </a:p>
+                  </a:txBody>
+                  <a:tcPr>
+                    <a:solidFill>
+                      <a:srgbClr val="FFFFFF"/>
+                    </a:solidFill>
+                  </a:tcPr>
+                </a:tc>
+                <a:tc>
+                  <a:txBody>
+                    <a:bodyPr/>
+                    <a:lstStyle/>
+                    <a:p>
+                      <a:pPr algn="l"/>
+                      <a:r>
+                        <a:rPr sz="1000" b="0">
+                          <a:solidFill>
+                            <a:srgbClr val="1D1B43"/>
+                          </a:solidFill>
+                          <a:latin typeface="Calibri"/>
+                        </a:rPr>
+                        <a:t>ENTREGUE FORA DO PRAZO</a:t>
+                      </a:r>
+                    </a:p>
+                  </a:txBody>
+                  <a:tcPr>
+                    <a:solidFill>
+                      <a:srgbClr val="FFFFFF"/>
+                    </a:solidFill>
+                  </a:tcPr>
+                </a:tc>
+              </a:tr>
+              <a:tr h="198782">
+                <a:tc>
+                  <a:txBody>
+                    <a:bodyPr/>
+                    <a:lstStyle/>
+                    <a:p>
+                      <a:pPr algn="l"/>
+                      <a:r>
+                        <a:rPr sz="1000" b="0">
+                          <a:solidFill>
+                            <a:srgbClr val="1D1B43"/>
+                          </a:solidFill>
+                          <a:latin typeface="Calibri"/>
+                        </a:rPr>
+                        <a:t>279997</a:t>
+                      </a:r>
+                    </a:p>
+                  </a:txBody>
+                  <a:tcPr>
+                    <a:solidFill>
+                      <a:srgbClr val="F2F2F2"/>
+                    </a:solidFill>
+                  </a:tcPr>
+                </a:tc>
+                <a:tc>
+                  <a:txBody>
+                    <a:bodyPr/>
+                    <a:lstStyle/>
+                    <a:p>
+                      <a:pPr algn="l"/>
+                      <a:r>
+                        <a:rPr sz="1000" b="0">
+                          <a:solidFill>
+                            <a:srgbClr val="1D1B43"/>
+                          </a:solidFill>
+                          <a:latin typeface="Calibri"/>
+                        </a:rPr>
+                        <a:t>STAR SHOES LTDA - GUACUI / ES</a:t>
+                      </a:r>
+                    </a:p>
+                  </a:txBody>
+                  <a:tcPr>
+                    <a:solidFill>
+                      <a:srgbClr val="F2F2F2"/>
+                    </a:solidFill>
+                  </a:tcPr>
+                </a:tc>
+                <a:tc>
+                  <a:txBody>
+                    <a:bodyPr/>
+                    <a:lstStyle/>
+                    <a:p>
+                      <a:pPr algn="l"/>
+                      <a:r>
+                        <a:rPr sz="1000" b="0">
+                          <a:solidFill>
+                            <a:srgbClr val="1D1B43"/>
+                          </a:solidFill>
+                          <a:latin typeface="Calibri"/>
+                        </a:rPr>
+                        <a:t>GUACUI/ES</a:t>
+                      </a:r>
+                    </a:p>
+                  </a:txBody>
+                  <a:tcPr>
+                    <a:solidFill>
+                      <a:srgbClr val="F2F2F2"/>
+                    </a:solidFill>
+                  </a:tcPr>
+                </a:tc>
+                <a:tc>
+                  <a:txBody>
+                    <a:bodyPr/>
+                    <a:lstStyle/>
+                    <a:p>
+                      <a:pPr algn="l"/>
+                      <a:r>
+                        <a:rPr sz="1000" b="0">
+                          <a:solidFill>
+                            <a:srgbClr val="1D1B43"/>
+                          </a:solidFill>
+                          <a:latin typeface="Calibri"/>
+                        </a:rPr>
+                        <a:t>29/04/2026</a:t>
+                      </a:r>
+                    </a:p>
+                  </a:txBody>
+                  <a:tcPr>
+                    <a:solidFill>
+                      <a:srgbClr val="F2F2F2"/>
+                    </a:solidFill>
+                  </a:tcPr>
+                </a:tc>
+                <a:tc>
+                  <a:txBody>
+                    <a:bodyPr/>
+                    <a:lstStyle/>
+                    <a:p>
+                      <a:pPr algn="l"/>
+                      <a:r>
+                        <a:rPr sz="1000" b="0">
+                          <a:solidFill>
+                            <a:srgbClr val="1D1B43"/>
+                          </a:solidFill>
+                          <a:latin typeface="Calibri"/>
+                        </a:rPr>
+                        <a:t>ENTREGUE FORA DO PRAZO</a:t>
+                      </a:r>
+                    </a:p>
+                  </a:txBody>
+                  <a:tcPr>
+                    <a:solidFill>
+                      <a:srgbClr val="F2F2F2"/>
+                    </a:solidFill>
+                  </a:tcPr>
+                </a:tc>
+              </a:tr>
+              <a:tr h="198782">
+                <a:tc>
+                  <a:txBody>
+                    <a:bodyPr/>
+                    <a:lstStyle/>
+                    <a:p>
+                      <a:pPr algn="l"/>
+                      <a:r>
+                        <a:rPr sz="1000" b="0">
+                          <a:solidFill>
+                            <a:srgbClr val="1D1B43"/>
+                          </a:solidFill>
+                          <a:latin typeface="Calibri"/>
+                        </a:rPr>
+                        <a:t>280031</a:t>
+                      </a:r>
+                    </a:p>
+                  </a:txBody>
+                  <a:tcPr>
+                    <a:solidFill>
+                      <a:srgbClr val="FFFFFF"/>
+                    </a:solidFill>
+                  </a:tcPr>
+                </a:tc>
+                <a:tc>
+                  <a:txBody>
+                    <a:bodyPr/>
+                    <a:lstStyle/>
+                    <a:p>
+                      <a:pPr algn="l"/>
+                      <a:r>
+                        <a:rPr sz="1000" b="0">
+                          <a:solidFill>
+                            <a:srgbClr val="1D1B43"/>
+                          </a:solidFill>
+                          <a:latin typeface="Calibri"/>
+                        </a:rPr>
+                        <a:t>M STORE COMERCIO LTD - IBIRACU / ES</a:t>
+                      </a:r>
+                    </a:p>
+                  </a:txBody>
+                  <a:tcPr>
+                    <a:solidFill>
+                      <a:srgbClr val="FFFFFF"/>
+                    </a:solidFill>
+                  </a:tcPr>
+                </a:tc>
+                <a:tc>
+                  <a:txBody>
+                    <a:bodyPr/>
+                    <a:lstStyle/>
+                    <a:p>
+                      <a:pPr algn="l"/>
+                      <a:r>
+                        <a:rPr sz="1000" b="0">
+                          <a:solidFill>
+                            <a:srgbClr val="1D1B43"/>
+                          </a:solidFill>
+                          <a:latin typeface="Calibri"/>
+                        </a:rPr>
+                        <a:t>IBIRACU/ES</a:t>
+                      </a:r>
+                    </a:p>
+                  </a:txBody>
+                  <a:tcPr>
+                    <a:solidFill>
+                      <a:srgbClr val="FFFFFF"/>
+                    </a:solidFill>
+                  </a:tcPr>
+                </a:tc>
+                <a:tc>
+                  <a:txBody>
+                    <a:bodyPr/>
+                    <a:lstStyle/>
+                    <a:p>
+                      <a:pPr algn="l"/>
+                      <a:r>
+                        <a:rPr sz="1000" b="0">
+                          <a:solidFill>
+                            <a:srgbClr val="1D1B43"/>
+                          </a:solidFill>
+                          <a:latin typeface="Calibri"/>
+                        </a:rPr>
+                        <a:t>29/04/2026</a:t>
+                      </a:r>
+                    </a:p>
+                  </a:txBody>
+                  <a:tcPr>
+                    <a:solidFill>
+                      <a:srgbClr val="FFFFFF"/>
+                    </a:solidFill>
+                  </a:tcPr>
+                </a:tc>
+                <a:tc>
+                  <a:txBody>
+                    <a:bodyPr/>
+                    <a:lstStyle/>
+                    <a:p>
+                      <a:pPr algn="l"/>
+                      <a:r>
+                        <a:rPr sz="1000" b="0">
+                          <a:solidFill>
+                            <a:srgbClr val="1D1B43"/>
+                          </a:solidFill>
+                          <a:latin typeface="Calibri"/>
+                        </a:rPr>
                         <a:t>FORA DO PRAZO</a:t>
                       </a:r>
                     </a:p>
                   </a:txBody>
                   <a:tcPr>
                     <a:solidFill>
-                      <a:srgbClr val="F2F2F2"/>
+                      <a:srgbClr val="FFFFFF"/>
                     </a:solidFill>
                   </a:tcPr>
                 </a:tc>
               </a:tr>
-              <a:tr h="190500">
-                <a:tc>
-                  <a:txBody>
-                    <a:bodyPr/>
-                    <a:lstStyle/>
-                    <a:p>
-                      <a:pPr algn="l"/>
-                      <a:r>
-                        <a:rPr sz="1000" b="0">
-                          <a:solidFill>
-                            <a:srgbClr val="1D1B43"/>
-                          </a:solidFill>
-                          <a:latin typeface="Calibri"/>
-                        </a:rPr>
-                        <a:t>279746</a:t>
-                      </a:r>
-                    </a:p>
-                  </a:txBody>
-                  <a:tcPr>
-                    <a:solidFill>
-                      <a:srgbClr val="FFFFFF"/>
-                    </a:solidFill>
-                  </a:tcPr>
-                </a:tc>
-                <a:tc>
-                  <a:txBody>
-                    <a:bodyPr/>
-                    <a:lstStyle/>
-                    <a:p>
-                      <a:pPr algn="l"/>
-                      <a:r>
-                        <a:rPr sz="1000" b="0">
-                          <a:solidFill>
-                            <a:srgbClr val="1D1B43"/>
-                          </a:solidFill>
-                          <a:latin typeface="Calibri"/>
-                        </a:rPr>
-                        <a:t>R4 COMERCIO DE SAPAT - VITORIA / ES</a:t>
-                      </a:r>
-                    </a:p>
-                  </a:txBody>
-                  <a:tcPr>
-                    <a:solidFill>
-                      <a:srgbClr val="FFFFFF"/>
-                    </a:solidFill>
-                  </a:tcPr>
-                </a:tc>
-                <a:tc>
-                  <a:txBody>
-                    <a:bodyPr/>
-                    <a:lstStyle/>
-                    <a:p>
-                      <a:pPr algn="l"/>
-                      <a:r>
-                        <a:rPr sz="1000" b="0">
-                          <a:solidFill>
-                            <a:srgbClr val="1D1B43"/>
-                          </a:solidFill>
-                          <a:latin typeface="Calibri"/>
-                        </a:rPr>
-                        <a:t>VITORIA/ES</a:t>
-                      </a:r>
-                    </a:p>
-                  </a:txBody>
-                  <a:tcPr>
-                    <a:solidFill>
-                      <a:srgbClr val="FFFFFF"/>
+              <a:tr h="198782">
+                <a:tc>
+                  <a:txBody>
+                    <a:bodyPr/>
+                    <a:lstStyle/>
+                    <a:p>
+                      <a:pPr algn="l"/>
+                      <a:r>
+                        <a:rPr sz="1000" b="0">
+                          <a:solidFill>
+                            <a:srgbClr val="1D1B43"/>
+                          </a:solidFill>
+                          <a:latin typeface="Calibri"/>
+                        </a:rPr>
+                        <a:t>280098</a:t>
+                      </a:r>
+                    </a:p>
+                  </a:txBody>
+                  <a:tcPr>
+                    <a:solidFill>
+                      <a:srgbClr val="F2F2F2"/>
+                    </a:solidFill>
+                  </a:tcPr>
+                </a:tc>
+                <a:tc>
+                  <a:txBody>
+                    <a:bodyPr/>
+                    <a:lstStyle/>
+                    <a:p>
+                      <a:pPr algn="l"/>
+                      <a:r>
+                        <a:rPr sz="1000" b="0">
+                          <a:solidFill>
+                            <a:srgbClr val="1D1B43"/>
+                          </a:solidFill>
+                          <a:latin typeface="Calibri"/>
+                        </a:rPr>
+                        <a:t>CALCADOS E ACESSORIO - SAO JOSE DO CALCADO / ES</a:t>
+                      </a:r>
+                    </a:p>
+                  </a:txBody>
+                  <a:tcPr>
+                    <a:solidFill>
+                      <a:srgbClr val="F2F2F2"/>
+                    </a:solidFill>
+                  </a:tcPr>
+                </a:tc>
+                <a:tc>
+                  <a:txBody>
+                    <a:bodyPr/>
+                    <a:lstStyle/>
+                    <a:p>
+                      <a:pPr algn="l"/>
+                      <a:r>
+                        <a:rPr sz="1000" b="0">
+                          <a:solidFill>
+                            <a:srgbClr val="1D1B43"/>
+                          </a:solidFill>
+                          <a:latin typeface="Calibri"/>
+                        </a:rPr>
+                        <a:t>SAO JOSE DO CALCADO/ES</a:t>
+                      </a:r>
+                    </a:p>
+                  </a:txBody>
+                  <a:tcPr>
+                    <a:solidFill>
+                      <a:srgbClr val="F2F2F2"/>
                     </a:solidFill>
                   </a:tcPr>
                 </a:tc>
@@ -6022,7 +7309,7 @@
                   </a:txBody>
                   <a:tcPr>
                     <a:solidFill>
-                      <a:srgbClr val="FFFFFF"/>
+                      <a:srgbClr val="F2F2F2"/>
                     </a:solidFill>
                   </a:tcPr>
                 </a:tc>
@@ -6045,78 +7332,78 @@
                   </a:txBody>
                   <a:tcPr>
                     <a:solidFill>
-                      <a:srgbClr val="FFFFFF"/>
+                      <a:srgbClr val="F2F2F2"/>
                     </a:solidFill>
                   </a:tcPr>
                 </a:tc>
               </a:tr>
-              <a:tr h="190500">
-                <a:tc>
-                  <a:txBody>
-                    <a:bodyPr/>
-                    <a:lstStyle/>
-                    <a:p>
-                      <a:pPr algn="l"/>
-                      <a:r>
-                        <a:rPr sz="1000" b="0">
-                          <a:solidFill>
-                            <a:srgbClr val="1D1B43"/>
-                          </a:solidFill>
-                          <a:latin typeface="Calibri"/>
-                        </a:rPr>
-                        <a:t>279762</a:t>
-                      </a:r>
-                    </a:p>
-                  </a:txBody>
-                  <a:tcPr>
-                    <a:solidFill>
-                      <a:srgbClr val="F2F2F2"/>
-                    </a:solidFill>
-                  </a:tcPr>
-                </a:tc>
-                <a:tc>
-                  <a:txBody>
-                    <a:bodyPr/>
-                    <a:lstStyle/>
-                    <a:p>
-                      <a:pPr algn="l"/>
-                      <a:r>
-                        <a:rPr sz="1000" b="0">
-                          <a:solidFill>
-                            <a:srgbClr val="1D1B43"/>
-                          </a:solidFill>
-                          <a:latin typeface="Calibri"/>
-                        </a:rPr>
-                        <a:t>ARI COMERCIO E SERVI - SERRA / ES</a:t>
-                      </a:r>
-                    </a:p>
-                  </a:txBody>
-                  <a:tcPr>
-                    <a:solidFill>
-                      <a:srgbClr val="F2F2F2"/>
-                    </a:solidFill>
-                  </a:tcPr>
-                </a:tc>
-                <a:tc>
-                  <a:txBody>
-                    <a:bodyPr/>
-                    <a:lstStyle/>
-                    <a:p>
-                      <a:pPr algn="l"/>
-                      <a:r>
-                        <a:rPr sz="1000" b="0">
-                          <a:solidFill>
-                            <a:srgbClr val="1D1B43"/>
-                          </a:solidFill>
-                          <a:latin typeface="Calibri"/>
-                        </a:rPr>
-                        <a:t>SERRA/ES</a:t>
-                      </a:r>
-                    </a:p>
-                  </a:txBody>
-                  <a:tcPr>
-                    <a:solidFill>
-                      <a:srgbClr val="F2F2F2"/>
+              <a:tr h="198782">
+                <a:tc>
+                  <a:txBody>
+                    <a:bodyPr/>
+                    <a:lstStyle/>
+                    <a:p>
+                      <a:pPr algn="l"/>
+                      <a:r>
+                        <a:rPr sz="1000" b="0">
+                          <a:solidFill>
+                            <a:srgbClr val="1D1B43"/>
+                          </a:solidFill>
+                          <a:latin typeface="Calibri"/>
+                        </a:rPr>
+                        <a:t>280100</a:t>
+                      </a:r>
+                    </a:p>
+                  </a:txBody>
+                  <a:tcPr>
+                    <a:solidFill>
+                      <a:srgbClr val="FFFFFF"/>
+                    </a:solidFill>
+                  </a:tcPr>
+                </a:tc>
+                <a:tc>
+                  <a:txBody>
+                    <a:bodyPr/>
+                    <a:lstStyle/>
+                    <a:p>
+                      <a:pPr algn="l"/>
+                      <a:r>
+                        <a:rPr sz="1000" b="0">
+                          <a:solidFill>
+                            <a:srgbClr val="1D1B43"/>
+                          </a:solidFill>
+                          <a:latin typeface="Calibri"/>
+                        </a:rPr>
+                        <a:t>CONFECCOES BATISTA E - ITABIRA / MG</a:t>
+                      </a:r>
+                    </a:p>
+                  </a:txBody>
+                  <a:tcPr>
+                    <a:solidFill>
+                      <a:srgbClr val="FFFFFF"/>
+                    </a:solidFill>
+                  </a:tcPr>
+                </a:tc>
+                <a:tc>
+                  <a:txBody>
+                    <a:bodyPr/>
+                    <a:lstStyle/>
+                    <a:p>
+                      <a:pPr algn="l"/>
+                      <a:r>
+                        <a:rPr sz="1000" b="0">
+                          <a:solidFill>
+                            <a:srgbClr val="1D1B43"/>
+                          </a:solidFill>
+                          <a:latin typeface="Calibri"/>
+                        </a:rPr>
+                        <a:t>ITABIRA/MG</a:t>
+                      </a:r>
+                    </a:p>
+                  </a:txBody>
+                  <a:tcPr>
+                    <a:solidFill>
+                      <a:srgbClr val="FFFFFF"/>
                     </a:solidFill>
                   </a:tcPr>
                 </a:tc>
@@ -6139,7 +7426,241 @@
                   </a:txBody>
                   <a:tcPr>
                     <a:solidFill>
-                      <a:srgbClr val="F2F2F2"/>
+                      <a:srgbClr val="FFFFFF"/>
+                    </a:solidFill>
+                  </a:tcPr>
+                </a:tc>
+                <a:tc>
+                  <a:txBody>
+                    <a:bodyPr/>
+                    <a:lstStyle/>
+                    <a:p>
+                      <a:pPr algn="l"/>
+                      <a:r>
+                        <a:rPr sz="1000" b="0">
+                          <a:solidFill>
+                            <a:srgbClr val="1D1B43"/>
+                          </a:solidFill>
+                          <a:latin typeface="Calibri"/>
+                        </a:rPr>
+                        <a:t>FORA DO PRAZO</a:t>
+                      </a:r>
+                    </a:p>
+                  </a:txBody>
+                  <a:tcPr>
+                    <a:solidFill>
+                      <a:srgbClr val="FFFFFF"/>
+                    </a:solidFill>
+                  </a:tcPr>
+                </a:tc>
+              </a:tr>
+              <a:tr h="198782">
+                <a:tc>
+                  <a:txBody>
+                    <a:bodyPr/>
+                    <a:lstStyle/>
+                    <a:p>
+                      <a:pPr algn="l"/>
+                      <a:r>
+                        <a:rPr sz="1000" b="0">
+                          <a:solidFill>
+                            <a:srgbClr val="1D1B43"/>
+                          </a:solidFill>
+                          <a:latin typeface="Calibri"/>
+                        </a:rPr>
+                        <a:t>280244</a:t>
+                      </a:r>
+                    </a:p>
+                  </a:txBody>
+                  <a:tcPr>
+                    <a:solidFill>
+                      <a:srgbClr val="F2F2F2"/>
+                    </a:solidFill>
+                  </a:tcPr>
+                </a:tc>
+                <a:tc>
+                  <a:txBody>
+                    <a:bodyPr/>
+                    <a:lstStyle/>
+                    <a:p>
+                      <a:pPr algn="l"/>
+                      <a:r>
+                        <a:rPr sz="1000" b="0">
+                          <a:solidFill>
+                            <a:srgbClr val="1D1B43"/>
+                          </a:solidFill>
+                          <a:latin typeface="Calibri"/>
+                        </a:rPr>
+                        <a:t>D&amp;J BOUTIQUE LTDA - - SAO GABRIEL DA PALHA / ES</a:t>
+                      </a:r>
+                    </a:p>
+                  </a:txBody>
+                  <a:tcPr>
+                    <a:solidFill>
+                      <a:srgbClr val="F2F2F2"/>
+                    </a:solidFill>
+                  </a:tcPr>
+                </a:tc>
+                <a:tc>
+                  <a:txBody>
+                    <a:bodyPr/>
+                    <a:lstStyle/>
+                    <a:p>
+                      <a:pPr algn="l"/>
+                      <a:r>
+                        <a:rPr sz="1000" b="0">
+                          <a:solidFill>
+                            <a:srgbClr val="1D1B43"/>
+                          </a:solidFill>
+                          <a:latin typeface="Calibri"/>
+                        </a:rPr>
+                        <a:t>SAO GABRIEL DA PALHA/ES</a:t>
+                      </a:r>
+                    </a:p>
+                  </a:txBody>
+                  <a:tcPr>
+                    <a:solidFill>
+                      <a:srgbClr val="F2F2F2"/>
+                    </a:solidFill>
+                  </a:tcPr>
+                </a:tc>
+                <a:tc>
+                  <a:txBody>
+                    <a:bodyPr/>
+                    <a:lstStyle/>
+                    <a:p>
+                      <a:pPr algn="l"/>
+                      <a:r>
+                        <a:rPr sz="1000" b="0">
+                          <a:solidFill>
+                            <a:srgbClr val="1D1B43"/>
+                          </a:solidFill>
+                          <a:latin typeface="Calibri"/>
+                        </a:rPr>
+                        <a:t>30/04/2026</a:t>
+                      </a:r>
+                    </a:p>
+                  </a:txBody>
+                  <a:tcPr>
+                    <a:solidFill>
+                      <a:srgbClr val="F2F2F2"/>
+                    </a:solidFill>
+                  </a:tcPr>
+                </a:tc>
+                <a:tc>
+                  <a:txBody>
+                    <a:bodyPr/>
+                    <a:lstStyle/>
+                    <a:p>
+                      <a:pPr algn="l"/>
+                      <a:r>
+                        <a:rPr sz="1000" b="0">
+                          <a:solidFill>
+                            <a:srgbClr val="1D1B43"/>
+                          </a:solidFill>
+                          <a:latin typeface="Calibri"/>
+                        </a:rPr>
+                        <a:t>FORA DO PRAZO</a:t>
+                      </a:r>
+                    </a:p>
+                  </a:txBody>
+                  <a:tcPr>
+                    <a:solidFill>
+                      <a:srgbClr val="F2F2F2"/>
+                    </a:solidFill>
+                  </a:tcPr>
+                </a:tc>
+              </a:tr>
+              <a:tr h="198782">
+                <a:tc>
+                  <a:txBody>
+                    <a:bodyPr/>
+                    <a:lstStyle/>
+                    <a:p>
+                      <a:pPr algn="l"/>
+                      <a:r>
+                        <a:rPr sz="1000" b="0">
+                          <a:solidFill>
+                            <a:srgbClr val="1D1B43"/>
+                          </a:solidFill>
+                          <a:latin typeface="Calibri"/>
+                        </a:rPr>
+                        <a:t>280247</a:t>
+                      </a:r>
+                    </a:p>
+                  </a:txBody>
+                  <a:tcPr>
+                    <a:solidFill>
+                      <a:srgbClr val="FFFFFF"/>
+                    </a:solidFill>
+                  </a:tcPr>
+                </a:tc>
+                <a:tc>
+                  <a:txBody>
+                    <a:bodyPr/>
+                    <a:lstStyle/>
+                    <a:p>
+                      <a:pPr algn="l"/>
+                      <a:r>
+                        <a:rPr sz="1000" b="0">
+                          <a:solidFill>
+                            <a:srgbClr val="1D1B43"/>
+                          </a:solidFill>
+                          <a:latin typeface="Calibri"/>
+                        </a:rPr>
+                        <a:t>SOBREIRA E ALBANI LT - ALEGRE / ES</a:t>
+                      </a:r>
+                    </a:p>
+                  </a:txBody>
+                  <a:tcPr>
+                    <a:solidFill>
+                      <a:srgbClr val="FFFFFF"/>
+                    </a:solidFill>
+                  </a:tcPr>
+                </a:tc>
+                <a:tc>
+                  <a:txBody>
+                    <a:bodyPr/>
+                    <a:lstStyle/>
+                    <a:p>
+                      <a:pPr algn="l"/>
+                      <a:r>
+                        <a:rPr sz="1000" b="0">
+                          <a:solidFill>
+                            <a:srgbClr val="1D1B43"/>
+                          </a:solidFill>
+                          <a:latin typeface="Calibri"/>
+                        </a:rPr>
+                        <a:t>ALEGRE/ES</a:t>
+                      </a:r>
+                    </a:p>
+                  </a:txBody>
+                  <a:tcPr>
+                    <a:solidFill>
+                      <a:srgbClr val="FFFFFF"/>
+                    </a:solidFill>
+                  </a:tcPr>
+                </a:tc>
+                <a:tc>
+                  <a:txBody>
+                    <a:bodyPr/>
+                    <a:lstStyle/>
+                    <a:p>
+                      <a:pPr algn="l"/>
+                      <a:r>
+                        <a:rPr sz="1000" b="0">
+                          <a:solidFill>
+                            <a:srgbClr val="1D1B43"/>
+                          </a:solidFill>
+                          <a:latin typeface="Calibri"/>
+                        </a:rPr>
+                        <a:t>30/04/2026</a:t>
+                      </a:r>
+                    </a:p>
+                  </a:txBody>
+                  <a:tcPr>
+                    <a:solidFill>
+                      <a:srgbClr val="FFFFFF"/>
                     </a:solidFill>
                   </a:tcPr>
                 </a:tc>
@@ -6162,218 +7683,218 @@
                   </a:txBody>
                   <a:tcPr>
                     <a:solidFill>
-                      <a:srgbClr val="F2F2F2"/>
+                      <a:srgbClr val="FFFFFF"/>
                     </a:solidFill>
                   </a:tcPr>
                 </a:tc>
               </a:tr>
-              <a:tr h="190500">
-                <a:tc>
-                  <a:txBody>
-                    <a:bodyPr/>
-                    <a:lstStyle/>
-                    <a:p>
-                      <a:pPr algn="l"/>
-                      <a:r>
-                        <a:rPr sz="1000" b="0">
-                          <a:solidFill>
-                            <a:srgbClr val="1D1B43"/>
-                          </a:solidFill>
-                          <a:latin typeface="Calibri"/>
-                        </a:rPr>
-                        <a:t>279774</a:t>
-                      </a:r>
-                    </a:p>
-                  </a:txBody>
-                  <a:tcPr>
-                    <a:solidFill>
-                      <a:srgbClr val="FFFFFF"/>
-                    </a:solidFill>
-                  </a:tcPr>
-                </a:tc>
-                <a:tc>
-                  <a:txBody>
-                    <a:bodyPr/>
-                    <a:lstStyle/>
-                    <a:p>
-                      <a:pPr algn="l"/>
-                      <a:r>
-                        <a:rPr sz="1000" b="0">
-                          <a:solidFill>
-                            <a:srgbClr val="1D1B43"/>
-                          </a:solidFill>
-                          <a:latin typeface="Calibri"/>
-                        </a:rPr>
-                        <a:t>LARISSA LUZIA ALVES - PIRAJUBA / MG</a:t>
-                      </a:r>
-                    </a:p>
-                  </a:txBody>
-                  <a:tcPr>
-                    <a:solidFill>
-                      <a:srgbClr val="FFFFFF"/>
-                    </a:solidFill>
-                  </a:tcPr>
-                </a:tc>
-                <a:tc>
-                  <a:txBody>
-                    <a:bodyPr/>
-                    <a:lstStyle/>
-                    <a:p>
-                      <a:pPr algn="l"/>
-                      <a:r>
-                        <a:rPr sz="1000" b="0">
-                          <a:solidFill>
-                            <a:srgbClr val="1D1B43"/>
-                          </a:solidFill>
-                          <a:latin typeface="Calibri"/>
-                        </a:rPr>
-                        <a:t>PIRAJUBA/MG</a:t>
-                      </a:r>
-                    </a:p>
-                  </a:txBody>
-                  <a:tcPr>
-                    <a:solidFill>
-                      <a:srgbClr val="FFFFFF"/>
-                    </a:solidFill>
-                  </a:tcPr>
-                </a:tc>
-                <a:tc>
-                  <a:txBody>
-                    <a:bodyPr/>
-                    <a:lstStyle/>
-                    <a:p>
-                      <a:pPr algn="l"/>
-                      <a:r>
-                        <a:rPr sz="1000" b="0">
-                          <a:solidFill>
-                            <a:srgbClr val="1D1B43"/>
-                          </a:solidFill>
-                          <a:latin typeface="Calibri"/>
-                        </a:rPr>
-                        <a:t>29/04/2026</a:t>
-                      </a:r>
-                    </a:p>
-                  </a:txBody>
-                  <a:tcPr>
-                    <a:solidFill>
-                      <a:srgbClr val="FFFFFF"/>
-                    </a:solidFill>
-                  </a:tcPr>
-                </a:tc>
-                <a:tc>
-                  <a:txBody>
-                    <a:bodyPr/>
-                    <a:lstStyle/>
-                    <a:p>
-                      <a:pPr algn="l"/>
-                      <a:r>
-                        <a:rPr sz="1000" b="0">
-                          <a:solidFill>
-                            <a:srgbClr val="1D1B43"/>
-                          </a:solidFill>
-                          <a:latin typeface="Calibri"/>
-                        </a:rPr>
-                        <a:t>FORA DO PRAZO</a:t>
-                      </a:r>
-                    </a:p>
-                  </a:txBody>
-                  <a:tcPr>
-                    <a:solidFill>
-                      <a:srgbClr val="FFFFFF"/>
+              <a:tr h="198782">
+                <a:tc>
+                  <a:txBody>
+                    <a:bodyPr/>
+                    <a:lstStyle/>
+                    <a:p>
+                      <a:pPr algn="l"/>
+                      <a:r>
+                        <a:rPr sz="1000" b="0">
+                          <a:solidFill>
+                            <a:srgbClr val="1D1B43"/>
+                          </a:solidFill>
+                          <a:latin typeface="Calibri"/>
+                        </a:rPr>
+                        <a:t>280254</a:t>
+                      </a:r>
+                    </a:p>
+                  </a:txBody>
+                  <a:tcPr>
+                    <a:solidFill>
+                      <a:srgbClr val="F2F2F2"/>
+                    </a:solidFill>
+                  </a:tcPr>
+                </a:tc>
+                <a:tc>
+                  <a:txBody>
+                    <a:bodyPr/>
+                    <a:lstStyle/>
+                    <a:p>
+                      <a:pPr algn="l"/>
+                      <a:r>
+                        <a:rPr sz="1000" b="0">
+                          <a:solidFill>
+                            <a:srgbClr val="1D1B43"/>
+                          </a:solidFill>
+                          <a:latin typeface="Calibri"/>
+                        </a:rPr>
+                        <a:t>43.474.701 TEREZINHA - FRANCISCO MORATO / SP</a:t>
+                      </a:r>
+                    </a:p>
+                  </a:txBody>
+                  <a:tcPr>
+                    <a:solidFill>
+                      <a:srgbClr val="F2F2F2"/>
+                    </a:solidFill>
+                  </a:tcPr>
+                </a:tc>
+                <a:tc>
+                  <a:txBody>
+                    <a:bodyPr/>
+                    <a:lstStyle/>
+                    <a:p>
+                      <a:pPr algn="l"/>
+                      <a:r>
+                        <a:rPr sz="1000" b="0">
+                          <a:solidFill>
+                            <a:srgbClr val="1D1B43"/>
+                          </a:solidFill>
+                          <a:latin typeface="Calibri"/>
+                        </a:rPr>
+                        <a:t>FRANCISCO MORATO/SP</a:t>
+                      </a:r>
+                    </a:p>
+                  </a:txBody>
+                  <a:tcPr>
+                    <a:solidFill>
+                      <a:srgbClr val="F2F2F2"/>
+                    </a:solidFill>
+                  </a:tcPr>
+                </a:tc>
+                <a:tc>
+                  <a:txBody>
+                    <a:bodyPr/>
+                    <a:lstStyle/>
+                    <a:p>
+                      <a:pPr algn="l"/>
+                      <a:r>
+                        <a:rPr sz="1000" b="0">
+                          <a:solidFill>
+                            <a:srgbClr val="1D1B43"/>
+                          </a:solidFill>
+                          <a:latin typeface="Calibri"/>
+                        </a:rPr>
+                        <a:t>30/04/2026</a:t>
+                      </a:r>
+                    </a:p>
+                  </a:txBody>
+                  <a:tcPr>
+                    <a:solidFill>
+                      <a:srgbClr val="F2F2F2"/>
+                    </a:solidFill>
+                  </a:tcPr>
+                </a:tc>
+                <a:tc>
+                  <a:txBody>
+                    <a:bodyPr/>
+                    <a:lstStyle/>
+                    <a:p>
+                      <a:pPr algn="l"/>
+                      <a:r>
+                        <a:rPr sz="1000" b="0">
+                          <a:solidFill>
+                            <a:srgbClr val="1D1B43"/>
+                          </a:solidFill>
+                          <a:latin typeface="Calibri"/>
+                        </a:rPr>
+                        <a:t>ENTREGUE FORA DO PRAZO</a:t>
+                      </a:r>
+                    </a:p>
+                  </a:txBody>
+                  <a:tcPr>
+                    <a:solidFill>
+                      <a:srgbClr val="F2F2F2"/>
                     </a:solidFill>
                   </a:tcPr>
                 </a:tc>
               </a:tr>
-              <a:tr h="190500">
-                <a:tc>
-                  <a:txBody>
-                    <a:bodyPr/>
-                    <a:lstStyle/>
-                    <a:p>
-                      <a:pPr algn="l"/>
-                      <a:r>
-                        <a:rPr sz="1000" b="0">
-                          <a:solidFill>
-                            <a:srgbClr val="1D1B43"/>
-                          </a:solidFill>
-                          <a:latin typeface="Calibri"/>
-                        </a:rPr>
-                        <a:t>279792</a:t>
-                      </a:r>
-                    </a:p>
-                  </a:txBody>
-                  <a:tcPr>
-                    <a:solidFill>
-                      <a:srgbClr val="F2F2F2"/>
-                    </a:solidFill>
-                  </a:tcPr>
-                </a:tc>
-                <a:tc>
-                  <a:txBody>
-                    <a:bodyPr/>
-                    <a:lstStyle/>
-                    <a:p>
-                      <a:pPr algn="l"/>
-                      <a:r>
-                        <a:rPr sz="1000" b="0">
-                          <a:solidFill>
-                            <a:srgbClr val="1D1B43"/>
-                          </a:solidFill>
-                          <a:latin typeface="Calibri"/>
-                        </a:rPr>
-                        <a:t>TANIA CENTER CALCADO - RIO POMBA / MG</a:t>
-                      </a:r>
-                    </a:p>
-                  </a:txBody>
-                  <a:tcPr>
-                    <a:solidFill>
-                      <a:srgbClr val="F2F2F2"/>
-                    </a:solidFill>
-                  </a:tcPr>
-                </a:tc>
-                <a:tc>
-                  <a:txBody>
-                    <a:bodyPr/>
-                    <a:lstStyle/>
-                    <a:p>
-                      <a:pPr algn="l"/>
-                      <a:r>
-                        <a:rPr sz="1000" b="0">
-                          <a:solidFill>
-                            <a:srgbClr val="1D1B43"/>
-                          </a:solidFill>
-                          <a:latin typeface="Calibri"/>
-                        </a:rPr>
-                        <a:t>RIO POMBA/MG</a:t>
-                      </a:r>
-                    </a:p>
-                  </a:txBody>
-                  <a:tcPr>
-                    <a:solidFill>
-                      <a:srgbClr val="F2F2F2"/>
-                    </a:solidFill>
-                  </a:tcPr>
-                </a:tc>
-                <a:tc>
-                  <a:txBody>
-                    <a:bodyPr/>
-                    <a:lstStyle/>
-                    <a:p>
-                      <a:pPr algn="l"/>
-                      <a:r>
-                        <a:rPr sz="1000" b="0">
-                          <a:solidFill>
-                            <a:srgbClr val="1D1B43"/>
-                          </a:solidFill>
-                          <a:latin typeface="Calibri"/>
-                        </a:rPr>
-                        <a:t>29/04/2026</a:t>
-                      </a:r>
-                    </a:p>
-                  </a:txBody>
-                  <a:tcPr>
-                    <a:solidFill>
-                      <a:srgbClr val="F2F2F2"/>
+              <a:tr h="198782">
+                <a:tc>
+                  <a:txBody>
+                    <a:bodyPr/>
+                    <a:lstStyle/>
+                    <a:p>
+                      <a:pPr algn="l"/>
+                      <a:r>
+                        <a:rPr sz="1000" b="0">
+                          <a:solidFill>
+                            <a:srgbClr val="1D1B43"/>
+                          </a:solidFill>
+                          <a:latin typeface="Calibri"/>
+                        </a:rPr>
+                        <a:t>280262</a:t>
+                      </a:r>
+                    </a:p>
+                  </a:txBody>
+                  <a:tcPr>
+                    <a:solidFill>
+                      <a:srgbClr val="FFFFFF"/>
+                    </a:solidFill>
+                  </a:tcPr>
+                </a:tc>
+                <a:tc>
+                  <a:txBody>
+                    <a:bodyPr/>
+                    <a:lstStyle/>
+                    <a:p>
+                      <a:pPr algn="l"/>
+                      <a:r>
+                        <a:rPr sz="1000" b="0">
+                          <a:solidFill>
+                            <a:srgbClr val="1D1B43"/>
+                          </a:solidFill>
+                          <a:latin typeface="Calibri"/>
+                        </a:rPr>
+                        <a:t>62.209.212 EVELLYN A - IBITIRAMA / ES</a:t>
+                      </a:r>
+                    </a:p>
+                  </a:txBody>
+                  <a:tcPr>
+                    <a:solidFill>
+                      <a:srgbClr val="FFFFFF"/>
+                    </a:solidFill>
+                  </a:tcPr>
+                </a:tc>
+                <a:tc>
+                  <a:txBody>
+                    <a:bodyPr/>
+                    <a:lstStyle/>
+                    <a:p>
+                      <a:pPr algn="l"/>
+                      <a:r>
+                        <a:rPr sz="1000" b="0">
+                          <a:solidFill>
+                            <a:srgbClr val="1D1B43"/>
+                          </a:solidFill>
+                          <a:latin typeface="Calibri"/>
+                        </a:rPr>
+                        <a:t>IBITIRAMA/ES</a:t>
+                      </a:r>
+                    </a:p>
+                  </a:txBody>
+                  <a:tcPr>
+                    <a:solidFill>
+                      <a:srgbClr val="FFFFFF"/>
+                    </a:solidFill>
+                  </a:tcPr>
+                </a:tc>
+                <a:tc>
+                  <a:txBody>
+                    <a:bodyPr/>
+                    <a:lstStyle/>
+                    <a:p>
+                      <a:pPr algn="l"/>
+                      <a:r>
+                        <a:rPr sz="1000" b="0">
+                          <a:solidFill>
+                            <a:srgbClr val="1D1B43"/>
+                          </a:solidFill>
+                          <a:latin typeface="Calibri"/>
+                        </a:rPr>
+                        <a:t>30/04/2026</a:t>
+                      </a:r>
+                    </a:p>
+                  </a:txBody>
+                  <a:tcPr>
+                    <a:solidFill>
+                      <a:srgbClr val="FFFFFF"/>
                     </a:solidFill>
                   </a:tcPr>
                 </a:tc>
@@ -6396,101 +7917,101 @@
                   </a:txBody>
                   <a:tcPr>
                     <a:solidFill>
-                      <a:srgbClr val="F2F2F2"/>
+                      <a:srgbClr val="FFFFFF"/>
                     </a:solidFill>
                   </a:tcPr>
                 </a:tc>
               </a:tr>
-              <a:tr h="190500">
-                <a:tc>
-                  <a:txBody>
-                    <a:bodyPr/>
-                    <a:lstStyle/>
-                    <a:p>
-                      <a:pPr algn="l"/>
-                      <a:r>
-                        <a:rPr sz="1000" b="0">
-                          <a:solidFill>
-                            <a:srgbClr val="1D1B43"/>
-                          </a:solidFill>
-                          <a:latin typeface="Calibri"/>
-                        </a:rPr>
-                        <a:t>279794</a:t>
-                      </a:r>
-                    </a:p>
-                  </a:txBody>
-                  <a:tcPr>
-                    <a:solidFill>
-                      <a:srgbClr val="FFFFFF"/>
-                    </a:solidFill>
-                  </a:tcPr>
-                </a:tc>
-                <a:tc>
-                  <a:txBody>
-                    <a:bodyPr/>
-                    <a:lstStyle/>
-                    <a:p>
-                      <a:pPr algn="l"/>
-                      <a:r>
-                        <a:rPr sz="1000" b="0">
-                          <a:solidFill>
-                            <a:srgbClr val="1D1B43"/>
-                          </a:solidFill>
-                          <a:latin typeface="Calibri"/>
-                        </a:rPr>
-                        <a:t>J B COMERCIO DE ROUP - SERRA / ES</a:t>
-                      </a:r>
-                    </a:p>
-                  </a:txBody>
-                  <a:tcPr>
-                    <a:solidFill>
-                      <a:srgbClr val="FFFFFF"/>
-                    </a:solidFill>
-                  </a:tcPr>
-                </a:tc>
-                <a:tc>
-                  <a:txBody>
-                    <a:bodyPr/>
-                    <a:lstStyle/>
-                    <a:p>
-                      <a:pPr algn="l"/>
-                      <a:r>
-                        <a:rPr sz="1000" b="0">
-                          <a:solidFill>
-                            <a:srgbClr val="1D1B43"/>
-                          </a:solidFill>
-                          <a:latin typeface="Calibri"/>
-                        </a:rPr>
-                        <a:t>SERRA/ES</a:t>
-                      </a:r>
-                    </a:p>
-                  </a:txBody>
-                  <a:tcPr>
-                    <a:solidFill>
-                      <a:srgbClr val="FFFFFF"/>
-                    </a:solidFill>
-                  </a:tcPr>
-                </a:tc>
-                <a:tc>
-                  <a:txBody>
-                    <a:bodyPr/>
-                    <a:lstStyle/>
-                    <a:p>
-                      <a:pPr algn="l"/>
-                      <a:r>
-                        <a:rPr sz="1000" b="0">
-                          <a:solidFill>
-                            <a:srgbClr val="1D1B43"/>
-                          </a:solidFill>
-                          <a:latin typeface="Calibri"/>
-                        </a:rPr>
-                        <a:t>29/04/2026</a:t>
-                      </a:r>
-                    </a:p>
-                  </a:txBody>
-                  <a:tcPr>
-                    <a:solidFill>
-                      <a:srgbClr val="FFFFFF"/>
+              <a:tr h="198782">
+                <a:tc>
+                  <a:txBody>
+                    <a:bodyPr/>
+                    <a:lstStyle/>
+                    <a:p>
+                      <a:pPr algn="l"/>
+                      <a:r>
+                        <a:rPr sz="1000" b="0">
+                          <a:solidFill>
+                            <a:srgbClr val="1D1B43"/>
+                          </a:solidFill>
+                          <a:latin typeface="Calibri"/>
+                        </a:rPr>
+                        <a:t>280266</a:t>
+                      </a:r>
+                    </a:p>
+                  </a:txBody>
+                  <a:tcPr>
+                    <a:solidFill>
+                      <a:srgbClr val="F2F2F2"/>
+                    </a:solidFill>
+                  </a:tcPr>
+                </a:tc>
+                <a:tc>
+                  <a:txBody>
+                    <a:bodyPr/>
+                    <a:lstStyle/>
+                    <a:p>
+                      <a:pPr algn="l"/>
+                      <a:r>
+                        <a:rPr sz="1000" b="0">
+                          <a:solidFill>
+                            <a:srgbClr val="1D1B43"/>
+                          </a:solidFill>
+                          <a:latin typeface="Calibri"/>
+                        </a:rPr>
+                        <a:t>11.681.910 DARLENE G - BIRITIBA-MIRIM / SP</a:t>
+                      </a:r>
+                    </a:p>
+                  </a:txBody>
+                  <a:tcPr>
+                    <a:solidFill>
+                      <a:srgbClr val="F2F2F2"/>
+                    </a:solidFill>
+                  </a:tcPr>
+                </a:tc>
+                <a:tc>
+                  <a:txBody>
+                    <a:bodyPr/>
+                    <a:lstStyle/>
+                    <a:p>
+                      <a:pPr algn="l"/>
+                      <a:r>
+                        <a:rPr sz="1000" b="0">
+                          <a:solidFill>
+                            <a:srgbClr val="1D1B43"/>
+                          </a:solidFill>
+                          <a:latin typeface="Calibri"/>
+                        </a:rPr>
+                        <a:t>BIRITIBA-MIRIM/SP</a:t>
+                      </a:r>
+                    </a:p>
+                  </a:txBody>
+                  <a:tcPr>
+                    <a:solidFill>
+                      <a:srgbClr val="F2F2F2"/>
+                    </a:solidFill>
+                  </a:tcPr>
+                </a:tc>
+                <a:tc>
+                  <a:txBody>
+                    <a:bodyPr/>
+                    <a:lstStyle/>
+                    <a:p>
+                      <a:pPr algn="l"/>
+                      <a:r>
+                        <a:rPr sz="1000" b="0">
+                          <a:solidFill>
+                            <a:srgbClr val="1D1B43"/>
+                          </a:solidFill>
+                          <a:latin typeface="Calibri"/>
+                        </a:rPr>
+                        <a:t>30/04/2026</a:t>
+                      </a:r>
+                    </a:p>
+                  </a:txBody>
+                  <a:tcPr>
+                    <a:solidFill>
+                      <a:srgbClr val="F2F2F2"/>
                     </a:solidFill>
                   </a:tcPr>
                 </a:tc>
@@ -6513,1645 +8034,7 @@
                   </a:txBody>
                   <a:tcPr>
                     <a:solidFill>
-                      <a:srgbClr val="FFFFFF"/>
-                    </a:solidFill>
-                  </a:tcPr>
-                </a:tc>
-              </a:tr>
-              <a:tr h="190500">
-                <a:tc>
-                  <a:txBody>
-                    <a:bodyPr/>
-                    <a:lstStyle/>
-                    <a:p>
-                      <a:pPr algn="l"/>
-                      <a:r>
-                        <a:rPr sz="1000" b="0">
-                          <a:solidFill>
-                            <a:srgbClr val="1D1B43"/>
-                          </a:solidFill>
-                          <a:latin typeface="Calibri"/>
-                        </a:rPr>
-                        <a:t>279799</a:t>
-                      </a:r>
-                    </a:p>
-                  </a:txBody>
-                  <a:tcPr>
-                    <a:solidFill>
-                      <a:srgbClr val="F2F2F2"/>
-                    </a:solidFill>
-                  </a:tcPr>
-                </a:tc>
-                <a:tc>
-                  <a:txBody>
-                    <a:bodyPr/>
-                    <a:lstStyle/>
-                    <a:p>
-                      <a:pPr algn="l"/>
-                      <a:r>
-                        <a:rPr sz="1000" b="0">
-                          <a:solidFill>
-                            <a:srgbClr val="1D1B43"/>
-                          </a:solidFill>
-                          <a:latin typeface="Calibri"/>
-                        </a:rPr>
-                        <a:t>C J L DE OLIVEIRA - IRUPI / ES</a:t>
-                      </a:r>
-                    </a:p>
-                  </a:txBody>
-                  <a:tcPr>
-                    <a:solidFill>
-                      <a:srgbClr val="F2F2F2"/>
-                    </a:solidFill>
-                  </a:tcPr>
-                </a:tc>
-                <a:tc>
-                  <a:txBody>
-                    <a:bodyPr/>
-                    <a:lstStyle/>
-                    <a:p>
-                      <a:pPr algn="l"/>
-                      <a:r>
-                        <a:rPr sz="1000" b="0">
-                          <a:solidFill>
-                            <a:srgbClr val="1D1B43"/>
-                          </a:solidFill>
-                          <a:latin typeface="Calibri"/>
-                        </a:rPr>
-                        <a:t>IRUPI/ES</a:t>
-                      </a:r>
-                    </a:p>
-                  </a:txBody>
-                  <a:tcPr>
-                    <a:solidFill>
-                      <a:srgbClr val="F2F2F2"/>
-                    </a:solidFill>
-                  </a:tcPr>
-                </a:tc>
-                <a:tc>
-                  <a:txBody>
-                    <a:bodyPr/>
-                    <a:lstStyle/>
-                    <a:p>
-                      <a:pPr algn="l"/>
-                      <a:r>
-                        <a:rPr sz="1000" b="0">
-                          <a:solidFill>
-                            <a:srgbClr val="1D1B43"/>
-                          </a:solidFill>
-                          <a:latin typeface="Calibri"/>
-                        </a:rPr>
-                        <a:t>29/04/2026</a:t>
-                      </a:r>
-                    </a:p>
-                  </a:txBody>
-                  <a:tcPr>
-                    <a:solidFill>
-                      <a:srgbClr val="F2F2F2"/>
-                    </a:solidFill>
-                  </a:tcPr>
-                </a:tc>
-                <a:tc>
-                  <a:txBody>
-                    <a:bodyPr/>
-                    <a:lstStyle/>
-                    <a:p>
-                      <a:pPr algn="l"/>
-                      <a:r>
-                        <a:rPr sz="1000" b="0">
-                          <a:solidFill>
-                            <a:srgbClr val="1D1B43"/>
-                          </a:solidFill>
-                          <a:latin typeface="Calibri"/>
-                        </a:rPr>
-                        <a:t>FORA DO PRAZO</a:t>
-                      </a:r>
-                    </a:p>
-                  </a:txBody>
-                  <a:tcPr>
-                    <a:solidFill>
-                      <a:srgbClr val="F2F2F2"/>
-                    </a:solidFill>
-                  </a:tcPr>
-                </a:tc>
-              </a:tr>
-              <a:tr h="190500">
-                <a:tc>
-                  <a:txBody>
-                    <a:bodyPr/>
-                    <a:lstStyle/>
-                    <a:p>
-                      <a:pPr algn="l"/>
-                      <a:r>
-                        <a:rPr sz="1000" b="0">
-                          <a:solidFill>
-                            <a:srgbClr val="1D1B43"/>
-                          </a:solidFill>
-                          <a:latin typeface="Calibri"/>
-                        </a:rPr>
-                        <a:t>279800</a:t>
-                      </a:r>
-                    </a:p>
-                  </a:txBody>
-                  <a:tcPr>
-                    <a:solidFill>
-                      <a:srgbClr val="FFFFFF"/>
-                    </a:solidFill>
-                  </a:tcPr>
-                </a:tc>
-                <a:tc>
-                  <a:txBody>
-                    <a:bodyPr/>
-                    <a:lstStyle/>
-                    <a:p>
-                      <a:pPr algn="l"/>
-                      <a:r>
-                        <a:rPr sz="1000" b="0">
-                          <a:solidFill>
-                            <a:srgbClr val="1D1B43"/>
-                          </a:solidFill>
-                          <a:latin typeface="Calibri"/>
-                        </a:rPr>
-                        <a:t>ALLURE SHOES E ACESS - JERONIMO MONTEIRO / ES</a:t>
-                      </a:r>
-                    </a:p>
-                  </a:txBody>
-                  <a:tcPr>
-                    <a:solidFill>
-                      <a:srgbClr val="FFFFFF"/>
-                    </a:solidFill>
-                  </a:tcPr>
-                </a:tc>
-                <a:tc>
-                  <a:txBody>
-                    <a:bodyPr/>
-                    <a:lstStyle/>
-                    <a:p>
-                      <a:pPr algn="l"/>
-                      <a:r>
-                        <a:rPr sz="1000" b="0">
-                          <a:solidFill>
-                            <a:srgbClr val="1D1B43"/>
-                          </a:solidFill>
-                          <a:latin typeface="Calibri"/>
-                        </a:rPr>
-                        <a:t>JERONIMO MONTEIRO/ES</a:t>
-                      </a:r>
-                    </a:p>
-                  </a:txBody>
-                  <a:tcPr>
-                    <a:solidFill>
-                      <a:srgbClr val="FFFFFF"/>
-                    </a:solidFill>
-                  </a:tcPr>
-                </a:tc>
-                <a:tc>
-                  <a:txBody>
-                    <a:bodyPr/>
-                    <a:lstStyle/>
-                    <a:p>
-                      <a:pPr algn="l"/>
-                      <a:r>
-                        <a:rPr sz="1000" b="0">
-                          <a:solidFill>
-                            <a:srgbClr val="1D1B43"/>
-                          </a:solidFill>
-                          <a:latin typeface="Calibri"/>
-                        </a:rPr>
-                        <a:t>29/04/2026</a:t>
-                      </a:r>
-                    </a:p>
-                  </a:txBody>
-                  <a:tcPr>
-                    <a:solidFill>
-                      <a:srgbClr val="FFFFFF"/>
-                    </a:solidFill>
-                  </a:tcPr>
-                </a:tc>
-                <a:tc>
-                  <a:txBody>
-                    <a:bodyPr/>
-                    <a:lstStyle/>
-                    <a:p>
-                      <a:pPr algn="l"/>
-                      <a:r>
-                        <a:rPr sz="1000" b="0">
-                          <a:solidFill>
-                            <a:srgbClr val="1D1B43"/>
-                          </a:solidFill>
-                          <a:latin typeface="Calibri"/>
-                        </a:rPr>
-                        <a:t>ENTREGUE FORA DO PRAZO</a:t>
-                      </a:r>
-                    </a:p>
-                  </a:txBody>
-                  <a:tcPr>
-                    <a:solidFill>
-                      <a:srgbClr val="FFFFFF"/>
-                    </a:solidFill>
-                  </a:tcPr>
-                </a:tc>
-              </a:tr>
-              <a:tr h="190500">
-                <a:tc>
-                  <a:txBody>
-                    <a:bodyPr/>
-                    <a:lstStyle/>
-                    <a:p>
-                      <a:pPr algn="l"/>
-                      <a:r>
-                        <a:rPr sz="1000" b="0">
-                          <a:solidFill>
-                            <a:srgbClr val="1D1B43"/>
-                          </a:solidFill>
-                          <a:latin typeface="Calibri"/>
-                        </a:rPr>
-                        <a:t>279802</a:t>
-                      </a:r>
-                    </a:p>
-                  </a:txBody>
-                  <a:tcPr>
-                    <a:solidFill>
-                      <a:srgbClr val="F2F2F2"/>
-                    </a:solidFill>
-                  </a:tcPr>
-                </a:tc>
-                <a:tc>
-                  <a:txBody>
-                    <a:bodyPr/>
-                    <a:lstStyle/>
-                    <a:p>
-                      <a:pPr algn="l"/>
-                      <a:r>
-                        <a:rPr sz="1000" b="0">
-                          <a:solidFill>
-                            <a:srgbClr val="1D1B43"/>
-                          </a:solidFill>
-                          <a:latin typeface="Calibri"/>
-                        </a:rPr>
-                        <a:t>CONFECCOES BROEDEL L - CARIACICA / ES</a:t>
-                      </a:r>
-                    </a:p>
-                  </a:txBody>
-                  <a:tcPr>
-                    <a:solidFill>
-                      <a:srgbClr val="F2F2F2"/>
-                    </a:solidFill>
-                  </a:tcPr>
-                </a:tc>
-                <a:tc>
-                  <a:txBody>
-                    <a:bodyPr/>
-                    <a:lstStyle/>
-                    <a:p>
-                      <a:pPr algn="l"/>
-                      <a:r>
-                        <a:rPr sz="1000" b="0">
-                          <a:solidFill>
-                            <a:srgbClr val="1D1B43"/>
-                          </a:solidFill>
-                          <a:latin typeface="Calibri"/>
-                        </a:rPr>
-                        <a:t>CARIACICA/ES</a:t>
-                      </a:r>
-                    </a:p>
-                  </a:txBody>
-                  <a:tcPr>
-                    <a:solidFill>
-                      <a:srgbClr val="F2F2F2"/>
-                    </a:solidFill>
-                  </a:tcPr>
-                </a:tc>
-                <a:tc>
-                  <a:txBody>
-                    <a:bodyPr/>
-                    <a:lstStyle/>
-                    <a:p>
-                      <a:pPr algn="l"/>
-                      <a:r>
-                        <a:rPr sz="1000" b="0">
-                          <a:solidFill>
-                            <a:srgbClr val="1D1B43"/>
-                          </a:solidFill>
-                          <a:latin typeface="Calibri"/>
-                        </a:rPr>
-                        <a:t>29/04/2026</a:t>
-                      </a:r>
-                    </a:p>
-                  </a:txBody>
-                  <a:tcPr>
-                    <a:solidFill>
-                      <a:srgbClr val="F2F2F2"/>
-                    </a:solidFill>
-                  </a:tcPr>
-                </a:tc>
-                <a:tc>
-                  <a:txBody>
-                    <a:bodyPr/>
-                    <a:lstStyle/>
-                    <a:p>
-                      <a:pPr algn="l"/>
-                      <a:r>
-                        <a:rPr sz="1000" b="0">
-                          <a:solidFill>
-                            <a:srgbClr val="1D1B43"/>
-                          </a:solidFill>
-                          <a:latin typeface="Calibri"/>
-                        </a:rPr>
-                        <a:t>ENTREGUE FORA DO PRAZO</a:t>
-                      </a:r>
-                    </a:p>
-                  </a:txBody>
-                  <a:tcPr>
-                    <a:solidFill>
-                      <a:srgbClr val="F2F2F2"/>
-                    </a:solidFill>
-                  </a:tcPr>
-                </a:tc>
-              </a:tr>
-              <a:tr h="190500">
-                <a:tc>
-                  <a:txBody>
-                    <a:bodyPr/>
-                    <a:lstStyle/>
-                    <a:p>
-                      <a:pPr algn="l"/>
-                      <a:r>
-                        <a:rPr sz="1000" b="0">
-                          <a:solidFill>
-                            <a:srgbClr val="1D1B43"/>
-                          </a:solidFill>
-                          <a:latin typeface="Calibri"/>
-                        </a:rPr>
-                        <a:t>279805</a:t>
-                      </a:r>
-                    </a:p>
-                  </a:txBody>
-                  <a:tcPr>
-                    <a:solidFill>
-                      <a:srgbClr val="FFFFFF"/>
-                    </a:solidFill>
-                  </a:tcPr>
-                </a:tc>
-                <a:tc>
-                  <a:txBody>
-                    <a:bodyPr/>
-                    <a:lstStyle/>
-                    <a:p>
-                      <a:pPr algn="l"/>
-                      <a:r>
-                        <a:rPr sz="1000" b="0">
-                          <a:solidFill>
-                            <a:srgbClr val="1D1B43"/>
-                          </a:solidFill>
-                          <a:latin typeface="Calibri"/>
-                        </a:rPr>
-                        <a:t>GESSICA CHIEPPE 1363 - MARILANDIA / ES</a:t>
-                      </a:r>
-                    </a:p>
-                  </a:txBody>
-                  <a:tcPr>
-                    <a:solidFill>
-                      <a:srgbClr val="FFFFFF"/>
-                    </a:solidFill>
-                  </a:tcPr>
-                </a:tc>
-                <a:tc>
-                  <a:txBody>
-                    <a:bodyPr/>
-                    <a:lstStyle/>
-                    <a:p>
-                      <a:pPr algn="l"/>
-                      <a:r>
-                        <a:rPr sz="1000" b="0">
-                          <a:solidFill>
-                            <a:srgbClr val="1D1B43"/>
-                          </a:solidFill>
-                          <a:latin typeface="Calibri"/>
-                        </a:rPr>
-                        <a:t>MARILANDIA/ES</a:t>
-                      </a:r>
-                    </a:p>
-                  </a:txBody>
-                  <a:tcPr>
-                    <a:solidFill>
-                      <a:srgbClr val="FFFFFF"/>
-                    </a:solidFill>
-                  </a:tcPr>
-                </a:tc>
-                <a:tc>
-                  <a:txBody>
-                    <a:bodyPr/>
-                    <a:lstStyle/>
-                    <a:p>
-                      <a:pPr algn="l"/>
-                      <a:r>
-                        <a:rPr sz="1000" b="0">
-                          <a:solidFill>
-                            <a:srgbClr val="1D1B43"/>
-                          </a:solidFill>
-                          <a:latin typeface="Calibri"/>
-                        </a:rPr>
-                        <a:t>29/04/2026</a:t>
-                      </a:r>
-                    </a:p>
-                  </a:txBody>
-                  <a:tcPr>
-                    <a:solidFill>
-                      <a:srgbClr val="FFFFFF"/>
-                    </a:solidFill>
-                  </a:tcPr>
-                </a:tc>
-                <a:tc>
-                  <a:txBody>
-                    <a:bodyPr/>
-                    <a:lstStyle/>
-                    <a:p>
-                      <a:pPr algn="l"/>
-                      <a:r>
-                        <a:rPr sz="1000" b="0">
-                          <a:solidFill>
-                            <a:srgbClr val="1D1B43"/>
-                          </a:solidFill>
-                          <a:latin typeface="Calibri"/>
-                        </a:rPr>
-                        <a:t>FORA DO PRAZO</a:t>
-                      </a:r>
-                    </a:p>
-                  </a:txBody>
-                  <a:tcPr>
-                    <a:solidFill>
-                      <a:srgbClr val="FFFFFF"/>
-                    </a:solidFill>
-                  </a:tcPr>
-                </a:tc>
-              </a:tr>
-              <a:tr h="190500">
-                <a:tc>
-                  <a:txBody>
-                    <a:bodyPr/>
-                    <a:lstStyle/>
-                    <a:p>
-                      <a:pPr algn="l"/>
-                      <a:r>
-                        <a:rPr sz="1000" b="0">
-                          <a:solidFill>
-                            <a:srgbClr val="1D1B43"/>
-                          </a:solidFill>
-                          <a:latin typeface="Calibri"/>
-                        </a:rPr>
-                        <a:t>279995</a:t>
-                      </a:r>
-                    </a:p>
-                  </a:txBody>
-                  <a:tcPr>
-                    <a:solidFill>
-                      <a:srgbClr val="F2F2F2"/>
-                    </a:solidFill>
-                  </a:tcPr>
-                </a:tc>
-                <a:tc>
-                  <a:txBody>
-                    <a:bodyPr/>
-                    <a:lstStyle/>
-                    <a:p>
-                      <a:pPr algn="l"/>
-                      <a:r>
-                        <a:rPr sz="1000" b="0">
-                          <a:solidFill>
-                            <a:srgbClr val="1D1B43"/>
-                          </a:solidFill>
-                          <a:latin typeface="Calibri"/>
-                        </a:rPr>
-                        <a:t>DI DELLE CALCADOS LT - ARACRUZ / ES</a:t>
-                      </a:r>
-                    </a:p>
-                  </a:txBody>
-                  <a:tcPr>
-                    <a:solidFill>
-                      <a:srgbClr val="F2F2F2"/>
-                    </a:solidFill>
-                  </a:tcPr>
-                </a:tc>
-                <a:tc>
-                  <a:txBody>
-                    <a:bodyPr/>
-                    <a:lstStyle/>
-                    <a:p>
-                      <a:pPr algn="l"/>
-                      <a:r>
-                        <a:rPr sz="1000" b="0">
-                          <a:solidFill>
-                            <a:srgbClr val="1D1B43"/>
-                          </a:solidFill>
-                          <a:latin typeface="Calibri"/>
-                        </a:rPr>
-                        <a:t>ARACRUZ/ES</a:t>
-                      </a:r>
-                    </a:p>
-                  </a:txBody>
-                  <a:tcPr>
-                    <a:solidFill>
-                      <a:srgbClr val="F2F2F2"/>
-                    </a:solidFill>
-                  </a:tcPr>
-                </a:tc>
-                <a:tc>
-                  <a:txBody>
-                    <a:bodyPr/>
-                    <a:lstStyle/>
-                    <a:p>
-                      <a:pPr algn="l"/>
-                      <a:r>
-                        <a:rPr sz="1000" b="0">
-                          <a:solidFill>
-                            <a:srgbClr val="1D1B43"/>
-                          </a:solidFill>
-                          <a:latin typeface="Calibri"/>
-                        </a:rPr>
-                        <a:t>29/04/2026</a:t>
-                      </a:r>
-                    </a:p>
-                  </a:txBody>
-                  <a:tcPr>
-                    <a:solidFill>
-                      <a:srgbClr val="F2F2F2"/>
-                    </a:solidFill>
-                  </a:tcPr>
-                </a:tc>
-                <a:tc>
-                  <a:txBody>
-                    <a:bodyPr/>
-                    <a:lstStyle/>
-                    <a:p>
-                      <a:pPr algn="l"/>
-                      <a:r>
-                        <a:rPr sz="1000" b="0">
-                          <a:solidFill>
-                            <a:srgbClr val="1D1B43"/>
-                          </a:solidFill>
-                          <a:latin typeface="Calibri"/>
-                        </a:rPr>
-                        <a:t>ENTREGUE FORA DO PRAZO</a:t>
-                      </a:r>
-                    </a:p>
-                  </a:txBody>
-                  <a:tcPr>
-                    <a:solidFill>
-                      <a:srgbClr val="F2F2F2"/>
-                    </a:solidFill>
-                  </a:tcPr>
-                </a:tc>
-              </a:tr>
-              <a:tr h="190500">
-                <a:tc>
-                  <a:txBody>
-                    <a:bodyPr/>
-                    <a:lstStyle/>
-                    <a:p>
-                      <a:pPr algn="l"/>
-                      <a:r>
-                        <a:rPr sz="1000" b="0">
-                          <a:solidFill>
-                            <a:srgbClr val="1D1B43"/>
-                          </a:solidFill>
-                          <a:latin typeface="Calibri"/>
-                        </a:rPr>
-                        <a:t>279997</a:t>
-                      </a:r>
-                    </a:p>
-                  </a:txBody>
-                  <a:tcPr>
-                    <a:solidFill>
-                      <a:srgbClr val="FFFFFF"/>
-                    </a:solidFill>
-                  </a:tcPr>
-                </a:tc>
-                <a:tc>
-                  <a:txBody>
-                    <a:bodyPr/>
-                    <a:lstStyle/>
-                    <a:p>
-                      <a:pPr algn="l"/>
-                      <a:r>
-                        <a:rPr sz="1000" b="0">
-                          <a:solidFill>
-                            <a:srgbClr val="1D1B43"/>
-                          </a:solidFill>
-                          <a:latin typeface="Calibri"/>
-                        </a:rPr>
-                        <a:t>STAR SHOES LTDA - GUACUI / ES</a:t>
-                      </a:r>
-                    </a:p>
-                  </a:txBody>
-                  <a:tcPr>
-                    <a:solidFill>
-                      <a:srgbClr val="FFFFFF"/>
-                    </a:solidFill>
-                  </a:tcPr>
-                </a:tc>
-                <a:tc>
-                  <a:txBody>
-                    <a:bodyPr/>
-                    <a:lstStyle/>
-                    <a:p>
-                      <a:pPr algn="l"/>
-                      <a:r>
-                        <a:rPr sz="1000" b="0">
-                          <a:solidFill>
-                            <a:srgbClr val="1D1B43"/>
-                          </a:solidFill>
-                          <a:latin typeface="Calibri"/>
-                        </a:rPr>
-                        <a:t>GUACUI/ES</a:t>
-                      </a:r>
-                    </a:p>
-                  </a:txBody>
-                  <a:tcPr>
-                    <a:solidFill>
-                      <a:srgbClr val="FFFFFF"/>
-                    </a:solidFill>
-                  </a:tcPr>
-                </a:tc>
-                <a:tc>
-                  <a:txBody>
-                    <a:bodyPr/>
-                    <a:lstStyle/>
-                    <a:p>
-                      <a:pPr algn="l"/>
-                      <a:r>
-                        <a:rPr sz="1000" b="0">
-                          <a:solidFill>
-                            <a:srgbClr val="1D1B43"/>
-                          </a:solidFill>
-                          <a:latin typeface="Calibri"/>
-                        </a:rPr>
-                        <a:t>29/04/2026</a:t>
-                      </a:r>
-                    </a:p>
-                  </a:txBody>
-                  <a:tcPr>
-                    <a:solidFill>
-                      <a:srgbClr val="FFFFFF"/>
-                    </a:solidFill>
-                  </a:tcPr>
-                </a:tc>
-                <a:tc>
-                  <a:txBody>
-                    <a:bodyPr/>
-                    <a:lstStyle/>
-                    <a:p>
-                      <a:pPr algn="l"/>
-                      <a:r>
-                        <a:rPr sz="1000" b="0">
-                          <a:solidFill>
-                            <a:srgbClr val="1D1B43"/>
-                          </a:solidFill>
-                          <a:latin typeface="Calibri"/>
-                        </a:rPr>
-                        <a:t>FORA DO PRAZO</a:t>
-                      </a:r>
-                    </a:p>
-                  </a:txBody>
-                  <a:tcPr>
-                    <a:solidFill>
-                      <a:srgbClr val="FFFFFF"/>
-                    </a:solidFill>
-                  </a:tcPr>
-                </a:tc>
-              </a:tr>
-              <a:tr h="190500">
-                <a:tc>
-                  <a:txBody>
-                    <a:bodyPr/>
-                    <a:lstStyle/>
-                    <a:p>
-                      <a:pPr algn="l"/>
-                      <a:r>
-                        <a:rPr sz="1000" b="0">
-                          <a:solidFill>
-                            <a:srgbClr val="1D1B43"/>
-                          </a:solidFill>
-                          <a:latin typeface="Calibri"/>
-                        </a:rPr>
-                        <a:t>280031</a:t>
-                      </a:r>
-                    </a:p>
-                  </a:txBody>
-                  <a:tcPr>
-                    <a:solidFill>
-                      <a:srgbClr val="F2F2F2"/>
-                    </a:solidFill>
-                  </a:tcPr>
-                </a:tc>
-                <a:tc>
-                  <a:txBody>
-                    <a:bodyPr/>
-                    <a:lstStyle/>
-                    <a:p>
-                      <a:pPr algn="l"/>
-                      <a:r>
-                        <a:rPr sz="1000" b="0">
-                          <a:solidFill>
-                            <a:srgbClr val="1D1B43"/>
-                          </a:solidFill>
-                          <a:latin typeface="Calibri"/>
-                        </a:rPr>
-                        <a:t>M STORE COMERCIO LTD - IBIRACU / ES</a:t>
-                      </a:r>
-                    </a:p>
-                  </a:txBody>
-                  <a:tcPr>
-                    <a:solidFill>
-                      <a:srgbClr val="F2F2F2"/>
-                    </a:solidFill>
-                  </a:tcPr>
-                </a:tc>
-                <a:tc>
-                  <a:txBody>
-                    <a:bodyPr/>
-                    <a:lstStyle/>
-                    <a:p>
-                      <a:pPr algn="l"/>
-                      <a:r>
-                        <a:rPr sz="1000" b="0">
-                          <a:solidFill>
-                            <a:srgbClr val="1D1B43"/>
-                          </a:solidFill>
-                          <a:latin typeface="Calibri"/>
-                        </a:rPr>
-                        <a:t>IBIRACU/ES</a:t>
-                      </a:r>
-                    </a:p>
-                  </a:txBody>
-                  <a:tcPr>
-                    <a:solidFill>
-                      <a:srgbClr val="F2F2F2"/>
-                    </a:solidFill>
-                  </a:tcPr>
-                </a:tc>
-                <a:tc>
-                  <a:txBody>
-                    <a:bodyPr/>
-                    <a:lstStyle/>
-                    <a:p>
-                      <a:pPr algn="l"/>
-                      <a:r>
-                        <a:rPr sz="1000" b="0">
-                          <a:solidFill>
-                            <a:srgbClr val="1D1B43"/>
-                          </a:solidFill>
-                          <a:latin typeface="Calibri"/>
-                        </a:rPr>
-                        <a:t>29/04/2026</a:t>
-                      </a:r>
-                    </a:p>
-                  </a:txBody>
-                  <a:tcPr>
-                    <a:solidFill>
-                      <a:srgbClr val="F2F2F2"/>
-                    </a:solidFill>
-                  </a:tcPr>
-                </a:tc>
-                <a:tc>
-                  <a:txBody>
-                    <a:bodyPr/>
-                    <a:lstStyle/>
-                    <a:p>
-                      <a:pPr algn="l"/>
-                      <a:r>
-                        <a:rPr sz="1000" b="0">
-                          <a:solidFill>
-                            <a:srgbClr val="1D1B43"/>
-                          </a:solidFill>
-                          <a:latin typeface="Calibri"/>
-                        </a:rPr>
-                        <a:t>FORA DO PRAZO</a:t>
-                      </a:r>
-                    </a:p>
-                  </a:txBody>
-                  <a:tcPr>
-                    <a:solidFill>
-                      <a:srgbClr val="F2F2F2"/>
-                    </a:solidFill>
-                  </a:tcPr>
-                </a:tc>
-              </a:tr>
-              <a:tr h="190500">
-                <a:tc>
-                  <a:txBody>
-                    <a:bodyPr/>
-                    <a:lstStyle/>
-                    <a:p>
-                      <a:pPr algn="l"/>
-                      <a:r>
-                        <a:rPr sz="1000" b="0">
-                          <a:solidFill>
-                            <a:srgbClr val="1D1B43"/>
-                          </a:solidFill>
-                          <a:latin typeface="Calibri"/>
-                        </a:rPr>
-                        <a:t>280098</a:t>
-                      </a:r>
-                    </a:p>
-                  </a:txBody>
-                  <a:tcPr>
-                    <a:solidFill>
-                      <a:srgbClr val="FFFFFF"/>
-                    </a:solidFill>
-                  </a:tcPr>
-                </a:tc>
-                <a:tc>
-                  <a:txBody>
-                    <a:bodyPr/>
-                    <a:lstStyle/>
-                    <a:p>
-                      <a:pPr algn="l"/>
-                      <a:r>
-                        <a:rPr sz="1000" b="0">
-                          <a:solidFill>
-                            <a:srgbClr val="1D1B43"/>
-                          </a:solidFill>
-                          <a:latin typeface="Calibri"/>
-                        </a:rPr>
-                        <a:t>CALCADOS E ACESSORIO - SAO JOSE DO CALCADO / ES</a:t>
-                      </a:r>
-                    </a:p>
-                  </a:txBody>
-                  <a:tcPr>
-                    <a:solidFill>
-                      <a:srgbClr val="FFFFFF"/>
-                    </a:solidFill>
-                  </a:tcPr>
-                </a:tc>
-                <a:tc>
-                  <a:txBody>
-                    <a:bodyPr/>
-                    <a:lstStyle/>
-                    <a:p>
-                      <a:pPr algn="l"/>
-                      <a:r>
-                        <a:rPr sz="1000" b="0">
-                          <a:solidFill>
-                            <a:srgbClr val="1D1B43"/>
-                          </a:solidFill>
-                          <a:latin typeface="Calibri"/>
-                        </a:rPr>
-                        <a:t>SAO JOSE DO CALCADO/ES</a:t>
-                      </a:r>
-                    </a:p>
-                  </a:txBody>
-                  <a:tcPr>
-                    <a:solidFill>
-                      <a:srgbClr val="FFFFFF"/>
-                    </a:solidFill>
-                  </a:tcPr>
-                </a:tc>
-                <a:tc>
-                  <a:txBody>
-                    <a:bodyPr/>
-                    <a:lstStyle/>
-                    <a:p>
-                      <a:pPr algn="l"/>
-                      <a:r>
-                        <a:rPr sz="1000" b="0">
-                          <a:solidFill>
-                            <a:srgbClr val="1D1B43"/>
-                          </a:solidFill>
-                          <a:latin typeface="Calibri"/>
-                        </a:rPr>
-                        <a:t>29/04/2026</a:t>
-                      </a:r>
-                    </a:p>
-                  </a:txBody>
-                  <a:tcPr>
-                    <a:solidFill>
-                      <a:srgbClr val="FFFFFF"/>
-                    </a:solidFill>
-                  </a:tcPr>
-                </a:tc>
-                <a:tc>
-                  <a:txBody>
-                    <a:bodyPr/>
-                    <a:lstStyle/>
-                    <a:p>
-                      <a:pPr algn="l"/>
-                      <a:r>
-                        <a:rPr sz="1000" b="0">
-                          <a:solidFill>
-                            <a:srgbClr val="1D1B43"/>
-                          </a:solidFill>
-                          <a:latin typeface="Calibri"/>
-                        </a:rPr>
-                        <a:t>FORA DO PRAZO</a:t>
-                      </a:r>
-                    </a:p>
-                  </a:txBody>
-                  <a:tcPr>
-                    <a:solidFill>
-                      <a:srgbClr val="FFFFFF"/>
-                    </a:solidFill>
-                  </a:tcPr>
-                </a:tc>
-              </a:tr>
-              <a:tr h="190500">
-                <a:tc>
-                  <a:txBody>
-                    <a:bodyPr/>
-                    <a:lstStyle/>
-                    <a:p>
-                      <a:pPr algn="l"/>
-                      <a:r>
-                        <a:rPr sz="1000" b="0">
-                          <a:solidFill>
-                            <a:srgbClr val="1D1B43"/>
-                          </a:solidFill>
-                          <a:latin typeface="Calibri"/>
-                        </a:rPr>
-                        <a:t>280100</a:t>
-                      </a:r>
-                    </a:p>
-                  </a:txBody>
-                  <a:tcPr>
-                    <a:solidFill>
-                      <a:srgbClr val="F2F2F2"/>
-                    </a:solidFill>
-                  </a:tcPr>
-                </a:tc>
-                <a:tc>
-                  <a:txBody>
-                    <a:bodyPr/>
-                    <a:lstStyle/>
-                    <a:p>
-                      <a:pPr algn="l"/>
-                      <a:r>
-                        <a:rPr sz="1000" b="0">
-                          <a:solidFill>
-                            <a:srgbClr val="1D1B43"/>
-                          </a:solidFill>
-                          <a:latin typeface="Calibri"/>
-                        </a:rPr>
-                        <a:t>CONFECCOES BATISTA E - ITABIRA / MG</a:t>
-                      </a:r>
-                    </a:p>
-                  </a:txBody>
-                  <a:tcPr>
-                    <a:solidFill>
-                      <a:srgbClr val="F2F2F2"/>
-                    </a:solidFill>
-                  </a:tcPr>
-                </a:tc>
-                <a:tc>
-                  <a:txBody>
-                    <a:bodyPr/>
-                    <a:lstStyle/>
-                    <a:p>
-                      <a:pPr algn="l"/>
-                      <a:r>
-                        <a:rPr sz="1000" b="0">
-                          <a:solidFill>
-                            <a:srgbClr val="1D1B43"/>
-                          </a:solidFill>
-                          <a:latin typeface="Calibri"/>
-                        </a:rPr>
-                        <a:t>ITABIRA/MG</a:t>
-                      </a:r>
-                    </a:p>
-                  </a:txBody>
-                  <a:tcPr>
-                    <a:solidFill>
-                      <a:srgbClr val="F2F2F2"/>
-                    </a:solidFill>
-                  </a:tcPr>
-                </a:tc>
-                <a:tc>
-                  <a:txBody>
-                    <a:bodyPr/>
-                    <a:lstStyle/>
-                    <a:p>
-                      <a:pPr algn="l"/>
-                      <a:r>
-                        <a:rPr sz="1000" b="0">
-                          <a:solidFill>
-                            <a:srgbClr val="1D1B43"/>
-                          </a:solidFill>
-                          <a:latin typeface="Calibri"/>
-                        </a:rPr>
-                        <a:t>29/04/2026</a:t>
-                      </a:r>
-                    </a:p>
-                  </a:txBody>
-                  <a:tcPr>
-                    <a:solidFill>
-                      <a:srgbClr val="F2F2F2"/>
-                    </a:solidFill>
-                  </a:tcPr>
-                </a:tc>
-                <a:tc>
-                  <a:txBody>
-                    <a:bodyPr/>
-                    <a:lstStyle/>
-                    <a:p>
-                      <a:pPr algn="l"/>
-                      <a:r>
-                        <a:rPr sz="1000" b="0">
-                          <a:solidFill>
-                            <a:srgbClr val="1D1B43"/>
-                          </a:solidFill>
-                          <a:latin typeface="Calibri"/>
-                        </a:rPr>
-                        <a:t>FORA DO PRAZO</a:t>
-                      </a:r>
-                    </a:p>
-                  </a:txBody>
-                  <a:tcPr>
-                    <a:solidFill>
-                      <a:srgbClr val="F2F2F2"/>
-                    </a:solidFill>
-                  </a:tcPr>
-                </a:tc>
-              </a:tr>
-              <a:tr h="190500">
-                <a:tc>
-                  <a:txBody>
-                    <a:bodyPr/>
-                    <a:lstStyle/>
-                    <a:p>
-                      <a:pPr algn="l"/>
-                      <a:r>
-                        <a:rPr sz="1000" b="0">
-                          <a:solidFill>
-                            <a:srgbClr val="1D1B43"/>
-                          </a:solidFill>
-                          <a:latin typeface="Calibri"/>
-                        </a:rPr>
-                        <a:t>280244</a:t>
-                      </a:r>
-                    </a:p>
-                  </a:txBody>
-                  <a:tcPr>
-                    <a:solidFill>
-                      <a:srgbClr val="FFFFFF"/>
-                    </a:solidFill>
-                  </a:tcPr>
-                </a:tc>
-                <a:tc>
-                  <a:txBody>
-                    <a:bodyPr/>
-                    <a:lstStyle/>
-                    <a:p>
-                      <a:pPr algn="l"/>
-                      <a:r>
-                        <a:rPr sz="1000" b="0">
-                          <a:solidFill>
-                            <a:srgbClr val="1D1B43"/>
-                          </a:solidFill>
-                          <a:latin typeface="Calibri"/>
-                        </a:rPr>
-                        <a:t>D&amp;J BOUTIQUE LTDA - - SAO GABRIEL DA PALHA / ES</a:t>
-                      </a:r>
-                    </a:p>
-                  </a:txBody>
-                  <a:tcPr>
-                    <a:solidFill>
-                      <a:srgbClr val="FFFFFF"/>
-                    </a:solidFill>
-                  </a:tcPr>
-                </a:tc>
-                <a:tc>
-                  <a:txBody>
-                    <a:bodyPr/>
-                    <a:lstStyle/>
-                    <a:p>
-                      <a:pPr algn="l"/>
-                      <a:r>
-                        <a:rPr sz="1000" b="0">
-                          <a:solidFill>
-                            <a:srgbClr val="1D1B43"/>
-                          </a:solidFill>
-                          <a:latin typeface="Calibri"/>
-                        </a:rPr>
-                        <a:t>SAO GABRIEL DA PALHA/ES</a:t>
-                      </a:r>
-                    </a:p>
-                  </a:txBody>
-                  <a:tcPr>
-                    <a:solidFill>
-                      <a:srgbClr val="FFFFFF"/>
-                    </a:solidFill>
-                  </a:tcPr>
-                </a:tc>
-                <a:tc>
-                  <a:txBody>
-                    <a:bodyPr/>
-                    <a:lstStyle/>
-                    <a:p>
-                      <a:pPr algn="l"/>
-                      <a:r>
-                        <a:rPr sz="1000" b="0">
-                          <a:solidFill>
-                            <a:srgbClr val="1D1B43"/>
-                          </a:solidFill>
-                          <a:latin typeface="Calibri"/>
-                        </a:rPr>
-                        <a:t>30/04/2026</a:t>
-                      </a:r>
-                    </a:p>
-                  </a:txBody>
-                  <a:tcPr>
-                    <a:solidFill>
-                      <a:srgbClr val="FFFFFF"/>
-                    </a:solidFill>
-                  </a:tcPr>
-                </a:tc>
-                <a:tc>
-                  <a:txBody>
-                    <a:bodyPr/>
-                    <a:lstStyle/>
-                    <a:p>
-                      <a:pPr algn="l"/>
-                      <a:r>
-                        <a:rPr sz="1000" b="0">
-                          <a:solidFill>
-                            <a:srgbClr val="1D1B43"/>
-                          </a:solidFill>
-                          <a:latin typeface="Calibri"/>
-                        </a:rPr>
-                        <a:t>FORA DO PRAZO</a:t>
-                      </a:r>
-                    </a:p>
-                  </a:txBody>
-                  <a:tcPr>
-                    <a:solidFill>
-                      <a:srgbClr val="FFFFFF"/>
-                    </a:solidFill>
-                  </a:tcPr>
-                </a:tc>
-              </a:tr>
-              <a:tr h="190500">
-                <a:tc>
-                  <a:txBody>
-                    <a:bodyPr/>
-                    <a:lstStyle/>
-                    <a:p>
-                      <a:pPr algn="l"/>
-                      <a:r>
-                        <a:rPr sz="1000" b="0">
-                          <a:solidFill>
-                            <a:srgbClr val="1D1B43"/>
-                          </a:solidFill>
-                          <a:latin typeface="Calibri"/>
-                        </a:rPr>
-                        <a:t>280247</a:t>
-                      </a:r>
-                    </a:p>
-                  </a:txBody>
-                  <a:tcPr>
-                    <a:solidFill>
-                      <a:srgbClr val="F2F2F2"/>
-                    </a:solidFill>
-                  </a:tcPr>
-                </a:tc>
-                <a:tc>
-                  <a:txBody>
-                    <a:bodyPr/>
-                    <a:lstStyle/>
-                    <a:p>
-                      <a:pPr algn="l"/>
-                      <a:r>
-                        <a:rPr sz="1000" b="0">
-                          <a:solidFill>
-                            <a:srgbClr val="1D1B43"/>
-                          </a:solidFill>
-                          <a:latin typeface="Calibri"/>
-                        </a:rPr>
-                        <a:t>SOBREIRA E ALBANI LT - ALEGRE / ES</a:t>
-                      </a:r>
-                    </a:p>
-                  </a:txBody>
-                  <a:tcPr>
-                    <a:solidFill>
-                      <a:srgbClr val="F2F2F2"/>
-                    </a:solidFill>
-                  </a:tcPr>
-                </a:tc>
-                <a:tc>
-                  <a:txBody>
-                    <a:bodyPr/>
-                    <a:lstStyle/>
-                    <a:p>
-                      <a:pPr algn="l"/>
-                      <a:r>
-                        <a:rPr sz="1000" b="0">
-                          <a:solidFill>
-                            <a:srgbClr val="1D1B43"/>
-                          </a:solidFill>
-                          <a:latin typeface="Calibri"/>
-                        </a:rPr>
-                        <a:t>ALEGRE/ES</a:t>
-                      </a:r>
-                    </a:p>
-                  </a:txBody>
-                  <a:tcPr>
-                    <a:solidFill>
-                      <a:srgbClr val="F2F2F2"/>
-                    </a:solidFill>
-                  </a:tcPr>
-                </a:tc>
-                <a:tc>
-                  <a:txBody>
-                    <a:bodyPr/>
-                    <a:lstStyle/>
-                    <a:p>
-                      <a:pPr algn="l"/>
-                      <a:r>
-                        <a:rPr sz="1000" b="0">
-                          <a:solidFill>
-                            <a:srgbClr val="1D1B43"/>
-                          </a:solidFill>
-                          <a:latin typeface="Calibri"/>
-                        </a:rPr>
-                        <a:t>30/04/2026</a:t>
-                      </a:r>
-                    </a:p>
-                  </a:txBody>
-                  <a:tcPr>
-                    <a:solidFill>
-                      <a:srgbClr val="F2F2F2"/>
-                    </a:solidFill>
-                  </a:tcPr>
-                </a:tc>
-                <a:tc>
-                  <a:txBody>
-                    <a:bodyPr/>
-                    <a:lstStyle/>
-                    <a:p>
-                      <a:pPr algn="l"/>
-                      <a:r>
-                        <a:rPr sz="1000" b="0">
-                          <a:solidFill>
-                            <a:srgbClr val="1D1B43"/>
-                          </a:solidFill>
-                          <a:latin typeface="Calibri"/>
-                        </a:rPr>
-                        <a:t>ENTREGUE FORA DO PRAZO</a:t>
-                      </a:r>
-                    </a:p>
-                  </a:txBody>
-                  <a:tcPr>
-                    <a:solidFill>
-                      <a:srgbClr val="F2F2F2"/>
-                    </a:solidFill>
-                  </a:tcPr>
-                </a:tc>
-              </a:tr>
-              <a:tr h="190500">
-                <a:tc>
-                  <a:txBody>
-                    <a:bodyPr/>
-                    <a:lstStyle/>
-                    <a:p>
-                      <a:pPr algn="l"/>
-                      <a:r>
-                        <a:rPr sz="1000" b="0">
-                          <a:solidFill>
-                            <a:srgbClr val="1D1B43"/>
-                          </a:solidFill>
-                          <a:latin typeface="Calibri"/>
-                        </a:rPr>
-                        <a:t>280254</a:t>
-                      </a:r>
-                    </a:p>
-                  </a:txBody>
-                  <a:tcPr>
-                    <a:solidFill>
-                      <a:srgbClr val="FFFFFF"/>
-                    </a:solidFill>
-                  </a:tcPr>
-                </a:tc>
-                <a:tc>
-                  <a:txBody>
-                    <a:bodyPr/>
-                    <a:lstStyle/>
-                    <a:p>
-                      <a:pPr algn="l"/>
-                      <a:r>
-                        <a:rPr sz="1000" b="0">
-                          <a:solidFill>
-                            <a:srgbClr val="1D1B43"/>
-                          </a:solidFill>
-                          <a:latin typeface="Calibri"/>
-                        </a:rPr>
-                        <a:t>43.474.701 TEREZINHA - FRANCISCO MORATO / SP</a:t>
-                      </a:r>
-                    </a:p>
-                  </a:txBody>
-                  <a:tcPr>
-                    <a:solidFill>
-                      <a:srgbClr val="FFFFFF"/>
-                    </a:solidFill>
-                  </a:tcPr>
-                </a:tc>
-                <a:tc>
-                  <a:txBody>
-                    <a:bodyPr/>
-                    <a:lstStyle/>
-                    <a:p>
-                      <a:pPr algn="l"/>
-                      <a:r>
-                        <a:rPr sz="1000" b="0">
-                          <a:solidFill>
-                            <a:srgbClr val="1D1B43"/>
-                          </a:solidFill>
-                          <a:latin typeface="Calibri"/>
-                        </a:rPr>
-                        <a:t>FRANCISCO MORATO/SP</a:t>
-                      </a:r>
-                    </a:p>
-                  </a:txBody>
-                  <a:tcPr>
-                    <a:solidFill>
-                      <a:srgbClr val="FFFFFF"/>
-                    </a:solidFill>
-                  </a:tcPr>
-                </a:tc>
-                <a:tc>
-                  <a:txBody>
-                    <a:bodyPr/>
-                    <a:lstStyle/>
-                    <a:p>
-                      <a:pPr algn="l"/>
-                      <a:r>
-                        <a:rPr sz="1000" b="0">
-                          <a:solidFill>
-                            <a:srgbClr val="1D1B43"/>
-                          </a:solidFill>
-                          <a:latin typeface="Calibri"/>
-                        </a:rPr>
-                        <a:t>30/04/2026</a:t>
-                      </a:r>
-                    </a:p>
-                  </a:txBody>
-                  <a:tcPr>
-                    <a:solidFill>
-                      <a:srgbClr val="FFFFFF"/>
-                    </a:solidFill>
-                  </a:tcPr>
-                </a:tc>
-                <a:tc>
-                  <a:txBody>
-                    <a:bodyPr/>
-                    <a:lstStyle/>
-                    <a:p>
-                      <a:pPr algn="l"/>
-                      <a:r>
-                        <a:rPr sz="1000" b="0">
-                          <a:solidFill>
-                            <a:srgbClr val="1D1B43"/>
-                          </a:solidFill>
-                          <a:latin typeface="Calibri"/>
-                        </a:rPr>
-                        <a:t>ENTREGUE FORA DO PRAZO</a:t>
-                      </a:r>
-                    </a:p>
-                  </a:txBody>
-                  <a:tcPr>
-                    <a:solidFill>
-                      <a:srgbClr val="FFFFFF"/>
-                    </a:solidFill>
-                  </a:tcPr>
-                </a:tc>
-              </a:tr>
-              <a:tr h="190500">
-                <a:tc>
-                  <a:txBody>
-                    <a:bodyPr/>
-                    <a:lstStyle/>
-                    <a:p>
-                      <a:pPr algn="l"/>
-                      <a:r>
-                        <a:rPr sz="1000" b="0">
-                          <a:solidFill>
-                            <a:srgbClr val="1D1B43"/>
-                          </a:solidFill>
-                          <a:latin typeface="Calibri"/>
-                        </a:rPr>
-                        <a:t>280262</a:t>
-                      </a:r>
-                    </a:p>
-                  </a:txBody>
-                  <a:tcPr>
-                    <a:solidFill>
-                      <a:srgbClr val="F2F2F2"/>
-                    </a:solidFill>
-                  </a:tcPr>
-                </a:tc>
-                <a:tc>
-                  <a:txBody>
-                    <a:bodyPr/>
-                    <a:lstStyle/>
-                    <a:p>
-                      <a:pPr algn="l"/>
-                      <a:r>
-                        <a:rPr sz="1000" b="0">
-                          <a:solidFill>
-                            <a:srgbClr val="1D1B43"/>
-                          </a:solidFill>
-                          <a:latin typeface="Calibri"/>
-                        </a:rPr>
-                        <a:t>62.209.212 EVELLYN A - IBITIRAMA / ES</a:t>
-                      </a:r>
-                    </a:p>
-                  </a:txBody>
-                  <a:tcPr>
-                    <a:solidFill>
-                      <a:srgbClr val="F2F2F2"/>
-                    </a:solidFill>
-                  </a:tcPr>
-                </a:tc>
-                <a:tc>
-                  <a:txBody>
-                    <a:bodyPr/>
-                    <a:lstStyle/>
-                    <a:p>
-                      <a:pPr algn="l"/>
-                      <a:r>
-                        <a:rPr sz="1000" b="0">
-                          <a:solidFill>
-                            <a:srgbClr val="1D1B43"/>
-                          </a:solidFill>
-                          <a:latin typeface="Calibri"/>
-                        </a:rPr>
-                        <a:t>IBITIRAMA/ES</a:t>
-                      </a:r>
-                    </a:p>
-                  </a:txBody>
-                  <a:tcPr>
-                    <a:solidFill>
-                      <a:srgbClr val="F2F2F2"/>
-                    </a:solidFill>
-                  </a:tcPr>
-                </a:tc>
-                <a:tc>
-                  <a:txBody>
-                    <a:bodyPr/>
-                    <a:lstStyle/>
-                    <a:p>
-                      <a:pPr algn="l"/>
-                      <a:r>
-                        <a:rPr sz="1000" b="0">
-                          <a:solidFill>
-                            <a:srgbClr val="1D1B43"/>
-                          </a:solidFill>
-                          <a:latin typeface="Calibri"/>
-                        </a:rPr>
-                        <a:t>30/04/2026</a:t>
-                      </a:r>
-                    </a:p>
-                  </a:txBody>
-                  <a:tcPr>
-                    <a:solidFill>
-                      <a:srgbClr val="F2F2F2"/>
-                    </a:solidFill>
-                  </a:tcPr>
-                </a:tc>
-                <a:tc>
-                  <a:txBody>
-                    <a:bodyPr/>
-                    <a:lstStyle/>
-                    <a:p>
-                      <a:pPr algn="l"/>
-                      <a:r>
-                        <a:rPr sz="1000" b="0">
-                          <a:solidFill>
-                            <a:srgbClr val="1D1B43"/>
-                          </a:solidFill>
-                          <a:latin typeface="Calibri"/>
-                        </a:rPr>
-                        <a:t>FORA DO PRAZO</a:t>
-                      </a:r>
-                    </a:p>
-                  </a:txBody>
-                  <a:tcPr>
-                    <a:solidFill>
-                      <a:srgbClr val="F2F2F2"/>
-                    </a:solidFill>
-                  </a:tcPr>
-                </a:tc>
-              </a:tr>
-              <a:tr h="190500">
-                <a:tc>
-                  <a:txBody>
-                    <a:bodyPr/>
-                    <a:lstStyle/>
-                    <a:p>
-                      <a:pPr algn="l"/>
-                      <a:r>
-                        <a:rPr sz="1000" b="0">
-                          <a:solidFill>
-                            <a:srgbClr val="1D1B43"/>
-                          </a:solidFill>
-                          <a:latin typeface="Calibri"/>
-                        </a:rPr>
-                        <a:t>280266</a:t>
-                      </a:r>
-                    </a:p>
-                  </a:txBody>
-                  <a:tcPr>
-                    <a:solidFill>
-                      <a:srgbClr val="FFFFFF"/>
-                    </a:solidFill>
-                  </a:tcPr>
-                </a:tc>
-                <a:tc>
-                  <a:txBody>
-                    <a:bodyPr/>
-                    <a:lstStyle/>
-                    <a:p>
-                      <a:pPr algn="l"/>
-                      <a:r>
-                        <a:rPr sz="1000" b="0">
-                          <a:solidFill>
-                            <a:srgbClr val="1D1B43"/>
-                          </a:solidFill>
-                          <a:latin typeface="Calibri"/>
-                        </a:rPr>
-                        <a:t>11.681.910 DARLENE G - BIRITIBA-MIRIM / SP</a:t>
-                      </a:r>
-                    </a:p>
-                  </a:txBody>
-                  <a:tcPr>
-                    <a:solidFill>
-                      <a:srgbClr val="FFFFFF"/>
-                    </a:solidFill>
-                  </a:tcPr>
-                </a:tc>
-                <a:tc>
-                  <a:txBody>
-                    <a:bodyPr/>
-                    <a:lstStyle/>
-                    <a:p>
-                      <a:pPr algn="l"/>
-                      <a:r>
-                        <a:rPr sz="1000" b="0">
-                          <a:solidFill>
-                            <a:srgbClr val="1D1B43"/>
-                          </a:solidFill>
-                          <a:latin typeface="Calibri"/>
-                        </a:rPr>
-                        <a:t>BIRITIBA-MIRIM/SP</a:t>
-                      </a:r>
-                    </a:p>
-                  </a:txBody>
-                  <a:tcPr>
-                    <a:solidFill>
-                      <a:srgbClr val="FFFFFF"/>
-                    </a:solidFill>
-                  </a:tcPr>
-                </a:tc>
-                <a:tc>
-                  <a:txBody>
-                    <a:bodyPr/>
-                    <a:lstStyle/>
-                    <a:p>
-                      <a:pPr algn="l"/>
-                      <a:r>
-                        <a:rPr sz="1000" b="0">
-                          <a:solidFill>
-                            <a:srgbClr val="1D1B43"/>
-                          </a:solidFill>
-                          <a:latin typeface="Calibri"/>
-                        </a:rPr>
-                        <a:t>30/04/2026</a:t>
-                      </a:r>
-                    </a:p>
-                  </a:txBody>
-                  <a:tcPr>
-                    <a:solidFill>
-                      <a:srgbClr val="FFFFFF"/>
-                    </a:solidFill>
-                  </a:tcPr>
-                </a:tc>
-                <a:tc>
-                  <a:txBody>
-                    <a:bodyPr/>
-                    <a:lstStyle/>
-                    <a:p>
-                      <a:pPr algn="l"/>
-                      <a:r>
-                        <a:rPr sz="1000" b="0">
-                          <a:solidFill>
-                            <a:srgbClr val="1D1B43"/>
-                          </a:solidFill>
-                          <a:latin typeface="Calibri"/>
-                        </a:rPr>
-                        <a:t>ENTREGUE FORA DO PRAZO</a:t>
-                      </a:r>
-                    </a:p>
-                  </a:txBody>
-                  <a:tcPr>
-                    <a:solidFill>
-                      <a:srgbClr val="FFFFFF"/>
+                      <a:srgbClr val="F2F2F2"/>
                     </a:solidFill>
                   </a:tcPr>
                 </a:tc>
@@ -8794,53 +8677,53 @@
                           </a:solidFill>
                           <a:latin typeface="Calibri"/>
                         </a:rPr>
-                        <a:t>11</a:t>
-                      </a:r>
-                    </a:p>
-                  </a:txBody>
-                  <a:tcPr>
-                    <a:solidFill>
-                      <a:srgbClr val="FFFFFF"/>
-                    </a:solidFill>
-                  </a:tcPr>
-                </a:tc>
-                <a:tc>
-                  <a:txBody>
-                    <a:bodyPr/>
-                    <a:lstStyle/>
-                    <a:p>
-                      <a:pPr algn="l"/>
-                      <a:r>
-                        <a:rPr sz="1000" b="0">
-                          <a:solidFill>
-                            <a:srgbClr val="1D1B43"/>
-                          </a:solidFill>
-                          <a:latin typeface="Calibri"/>
-                        </a:rPr>
-                        <a:t>16</a:t>
-                      </a:r>
-                    </a:p>
-                  </a:txBody>
-                  <a:tcPr>
-                    <a:solidFill>
-                      <a:srgbClr val="FFFFFF"/>
-                    </a:solidFill>
-                  </a:tcPr>
-                </a:tc>
-                <a:tc>
-                  <a:txBody>
-                    <a:bodyPr/>
-                    <a:lstStyle/>
-                    <a:p>
-                      <a:pPr algn="l"/>
-                      <a:r>
-                        <a:rPr sz="1000" b="0">
-                          <a:solidFill>
-                            <a:srgbClr val="1D1B43"/>
-                          </a:solidFill>
-                          <a:latin typeface="Calibri"/>
-                        </a:rPr>
-                        <a:t>40.7%</a:t>
+                        <a:t>12</a:t>
+                      </a:r>
+                    </a:p>
+                  </a:txBody>
+                  <a:tcPr>
+                    <a:solidFill>
+                      <a:srgbClr val="FFFFFF"/>
+                    </a:solidFill>
+                  </a:tcPr>
+                </a:tc>
+                <a:tc>
+                  <a:txBody>
+                    <a:bodyPr/>
+                    <a:lstStyle/>
+                    <a:p>
+                      <a:pPr algn="l"/>
+                      <a:r>
+                        <a:rPr sz="1000" b="0">
+                          <a:solidFill>
+                            <a:srgbClr val="1D1B43"/>
+                          </a:solidFill>
+                          <a:latin typeface="Calibri"/>
+                        </a:rPr>
+                        <a:t>15</a:t>
+                      </a:r>
+                    </a:p>
+                  </a:txBody>
+                  <a:tcPr>
+                    <a:solidFill>
+                      <a:srgbClr val="FFFFFF"/>
+                    </a:solidFill>
+                  </a:tcPr>
+                </a:tc>
+                <a:tc>
+                  <a:txBody>
+                    <a:bodyPr/>
+                    <a:lstStyle/>
+                    <a:p>
+                      <a:pPr algn="l"/>
+                      <a:r>
+                        <a:rPr sz="1000" b="0">
+                          <a:solidFill>
+                            <a:srgbClr val="1D1B43"/>
+                          </a:solidFill>
+                          <a:latin typeface="Calibri"/>
+                        </a:rPr>
+                        <a:t>44.4%</a:t>
                       </a:r>
                     </a:p>
                   </a:txBody>

--- a/SKO_COMERCIO_IMPORTACAO_E_EXP.pptx
+++ b/SKO_COMERCIO_IMPORTACAO_E_EXP.pptx
@@ -147,10 +147,10 @@
               <c:strCache>
                 <c:ptCount val="2"/>
                 <c:pt idx="0">
-                  <c:v>Maio 2026</c:v>
+                  <c:v>Abril 2026</c:v>
                 </c:pt>
                 <c:pt idx="1">
-                  <c:v>Abril 2026</c:v>
+                  <c:v>Maio 2026</c:v>
                 </c:pt>
               </c:strCache>
             </c:strRef>
@@ -162,10 +162,10 @@
                 <c:formatCode>General</c:formatCode>
                 <c:ptCount val="2"/>
                 <c:pt idx="0">
-                  <c:v>113</c:v>
+                  <c:v>247</c:v>
                 </c:pt>
                 <c:pt idx="1">
-                  <c:v>247</c:v>
+                  <c:v>121</c:v>
                 </c:pt>
               </c:numCache>
             </c:numRef>
@@ -196,10 +196,10 @@
               <c:strCache>
                 <c:ptCount val="2"/>
                 <c:pt idx="0">
-                  <c:v>Maio 2026</c:v>
+                  <c:v>Abril 2026</c:v>
                 </c:pt>
                 <c:pt idx="1">
-                  <c:v>Abril 2026</c:v>
+                  <c:v>Maio 2026</c:v>
                 </c:pt>
               </c:strCache>
             </c:strRef>
@@ -211,10 +211,10 @@
                 <c:formatCode>General</c:formatCode>
                 <c:ptCount val="2"/>
                 <c:pt idx="0">
-                  <c:v>23</c:v>
+                  <c:v>22</c:v>
                 </c:pt>
                 <c:pt idx="1">
-                  <c:v>22</c:v>
+                  <c:v>18</c:v>
                 </c:pt>
               </c:numCache>
             </c:numRef>
@@ -3387,7 +3387,7 @@
                 </a:solidFill>
                 <a:latin typeface="Calibri"/>
               </a:rPr>
-              <a:t>INDICADORES ABRIL 2026</a:t>
+              <a:t>INDICADORES MAIO 2026</a:t>
             </a:r>
           </a:p>
         </p:txBody>
@@ -3708,7 +3708,7 @@
                 </a:solidFill>
                 <a:latin typeface="Calibri"/>
               </a:rPr>
-              <a:t>269</a:t>
+              <a:t>139</a:t>
             </a:r>
           </a:p>
         </p:txBody>
@@ -3823,7 +3823,7 @@
                 </a:solidFill>
                 <a:latin typeface="Calibri"/>
               </a:rPr>
-              <a:t>247</a:t>
+              <a:t>121</a:t>
             </a:r>
           </a:p>
         </p:txBody>
@@ -3938,7 +3938,7 @@
                 </a:solidFill>
                 <a:latin typeface="Calibri"/>
               </a:rPr>
-              <a:t>22</a:t>
+              <a:t>18</a:t>
             </a:r>
           </a:p>
         </p:txBody>
@@ -4053,7 +4053,7 @@
                 </a:solidFill>
                 <a:latin typeface="Calibri"/>
               </a:rPr>
-              <a:t>91.8%</a:t>
+              <a:t>87.1%</a:t>
             </a:r>
           </a:p>
         </p:txBody>
@@ -4154,30 +4154,30 @@
                           </a:solidFill>
                           <a:latin typeface="Calibri"/>
                         </a:rPr>
+                        <a:t>Abril 2026</a:t>
+                      </a:r>
+                    </a:p>
+                  </a:txBody>
+                  <a:tcPr>
+                    <a:solidFill>
+                      <a:srgbClr val="1D1B43"/>
+                    </a:solidFill>
+                  </a:tcPr>
+                </a:tc>
+                <a:tc>
+                  <a:txBody>
+                    <a:bodyPr/>
+                    <a:lstStyle/>
+                    <a:p>
+                      <a:pPr algn="ctr"/>
+                      <a:r>
+                        <a:rPr sz="1100" b="1">
+                          <a:solidFill>
+                            <a:srgbClr val="FFFFFF"/>
+                          </a:solidFill>
+                          <a:latin typeface="Calibri"/>
+                        </a:rPr>
                         <a:t>Maio 2026</a:t>
-                      </a:r>
-                    </a:p>
-                  </a:txBody>
-                  <a:tcPr>
-                    <a:solidFill>
-                      <a:srgbClr val="1D1B43"/>
-                    </a:solidFill>
-                  </a:tcPr>
-                </a:tc>
-                <a:tc>
-                  <a:txBody>
-                    <a:bodyPr/>
-                    <a:lstStyle/>
-                    <a:p>
-                      <a:pPr algn="ctr"/>
-                      <a:r>
-                        <a:rPr sz="1100" b="1">
-                          <a:solidFill>
-                            <a:srgbClr val="FFFFFF"/>
-                          </a:solidFill>
-                          <a:latin typeface="Calibri"/>
-                        </a:rPr>
-                        <a:t>Abril 2026</a:t>
                       </a:r>
                     </a:p>
                   </a:txBody>
@@ -4248,7 +4248,7 @@
                           </a:solidFill>
                           <a:latin typeface="Calibri"/>
                         </a:rPr>
-                        <a:t>136</a:t>
+                        <a:t>269</a:t>
                       </a:r>
                     </a:p>
                   </a:txBody>
@@ -4271,7 +4271,7 @@
                           </a:solidFill>
                           <a:latin typeface="Calibri"/>
                         </a:rPr>
-                        <a:t>269</a:t>
+                        <a:t>139</a:t>
                       </a:r>
                     </a:p>
                   </a:txBody>
@@ -4294,7 +4294,7 @@
                           </a:solidFill>
                           <a:latin typeface="Calibri"/>
                         </a:rPr>
-                        <a:t>+ 133</a:t>
+                        <a:t>- 130</a:t>
                       </a:r>
                     </a:p>
                   </a:txBody>
@@ -4342,7 +4342,7 @@
                           </a:solidFill>
                           <a:latin typeface="Calibri"/>
                         </a:rPr>
-                        <a:t>113</a:t>
+                        <a:t>247</a:t>
                       </a:r>
                     </a:p>
                   </a:txBody>
@@ -4365,7 +4365,7 @@
                           </a:solidFill>
                           <a:latin typeface="Calibri"/>
                         </a:rPr>
-                        <a:t>247</a:t>
+                        <a:t>121</a:t>
                       </a:r>
                     </a:p>
                   </a:txBody>
@@ -4388,7 +4388,7 @@
                           </a:solidFill>
                           <a:latin typeface="Calibri"/>
                         </a:rPr>
-                        <a:t>+ 134</a:t>
+                        <a:t>- 126</a:t>
                       </a:r>
                     </a:p>
                   </a:txBody>
@@ -4436,7 +4436,7 @@
                           </a:solidFill>
                           <a:latin typeface="Calibri"/>
                         </a:rPr>
-                        <a:t>23</a:t>
+                        <a:t>22</a:t>
                       </a:r>
                     </a:p>
                   </a:txBody>
@@ -4459,7 +4459,7 @@
                           </a:solidFill>
                           <a:latin typeface="Calibri"/>
                         </a:rPr>
-                        <a:t>22</a:t>
+                        <a:t>18</a:t>
                       </a:r>
                     </a:p>
                   </a:txBody>
@@ -4482,7 +4482,7 @@
                           </a:solidFill>
                           <a:latin typeface="Calibri"/>
                         </a:rPr>
-                        <a:t>- 1</a:t>
+                        <a:t>- 4</a:t>
                       </a:r>
                     </a:p>
                   </a:txBody>
@@ -4530,7 +4530,7 @@
                           </a:solidFill>
                           <a:latin typeface="Calibri"/>
                         </a:rPr>
-                        <a:t>83.1%</a:t>
+                        <a:t>91.8%</a:t>
                       </a:r>
                     </a:p>
                   </a:txBody>
@@ -4553,7 +4553,7 @@
                           </a:solidFill>
                           <a:latin typeface="Calibri"/>
                         </a:rPr>
-                        <a:t>91.8%</a:t>
+                        <a:t>87.1%</a:t>
                       </a:r>
                     </a:p>
                   </a:txBody>
@@ -4576,7 +4576,7 @@
                           </a:solidFill>
                           <a:latin typeface="Calibri"/>
                         </a:rPr>
-                        <a:t>+ 8.7pp</a:t>
+                        <a:t>- 4.7pp</a:t>
                       </a:r>
                     </a:p>
                   </a:txBody>
@@ -4893,7 +4893,7 @@
                           </a:solidFill>
                           <a:latin typeface="Calibri"/>
                         </a:rPr>
-                        <a:t>Maio 2026</a:t>
+                        <a:t>Abril 2026</a:t>
                       </a:r>
                     </a:p>
                   </a:txBody>
@@ -4916,7 +4916,7 @@
                           </a:solidFill>
                           <a:latin typeface="Calibri"/>
                         </a:rPr>
-                        <a:t>136</a:t>
+                        <a:t>269</a:t>
                       </a:r>
                     </a:p>
                   </a:txBody>
@@ -4939,7 +4939,7 @@
                           </a:solidFill>
                           <a:latin typeface="Calibri"/>
                         </a:rPr>
-                        <a:t>113</a:t>
+                        <a:t>247</a:t>
                       </a:r>
                     </a:p>
                   </a:txBody>
@@ -4962,7 +4962,7 @@
                           </a:solidFill>
                           <a:latin typeface="Calibri"/>
                         </a:rPr>
-                        <a:t>23</a:t>
+                        <a:t>22</a:t>
                       </a:r>
                     </a:p>
                   </a:txBody>
@@ -4985,7 +4985,7 @@
                           </a:solidFill>
                           <a:latin typeface="Calibri"/>
                         </a:rPr>
-                        <a:t>83.1%</a:t>
+                        <a:t>91.8%</a:t>
                       </a:r>
                     </a:p>
                   </a:txBody>
@@ -5010,7 +5010,7 @@
                           </a:solidFill>
                           <a:latin typeface="Calibri"/>
                         </a:rPr>
-                        <a:t>Abril 2026</a:t>
+                        <a:t>Maio 2026</a:t>
                       </a:r>
                     </a:p>
                   </a:txBody>
@@ -5033,7 +5033,7 @@
                           </a:solidFill>
                           <a:latin typeface="Calibri"/>
                         </a:rPr>
-                        <a:t>269</a:t>
+                        <a:t>139</a:t>
                       </a:r>
                     </a:p>
                   </a:txBody>
@@ -5056,7 +5056,7 @@
                           </a:solidFill>
                           <a:latin typeface="Calibri"/>
                         </a:rPr>
-                        <a:t>247</a:t>
+                        <a:t>121</a:t>
                       </a:r>
                     </a:p>
                   </a:txBody>
@@ -5079,7 +5079,7 @@
                           </a:solidFill>
                           <a:latin typeface="Calibri"/>
                         </a:rPr>
-                        <a:t>22</a:t>
+                        <a:t>18</a:t>
                       </a:r>
                     </a:p>
                   </a:txBody>
@@ -5102,7 +5102,7 @@
                           </a:solidFill>
                           <a:latin typeface="Calibri"/>
                         </a:rPr>
-                        <a:t>91.8%</a:t>
+                        <a:t>87.1%</a:t>
                       </a:r>
                     </a:p>
                   </a:txBody>
@@ -5190,7 +5190,7 @@
                 </a:solidFill>
                 <a:latin typeface="Calibri"/>
               </a:rPr>
-              <a:t>PERFORMANCE: 91.8% - REGULAR</a:t>
+              <a:t>PERFORMANCE: 87.1% - REGULAR</a:t>
             </a:r>
           </a:p>
         </p:txBody>
@@ -5275,7 +5275,7 @@
                 </a:solidFill>
                 <a:latin typeface="Calibri"/>
               </a:rPr>
-              <a:t>OCORRENCIAS FORA DO PRAZO (22)</a:t>
+              <a:t>OCORRENCIAS FORA DO PRAZO (18)</a:t>
             </a:r>
           </a:p>
         </p:txBody>
@@ -5333,7 +5333,7 @@
         </p:nvGraphicFramePr>
         <p:xfrm>
           <a:off x="457200" y="1828800"/>
-          <a:ext cx="11429999" cy="4571986"/>
+          <a:ext cx="11429999" cy="4571989"/>
         </p:xfrm>
         <a:graphic>
           <a:graphicData uri="http://schemas.openxmlformats.org/drawingml/2006/table">
@@ -5348,7 +5348,7 @@
                 <a:gridCol w="1554480"/>
                 <a:gridCol w="2743200"/>
               </a:tblGrid>
-              <a:tr h="198782">
+              <a:tr h="240631">
                 <a:tc>
                   <a:txBody>
                     <a:bodyPr/>
@@ -5465,21 +5465,21 @@
                   </a:tcPr>
                 </a:tc>
               </a:tr>
-              <a:tr h="198782">
-                <a:tc>
-                  <a:txBody>
-                    <a:bodyPr/>
-                    <a:lstStyle/>
-                    <a:p>
-                      <a:pPr algn="l"/>
-                      <a:r>
-                        <a:rPr sz="1000" b="0">
-                          <a:solidFill>
-                            <a:srgbClr val="1D1B43"/>
-                          </a:solidFill>
-                          <a:latin typeface="Calibri"/>
-                        </a:rPr>
-                        <a:t>279417</a:t>
+              <a:tr h="240631">
+                <a:tc>
+                  <a:txBody>
+                    <a:bodyPr/>
+                    <a:lstStyle/>
+                    <a:p>
+                      <a:pPr algn="l"/>
+                      <a:r>
+                        <a:rPr sz="1000" b="0">
+                          <a:solidFill>
+                            <a:srgbClr val="1D1B43"/>
+                          </a:solidFill>
+                          <a:latin typeface="Calibri"/>
+                        </a:rPr>
+                        <a:t>279708</a:t>
                       </a:r>
                     </a:p>
                   </a:txBody>
@@ -5502,7 +5502,7 @@
                           </a:solidFill>
                           <a:latin typeface="Calibri"/>
                         </a:rPr>
-                        <a:t>LUNALO CALCADOS E AC - OUROESTE / SP</a:t>
+                        <a:t>LAURENTIZ - COMERCIO - JABOTICABAL / SP</a:t>
                       </a:r>
                     </a:p>
                   </a:txBody>
@@ -5525,7 +5525,7 @@
                           </a:solidFill>
                           <a:latin typeface="Calibri"/>
                         </a:rPr>
-                        <a:t>OUROESTE/SP</a:t>
+                        <a:t>JABOTICABAL/SP</a:t>
                       </a:r>
                     </a:p>
                   </a:txBody>
@@ -5548,7 +5548,7 @@
                           </a:solidFill>
                           <a:latin typeface="Calibri"/>
                         </a:rPr>
-                        <a:t>28/04/2026</a:t>
+                        <a:t>04/05/2026</a:t>
                       </a:r>
                     </a:p>
                   </a:txBody>
@@ -5582,21 +5582,21 @@
                   </a:tcPr>
                 </a:tc>
               </a:tr>
-              <a:tr h="198782">
-                <a:tc>
-                  <a:txBody>
-                    <a:bodyPr/>
-                    <a:lstStyle/>
-                    <a:p>
-                      <a:pPr algn="l"/>
-                      <a:r>
-                        <a:rPr sz="1000" b="0">
-                          <a:solidFill>
-                            <a:srgbClr val="1D1B43"/>
-                          </a:solidFill>
-                          <a:latin typeface="Calibri"/>
-                        </a:rPr>
-                        <a:t>279723</a:t>
+              <a:tr h="240631">
+                <a:tc>
+                  <a:txBody>
+                    <a:bodyPr/>
+                    <a:lstStyle/>
+                    <a:p>
+                      <a:pPr algn="l"/>
+                      <a:r>
+                        <a:rPr sz="1000" b="0">
+                          <a:solidFill>
+                            <a:srgbClr val="1D1B43"/>
+                          </a:solidFill>
+                          <a:latin typeface="Calibri"/>
+                        </a:rPr>
+                        <a:t>279722</a:t>
                       </a:r>
                     </a:p>
                   </a:txBody>
@@ -5619,7 +5619,7 @@
                           </a:solidFill>
                           <a:latin typeface="Calibri"/>
                         </a:rPr>
-                        <a:t>MG CIDADE LTDA - BELO HORIZONTE / MG</a:t>
+                        <a:t>INLUX CALCADOS LTDA - ASSIS / SP</a:t>
                       </a:r>
                     </a:p>
                   </a:txBody>
@@ -5642,6 +5642,1176 @@
                           </a:solidFill>
                           <a:latin typeface="Calibri"/>
                         </a:rPr>
+                        <a:t>ASSIS/SP</a:t>
+                      </a:r>
+                    </a:p>
+                  </a:txBody>
+                  <a:tcPr>
+                    <a:solidFill>
+                      <a:srgbClr val="F2F2F2"/>
+                    </a:solidFill>
+                  </a:tcPr>
+                </a:tc>
+                <a:tc>
+                  <a:txBody>
+                    <a:bodyPr/>
+                    <a:lstStyle/>
+                    <a:p>
+                      <a:pPr algn="l"/>
+                      <a:r>
+                        <a:rPr sz="1000" b="0">
+                          <a:solidFill>
+                            <a:srgbClr val="1D1B43"/>
+                          </a:solidFill>
+                          <a:latin typeface="Calibri"/>
+                        </a:rPr>
+                        <a:t>04/05/2026</a:t>
+                      </a:r>
+                    </a:p>
+                  </a:txBody>
+                  <a:tcPr>
+                    <a:solidFill>
+                      <a:srgbClr val="F2F2F2"/>
+                    </a:solidFill>
+                  </a:tcPr>
+                </a:tc>
+                <a:tc>
+                  <a:txBody>
+                    <a:bodyPr/>
+                    <a:lstStyle/>
+                    <a:p>
+                      <a:pPr algn="l"/>
+                      <a:r>
+                        <a:rPr sz="1000" b="0">
+                          <a:solidFill>
+                            <a:srgbClr val="1D1B43"/>
+                          </a:solidFill>
+                          <a:latin typeface="Calibri"/>
+                        </a:rPr>
+                        <a:t>ENTREGUE FORA DO PRAZO</a:t>
+                      </a:r>
+                    </a:p>
+                  </a:txBody>
+                  <a:tcPr>
+                    <a:solidFill>
+                      <a:srgbClr val="F2F2F2"/>
+                    </a:solidFill>
+                  </a:tcPr>
+                </a:tc>
+              </a:tr>
+              <a:tr h="240631">
+                <a:tc>
+                  <a:txBody>
+                    <a:bodyPr/>
+                    <a:lstStyle/>
+                    <a:p>
+                      <a:pPr algn="l"/>
+                      <a:r>
+                        <a:rPr sz="1000" b="0">
+                          <a:solidFill>
+                            <a:srgbClr val="1D1B43"/>
+                          </a:solidFill>
+                          <a:latin typeface="Calibri"/>
+                        </a:rPr>
+                        <a:t>279755</a:t>
+                      </a:r>
+                    </a:p>
+                  </a:txBody>
+                  <a:tcPr>
+                    <a:solidFill>
+                      <a:srgbClr val="FFFFFF"/>
+                    </a:solidFill>
+                  </a:tcPr>
+                </a:tc>
+                <a:tc>
+                  <a:txBody>
+                    <a:bodyPr/>
+                    <a:lstStyle/>
+                    <a:p>
+                      <a:pPr algn="l"/>
+                      <a:r>
+                        <a:rPr sz="1000" b="0">
+                          <a:solidFill>
+                            <a:srgbClr val="1D1B43"/>
+                          </a:solidFill>
+                          <a:latin typeface="Calibri"/>
+                        </a:rPr>
+                        <a:t>ANA VICTORIA GUARIEN - NEVES PAULISTA / SP</a:t>
+                      </a:r>
+                    </a:p>
+                  </a:txBody>
+                  <a:tcPr>
+                    <a:solidFill>
+                      <a:srgbClr val="FFFFFF"/>
+                    </a:solidFill>
+                  </a:tcPr>
+                </a:tc>
+                <a:tc>
+                  <a:txBody>
+                    <a:bodyPr/>
+                    <a:lstStyle/>
+                    <a:p>
+                      <a:pPr algn="l"/>
+                      <a:r>
+                        <a:rPr sz="1000" b="0">
+                          <a:solidFill>
+                            <a:srgbClr val="1D1B43"/>
+                          </a:solidFill>
+                          <a:latin typeface="Calibri"/>
+                        </a:rPr>
+                        <a:t>NEVES PAULISTA/SP</a:t>
+                      </a:r>
+                    </a:p>
+                  </a:txBody>
+                  <a:tcPr>
+                    <a:solidFill>
+                      <a:srgbClr val="FFFFFF"/>
+                    </a:solidFill>
+                  </a:tcPr>
+                </a:tc>
+                <a:tc>
+                  <a:txBody>
+                    <a:bodyPr/>
+                    <a:lstStyle/>
+                    <a:p>
+                      <a:pPr algn="l"/>
+                      <a:r>
+                        <a:rPr sz="1000" b="0">
+                          <a:solidFill>
+                            <a:srgbClr val="1D1B43"/>
+                          </a:solidFill>
+                          <a:latin typeface="Calibri"/>
+                        </a:rPr>
+                        <a:t>04/05/2026</a:t>
+                      </a:r>
+                    </a:p>
+                  </a:txBody>
+                  <a:tcPr>
+                    <a:solidFill>
+                      <a:srgbClr val="FFFFFF"/>
+                    </a:solidFill>
+                  </a:tcPr>
+                </a:tc>
+                <a:tc>
+                  <a:txBody>
+                    <a:bodyPr/>
+                    <a:lstStyle/>
+                    <a:p>
+                      <a:pPr algn="l"/>
+                      <a:r>
+                        <a:rPr sz="1000" b="0">
+                          <a:solidFill>
+                            <a:srgbClr val="1D1B43"/>
+                          </a:solidFill>
+                          <a:latin typeface="Calibri"/>
+                        </a:rPr>
+                        <a:t>ENTREGUE FORA DO PRAZO</a:t>
+                      </a:r>
+                    </a:p>
+                  </a:txBody>
+                  <a:tcPr>
+                    <a:solidFill>
+                      <a:srgbClr val="FFFFFF"/>
+                    </a:solidFill>
+                  </a:tcPr>
+                </a:tc>
+              </a:tr>
+              <a:tr h="240631">
+                <a:tc>
+                  <a:txBody>
+                    <a:bodyPr/>
+                    <a:lstStyle/>
+                    <a:p>
+                      <a:pPr algn="l"/>
+                      <a:r>
+                        <a:rPr sz="1000" b="0">
+                          <a:solidFill>
+                            <a:srgbClr val="1D1B43"/>
+                          </a:solidFill>
+                          <a:latin typeface="Calibri"/>
+                        </a:rPr>
+                        <a:t>279757</a:t>
+                      </a:r>
+                    </a:p>
+                  </a:txBody>
+                  <a:tcPr>
+                    <a:solidFill>
+                      <a:srgbClr val="F2F2F2"/>
+                    </a:solidFill>
+                  </a:tcPr>
+                </a:tc>
+                <a:tc>
+                  <a:txBody>
+                    <a:bodyPr/>
+                    <a:lstStyle/>
+                    <a:p>
+                      <a:pPr algn="l"/>
+                      <a:r>
+                        <a:rPr sz="1000" b="0">
+                          <a:solidFill>
+                            <a:srgbClr val="1D1B43"/>
+                          </a:solidFill>
+                          <a:latin typeface="Calibri"/>
+                        </a:rPr>
+                        <a:t>MARIA L. G. ALMEIDA - PALMITAL / SP</a:t>
+                      </a:r>
+                    </a:p>
+                  </a:txBody>
+                  <a:tcPr>
+                    <a:solidFill>
+                      <a:srgbClr val="F2F2F2"/>
+                    </a:solidFill>
+                  </a:tcPr>
+                </a:tc>
+                <a:tc>
+                  <a:txBody>
+                    <a:bodyPr/>
+                    <a:lstStyle/>
+                    <a:p>
+                      <a:pPr algn="l"/>
+                      <a:r>
+                        <a:rPr sz="1000" b="0">
+                          <a:solidFill>
+                            <a:srgbClr val="1D1B43"/>
+                          </a:solidFill>
+                          <a:latin typeface="Calibri"/>
+                        </a:rPr>
+                        <a:t>PALMITAL/SP</a:t>
+                      </a:r>
+                    </a:p>
+                  </a:txBody>
+                  <a:tcPr>
+                    <a:solidFill>
+                      <a:srgbClr val="F2F2F2"/>
+                    </a:solidFill>
+                  </a:tcPr>
+                </a:tc>
+                <a:tc>
+                  <a:txBody>
+                    <a:bodyPr/>
+                    <a:lstStyle/>
+                    <a:p>
+                      <a:pPr algn="l"/>
+                      <a:r>
+                        <a:rPr sz="1000" b="0">
+                          <a:solidFill>
+                            <a:srgbClr val="1D1B43"/>
+                          </a:solidFill>
+                          <a:latin typeface="Calibri"/>
+                        </a:rPr>
+                        <a:t>04/05/2026</a:t>
+                      </a:r>
+                    </a:p>
+                  </a:txBody>
+                  <a:tcPr>
+                    <a:solidFill>
+                      <a:srgbClr val="F2F2F2"/>
+                    </a:solidFill>
+                  </a:tcPr>
+                </a:tc>
+                <a:tc>
+                  <a:txBody>
+                    <a:bodyPr/>
+                    <a:lstStyle/>
+                    <a:p>
+                      <a:pPr algn="l"/>
+                      <a:r>
+                        <a:rPr sz="1000" b="0">
+                          <a:solidFill>
+                            <a:srgbClr val="1D1B43"/>
+                          </a:solidFill>
+                          <a:latin typeface="Calibri"/>
+                        </a:rPr>
+                        <a:t>ENTREGUE FORA DO PRAZO</a:t>
+                      </a:r>
+                    </a:p>
+                  </a:txBody>
+                  <a:tcPr>
+                    <a:solidFill>
+                      <a:srgbClr val="F2F2F2"/>
+                    </a:solidFill>
+                  </a:tcPr>
+                </a:tc>
+              </a:tr>
+              <a:tr h="240631">
+                <a:tc>
+                  <a:txBody>
+                    <a:bodyPr/>
+                    <a:lstStyle/>
+                    <a:p>
+                      <a:pPr algn="l"/>
+                      <a:r>
+                        <a:rPr sz="1000" b="0">
+                          <a:solidFill>
+                            <a:srgbClr val="1D1B43"/>
+                          </a:solidFill>
+                          <a:latin typeface="Calibri"/>
+                        </a:rPr>
+                        <a:t>279759</a:t>
+                      </a:r>
+                    </a:p>
+                  </a:txBody>
+                  <a:tcPr>
+                    <a:solidFill>
+                      <a:srgbClr val="FFFFFF"/>
+                    </a:solidFill>
+                  </a:tcPr>
+                </a:tc>
+                <a:tc>
+                  <a:txBody>
+                    <a:bodyPr/>
+                    <a:lstStyle/>
+                    <a:p>
+                      <a:pPr algn="l"/>
+                      <a:r>
+                        <a:rPr sz="1000" b="0">
+                          <a:solidFill>
+                            <a:srgbClr val="1D1B43"/>
+                          </a:solidFill>
+                          <a:latin typeface="Calibri"/>
+                        </a:rPr>
+                        <a:t>AMMIRARE CALCADOS EI - JABOTICABAL / SP</a:t>
+                      </a:r>
+                    </a:p>
+                  </a:txBody>
+                  <a:tcPr>
+                    <a:solidFill>
+                      <a:srgbClr val="FFFFFF"/>
+                    </a:solidFill>
+                  </a:tcPr>
+                </a:tc>
+                <a:tc>
+                  <a:txBody>
+                    <a:bodyPr/>
+                    <a:lstStyle/>
+                    <a:p>
+                      <a:pPr algn="l"/>
+                      <a:r>
+                        <a:rPr sz="1000" b="0">
+                          <a:solidFill>
+                            <a:srgbClr val="1D1B43"/>
+                          </a:solidFill>
+                          <a:latin typeface="Calibri"/>
+                        </a:rPr>
+                        <a:t>JABOTICABAL/SP</a:t>
+                      </a:r>
+                    </a:p>
+                  </a:txBody>
+                  <a:tcPr>
+                    <a:solidFill>
+                      <a:srgbClr val="FFFFFF"/>
+                    </a:solidFill>
+                  </a:tcPr>
+                </a:tc>
+                <a:tc>
+                  <a:txBody>
+                    <a:bodyPr/>
+                    <a:lstStyle/>
+                    <a:p>
+                      <a:pPr algn="l"/>
+                      <a:r>
+                        <a:rPr sz="1000" b="0">
+                          <a:solidFill>
+                            <a:srgbClr val="1D1B43"/>
+                          </a:solidFill>
+                          <a:latin typeface="Calibri"/>
+                        </a:rPr>
+                        <a:t>04/05/2026</a:t>
+                      </a:r>
+                    </a:p>
+                  </a:txBody>
+                  <a:tcPr>
+                    <a:solidFill>
+                      <a:srgbClr val="FFFFFF"/>
+                    </a:solidFill>
+                  </a:tcPr>
+                </a:tc>
+                <a:tc>
+                  <a:txBody>
+                    <a:bodyPr/>
+                    <a:lstStyle/>
+                    <a:p>
+                      <a:pPr algn="l"/>
+                      <a:r>
+                        <a:rPr sz="1000" b="0">
+                          <a:solidFill>
+                            <a:srgbClr val="1D1B43"/>
+                          </a:solidFill>
+                          <a:latin typeface="Calibri"/>
+                        </a:rPr>
+                        <a:t>ENTREGUE FORA DO PRAZO</a:t>
+                      </a:r>
+                    </a:p>
+                  </a:txBody>
+                  <a:tcPr>
+                    <a:solidFill>
+                      <a:srgbClr val="FFFFFF"/>
+                    </a:solidFill>
+                  </a:tcPr>
+                </a:tc>
+              </a:tr>
+              <a:tr h="240631">
+                <a:tc>
+                  <a:txBody>
+                    <a:bodyPr/>
+                    <a:lstStyle/>
+                    <a:p>
+                      <a:pPr algn="l"/>
+                      <a:r>
+                        <a:rPr sz="1000" b="0">
+                          <a:solidFill>
+                            <a:srgbClr val="1D1B43"/>
+                          </a:solidFill>
+                          <a:latin typeface="Calibri"/>
+                        </a:rPr>
+                        <a:t>279764</a:t>
+                      </a:r>
+                    </a:p>
+                  </a:txBody>
+                  <a:tcPr>
+                    <a:solidFill>
+                      <a:srgbClr val="F2F2F2"/>
+                    </a:solidFill>
+                  </a:tcPr>
+                </a:tc>
+                <a:tc>
+                  <a:txBody>
+                    <a:bodyPr/>
+                    <a:lstStyle/>
+                    <a:p>
+                      <a:pPr algn="l"/>
+                      <a:r>
+                        <a:rPr sz="1000" b="0">
+                          <a:solidFill>
+                            <a:srgbClr val="1D1B43"/>
+                          </a:solidFill>
+                          <a:latin typeface="Calibri"/>
+                        </a:rPr>
+                        <a:t>MISTURA DA MODA COME - PEREIRA BARRETO / SP</a:t>
+                      </a:r>
+                    </a:p>
+                  </a:txBody>
+                  <a:tcPr>
+                    <a:solidFill>
+                      <a:srgbClr val="F2F2F2"/>
+                    </a:solidFill>
+                  </a:tcPr>
+                </a:tc>
+                <a:tc>
+                  <a:txBody>
+                    <a:bodyPr/>
+                    <a:lstStyle/>
+                    <a:p>
+                      <a:pPr algn="l"/>
+                      <a:r>
+                        <a:rPr sz="1000" b="0">
+                          <a:solidFill>
+                            <a:srgbClr val="1D1B43"/>
+                          </a:solidFill>
+                          <a:latin typeface="Calibri"/>
+                        </a:rPr>
+                        <a:t>PEREIRA BARRETO/SP</a:t>
+                      </a:r>
+                    </a:p>
+                  </a:txBody>
+                  <a:tcPr>
+                    <a:solidFill>
+                      <a:srgbClr val="F2F2F2"/>
+                    </a:solidFill>
+                  </a:tcPr>
+                </a:tc>
+                <a:tc>
+                  <a:txBody>
+                    <a:bodyPr/>
+                    <a:lstStyle/>
+                    <a:p>
+                      <a:pPr algn="l"/>
+                      <a:r>
+                        <a:rPr sz="1000" b="0">
+                          <a:solidFill>
+                            <a:srgbClr val="1D1B43"/>
+                          </a:solidFill>
+                          <a:latin typeface="Calibri"/>
+                        </a:rPr>
+                        <a:t>04/05/2026</a:t>
+                      </a:r>
+                    </a:p>
+                  </a:txBody>
+                  <a:tcPr>
+                    <a:solidFill>
+                      <a:srgbClr val="F2F2F2"/>
+                    </a:solidFill>
+                  </a:tcPr>
+                </a:tc>
+                <a:tc>
+                  <a:txBody>
+                    <a:bodyPr/>
+                    <a:lstStyle/>
+                    <a:p>
+                      <a:pPr algn="l"/>
+                      <a:r>
+                        <a:rPr sz="1000" b="0">
+                          <a:solidFill>
+                            <a:srgbClr val="1D1B43"/>
+                          </a:solidFill>
+                          <a:latin typeface="Calibri"/>
+                        </a:rPr>
+                        <a:t>ENTREGUE FORA DO PRAZO</a:t>
+                      </a:r>
+                    </a:p>
+                  </a:txBody>
+                  <a:tcPr>
+                    <a:solidFill>
+                      <a:srgbClr val="F2F2F2"/>
+                    </a:solidFill>
+                  </a:tcPr>
+                </a:tc>
+              </a:tr>
+              <a:tr h="240631">
+                <a:tc>
+                  <a:txBody>
+                    <a:bodyPr/>
+                    <a:lstStyle/>
+                    <a:p>
+                      <a:pPr algn="l"/>
+                      <a:r>
+                        <a:rPr sz="1000" b="0">
+                          <a:solidFill>
+                            <a:srgbClr val="1D1B43"/>
+                          </a:solidFill>
+                          <a:latin typeface="Calibri"/>
+                        </a:rPr>
+                        <a:t>279765</a:t>
+                      </a:r>
+                    </a:p>
+                  </a:txBody>
+                  <a:tcPr>
+                    <a:solidFill>
+                      <a:srgbClr val="FFFFFF"/>
+                    </a:solidFill>
+                  </a:tcPr>
+                </a:tc>
+                <a:tc>
+                  <a:txBody>
+                    <a:bodyPr/>
+                    <a:lstStyle/>
+                    <a:p>
+                      <a:pPr algn="l"/>
+                      <a:r>
+                        <a:rPr sz="1000" b="0">
+                          <a:solidFill>
+                            <a:srgbClr val="1D1B43"/>
+                          </a:solidFill>
+                          <a:latin typeface="Calibri"/>
+                        </a:rPr>
+                        <a:t>NAKOLINY CALCADOS LT - NOVO HORIZONTE / SP</a:t>
+                      </a:r>
+                    </a:p>
+                  </a:txBody>
+                  <a:tcPr>
+                    <a:solidFill>
+                      <a:srgbClr val="FFFFFF"/>
+                    </a:solidFill>
+                  </a:tcPr>
+                </a:tc>
+                <a:tc>
+                  <a:txBody>
+                    <a:bodyPr/>
+                    <a:lstStyle/>
+                    <a:p>
+                      <a:pPr algn="l"/>
+                      <a:r>
+                        <a:rPr sz="1000" b="0">
+                          <a:solidFill>
+                            <a:srgbClr val="1D1B43"/>
+                          </a:solidFill>
+                          <a:latin typeface="Calibri"/>
+                        </a:rPr>
+                        <a:t>NOVO HORIZONTE/SP</a:t>
+                      </a:r>
+                    </a:p>
+                  </a:txBody>
+                  <a:tcPr>
+                    <a:solidFill>
+                      <a:srgbClr val="FFFFFF"/>
+                    </a:solidFill>
+                  </a:tcPr>
+                </a:tc>
+                <a:tc>
+                  <a:txBody>
+                    <a:bodyPr/>
+                    <a:lstStyle/>
+                    <a:p>
+                      <a:pPr algn="l"/>
+                      <a:r>
+                        <a:rPr sz="1000" b="0">
+                          <a:solidFill>
+                            <a:srgbClr val="1D1B43"/>
+                          </a:solidFill>
+                          <a:latin typeface="Calibri"/>
+                        </a:rPr>
+                        <a:t>04/05/2026</a:t>
+                      </a:r>
+                    </a:p>
+                  </a:txBody>
+                  <a:tcPr>
+                    <a:solidFill>
+                      <a:srgbClr val="FFFFFF"/>
+                    </a:solidFill>
+                  </a:tcPr>
+                </a:tc>
+                <a:tc>
+                  <a:txBody>
+                    <a:bodyPr/>
+                    <a:lstStyle/>
+                    <a:p>
+                      <a:pPr algn="l"/>
+                      <a:r>
+                        <a:rPr sz="1000" b="0">
+                          <a:solidFill>
+                            <a:srgbClr val="1D1B43"/>
+                          </a:solidFill>
+                          <a:latin typeface="Calibri"/>
+                        </a:rPr>
+                        <a:t>ENTREGUE FORA DO PRAZO</a:t>
+                      </a:r>
+                    </a:p>
+                  </a:txBody>
+                  <a:tcPr>
+                    <a:solidFill>
+                      <a:srgbClr val="FFFFFF"/>
+                    </a:solidFill>
+                  </a:tcPr>
+                </a:tc>
+              </a:tr>
+              <a:tr h="240631">
+                <a:tc>
+                  <a:txBody>
+                    <a:bodyPr/>
+                    <a:lstStyle/>
+                    <a:p>
+                      <a:pPr algn="l"/>
+                      <a:r>
+                        <a:rPr sz="1000" b="0">
+                          <a:solidFill>
+                            <a:srgbClr val="1D1B43"/>
+                          </a:solidFill>
+                          <a:latin typeface="Calibri"/>
+                        </a:rPr>
+                        <a:t>279812</a:t>
+                      </a:r>
+                    </a:p>
+                  </a:txBody>
+                  <a:tcPr>
+                    <a:solidFill>
+                      <a:srgbClr val="F2F2F2"/>
+                    </a:solidFill>
+                  </a:tcPr>
+                </a:tc>
+                <a:tc>
+                  <a:txBody>
+                    <a:bodyPr/>
+                    <a:lstStyle/>
+                    <a:p>
+                      <a:pPr algn="l"/>
+                      <a:r>
+                        <a:rPr sz="1000" b="0">
+                          <a:solidFill>
+                            <a:srgbClr val="1D1B43"/>
+                          </a:solidFill>
+                          <a:latin typeface="Calibri"/>
+                        </a:rPr>
+                        <a:t>VITTI VITTI LTDA - E - RIO CLARO / SP</a:t>
+                      </a:r>
+                    </a:p>
+                  </a:txBody>
+                  <a:tcPr>
+                    <a:solidFill>
+                      <a:srgbClr val="F2F2F2"/>
+                    </a:solidFill>
+                  </a:tcPr>
+                </a:tc>
+                <a:tc>
+                  <a:txBody>
+                    <a:bodyPr/>
+                    <a:lstStyle/>
+                    <a:p>
+                      <a:pPr algn="l"/>
+                      <a:r>
+                        <a:rPr sz="1000" b="0">
+                          <a:solidFill>
+                            <a:srgbClr val="1D1B43"/>
+                          </a:solidFill>
+                          <a:latin typeface="Calibri"/>
+                        </a:rPr>
+                        <a:t>RIO CLARO/SP</a:t>
+                      </a:r>
+                    </a:p>
+                  </a:txBody>
+                  <a:tcPr>
+                    <a:solidFill>
+                      <a:srgbClr val="F2F2F2"/>
+                    </a:solidFill>
+                  </a:tcPr>
+                </a:tc>
+                <a:tc>
+                  <a:txBody>
+                    <a:bodyPr/>
+                    <a:lstStyle/>
+                    <a:p>
+                      <a:pPr algn="l"/>
+                      <a:r>
+                        <a:rPr sz="1000" b="0">
+                          <a:solidFill>
+                            <a:srgbClr val="1D1B43"/>
+                          </a:solidFill>
+                          <a:latin typeface="Calibri"/>
+                        </a:rPr>
+                        <a:t>04/05/2026</a:t>
+                      </a:r>
+                    </a:p>
+                  </a:txBody>
+                  <a:tcPr>
+                    <a:solidFill>
+                      <a:srgbClr val="F2F2F2"/>
+                    </a:solidFill>
+                  </a:tcPr>
+                </a:tc>
+                <a:tc>
+                  <a:txBody>
+                    <a:bodyPr/>
+                    <a:lstStyle/>
+                    <a:p>
+                      <a:pPr algn="l"/>
+                      <a:r>
+                        <a:rPr sz="1000" b="0">
+                          <a:solidFill>
+                            <a:srgbClr val="1D1B43"/>
+                          </a:solidFill>
+                          <a:latin typeface="Calibri"/>
+                        </a:rPr>
+                        <a:t>ENTREGUE FORA DO PRAZO</a:t>
+                      </a:r>
+                    </a:p>
+                  </a:txBody>
+                  <a:tcPr>
+                    <a:solidFill>
+                      <a:srgbClr val="F2F2F2"/>
+                    </a:solidFill>
+                  </a:tcPr>
+                </a:tc>
+              </a:tr>
+              <a:tr h="240631">
+                <a:tc>
+                  <a:txBody>
+                    <a:bodyPr/>
+                    <a:lstStyle/>
+                    <a:p>
+                      <a:pPr algn="l"/>
+                      <a:r>
+                        <a:rPr sz="1000" b="0">
+                          <a:solidFill>
+                            <a:srgbClr val="1D1B43"/>
+                          </a:solidFill>
+                          <a:latin typeface="Calibri"/>
+                        </a:rPr>
+                        <a:t>280002</a:t>
+                      </a:r>
+                    </a:p>
+                  </a:txBody>
+                  <a:tcPr>
+                    <a:solidFill>
+                      <a:srgbClr val="FFFFFF"/>
+                    </a:solidFill>
+                  </a:tcPr>
+                </a:tc>
+                <a:tc>
+                  <a:txBody>
+                    <a:bodyPr/>
+                    <a:lstStyle/>
+                    <a:p>
+                      <a:pPr algn="l"/>
+                      <a:r>
+                        <a:rPr sz="1000" b="0">
+                          <a:solidFill>
+                            <a:srgbClr val="1D1B43"/>
+                          </a:solidFill>
+                          <a:latin typeface="Calibri"/>
+                        </a:rPr>
+                        <a:t>FAVERO URIAS E CIA L - MOCOCA / SP</a:t>
+                      </a:r>
+                    </a:p>
+                  </a:txBody>
+                  <a:tcPr>
+                    <a:solidFill>
+                      <a:srgbClr val="FFFFFF"/>
+                    </a:solidFill>
+                  </a:tcPr>
+                </a:tc>
+                <a:tc>
+                  <a:txBody>
+                    <a:bodyPr/>
+                    <a:lstStyle/>
+                    <a:p>
+                      <a:pPr algn="l"/>
+                      <a:r>
+                        <a:rPr sz="1000" b="0">
+                          <a:solidFill>
+                            <a:srgbClr val="1D1B43"/>
+                          </a:solidFill>
+                          <a:latin typeface="Calibri"/>
+                        </a:rPr>
+                        <a:t>MOCOCA/SP</a:t>
+                      </a:r>
+                    </a:p>
+                  </a:txBody>
+                  <a:tcPr>
+                    <a:solidFill>
+                      <a:srgbClr val="FFFFFF"/>
+                    </a:solidFill>
+                  </a:tcPr>
+                </a:tc>
+                <a:tc>
+                  <a:txBody>
+                    <a:bodyPr/>
+                    <a:lstStyle/>
+                    <a:p>
+                      <a:pPr algn="l"/>
+                      <a:r>
+                        <a:rPr sz="1000" b="0">
+                          <a:solidFill>
+                            <a:srgbClr val="1D1B43"/>
+                          </a:solidFill>
+                          <a:latin typeface="Calibri"/>
+                        </a:rPr>
+                        <a:t>04/05/2026</a:t>
+                      </a:r>
+                    </a:p>
+                  </a:txBody>
+                  <a:tcPr>
+                    <a:solidFill>
+                      <a:srgbClr val="FFFFFF"/>
+                    </a:solidFill>
+                  </a:tcPr>
+                </a:tc>
+                <a:tc>
+                  <a:txBody>
+                    <a:bodyPr/>
+                    <a:lstStyle/>
+                    <a:p>
+                      <a:pPr algn="l"/>
+                      <a:r>
+                        <a:rPr sz="1000" b="0">
+                          <a:solidFill>
+                            <a:srgbClr val="1D1B43"/>
+                          </a:solidFill>
+                          <a:latin typeface="Calibri"/>
+                        </a:rPr>
+                        <a:t>ENTREGUE FORA DO PRAZO</a:t>
+                      </a:r>
+                    </a:p>
+                  </a:txBody>
+                  <a:tcPr>
+                    <a:solidFill>
+                      <a:srgbClr val="FFFFFF"/>
+                    </a:solidFill>
+                  </a:tcPr>
+                </a:tc>
+              </a:tr>
+              <a:tr h="240631">
+                <a:tc>
+                  <a:txBody>
+                    <a:bodyPr/>
+                    <a:lstStyle/>
+                    <a:p>
+                      <a:pPr algn="l"/>
+                      <a:r>
+                        <a:rPr sz="1000" b="0">
+                          <a:solidFill>
+                            <a:srgbClr val="1D1B43"/>
+                          </a:solidFill>
+                          <a:latin typeface="Calibri"/>
+                        </a:rPr>
+                        <a:t>280083</a:t>
+                      </a:r>
+                    </a:p>
+                  </a:txBody>
+                  <a:tcPr>
+                    <a:solidFill>
+                      <a:srgbClr val="F2F2F2"/>
+                    </a:solidFill>
+                  </a:tcPr>
+                </a:tc>
+                <a:tc>
+                  <a:txBody>
+                    <a:bodyPr/>
+                    <a:lstStyle/>
+                    <a:p>
+                      <a:pPr algn="l"/>
+                      <a:r>
+                        <a:rPr sz="1000" b="0">
+                          <a:solidFill>
+                            <a:srgbClr val="1D1B43"/>
+                          </a:solidFill>
+                          <a:latin typeface="Calibri"/>
+                        </a:rPr>
+                        <a:t>CLEBER MANFIO - CANDIDO MOTA / SP</a:t>
+                      </a:r>
+                    </a:p>
+                  </a:txBody>
+                  <a:tcPr>
+                    <a:solidFill>
+                      <a:srgbClr val="F2F2F2"/>
+                    </a:solidFill>
+                  </a:tcPr>
+                </a:tc>
+                <a:tc>
+                  <a:txBody>
+                    <a:bodyPr/>
+                    <a:lstStyle/>
+                    <a:p>
+                      <a:pPr algn="l"/>
+                      <a:r>
+                        <a:rPr sz="1000" b="0">
+                          <a:solidFill>
+                            <a:srgbClr val="1D1B43"/>
+                          </a:solidFill>
+                          <a:latin typeface="Calibri"/>
+                        </a:rPr>
+                        <a:t>CANDIDO MOTA/SP</a:t>
+                      </a:r>
+                    </a:p>
+                  </a:txBody>
+                  <a:tcPr>
+                    <a:solidFill>
+                      <a:srgbClr val="F2F2F2"/>
+                    </a:solidFill>
+                  </a:tcPr>
+                </a:tc>
+                <a:tc>
+                  <a:txBody>
+                    <a:bodyPr/>
+                    <a:lstStyle/>
+                    <a:p>
+                      <a:pPr algn="l"/>
+                      <a:r>
+                        <a:rPr sz="1000" b="0">
+                          <a:solidFill>
+                            <a:srgbClr val="1D1B43"/>
+                          </a:solidFill>
+                          <a:latin typeface="Calibri"/>
+                        </a:rPr>
+                        <a:t>04/05/2026</a:t>
+                      </a:r>
+                    </a:p>
+                  </a:txBody>
+                  <a:tcPr>
+                    <a:solidFill>
+                      <a:srgbClr val="F2F2F2"/>
+                    </a:solidFill>
+                  </a:tcPr>
+                </a:tc>
+                <a:tc>
+                  <a:txBody>
+                    <a:bodyPr/>
+                    <a:lstStyle/>
+                    <a:p>
+                      <a:pPr algn="l"/>
+                      <a:r>
+                        <a:rPr sz="1000" b="0">
+                          <a:solidFill>
+                            <a:srgbClr val="1D1B43"/>
+                          </a:solidFill>
+                          <a:latin typeface="Calibri"/>
+                        </a:rPr>
+                        <a:t>ENTREGUE FORA DO PRAZO</a:t>
+                      </a:r>
+                    </a:p>
+                  </a:txBody>
+                  <a:tcPr>
+                    <a:solidFill>
+                      <a:srgbClr val="F2F2F2"/>
+                    </a:solidFill>
+                  </a:tcPr>
+                </a:tc>
+              </a:tr>
+              <a:tr h="240631">
+                <a:tc>
+                  <a:txBody>
+                    <a:bodyPr/>
+                    <a:lstStyle/>
+                    <a:p>
+                      <a:pPr algn="l"/>
+                      <a:r>
+                        <a:rPr sz="1000" b="0">
+                          <a:solidFill>
+                            <a:srgbClr val="1D1B43"/>
+                          </a:solidFill>
+                          <a:latin typeface="Calibri"/>
+                        </a:rPr>
+                        <a:t>280090</a:t>
+                      </a:r>
+                    </a:p>
+                  </a:txBody>
+                  <a:tcPr>
+                    <a:solidFill>
+                      <a:srgbClr val="FFFFFF"/>
+                    </a:solidFill>
+                  </a:tcPr>
+                </a:tc>
+                <a:tc>
+                  <a:txBody>
+                    <a:bodyPr/>
+                    <a:lstStyle/>
+                    <a:p>
+                      <a:pPr algn="l"/>
+                      <a:r>
+                        <a:rPr sz="1000" b="0">
+                          <a:solidFill>
+                            <a:srgbClr val="1D1B43"/>
+                          </a:solidFill>
+                          <a:latin typeface="Calibri"/>
+                        </a:rPr>
+                        <a:t>FNF COMERCIO DE CALC - PARAGUACU PAULISTA / SP</a:t>
+                      </a:r>
+                    </a:p>
+                  </a:txBody>
+                  <a:tcPr>
+                    <a:solidFill>
+                      <a:srgbClr val="FFFFFF"/>
+                    </a:solidFill>
+                  </a:tcPr>
+                </a:tc>
+                <a:tc>
+                  <a:txBody>
+                    <a:bodyPr/>
+                    <a:lstStyle/>
+                    <a:p>
+                      <a:pPr algn="l"/>
+                      <a:r>
+                        <a:rPr sz="1000" b="0">
+                          <a:solidFill>
+                            <a:srgbClr val="1D1B43"/>
+                          </a:solidFill>
+                          <a:latin typeface="Calibri"/>
+                        </a:rPr>
+                        <a:t>PARAGUACU PAULISTA/SP</a:t>
+                      </a:r>
+                    </a:p>
+                  </a:txBody>
+                  <a:tcPr>
+                    <a:solidFill>
+                      <a:srgbClr val="FFFFFF"/>
+                    </a:solidFill>
+                  </a:tcPr>
+                </a:tc>
+                <a:tc>
+                  <a:txBody>
+                    <a:bodyPr/>
+                    <a:lstStyle/>
+                    <a:p>
+                      <a:pPr algn="l"/>
+                      <a:r>
+                        <a:rPr sz="1000" b="0">
+                          <a:solidFill>
+                            <a:srgbClr val="1D1B43"/>
+                          </a:solidFill>
+                          <a:latin typeface="Calibri"/>
+                        </a:rPr>
+                        <a:t>04/05/2026</a:t>
+                      </a:r>
+                    </a:p>
+                  </a:txBody>
+                  <a:tcPr>
+                    <a:solidFill>
+                      <a:srgbClr val="FFFFFF"/>
+                    </a:solidFill>
+                  </a:tcPr>
+                </a:tc>
+                <a:tc>
+                  <a:txBody>
+                    <a:bodyPr/>
+                    <a:lstStyle/>
+                    <a:p>
+                      <a:pPr algn="l"/>
+                      <a:r>
+                        <a:rPr sz="1000" b="0">
+                          <a:solidFill>
+                            <a:srgbClr val="1D1B43"/>
+                          </a:solidFill>
+                          <a:latin typeface="Calibri"/>
+                        </a:rPr>
+                        <a:t>ENTREGUE FORA DO PRAZO</a:t>
+                      </a:r>
+                    </a:p>
+                  </a:txBody>
+                  <a:tcPr>
+                    <a:solidFill>
+                      <a:srgbClr val="FFFFFF"/>
+                    </a:solidFill>
+                  </a:tcPr>
+                </a:tc>
+              </a:tr>
+              <a:tr h="240631">
+                <a:tc>
+                  <a:txBody>
+                    <a:bodyPr/>
+                    <a:lstStyle/>
+                    <a:p>
+                      <a:pPr algn="l"/>
+                      <a:r>
+                        <a:rPr sz="1000" b="0">
+                          <a:solidFill>
+                            <a:srgbClr val="1D1B43"/>
+                          </a:solidFill>
+                          <a:latin typeface="Calibri"/>
+                        </a:rPr>
+                        <a:t>280274</a:t>
+                      </a:r>
+                    </a:p>
+                  </a:txBody>
+                  <a:tcPr>
+                    <a:solidFill>
+                      <a:srgbClr val="F2F2F2"/>
+                    </a:solidFill>
+                  </a:tcPr>
+                </a:tc>
+                <a:tc>
+                  <a:txBody>
+                    <a:bodyPr/>
+                    <a:lstStyle/>
+                    <a:p>
+                      <a:pPr algn="l"/>
+                      <a:r>
+                        <a:rPr sz="1000" b="0">
+                          <a:solidFill>
+                            <a:srgbClr val="1D1B43"/>
+                          </a:solidFill>
+                          <a:latin typeface="Calibri"/>
+                        </a:rPr>
+                        <a:t>BLV RODRIGUES COM DE - BELO HORIZONTE / MG</a:t>
+                      </a:r>
+                    </a:p>
+                  </a:txBody>
+                  <a:tcPr>
+                    <a:solidFill>
+                      <a:srgbClr val="F2F2F2"/>
+                    </a:solidFill>
+                  </a:tcPr>
+                </a:tc>
+                <a:tc>
+                  <a:txBody>
+                    <a:bodyPr/>
+                    <a:lstStyle/>
+                    <a:p>
+                      <a:pPr algn="l"/>
+                      <a:r>
+                        <a:rPr sz="1000" b="0">
+                          <a:solidFill>
+                            <a:srgbClr val="1D1B43"/>
+                          </a:solidFill>
+                          <a:latin typeface="Calibri"/>
+                        </a:rPr>
                         <a:t>BELO HORIZONTE/MG</a:t>
                       </a:r>
                     </a:p>
@@ -5665,7 +6835,7 @@
                           </a:solidFill>
                           <a:latin typeface="Calibri"/>
                         </a:rPr>
-                        <a:t>29/04/2026</a:t>
+                        <a:t>04/05/2026</a:t>
                       </a:r>
                     </a:p>
                   </a:txBody>
@@ -5699,21 +6869,21 @@
                   </a:tcPr>
                 </a:tc>
               </a:tr>
-              <a:tr h="198782">
-                <a:tc>
-                  <a:txBody>
-                    <a:bodyPr/>
-                    <a:lstStyle/>
-                    <a:p>
-                      <a:pPr algn="l"/>
-                      <a:r>
-                        <a:rPr sz="1000" b="0">
-                          <a:solidFill>
-                            <a:srgbClr val="1D1B43"/>
-                          </a:solidFill>
-                          <a:latin typeface="Calibri"/>
-                        </a:rPr>
-                        <a:t>279732</a:t>
+              <a:tr h="240631">
+                <a:tc>
+                  <a:txBody>
+                    <a:bodyPr/>
+                    <a:lstStyle/>
+                    <a:p>
+                      <a:pPr algn="l"/>
+                      <a:r>
+                        <a:rPr sz="1000" b="0">
+                          <a:solidFill>
+                            <a:srgbClr val="1D1B43"/>
+                          </a:solidFill>
+                          <a:latin typeface="Calibri"/>
+                        </a:rPr>
+                        <a:t>280278</a:t>
                       </a:r>
                     </a:p>
                   </a:txBody>
@@ -5736,7 +6906,7 @@
                           </a:solidFill>
                           <a:latin typeface="Calibri"/>
                         </a:rPr>
-                        <a:t>S. A. LEMOS LTDA - VILA VELHA / ES</a:t>
+                        <a:t>V.M. VIX - COMERCIO - SERRA / ES</a:t>
                       </a:r>
                     </a:p>
                   </a:txBody>
@@ -5759,7 +6929,7 @@
                           </a:solidFill>
                           <a:latin typeface="Calibri"/>
                         </a:rPr>
-                        <a:t>VILA VELHA/ES</a:t>
+                        <a:t>SERRA/ES</a:t>
                       </a:r>
                     </a:p>
                   </a:txBody>
@@ -5782,7 +6952,7 @@
                           </a:solidFill>
                           <a:latin typeface="Calibri"/>
                         </a:rPr>
-                        <a:t>29/04/2026</a:t>
+                        <a:t>04/05/2026</a:t>
                       </a:r>
                     </a:p>
                   </a:txBody>
@@ -5805,7 +6975,7 @@
                           </a:solidFill>
                           <a:latin typeface="Calibri"/>
                         </a:rPr>
-                        <a:t>FORA DO PRAZO</a:t>
+                        <a:t>ENTREGUE FORA DO PRAZO</a:t>
                       </a:r>
                     </a:p>
                   </a:txBody>
@@ -5816,21 +6986,21 @@
                   </a:tcPr>
                 </a:tc>
               </a:tr>
-              <a:tr h="198782">
-                <a:tc>
-                  <a:txBody>
-                    <a:bodyPr/>
-                    <a:lstStyle/>
-                    <a:p>
-                      <a:pPr algn="l"/>
-                      <a:r>
-                        <a:rPr sz="1000" b="0">
-                          <a:solidFill>
-                            <a:srgbClr val="1D1B43"/>
-                          </a:solidFill>
-                          <a:latin typeface="Calibri"/>
-                        </a:rPr>
-                        <a:t>279746</a:t>
+              <a:tr h="240631">
+                <a:tc>
+                  <a:txBody>
+                    <a:bodyPr/>
+                    <a:lstStyle/>
+                    <a:p>
+                      <a:pPr algn="l"/>
+                      <a:r>
+                        <a:rPr sz="1000" b="0">
+                          <a:solidFill>
+                            <a:srgbClr val="1D1B43"/>
+                          </a:solidFill>
+                          <a:latin typeface="Calibri"/>
+                        </a:rPr>
+                        <a:t>280283</a:t>
                       </a:r>
                     </a:p>
                   </a:txBody>
@@ -5853,7 +7023,7 @@
                           </a:solidFill>
                           <a:latin typeface="Calibri"/>
                         </a:rPr>
-                        <a:t>R4 COMERCIO DE SAPAT - VITORIA / ES</a:t>
+                        <a:t>FORT CALCADOS DE ASS - LINS / SP</a:t>
                       </a:r>
                     </a:p>
                   </a:txBody>
@@ -5876,7 +7046,7 @@
                           </a:solidFill>
                           <a:latin typeface="Calibri"/>
                         </a:rPr>
-                        <a:t>VITORIA/ES</a:t>
+                        <a:t>LINS/SP</a:t>
                       </a:r>
                     </a:p>
                   </a:txBody>
@@ -5899,7 +7069,7 @@
                           </a:solidFill>
                           <a:latin typeface="Calibri"/>
                         </a:rPr>
-                        <a:t>29/04/2026</a:t>
+                        <a:t>06/05/2026</a:t>
                       </a:r>
                     </a:p>
                   </a:txBody>
@@ -5933,21 +7103,21 @@
                   </a:tcPr>
                 </a:tc>
               </a:tr>
-              <a:tr h="198782">
-                <a:tc>
-                  <a:txBody>
-                    <a:bodyPr/>
-                    <a:lstStyle/>
-                    <a:p>
-                      <a:pPr algn="l"/>
-                      <a:r>
-                        <a:rPr sz="1000" b="0">
-                          <a:solidFill>
-                            <a:srgbClr val="1D1B43"/>
-                          </a:solidFill>
-                          <a:latin typeface="Calibri"/>
-                        </a:rPr>
-                        <a:t>279762</a:t>
+              <a:tr h="240631">
+                <a:tc>
+                  <a:txBody>
+                    <a:bodyPr/>
+                    <a:lstStyle/>
+                    <a:p>
+                      <a:pPr algn="l"/>
+                      <a:r>
+                        <a:rPr sz="1000" b="0">
+                          <a:solidFill>
+                            <a:srgbClr val="1D1B43"/>
+                          </a:solidFill>
+                          <a:latin typeface="Calibri"/>
+                        </a:rPr>
+                        <a:t>280285</a:t>
                       </a:r>
                     </a:p>
                   </a:txBody>
@@ -5970,7 +7140,7 @@
                           </a:solidFill>
                           <a:latin typeface="Calibri"/>
                         </a:rPr>
-                        <a:t>ARI COMERCIO E SERVI - SERRA / ES</a:t>
+                        <a:t>M P MODAS LTDA - LINS / SP</a:t>
                       </a:r>
                     </a:p>
                   </a:txBody>
@@ -5993,7 +7163,7 @@
                           </a:solidFill>
                           <a:latin typeface="Calibri"/>
                         </a:rPr>
-                        <a:t>SERRA/ES</a:t>
+                        <a:t>LINS/SP</a:t>
                       </a:r>
                     </a:p>
                   </a:txBody>
@@ -6016,7 +7186,7 @@
                           </a:solidFill>
                           <a:latin typeface="Calibri"/>
                         </a:rPr>
-                        <a:t>29/04/2026</a:t>
+                        <a:t>06/05/2026</a:t>
                       </a:r>
                     </a:p>
                   </a:txBody>
@@ -6050,21 +7220,21 @@
                   </a:tcPr>
                 </a:tc>
               </a:tr>
-              <a:tr h="198782">
-                <a:tc>
-                  <a:txBody>
-                    <a:bodyPr/>
-                    <a:lstStyle/>
-                    <a:p>
-                      <a:pPr algn="l"/>
-                      <a:r>
-                        <a:rPr sz="1000" b="0">
-                          <a:solidFill>
-                            <a:srgbClr val="1D1B43"/>
-                          </a:solidFill>
-                          <a:latin typeface="Calibri"/>
-                        </a:rPr>
-                        <a:t>279774</a:t>
+              <a:tr h="240631">
+                <a:tc>
+                  <a:txBody>
+                    <a:bodyPr/>
+                    <a:lstStyle/>
+                    <a:p>
+                      <a:pPr algn="l"/>
+                      <a:r>
+                        <a:rPr sz="1000" b="0">
+                          <a:solidFill>
+                            <a:srgbClr val="1D1B43"/>
+                          </a:solidFill>
+                          <a:latin typeface="Calibri"/>
+                        </a:rPr>
+                        <a:t>280290</a:t>
                       </a:r>
                     </a:p>
                   </a:txBody>
@@ -6087,7 +7257,7 @@
                           </a:solidFill>
                           <a:latin typeface="Calibri"/>
                         </a:rPr>
-                        <a:t>LARISSA LUZIA ALVES - PIRAJUBA / MG</a:t>
+                        <a:t>F. S. OLIVEIRA CONFE - LINS / SP</a:t>
                       </a:r>
                     </a:p>
                   </a:txBody>
@@ -6110,7 +7280,7 @@
                           </a:solidFill>
                           <a:latin typeface="Calibri"/>
                         </a:rPr>
-                        <a:t>PIRAJUBA/MG</a:t>
+                        <a:t>LINS/SP</a:t>
                       </a:r>
                     </a:p>
                   </a:txBody>
@@ -6133,7 +7303,7 @@
                           </a:solidFill>
                           <a:latin typeface="Calibri"/>
                         </a:rPr>
-                        <a:t>29/04/2026</a:t>
+                        <a:t>06/05/2026</a:t>
                       </a:r>
                     </a:p>
                   </a:txBody>
@@ -6167,21 +7337,21 @@
                   </a:tcPr>
                 </a:tc>
               </a:tr>
-              <a:tr h="198782">
-                <a:tc>
-                  <a:txBody>
-                    <a:bodyPr/>
-                    <a:lstStyle/>
-                    <a:p>
-                      <a:pPr algn="l"/>
-                      <a:r>
-                        <a:rPr sz="1000" b="0">
-                          <a:solidFill>
-                            <a:srgbClr val="1D1B43"/>
-                          </a:solidFill>
-                          <a:latin typeface="Calibri"/>
-                        </a:rPr>
-                        <a:t>279792</a:t>
+              <a:tr h="240631">
+                <a:tc>
+                  <a:txBody>
+                    <a:bodyPr/>
+                    <a:lstStyle/>
+                    <a:p>
+                      <a:pPr algn="l"/>
+                      <a:r>
+                        <a:rPr sz="1000" b="0">
+                          <a:solidFill>
+                            <a:srgbClr val="1D1B43"/>
+                          </a:solidFill>
+                          <a:latin typeface="Calibri"/>
+                        </a:rPr>
+                        <a:t>280293</a:t>
                       </a:r>
                     </a:p>
                   </a:txBody>
@@ -6204,7 +7374,7 @@
                           </a:solidFill>
                           <a:latin typeface="Calibri"/>
                         </a:rPr>
-                        <a:t>TANIA CENTER CALCADO - RIO POMBA / MG</a:t>
+                        <a:t>FERREIRA &amp; FERNANDES - PROMISSAO / SP</a:t>
                       </a:r>
                     </a:p>
                   </a:txBody>
@@ -6227,7 +7397,7 @@
                           </a:solidFill>
                           <a:latin typeface="Calibri"/>
                         </a:rPr>
-                        <a:t>RIO POMBA/MG</a:t>
+                        <a:t>PROMISSAO/SP</a:t>
                       </a:r>
                     </a:p>
                   </a:txBody>
@@ -6250,7 +7420,7 @@
                           </a:solidFill>
                           <a:latin typeface="Calibri"/>
                         </a:rPr>
-                        <a:t>29/04/2026</a:t>
+                        <a:t>06/05/2026</a:t>
                       </a:r>
                     </a:p>
                   </a:txBody>
@@ -6284,21 +7454,21 @@
                   </a:tcPr>
                 </a:tc>
               </a:tr>
-              <a:tr h="198782">
-                <a:tc>
-                  <a:txBody>
-                    <a:bodyPr/>
-                    <a:lstStyle/>
-                    <a:p>
-                      <a:pPr algn="l"/>
-                      <a:r>
-                        <a:rPr sz="1000" b="0">
-                          <a:solidFill>
-                            <a:srgbClr val="1D1B43"/>
-                          </a:solidFill>
-                          <a:latin typeface="Calibri"/>
-                        </a:rPr>
-                        <a:t>279794</a:t>
+              <a:tr h="240631">
+                <a:tc>
+                  <a:txBody>
+                    <a:bodyPr/>
+                    <a:lstStyle/>
+                    <a:p>
+                      <a:pPr algn="l"/>
+                      <a:r>
+                        <a:rPr sz="1000" b="0">
+                          <a:solidFill>
+                            <a:srgbClr val="1D1B43"/>
+                          </a:solidFill>
+                          <a:latin typeface="Calibri"/>
+                        </a:rPr>
+                        <a:t>281087</a:t>
                       </a:r>
                     </a:p>
                   </a:txBody>
@@ -6321,7 +7491,7 @@
                           </a:solidFill>
                           <a:latin typeface="Calibri"/>
                         </a:rPr>
-                        <a:t>J B COMERCIO DE ROUP - SERRA / ES</a:t>
+                        <a:t>ANA CRISTINA GUIMARA - NOVA SERRANA / MG</a:t>
                       </a:r>
                     </a:p>
                   </a:txBody>
@@ -6344,7 +7514,7 @@
                           </a:solidFill>
                           <a:latin typeface="Calibri"/>
                         </a:rPr>
-                        <a:t>SERRA/ES</a:t>
+                        <a:t>NOVA SERRANA/MG</a:t>
                       </a:r>
                     </a:p>
                   </a:txBody>
@@ -6367,1645 +7537,7 @@
                           </a:solidFill>
                           <a:latin typeface="Calibri"/>
                         </a:rPr>
-                        <a:t>29/04/2026</a:t>
-                      </a:r>
-                    </a:p>
-                  </a:txBody>
-                  <a:tcPr>
-                    <a:solidFill>
-                      <a:srgbClr val="F2F2F2"/>
-                    </a:solidFill>
-                  </a:tcPr>
-                </a:tc>
-                <a:tc>
-                  <a:txBody>
-                    <a:bodyPr/>
-                    <a:lstStyle/>
-                    <a:p>
-                      <a:pPr algn="l"/>
-                      <a:r>
-                        <a:rPr sz="1000" b="0">
-                          <a:solidFill>
-                            <a:srgbClr val="1D1B43"/>
-                          </a:solidFill>
-                          <a:latin typeface="Calibri"/>
-                        </a:rPr>
-                        <a:t>ENTREGUE FORA DO PRAZO</a:t>
-                      </a:r>
-                    </a:p>
-                  </a:txBody>
-                  <a:tcPr>
-                    <a:solidFill>
-                      <a:srgbClr val="F2F2F2"/>
-                    </a:solidFill>
-                  </a:tcPr>
-                </a:tc>
-              </a:tr>
-              <a:tr h="198782">
-                <a:tc>
-                  <a:txBody>
-                    <a:bodyPr/>
-                    <a:lstStyle/>
-                    <a:p>
-                      <a:pPr algn="l"/>
-                      <a:r>
-                        <a:rPr sz="1000" b="0">
-                          <a:solidFill>
-                            <a:srgbClr val="1D1B43"/>
-                          </a:solidFill>
-                          <a:latin typeface="Calibri"/>
-                        </a:rPr>
-                        <a:t>279799</a:t>
-                      </a:r>
-                    </a:p>
-                  </a:txBody>
-                  <a:tcPr>
-                    <a:solidFill>
-                      <a:srgbClr val="FFFFFF"/>
-                    </a:solidFill>
-                  </a:tcPr>
-                </a:tc>
-                <a:tc>
-                  <a:txBody>
-                    <a:bodyPr/>
-                    <a:lstStyle/>
-                    <a:p>
-                      <a:pPr algn="l"/>
-                      <a:r>
-                        <a:rPr sz="1000" b="0">
-                          <a:solidFill>
-                            <a:srgbClr val="1D1B43"/>
-                          </a:solidFill>
-                          <a:latin typeface="Calibri"/>
-                        </a:rPr>
-                        <a:t>C J L DE OLIVEIRA - IRUPI / ES</a:t>
-                      </a:r>
-                    </a:p>
-                  </a:txBody>
-                  <a:tcPr>
-                    <a:solidFill>
-                      <a:srgbClr val="FFFFFF"/>
-                    </a:solidFill>
-                  </a:tcPr>
-                </a:tc>
-                <a:tc>
-                  <a:txBody>
-                    <a:bodyPr/>
-                    <a:lstStyle/>
-                    <a:p>
-                      <a:pPr algn="l"/>
-                      <a:r>
-                        <a:rPr sz="1000" b="0">
-                          <a:solidFill>
-                            <a:srgbClr val="1D1B43"/>
-                          </a:solidFill>
-                          <a:latin typeface="Calibri"/>
-                        </a:rPr>
-                        <a:t>IRUPI/ES</a:t>
-                      </a:r>
-                    </a:p>
-                  </a:txBody>
-                  <a:tcPr>
-                    <a:solidFill>
-                      <a:srgbClr val="FFFFFF"/>
-                    </a:solidFill>
-                  </a:tcPr>
-                </a:tc>
-                <a:tc>
-                  <a:txBody>
-                    <a:bodyPr/>
-                    <a:lstStyle/>
-                    <a:p>
-                      <a:pPr algn="l"/>
-                      <a:r>
-                        <a:rPr sz="1000" b="0">
-                          <a:solidFill>
-                            <a:srgbClr val="1D1B43"/>
-                          </a:solidFill>
-                          <a:latin typeface="Calibri"/>
-                        </a:rPr>
-                        <a:t>29/04/2026</a:t>
-                      </a:r>
-                    </a:p>
-                  </a:txBody>
-                  <a:tcPr>
-                    <a:solidFill>
-                      <a:srgbClr val="FFFFFF"/>
-                    </a:solidFill>
-                  </a:tcPr>
-                </a:tc>
-                <a:tc>
-                  <a:txBody>
-                    <a:bodyPr/>
-                    <a:lstStyle/>
-                    <a:p>
-                      <a:pPr algn="l"/>
-                      <a:r>
-                        <a:rPr sz="1000" b="0">
-                          <a:solidFill>
-                            <a:srgbClr val="1D1B43"/>
-                          </a:solidFill>
-                          <a:latin typeface="Calibri"/>
-                        </a:rPr>
-                        <a:t>ENTREGUE FORA DO PRAZO</a:t>
-                      </a:r>
-                    </a:p>
-                  </a:txBody>
-                  <a:tcPr>
-                    <a:solidFill>
-                      <a:srgbClr val="FFFFFF"/>
-                    </a:solidFill>
-                  </a:tcPr>
-                </a:tc>
-              </a:tr>
-              <a:tr h="198782">
-                <a:tc>
-                  <a:txBody>
-                    <a:bodyPr/>
-                    <a:lstStyle/>
-                    <a:p>
-                      <a:pPr algn="l"/>
-                      <a:r>
-                        <a:rPr sz="1000" b="0">
-                          <a:solidFill>
-                            <a:srgbClr val="1D1B43"/>
-                          </a:solidFill>
-                          <a:latin typeface="Calibri"/>
-                        </a:rPr>
-                        <a:t>279800</a:t>
-                      </a:r>
-                    </a:p>
-                  </a:txBody>
-                  <a:tcPr>
-                    <a:solidFill>
-                      <a:srgbClr val="F2F2F2"/>
-                    </a:solidFill>
-                  </a:tcPr>
-                </a:tc>
-                <a:tc>
-                  <a:txBody>
-                    <a:bodyPr/>
-                    <a:lstStyle/>
-                    <a:p>
-                      <a:pPr algn="l"/>
-                      <a:r>
-                        <a:rPr sz="1000" b="0">
-                          <a:solidFill>
-                            <a:srgbClr val="1D1B43"/>
-                          </a:solidFill>
-                          <a:latin typeface="Calibri"/>
-                        </a:rPr>
-                        <a:t>ALLURE SHOES E ACESS - JERONIMO MONTEIRO / ES</a:t>
-                      </a:r>
-                    </a:p>
-                  </a:txBody>
-                  <a:tcPr>
-                    <a:solidFill>
-                      <a:srgbClr val="F2F2F2"/>
-                    </a:solidFill>
-                  </a:tcPr>
-                </a:tc>
-                <a:tc>
-                  <a:txBody>
-                    <a:bodyPr/>
-                    <a:lstStyle/>
-                    <a:p>
-                      <a:pPr algn="l"/>
-                      <a:r>
-                        <a:rPr sz="1000" b="0">
-                          <a:solidFill>
-                            <a:srgbClr val="1D1B43"/>
-                          </a:solidFill>
-                          <a:latin typeface="Calibri"/>
-                        </a:rPr>
-                        <a:t>JERONIMO MONTEIRO/ES</a:t>
-                      </a:r>
-                    </a:p>
-                  </a:txBody>
-                  <a:tcPr>
-                    <a:solidFill>
-                      <a:srgbClr val="F2F2F2"/>
-                    </a:solidFill>
-                  </a:tcPr>
-                </a:tc>
-                <a:tc>
-                  <a:txBody>
-                    <a:bodyPr/>
-                    <a:lstStyle/>
-                    <a:p>
-                      <a:pPr algn="l"/>
-                      <a:r>
-                        <a:rPr sz="1000" b="0">
-                          <a:solidFill>
-                            <a:srgbClr val="1D1B43"/>
-                          </a:solidFill>
-                          <a:latin typeface="Calibri"/>
-                        </a:rPr>
-                        <a:t>29/04/2026</a:t>
-                      </a:r>
-                    </a:p>
-                  </a:txBody>
-                  <a:tcPr>
-                    <a:solidFill>
-                      <a:srgbClr val="F2F2F2"/>
-                    </a:solidFill>
-                  </a:tcPr>
-                </a:tc>
-                <a:tc>
-                  <a:txBody>
-                    <a:bodyPr/>
-                    <a:lstStyle/>
-                    <a:p>
-                      <a:pPr algn="l"/>
-                      <a:r>
-                        <a:rPr sz="1000" b="0">
-                          <a:solidFill>
-                            <a:srgbClr val="1D1B43"/>
-                          </a:solidFill>
-                          <a:latin typeface="Calibri"/>
-                        </a:rPr>
-                        <a:t>ENTREGUE FORA DO PRAZO</a:t>
-                      </a:r>
-                    </a:p>
-                  </a:txBody>
-                  <a:tcPr>
-                    <a:solidFill>
-                      <a:srgbClr val="F2F2F2"/>
-                    </a:solidFill>
-                  </a:tcPr>
-                </a:tc>
-              </a:tr>
-              <a:tr h="198782">
-                <a:tc>
-                  <a:txBody>
-                    <a:bodyPr/>
-                    <a:lstStyle/>
-                    <a:p>
-                      <a:pPr algn="l"/>
-                      <a:r>
-                        <a:rPr sz="1000" b="0">
-                          <a:solidFill>
-                            <a:srgbClr val="1D1B43"/>
-                          </a:solidFill>
-                          <a:latin typeface="Calibri"/>
-                        </a:rPr>
-                        <a:t>279802</a:t>
-                      </a:r>
-                    </a:p>
-                  </a:txBody>
-                  <a:tcPr>
-                    <a:solidFill>
-                      <a:srgbClr val="FFFFFF"/>
-                    </a:solidFill>
-                  </a:tcPr>
-                </a:tc>
-                <a:tc>
-                  <a:txBody>
-                    <a:bodyPr/>
-                    <a:lstStyle/>
-                    <a:p>
-                      <a:pPr algn="l"/>
-                      <a:r>
-                        <a:rPr sz="1000" b="0">
-                          <a:solidFill>
-                            <a:srgbClr val="1D1B43"/>
-                          </a:solidFill>
-                          <a:latin typeface="Calibri"/>
-                        </a:rPr>
-                        <a:t>CONFECCOES BROEDEL L - CARIACICA / ES</a:t>
-                      </a:r>
-                    </a:p>
-                  </a:txBody>
-                  <a:tcPr>
-                    <a:solidFill>
-                      <a:srgbClr val="FFFFFF"/>
-                    </a:solidFill>
-                  </a:tcPr>
-                </a:tc>
-                <a:tc>
-                  <a:txBody>
-                    <a:bodyPr/>
-                    <a:lstStyle/>
-                    <a:p>
-                      <a:pPr algn="l"/>
-                      <a:r>
-                        <a:rPr sz="1000" b="0">
-                          <a:solidFill>
-                            <a:srgbClr val="1D1B43"/>
-                          </a:solidFill>
-                          <a:latin typeface="Calibri"/>
-                        </a:rPr>
-                        <a:t>CARIACICA/ES</a:t>
-                      </a:r>
-                    </a:p>
-                  </a:txBody>
-                  <a:tcPr>
-                    <a:solidFill>
-                      <a:srgbClr val="FFFFFF"/>
-                    </a:solidFill>
-                  </a:tcPr>
-                </a:tc>
-                <a:tc>
-                  <a:txBody>
-                    <a:bodyPr/>
-                    <a:lstStyle/>
-                    <a:p>
-                      <a:pPr algn="l"/>
-                      <a:r>
-                        <a:rPr sz="1000" b="0">
-                          <a:solidFill>
-                            <a:srgbClr val="1D1B43"/>
-                          </a:solidFill>
-                          <a:latin typeface="Calibri"/>
-                        </a:rPr>
-                        <a:t>29/04/2026</a:t>
-                      </a:r>
-                    </a:p>
-                  </a:txBody>
-                  <a:tcPr>
-                    <a:solidFill>
-                      <a:srgbClr val="FFFFFF"/>
-                    </a:solidFill>
-                  </a:tcPr>
-                </a:tc>
-                <a:tc>
-                  <a:txBody>
-                    <a:bodyPr/>
-                    <a:lstStyle/>
-                    <a:p>
-                      <a:pPr algn="l"/>
-                      <a:r>
-                        <a:rPr sz="1000" b="0">
-                          <a:solidFill>
-                            <a:srgbClr val="1D1B43"/>
-                          </a:solidFill>
-                          <a:latin typeface="Calibri"/>
-                        </a:rPr>
-                        <a:t>ENTREGUE FORA DO PRAZO</a:t>
-                      </a:r>
-                    </a:p>
-                  </a:txBody>
-                  <a:tcPr>
-                    <a:solidFill>
-                      <a:srgbClr val="FFFFFF"/>
-                    </a:solidFill>
-                  </a:tcPr>
-                </a:tc>
-              </a:tr>
-              <a:tr h="198782">
-                <a:tc>
-                  <a:txBody>
-                    <a:bodyPr/>
-                    <a:lstStyle/>
-                    <a:p>
-                      <a:pPr algn="l"/>
-                      <a:r>
-                        <a:rPr sz="1000" b="0">
-                          <a:solidFill>
-                            <a:srgbClr val="1D1B43"/>
-                          </a:solidFill>
-                          <a:latin typeface="Calibri"/>
-                        </a:rPr>
-                        <a:t>279805</a:t>
-                      </a:r>
-                    </a:p>
-                  </a:txBody>
-                  <a:tcPr>
-                    <a:solidFill>
-                      <a:srgbClr val="F2F2F2"/>
-                    </a:solidFill>
-                  </a:tcPr>
-                </a:tc>
-                <a:tc>
-                  <a:txBody>
-                    <a:bodyPr/>
-                    <a:lstStyle/>
-                    <a:p>
-                      <a:pPr algn="l"/>
-                      <a:r>
-                        <a:rPr sz="1000" b="0">
-                          <a:solidFill>
-                            <a:srgbClr val="1D1B43"/>
-                          </a:solidFill>
-                          <a:latin typeface="Calibri"/>
-                        </a:rPr>
-                        <a:t>GESSICA CHIEPPE 1363 - MARILANDIA / ES</a:t>
-                      </a:r>
-                    </a:p>
-                  </a:txBody>
-                  <a:tcPr>
-                    <a:solidFill>
-                      <a:srgbClr val="F2F2F2"/>
-                    </a:solidFill>
-                  </a:tcPr>
-                </a:tc>
-                <a:tc>
-                  <a:txBody>
-                    <a:bodyPr/>
-                    <a:lstStyle/>
-                    <a:p>
-                      <a:pPr algn="l"/>
-                      <a:r>
-                        <a:rPr sz="1000" b="0">
-                          <a:solidFill>
-                            <a:srgbClr val="1D1B43"/>
-                          </a:solidFill>
-                          <a:latin typeface="Calibri"/>
-                        </a:rPr>
-                        <a:t>MARILANDIA/ES</a:t>
-                      </a:r>
-                    </a:p>
-                  </a:txBody>
-                  <a:tcPr>
-                    <a:solidFill>
-                      <a:srgbClr val="F2F2F2"/>
-                    </a:solidFill>
-                  </a:tcPr>
-                </a:tc>
-                <a:tc>
-                  <a:txBody>
-                    <a:bodyPr/>
-                    <a:lstStyle/>
-                    <a:p>
-                      <a:pPr algn="l"/>
-                      <a:r>
-                        <a:rPr sz="1000" b="0">
-                          <a:solidFill>
-                            <a:srgbClr val="1D1B43"/>
-                          </a:solidFill>
-                          <a:latin typeface="Calibri"/>
-                        </a:rPr>
-                        <a:t>29/04/2026</a:t>
-                      </a:r>
-                    </a:p>
-                  </a:txBody>
-                  <a:tcPr>
-                    <a:solidFill>
-                      <a:srgbClr val="F2F2F2"/>
-                    </a:solidFill>
-                  </a:tcPr>
-                </a:tc>
-                <a:tc>
-                  <a:txBody>
-                    <a:bodyPr/>
-                    <a:lstStyle/>
-                    <a:p>
-                      <a:pPr algn="l"/>
-                      <a:r>
-                        <a:rPr sz="1000" b="0">
-                          <a:solidFill>
-                            <a:srgbClr val="1D1B43"/>
-                          </a:solidFill>
-                          <a:latin typeface="Calibri"/>
-                        </a:rPr>
-                        <a:t>ENTREGUE FORA DO PRAZO</a:t>
-                      </a:r>
-                    </a:p>
-                  </a:txBody>
-                  <a:tcPr>
-                    <a:solidFill>
-                      <a:srgbClr val="F2F2F2"/>
-                    </a:solidFill>
-                  </a:tcPr>
-                </a:tc>
-              </a:tr>
-              <a:tr h="198782">
-                <a:tc>
-                  <a:txBody>
-                    <a:bodyPr/>
-                    <a:lstStyle/>
-                    <a:p>
-                      <a:pPr algn="l"/>
-                      <a:r>
-                        <a:rPr sz="1000" b="0">
-                          <a:solidFill>
-                            <a:srgbClr val="1D1B43"/>
-                          </a:solidFill>
-                          <a:latin typeface="Calibri"/>
-                        </a:rPr>
-                        <a:t>279995</a:t>
-                      </a:r>
-                    </a:p>
-                  </a:txBody>
-                  <a:tcPr>
-                    <a:solidFill>
-                      <a:srgbClr val="FFFFFF"/>
-                    </a:solidFill>
-                  </a:tcPr>
-                </a:tc>
-                <a:tc>
-                  <a:txBody>
-                    <a:bodyPr/>
-                    <a:lstStyle/>
-                    <a:p>
-                      <a:pPr algn="l"/>
-                      <a:r>
-                        <a:rPr sz="1000" b="0">
-                          <a:solidFill>
-                            <a:srgbClr val="1D1B43"/>
-                          </a:solidFill>
-                          <a:latin typeface="Calibri"/>
-                        </a:rPr>
-                        <a:t>DI DELLE CALCADOS LT - ARACRUZ / ES</a:t>
-                      </a:r>
-                    </a:p>
-                  </a:txBody>
-                  <a:tcPr>
-                    <a:solidFill>
-                      <a:srgbClr val="FFFFFF"/>
-                    </a:solidFill>
-                  </a:tcPr>
-                </a:tc>
-                <a:tc>
-                  <a:txBody>
-                    <a:bodyPr/>
-                    <a:lstStyle/>
-                    <a:p>
-                      <a:pPr algn="l"/>
-                      <a:r>
-                        <a:rPr sz="1000" b="0">
-                          <a:solidFill>
-                            <a:srgbClr val="1D1B43"/>
-                          </a:solidFill>
-                          <a:latin typeface="Calibri"/>
-                        </a:rPr>
-                        <a:t>ARACRUZ/ES</a:t>
-                      </a:r>
-                    </a:p>
-                  </a:txBody>
-                  <a:tcPr>
-                    <a:solidFill>
-                      <a:srgbClr val="FFFFFF"/>
-                    </a:solidFill>
-                  </a:tcPr>
-                </a:tc>
-                <a:tc>
-                  <a:txBody>
-                    <a:bodyPr/>
-                    <a:lstStyle/>
-                    <a:p>
-                      <a:pPr algn="l"/>
-                      <a:r>
-                        <a:rPr sz="1000" b="0">
-                          <a:solidFill>
-                            <a:srgbClr val="1D1B43"/>
-                          </a:solidFill>
-                          <a:latin typeface="Calibri"/>
-                        </a:rPr>
-                        <a:t>29/04/2026</a:t>
-                      </a:r>
-                    </a:p>
-                  </a:txBody>
-                  <a:tcPr>
-                    <a:solidFill>
-                      <a:srgbClr val="FFFFFF"/>
-                    </a:solidFill>
-                  </a:tcPr>
-                </a:tc>
-                <a:tc>
-                  <a:txBody>
-                    <a:bodyPr/>
-                    <a:lstStyle/>
-                    <a:p>
-                      <a:pPr algn="l"/>
-                      <a:r>
-                        <a:rPr sz="1000" b="0">
-                          <a:solidFill>
-                            <a:srgbClr val="1D1B43"/>
-                          </a:solidFill>
-                          <a:latin typeface="Calibri"/>
-                        </a:rPr>
-                        <a:t>ENTREGUE FORA DO PRAZO</a:t>
-                      </a:r>
-                    </a:p>
-                  </a:txBody>
-                  <a:tcPr>
-                    <a:solidFill>
-                      <a:srgbClr val="FFFFFF"/>
-                    </a:solidFill>
-                  </a:tcPr>
-                </a:tc>
-              </a:tr>
-              <a:tr h="198782">
-                <a:tc>
-                  <a:txBody>
-                    <a:bodyPr/>
-                    <a:lstStyle/>
-                    <a:p>
-                      <a:pPr algn="l"/>
-                      <a:r>
-                        <a:rPr sz="1000" b="0">
-                          <a:solidFill>
-                            <a:srgbClr val="1D1B43"/>
-                          </a:solidFill>
-                          <a:latin typeface="Calibri"/>
-                        </a:rPr>
-                        <a:t>279997</a:t>
-                      </a:r>
-                    </a:p>
-                  </a:txBody>
-                  <a:tcPr>
-                    <a:solidFill>
-                      <a:srgbClr val="F2F2F2"/>
-                    </a:solidFill>
-                  </a:tcPr>
-                </a:tc>
-                <a:tc>
-                  <a:txBody>
-                    <a:bodyPr/>
-                    <a:lstStyle/>
-                    <a:p>
-                      <a:pPr algn="l"/>
-                      <a:r>
-                        <a:rPr sz="1000" b="0">
-                          <a:solidFill>
-                            <a:srgbClr val="1D1B43"/>
-                          </a:solidFill>
-                          <a:latin typeface="Calibri"/>
-                        </a:rPr>
-                        <a:t>STAR SHOES LTDA - GUACUI / ES</a:t>
-                      </a:r>
-                    </a:p>
-                  </a:txBody>
-                  <a:tcPr>
-                    <a:solidFill>
-                      <a:srgbClr val="F2F2F2"/>
-                    </a:solidFill>
-                  </a:tcPr>
-                </a:tc>
-                <a:tc>
-                  <a:txBody>
-                    <a:bodyPr/>
-                    <a:lstStyle/>
-                    <a:p>
-                      <a:pPr algn="l"/>
-                      <a:r>
-                        <a:rPr sz="1000" b="0">
-                          <a:solidFill>
-                            <a:srgbClr val="1D1B43"/>
-                          </a:solidFill>
-                          <a:latin typeface="Calibri"/>
-                        </a:rPr>
-                        <a:t>GUACUI/ES</a:t>
-                      </a:r>
-                    </a:p>
-                  </a:txBody>
-                  <a:tcPr>
-                    <a:solidFill>
-                      <a:srgbClr val="F2F2F2"/>
-                    </a:solidFill>
-                  </a:tcPr>
-                </a:tc>
-                <a:tc>
-                  <a:txBody>
-                    <a:bodyPr/>
-                    <a:lstStyle/>
-                    <a:p>
-                      <a:pPr algn="l"/>
-                      <a:r>
-                        <a:rPr sz="1000" b="0">
-                          <a:solidFill>
-                            <a:srgbClr val="1D1B43"/>
-                          </a:solidFill>
-                          <a:latin typeface="Calibri"/>
-                        </a:rPr>
-                        <a:t>29/04/2026</a:t>
-                      </a:r>
-                    </a:p>
-                  </a:txBody>
-                  <a:tcPr>
-                    <a:solidFill>
-                      <a:srgbClr val="F2F2F2"/>
-                    </a:solidFill>
-                  </a:tcPr>
-                </a:tc>
-                <a:tc>
-                  <a:txBody>
-                    <a:bodyPr/>
-                    <a:lstStyle/>
-                    <a:p>
-                      <a:pPr algn="l"/>
-                      <a:r>
-                        <a:rPr sz="1000" b="0">
-                          <a:solidFill>
-                            <a:srgbClr val="1D1B43"/>
-                          </a:solidFill>
-                          <a:latin typeface="Calibri"/>
-                        </a:rPr>
-                        <a:t>ENTREGUE FORA DO PRAZO</a:t>
-                      </a:r>
-                    </a:p>
-                  </a:txBody>
-                  <a:tcPr>
-                    <a:solidFill>
-                      <a:srgbClr val="F2F2F2"/>
-                    </a:solidFill>
-                  </a:tcPr>
-                </a:tc>
-              </a:tr>
-              <a:tr h="198782">
-                <a:tc>
-                  <a:txBody>
-                    <a:bodyPr/>
-                    <a:lstStyle/>
-                    <a:p>
-                      <a:pPr algn="l"/>
-                      <a:r>
-                        <a:rPr sz="1000" b="0">
-                          <a:solidFill>
-                            <a:srgbClr val="1D1B43"/>
-                          </a:solidFill>
-                          <a:latin typeface="Calibri"/>
-                        </a:rPr>
-                        <a:t>280031</a:t>
-                      </a:r>
-                    </a:p>
-                  </a:txBody>
-                  <a:tcPr>
-                    <a:solidFill>
-                      <a:srgbClr val="FFFFFF"/>
-                    </a:solidFill>
-                  </a:tcPr>
-                </a:tc>
-                <a:tc>
-                  <a:txBody>
-                    <a:bodyPr/>
-                    <a:lstStyle/>
-                    <a:p>
-                      <a:pPr algn="l"/>
-                      <a:r>
-                        <a:rPr sz="1000" b="0">
-                          <a:solidFill>
-                            <a:srgbClr val="1D1B43"/>
-                          </a:solidFill>
-                          <a:latin typeface="Calibri"/>
-                        </a:rPr>
-                        <a:t>M STORE COMERCIO LTD - IBIRACU / ES</a:t>
-                      </a:r>
-                    </a:p>
-                  </a:txBody>
-                  <a:tcPr>
-                    <a:solidFill>
-                      <a:srgbClr val="FFFFFF"/>
-                    </a:solidFill>
-                  </a:tcPr>
-                </a:tc>
-                <a:tc>
-                  <a:txBody>
-                    <a:bodyPr/>
-                    <a:lstStyle/>
-                    <a:p>
-                      <a:pPr algn="l"/>
-                      <a:r>
-                        <a:rPr sz="1000" b="0">
-                          <a:solidFill>
-                            <a:srgbClr val="1D1B43"/>
-                          </a:solidFill>
-                          <a:latin typeface="Calibri"/>
-                        </a:rPr>
-                        <a:t>IBIRACU/ES</a:t>
-                      </a:r>
-                    </a:p>
-                  </a:txBody>
-                  <a:tcPr>
-                    <a:solidFill>
-                      <a:srgbClr val="FFFFFF"/>
-                    </a:solidFill>
-                  </a:tcPr>
-                </a:tc>
-                <a:tc>
-                  <a:txBody>
-                    <a:bodyPr/>
-                    <a:lstStyle/>
-                    <a:p>
-                      <a:pPr algn="l"/>
-                      <a:r>
-                        <a:rPr sz="1000" b="0">
-                          <a:solidFill>
-                            <a:srgbClr val="1D1B43"/>
-                          </a:solidFill>
-                          <a:latin typeface="Calibri"/>
-                        </a:rPr>
-                        <a:t>29/04/2026</a:t>
-                      </a:r>
-                    </a:p>
-                  </a:txBody>
-                  <a:tcPr>
-                    <a:solidFill>
-                      <a:srgbClr val="FFFFFF"/>
-                    </a:solidFill>
-                  </a:tcPr>
-                </a:tc>
-                <a:tc>
-                  <a:txBody>
-                    <a:bodyPr/>
-                    <a:lstStyle/>
-                    <a:p>
-                      <a:pPr algn="l"/>
-                      <a:r>
-                        <a:rPr sz="1000" b="0">
-                          <a:solidFill>
-                            <a:srgbClr val="1D1B43"/>
-                          </a:solidFill>
-                          <a:latin typeface="Calibri"/>
-                        </a:rPr>
-                        <a:t>FORA DO PRAZO</a:t>
-                      </a:r>
-                    </a:p>
-                  </a:txBody>
-                  <a:tcPr>
-                    <a:solidFill>
-                      <a:srgbClr val="FFFFFF"/>
-                    </a:solidFill>
-                  </a:tcPr>
-                </a:tc>
-              </a:tr>
-              <a:tr h="198782">
-                <a:tc>
-                  <a:txBody>
-                    <a:bodyPr/>
-                    <a:lstStyle/>
-                    <a:p>
-                      <a:pPr algn="l"/>
-                      <a:r>
-                        <a:rPr sz="1000" b="0">
-                          <a:solidFill>
-                            <a:srgbClr val="1D1B43"/>
-                          </a:solidFill>
-                          <a:latin typeface="Calibri"/>
-                        </a:rPr>
-                        <a:t>280098</a:t>
-                      </a:r>
-                    </a:p>
-                  </a:txBody>
-                  <a:tcPr>
-                    <a:solidFill>
-                      <a:srgbClr val="F2F2F2"/>
-                    </a:solidFill>
-                  </a:tcPr>
-                </a:tc>
-                <a:tc>
-                  <a:txBody>
-                    <a:bodyPr/>
-                    <a:lstStyle/>
-                    <a:p>
-                      <a:pPr algn="l"/>
-                      <a:r>
-                        <a:rPr sz="1000" b="0">
-                          <a:solidFill>
-                            <a:srgbClr val="1D1B43"/>
-                          </a:solidFill>
-                          <a:latin typeface="Calibri"/>
-                        </a:rPr>
-                        <a:t>CALCADOS E ACESSORIO - SAO JOSE DO CALCADO / ES</a:t>
-                      </a:r>
-                    </a:p>
-                  </a:txBody>
-                  <a:tcPr>
-                    <a:solidFill>
-                      <a:srgbClr val="F2F2F2"/>
-                    </a:solidFill>
-                  </a:tcPr>
-                </a:tc>
-                <a:tc>
-                  <a:txBody>
-                    <a:bodyPr/>
-                    <a:lstStyle/>
-                    <a:p>
-                      <a:pPr algn="l"/>
-                      <a:r>
-                        <a:rPr sz="1000" b="0">
-                          <a:solidFill>
-                            <a:srgbClr val="1D1B43"/>
-                          </a:solidFill>
-                          <a:latin typeface="Calibri"/>
-                        </a:rPr>
-                        <a:t>SAO JOSE DO CALCADO/ES</a:t>
-                      </a:r>
-                    </a:p>
-                  </a:txBody>
-                  <a:tcPr>
-                    <a:solidFill>
-                      <a:srgbClr val="F2F2F2"/>
-                    </a:solidFill>
-                  </a:tcPr>
-                </a:tc>
-                <a:tc>
-                  <a:txBody>
-                    <a:bodyPr/>
-                    <a:lstStyle/>
-                    <a:p>
-                      <a:pPr algn="l"/>
-                      <a:r>
-                        <a:rPr sz="1000" b="0">
-                          <a:solidFill>
-                            <a:srgbClr val="1D1B43"/>
-                          </a:solidFill>
-                          <a:latin typeface="Calibri"/>
-                        </a:rPr>
-                        <a:t>29/04/2026</a:t>
-                      </a:r>
-                    </a:p>
-                  </a:txBody>
-                  <a:tcPr>
-                    <a:solidFill>
-                      <a:srgbClr val="F2F2F2"/>
-                    </a:solidFill>
-                  </a:tcPr>
-                </a:tc>
-                <a:tc>
-                  <a:txBody>
-                    <a:bodyPr/>
-                    <a:lstStyle/>
-                    <a:p>
-                      <a:pPr algn="l"/>
-                      <a:r>
-                        <a:rPr sz="1000" b="0">
-                          <a:solidFill>
-                            <a:srgbClr val="1D1B43"/>
-                          </a:solidFill>
-                          <a:latin typeface="Calibri"/>
-                        </a:rPr>
-                        <a:t>ENTREGUE FORA DO PRAZO</a:t>
-                      </a:r>
-                    </a:p>
-                  </a:txBody>
-                  <a:tcPr>
-                    <a:solidFill>
-                      <a:srgbClr val="F2F2F2"/>
-                    </a:solidFill>
-                  </a:tcPr>
-                </a:tc>
-              </a:tr>
-              <a:tr h="198782">
-                <a:tc>
-                  <a:txBody>
-                    <a:bodyPr/>
-                    <a:lstStyle/>
-                    <a:p>
-                      <a:pPr algn="l"/>
-                      <a:r>
-                        <a:rPr sz="1000" b="0">
-                          <a:solidFill>
-                            <a:srgbClr val="1D1B43"/>
-                          </a:solidFill>
-                          <a:latin typeface="Calibri"/>
-                        </a:rPr>
-                        <a:t>280100</a:t>
-                      </a:r>
-                    </a:p>
-                  </a:txBody>
-                  <a:tcPr>
-                    <a:solidFill>
-                      <a:srgbClr val="FFFFFF"/>
-                    </a:solidFill>
-                  </a:tcPr>
-                </a:tc>
-                <a:tc>
-                  <a:txBody>
-                    <a:bodyPr/>
-                    <a:lstStyle/>
-                    <a:p>
-                      <a:pPr algn="l"/>
-                      <a:r>
-                        <a:rPr sz="1000" b="0">
-                          <a:solidFill>
-                            <a:srgbClr val="1D1B43"/>
-                          </a:solidFill>
-                          <a:latin typeface="Calibri"/>
-                        </a:rPr>
-                        <a:t>CONFECCOES BATISTA E - ITABIRA / MG</a:t>
-                      </a:r>
-                    </a:p>
-                  </a:txBody>
-                  <a:tcPr>
-                    <a:solidFill>
-                      <a:srgbClr val="FFFFFF"/>
-                    </a:solidFill>
-                  </a:tcPr>
-                </a:tc>
-                <a:tc>
-                  <a:txBody>
-                    <a:bodyPr/>
-                    <a:lstStyle/>
-                    <a:p>
-                      <a:pPr algn="l"/>
-                      <a:r>
-                        <a:rPr sz="1000" b="0">
-                          <a:solidFill>
-                            <a:srgbClr val="1D1B43"/>
-                          </a:solidFill>
-                          <a:latin typeface="Calibri"/>
-                        </a:rPr>
-                        <a:t>ITABIRA/MG</a:t>
-                      </a:r>
-                    </a:p>
-                  </a:txBody>
-                  <a:tcPr>
-                    <a:solidFill>
-                      <a:srgbClr val="FFFFFF"/>
-                    </a:solidFill>
-                  </a:tcPr>
-                </a:tc>
-                <a:tc>
-                  <a:txBody>
-                    <a:bodyPr/>
-                    <a:lstStyle/>
-                    <a:p>
-                      <a:pPr algn="l"/>
-                      <a:r>
-                        <a:rPr sz="1000" b="0">
-                          <a:solidFill>
-                            <a:srgbClr val="1D1B43"/>
-                          </a:solidFill>
-                          <a:latin typeface="Calibri"/>
-                        </a:rPr>
-                        <a:t>29/04/2026</a:t>
-                      </a:r>
-                    </a:p>
-                  </a:txBody>
-                  <a:tcPr>
-                    <a:solidFill>
-                      <a:srgbClr val="FFFFFF"/>
-                    </a:solidFill>
-                  </a:tcPr>
-                </a:tc>
-                <a:tc>
-                  <a:txBody>
-                    <a:bodyPr/>
-                    <a:lstStyle/>
-                    <a:p>
-                      <a:pPr algn="l"/>
-                      <a:r>
-                        <a:rPr sz="1000" b="0">
-                          <a:solidFill>
-                            <a:srgbClr val="1D1B43"/>
-                          </a:solidFill>
-                          <a:latin typeface="Calibri"/>
-                        </a:rPr>
-                        <a:t>FORA DO PRAZO</a:t>
-                      </a:r>
-                    </a:p>
-                  </a:txBody>
-                  <a:tcPr>
-                    <a:solidFill>
-                      <a:srgbClr val="FFFFFF"/>
-                    </a:solidFill>
-                  </a:tcPr>
-                </a:tc>
-              </a:tr>
-              <a:tr h="198782">
-                <a:tc>
-                  <a:txBody>
-                    <a:bodyPr/>
-                    <a:lstStyle/>
-                    <a:p>
-                      <a:pPr algn="l"/>
-                      <a:r>
-                        <a:rPr sz="1000" b="0">
-                          <a:solidFill>
-                            <a:srgbClr val="1D1B43"/>
-                          </a:solidFill>
-                          <a:latin typeface="Calibri"/>
-                        </a:rPr>
-                        <a:t>280244</a:t>
-                      </a:r>
-                    </a:p>
-                  </a:txBody>
-                  <a:tcPr>
-                    <a:solidFill>
-                      <a:srgbClr val="F2F2F2"/>
-                    </a:solidFill>
-                  </a:tcPr>
-                </a:tc>
-                <a:tc>
-                  <a:txBody>
-                    <a:bodyPr/>
-                    <a:lstStyle/>
-                    <a:p>
-                      <a:pPr algn="l"/>
-                      <a:r>
-                        <a:rPr sz="1000" b="0">
-                          <a:solidFill>
-                            <a:srgbClr val="1D1B43"/>
-                          </a:solidFill>
-                          <a:latin typeface="Calibri"/>
-                        </a:rPr>
-                        <a:t>D&amp;J BOUTIQUE LTDA - - SAO GABRIEL DA PALHA / ES</a:t>
-                      </a:r>
-                    </a:p>
-                  </a:txBody>
-                  <a:tcPr>
-                    <a:solidFill>
-                      <a:srgbClr val="F2F2F2"/>
-                    </a:solidFill>
-                  </a:tcPr>
-                </a:tc>
-                <a:tc>
-                  <a:txBody>
-                    <a:bodyPr/>
-                    <a:lstStyle/>
-                    <a:p>
-                      <a:pPr algn="l"/>
-                      <a:r>
-                        <a:rPr sz="1000" b="0">
-                          <a:solidFill>
-                            <a:srgbClr val="1D1B43"/>
-                          </a:solidFill>
-                          <a:latin typeface="Calibri"/>
-                        </a:rPr>
-                        <a:t>SAO GABRIEL DA PALHA/ES</a:t>
-                      </a:r>
-                    </a:p>
-                  </a:txBody>
-                  <a:tcPr>
-                    <a:solidFill>
-                      <a:srgbClr val="F2F2F2"/>
-                    </a:solidFill>
-                  </a:tcPr>
-                </a:tc>
-                <a:tc>
-                  <a:txBody>
-                    <a:bodyPr/>
-                    <a:lstStyle/>
-                    <a:p>
-                      <a:pPr algn="l"/>
-                      <a:r>
-                        <a:rPr sz="1000" b="0">
-                          <a:solidFill>
-                            <a:srgbClr val="1D1B43"/>
-                          </a:solidFill>
-                          <a:latin typeface="Calibri"/>
-                        </a:rPr>
-                        <a:t>30/04/2026</a:t>
-                      </a:r>
-                    </a:p>
-                  </a:txBody>
-                  <a:tcPr>
-                    <a:solidFill>
-                      <a:srgbClr val="F2F2F2"/>
-                    </a:solidFill>
-                  </a:tcPr>
-                </a:tc>
-                <a:tc>
-                  <a:txBody>
-                    <a:bodyPr/>
-                    <a:lstStyle/>
-                    <a:p>
-                      <a:pPr algn="l"/>
-                      <a:r>
-                        <a:rPr sz="1000" b="0">
-                          <a:solidFill>
-                            <a:srgbClr val="1D1B43"/>
-                          </a:solidFill>
-                          <a:latin typeface="Calibri"/>
-                        </a:rPr>
-                        <a:t>FORA DO PRAZO</a:t>
-                      </a:r>
-                    </a:p>
-                  </a:txBody>
-                  <a:tcPr>
-                    <a:solidFill>
-                      <a:srgbClr val="F2F2F2"/>
-                    </a:solidFill>
-                  </a:tcPr>
-                </a:tc>
-              </a:tr>
-              <a:tr h="198782">
-                <a:tc>
-                  <a:txBody>
-                    <a:bodyPr/>
-                    <a:lstStyle/>
-                    <a:p>
-                      <a:pPr algn="l"/>
-                      <a:r>
-                        <a:rPr sz="1000" b="0">
-                          <a:solidFill>
-                            <a:srgbClr val="1D1B43"/>
-                          </a:solidFill>
-                          <a:latin typeface="Calibri"/>
-                        </a:rPr>
-                        <a:t>280247</a:t>
-                      </a:r>
-                    </a:p>
-                  </a:txBody>
-                  <a:tcPr>
-                    <a:solidFill>
-                      <a:srgbClr val="FFFFFF"/>
-                    </a:solidFill>
-                  </a:tcPr>
-                </a:tc>
-                <a:tc>
-                  <a:txBody>
-                    <a:bodyPr/>
-                    <a:lstStyle/>
-                    <a:p>
-                      <a:pPr algn="l"/>
-                      <a:r>
-                        <a:rPr sz="1000" b="0">
-                          <a:solidFill>
-                            <a:srgbClr val="1D1B43"/>
-                          </a:solidFill>
-                          <a:latin typeface="Calibri"/>
-                        </a:rPr>
-                        <a:t>SOBREIRA E ALBANI LT - ALEGRE / ES</a:t>
-                      </a:r>
-                    </a:p>
-                  </a:txBody>
-                  <a:tcPr>
-                    <a:solidFill>
-                      <a:srgbClr val="FFFFFF"/>
-                    </a:solidFill>
-                  </a:tcPr>
-                </a:tc>
-                <a:tc>
-                  <a:txBody>
-                    <a:bodyPr/>
-                    <a:lstStyle/>
-                    <a:p>
-                      <a:pPr algn="l"/>
-                      <a:r>
-                        <a:rPr sz="1000" b="0">
-                          <a:solidFill>
-                            <a:srgbClr val="1D1B43"/>
-                          </a:solidFill>
-                          <a:latin typeface="Calibri"/>
-                        </a:rPr>
-                        <a:t>ALEGRE/ES</a:t>
-                      </a:r>
-                    </a:p>
-                  </a:txBody>
-                  <a:tcPr>
-                    <a:solidFill>
-                      <a:srgbClr val="FFFFFF"/>
-                    </a:solidFill>
-                  </a:tcPr>
-                </a:tc>
-                <a:tc>
-                  <a:txBody>
-                    <a:bodyPr/>
-                    <a:lstStyle/>
-                    <a:p>
-                      <a:pPr algn="l"/>
-                      <a:r>
-                        <a:rPr sz="1000" b="0">
-                          <a:solidFill>
-                            <a:srgbClr val="1D1B43"/>
-                          </a:solidFill>
-                          <a:latin typeface="Calibri"/>
-                        </a:rPr>
-                        <a:t>30/04/2026</a:t>
-                      </a:r>
-                    </a:p>
-                  </a:txBody>
-                  <a:tcPr>
-                    <a:solidFill>
-                      <a:srgbClr val="FFFFFF"/>
-                    </a:solidFill>
-                  </a:tcPr>
-                </a:tc>
-                <a:tc>
-                  <a:txBody>
-                    <a:bodyPr/>
-                    <a:lstStyle/>
-                    <a:p>
-                      <a:pPr algn="l"/>
-                      <a:r>
-                        <a:rPr sz="1000" b="0">
-                          <a:solidFill>
-                            <a:srgbClr val="1D1B43"/>
-                          </a:solidFill>
-                          <a:latin typeface="Calibri"/>
-                        </a:rPr>
-                        <a:t>ENTREGUE FORA DO PRAZO</a:t>
-                      </a:r>
-                    </a:p>
-                  </a:txBody>
-                  <a:tcPr>
-                    <a:solidFill>
-                      <a:srgbClr val="FFFFFF"/>
-                    </a:solidFill>
-                  </a:tcPr>
-                </a:tc>
-              </a:tr>
-              <a:tr h="198782">
-                <a:tc>
-                  <a:txBody>
-                    <a:bodyPr/>
-                    <a:lstStyle/>
-                    <a:p>
-                      <a:pPr algn="l"/>
-                      <a:r>
-                        <a:rPr sz="1000" b="0">
-                          <a:solidFill>
-                            <a:srgbClr val="1D1B43"/>
-                          </a:solidFill>
-                          <a:latin typeface="Calibri"/>
-                        </a:rPr>
-                        <a:t>280254</a:t>
-                      </a:r>
-                    </a:p>
-                  </a:txBody>
-                  <a:tcPr>
-                    <a:solidFill>
-                      <a:srgbClr val="F2F2F2"/>
-                    </a:solidFill>
-                  </a:tcPr>
-                </a:tc>
-                <a:tc>
-                  <a:txBody>
-                    <a:bodyPr/>
-                    <a:lstStyle/>
-                    <a:p>
-                      <a:pPr algn="l"/>
-                      <a:r>
-                        <a:rPr sz="1000" b="0">
-                          <a:solidFill>
-                            <a:srgbClr val="1D1B43"/>
-                          </a:solidFill>
-                          <a:latin typeface="Calibri"/>
-                        </a:rPr>
-                        <a:t>43.474.701 TEREZINHA - FRANCISCO MORATO / SP</a:t>
-                      </a:r>
-                    </a:p>
-                  </a:txBody>
-                  <a:tcPr>
-                    <a:solidFill>
-                      <a:srgbClr val="F2F2F2"/>
-                    </a:solidFill>
-                  </a:tcPr>
-                </a:tc>
-                <a:tc>
-                  <a:txBody>
-                    <a:bodyPr/>
-                    <a:lstStyle/>
-                    <a:p>
-                      <a:pPr algn="l"/>
-                      <a:r>
-                        <a:rPr sz="1000" b="0">
-                          <a:solidFill>
-                            <a:srgbClr val="1D1B43"/>
-                          </a:solidFill>
-                          <a:latin typeface="Calibri"/>
-                        </a:rPr>
-                        <a:t>FRANCISCO MORATO/SP</a:t>
-                      </a:r>
-                    </a:p>
-                  </a:txBody>
-                  <a:tcPr>
-                    <a:solidFill>
-                      <a:srgbClr val="F2F2F2"/>
-                    </a:solidFill>
-                  </a:tcPr>
-                </a:tc>
-                <a:tc>
-                  <a:txBody>
-                    <a:bodyPr/>
-                    <a:lstStyle/>
-                    <a:p>
-                      <a:pPr algn="l"/>
-                      <a:r>
-                        <a:rPr sz="1000" b="0">
-                          <a:solidFill>
-                            <a:srgbClr val="1D1B43"/>
-                          </a:solidFill>
-                          <a:latin typeface="Calibri"/>
-                        </a:rPr>
-                        <a:t>30/04/2026</a:t>
-                      </a:r>
-                    </a:p>
-                  </a:txBody>
-                  <a:tcPr>
-                    <a:solidFill>
-                      <a:srgbClr val="F2F2F2"/>
-                    </a:solidFill>
-                  </a:tcPr>
-                </a:tc>
-                <a:tc>
-                  <a:txBody>
-                    <a:bodyPr/>
-                    <a:lstStyle/>
-                    <a:p>
-                      <a:pPr algn="l"/>
-                      <a:r>
-                        <a:rPr sz="1000" b="0">
-                          <a:solidFill>
-                            <a:srgbClr val="1D1B43"/>
-                          </a:solidFill>
-                          <a:latin typeface="Calibri"/>
-                        </a:rPr>
-                        <a:t>ENTREGUE FORA DO PRAZO</a:t>
-                      </a:r>
-                    </a:p>
-                  </a:txBody>
-                  <a:tcPr>
-                    <a:solidFill>
-                      <a:srgbClr val="F2F2F2"/>
-                    </a:solidFill>
-                  </a:tcPr>
-                </a:tc>
-              </a:tr>
-              <a:tr h="198782">
-                <a:tc>
-                  <a:txBody>
-                    <a:bodyPr/>
-                    <a:lstStyle/>
-                    <a:p>
-                      <a:pPr algn="l"/>
-                      <a:r>
-                        <a:rPr sz="1000" b="0">
-                          <a:solidFill>
-                            <a:srgbClr val="1D1B43"/>
-                          </a:solidFill>
-                          <a:latin typeface="Calibri"/>
-                        </a:rPr>
-                        <a:t>280262</a:t>
-                      </a:r>
-                    </a:p>
-                  </a:txBody>
-                  <a:tcPr>
-                    <a:solidFill>
-                      <a:srgbClr val="FFFFFF"/>
-                    </a:solidFill>
-                  </a:tcPr>
-                </a:tc>
-                <a:tc>
-                  <a:txBody>
-                    <a:bodyPr/>
-                    <a:lstStyle/>
-                    <a:p>
-                      <a:pPr algn="l"/>
-                      <a:r>
-                        <a:rPr sz="1000" b="0">
-                          <a:solidFill>
-                            <a:srgbClr val="1D1B43"/>
-                          </a:solidFill>
-                          <a:latin typeface="Calibri"/>
-                        </a:rPr>
-                        <a:t>62.209.212 EVELLYN A - IBITIRAMA / ES</a:t>
-                      </a:r>
-                    </a:p>
-                  </a:txBody>
-                  <a:tcPr>
-                    <a:solidFill>
-                      <a:srgbClr val="FFFFFF"/>
-                    </a:solidFill>
-                  </a:tcPr>
-                </a:tc>
-                <a:tc>
-                  <a:txBody>
-                    <a:bodyPr/>
-                    <a:lstStyle/>
-                    <a:p>
-                      <a:pPr algn="l"/>
-                      <a:r>
-                        <a:rPr sz="1000" b="0">
-                          <a:solidFill>
-                            <a:srgbClr val="1D1B43"/>
-                          </a:solidFill>
-                          <a:latin typeface="Calibri"/>
-                        </a:rPr>
-                        <a:t>IBITIRAMA/ES</a:t>
-                      </a:r>
-                    </a:p>
-                  </a:txBody>
-                  <a:tcPr>
-                    <a:solidFill>
-                      <a:srgbClr val="FFFFFF"/>
-                    </a:solidFill>
-                  </a:tcPr>
-                </a:tc>
-                <a:tc>
-                  <a:txBody>
-                    <a:bodyPr/>
-                    <a:lstStyle/>
-                    <a:p>
-                      <a:pPr algn="l"/>
-                      <a:r>
-                        <a:rPr sz="1000" b="0">
-                          <a:solidFill>
-                            <a:srgbClr val="1D1B43"/>
-                          </a:solidFill>
-                          <a:latin typeface="Calibri"/>
-                        </a:rPr>
-                        <a:t>30/04/2026</a:t>
-                      </a:r>
-                    </a:p>
-                  </a:txBody>
-                  <a:tcPr>
-                    <a:solidFill>
-                      <a:srgbClr val="FFFFFF"/>
-                    </a:solidFill>
-                  </a:tcPr>
-                </a:tc>
-                <a:tc>
-                  <a:txBody>
-                    <a:bodyPr/>
-                    <a:lstStyle/>
-                    <a:p>
-                      <a:pPr algn="l"/>
-                      <a:r>
-                        <a:rPr sz="1000" b="0">
-                          <a:solidFill>
-                            <a:srgbClr val="1D1B43"/>
-                          </a:solidFill>
-                          <a:latin typeface="Calibri"/>
-                        </a:rPr>
-                        <a:t>ENTREGUE FORA DO PRAZO</a:t>
-                      </a:r>
-                    </a:p>
-                  </a:txBody>
-                  <a:tcPr>
-                    <a:solidFill>
-                      <a:srgbClr val="FFFFFF"/>
-                    </a:solidFill>
-                  </a:tcPr>
-                </a:tc>
-              </a:tr>
-              <a:tr h="198782">
-                <a:tc>
-                  <a:txBody>
-                    <a:bodyPr/>
-                    <a:lstStyle/>
-                    <a:p>
-                      <a:pPr algn="l"/>
-                      <a:r>
-                        <a:rPr sz="1000" b="0">
-                          <a:solidFill>
-                            <a:srgbClr val="1D1B43"/>
-                          </a:solidFill>
-                          <a:latin typeface="Calibri"/>
-                        </a:rPr>
-                        <a:t>280266</a:t>
-                      </a:r>
-                    </a:p>
-                  </a:txBody>
-                  <a:tcPr>
-                    <a:solidFill>
-                      <a:srgbClr val="F2F2F2"/>
-                    </a:solidFill>
-                  </a:tcPr>
-                </a:tc>
-                <a:tc>
-                  <a:txBody>
-                    <a:bodyPr/>
-                    <a:lstStyle/>
-                    <a:p>
-                      <a:pPr algn="l"/>
-                      <a:r>
-                        <a:rPr sz="1000" b="0">
-                          <a:solidFill>
-                            <a:srgbClr val="1D1B43"/>
-                          </a:solidFill>
-                          <a:latin typeface="Calibri"/>
-                        </a:rPr>
-                        <a:t>11.681.910 DARLENE G - BIRITIBA-MIRIM / SP</a:t>
-                      </a:r>
-                    </a:p>
-                  </a:txBody>
-                  <a:tcPr>
-                    <a:solidFill>
-                      <a:srgbClr val="F2F2F2"/>
-                    </a:solidFill>
-                  </a:tcPr>
-                </a:tc>
-                <a:tc>
-                  <a:txBody>
-                    <a:bodyPr/>
-                    <a:lstStyle/>
-                    <a:p>
-                      <a:pPr algn="l"/>
-                      <a:r>
-                        <a:rPr sz="1000" b="0">
-                          <a:solidFill>
-                            <a:srgbClr val="1D1B43"/>
-                          </a:solidFill>
-                          <a:latin typeface="Calibri"/>
-                        </a:rPr>
-                        <a:t>BIRITIBA-MIRIM/SP</a:t>
-                      </a:r>
-                    </a:p>
-                  </a:txBody>
-                  <a:tcPr>
-                    <a:solidFill>
-                      <a:srgbClr val="F2F2F2"/>
-                    </a:solidFill>
-                  </a:tcPr>
-                </a:tc>
-                <a:tc>
-                  <a:txBody>
-                    <a:bodyPr/>
-                    <a:lstStyle/>
-                    <a:p>
-                      <a:pPr algn="l"/>
-                      <a:r>
-                        <a:rPr sz="1000" b="0">
-                          <a:solidFill>
-                            <a:srgbClr val="1D1B43"/>
-                          </a:solidFill>
-                          <a:latin typeface="Calibri"/>
-                        </a:rPr>
-                        <a:t>30/04/2026</a:t>
+                        <a:t>06/05/2026</a:t>
                       </a:r>
                     </a:p>
                   </a:txBody>
@@ -8181,7 +7713,7 @@
         </p:nvGraphicFramePr>
         <p:xfrm>
           <a:off x="731520" y="1920240"/>
-          <a:ext cx="10698480" cy="3200400"/>
+          <a:ext cx="10698480" cy="2286000"/>
         </p:xfrm>
         <a:graphic>
           <a:graphicData uri="http://schemas.openxmlformats.org/drawingml/2006/table">
@@ -8374,7 +7906,7 @@
                           </a:solidFill>
                           <a:latin typeface="Calibri"/>
                         </a:rPr>
-                        <a:t>164</a:t>
+                        <a:t>114</a:t>
                       </a:r>
                     </a:p>
                   </a:txBody>
@@ -8397,7 +7929,7 @@
                           </a:solidFill>
                           <a:latin typeface="Calibri"/>
                         </a:rPr>
-                        <a:t>161</a:t>
+                        <a:t>99</a:t>
                       </a:r>
                     </a:p>
                   </a:txBody>
@@ -8420,7 +7952,7 @@
                           </a:solidFill>
                           <a:latin typeface="Calibri"/>
                         </a:rPr>
-                        <a:t>3</a:t>
+                        <a:t>15</a:t>
                       </a:r>
                     </a:p>
                   </a:txBody>
@@ -8443,7 +7975,7 @@
                           </a:solidFill>
                           <a:latin typeface="Calibri"/>
                         </a:rPr>
-                        <a:t>98.2%</a:t>
+                        <a:t>86.8%</a:t>
                       </a:r>
                     </a:p>
                   </a:txBody>
@@ -8466,7 +7998,7 @@
                           </a:solidFill>
                           <a:latin typeface="Calibri"/>
                         </a:rPr>
-                        <a:t>Excelente</a:t>
+                        <a:t>Regular</a:t>
                       </a:r>
                     </a:p>
                   </a:txBody>
@@ -8514,7 +8046,7 @@
                           </a:solidFill>
                           <a:latin typeface="Calibri"/>
                         </a:rPr>
-                        <a:t>59</a:t>
+                        <a:t>21</a:t>
                       </a:r>
                     </a:p>
                   </a:txBody>
@@ -8537,7 +8069,7 @@
                           </a:solidFill>
                           <a:latin typeface="Calibri"/>
                         </a:rPr>
-                        <a:t>55</a:t>
+                        <a:t>19</a:t>
                       </a:r>
                     </a:p>
                   </a:txBody>
@@ -8560,7 +8092,7 @@
                           </a:solidFill>
                           <a:latin typeface="Calibri"/>
                         </a:rPr>
-                        <a:t>4</a:t>
+                        <a:t>2</a:t>
                       </a:r>
                     </a:p>
                   </a:txBody>
@@ -8583,7 +8115,7 @@
                           </a:solidFill>
                           <a:latin typeface="Calibri"/>
                         </a:rPr>
-                        <a:t>93.2%</a:t>
+                        <a:t>90.5%</a:t>
                       </a:r>
                     </a:p>
                   </a:txBody>
@@ -8654,7 +8186,7 @@
                           </a:solidFill>
                           <a:latin typeface="Calibri"/>
                         </a:rPr>
-                        <a:t>27</a:t>
+                        <a:t>2</a:t>
                       </a:r>
                     </a:p>
                   </a:txBody>
@@ -8677,7 +8209,7 @@
                           </a:solidFill>
                           <a:latin typeface="Calibri"/>
                         </a:rPr>
-                        <a:t>12</a:t>
+                        <a:t>1</a:t>
                       </a:r>
                     </a:p>
                   </a:txBody>
@@ -8700,7 +8232,7 @@
                           </a:solidFill>
                           <a:latin typeface="Calibri"/>
                         </a:rPr>
-                        <a:t>15</a:t>
+                        <a:t>1</a:t>
                       </a:r>
                     </a:p>
                   </a:txBody>
@@ -8723,7 +8255,7 @@
                           </a:solidFill>
                           <a:latin typeface="Calibri"/>
                         </a:rPr>
-                        <a:t>44.4%</a:t>
+                        <a:t>50.0%</a:t>
                       </a:r>
                     </a:p>
                   </a:txBody>
@@ -8772,286 +8304,6 @@
                           <a:latin typeface="Calibri"/>
                         </a:rPr>
                         <a:t>SC</a:t>
-                      </a:r>
-                    </a:p>
-                  </a:txBody>
-                  <a:tcPr>
-                    <a:solidFill>
-                      <a:srgbClr val="F2F2F2"/>
-                    </a:solidFill>
-                  </a:tcPr>
-                </a:tc>
-                <a:tc>
-                  <a:txBody>
-                    <a:bodyPr/>
-                    <a:lstStyle/>
-                    <a:p>
-                      <a:pPr algn="l"/>
-                      <a:r>
-                        <a:rPr sz="1000" b="0">
-                          <a:solidFill>
-                            <a:srgbClr val="1D1B43"/>
-                          </a:solidFill>
-                          <a:latin typeface="Calibri"/>
-                        </a:rPr>
-                        <a:t>11</a:t>
-                      </a:r>
-                    </a:p>
-                  </a:txBody>
-                  <a:tcPr>
-                    <a:solidFill>
-                      <a:srgbClr val="F2F2F2"/>
-                    </a:solidFill>
-                  </a:tcPr>
-                </a:tc>
-                <a:tc>
-                  <a:txBody>
-                    <a:bodyPr/>
-                    <a:lstStyle/>
-                    <a:p>
-                      <a:pPr algn="l"/>
-                      <a:r>
-                        <a:rPr sz="1000" b="0">
-                          <a:solidFill>
-                            <a:srgbClr val="1D1B43"/>
-                          </a:solidFill>
-                          <a:latin typeface="Calibri"/>
-                        </a:rPr>
-                        <a:t>11</a:t>
-                      </a:r>
-                    </a:p>
-                  </a:txBody>
-                  <a:tcPr>
-                    <a:solidFill>
-                      <a:srgbClr val="F2F2F2"/>
-                    </a:solidFill>
-                  </a:tcPr>
-                </a:tc>
-                <a:tc>
-                  <a:txBody>
-                    <a:bodyPr/>
-                    <a:lstStyle/>
-                    <a:p>
-                      <a:pPr algn="l"/>
-                      <a:r>
-                        <a:rPr sz="1000" b="0">
-                          <a:solidFill>
-                            <a:srgbClr val="1D1B43"/>
-                          </a:solidFill>
-                          <a:latin typeface="Calibri"/>
-                        </a:rPr>
-                        <a:t>0</a:t>
-                      </a:r>
-                    </a:p>
-                  </a:txBody>
-                  <a:tcPr>
-                    <a:solidFill>
-                      <a:srgbClr val="F2F2F2"/>
-                    </a:solidFill>
-                  </a:tcPr>
-                </a:tc>
-                <a:tc>
-                  <a:txBody>
-                    <a:bodyPr/>
-                    <a:lstStyle/>
-                    <a:p>
-                      <a:pPr algn="l"/>
-                      <a:r>
-                        <a:rPr sz="1000" b="0">
-                          <a:solidFill>
-                            <a:srgbClr val="1D1B43"/>
-                          </a:solidFill>
-                          <a:latin typeface="Calibri"/>
-                        </a:rPr>
-                        <a:t>100.0%</a:t>
-                      </a:r>
-                    </a:p>
-                  </a:txBody>
-                  <a:tcPr>
-                    <a:solidFill>
-                      <a:srgbClr val="F2F2F2"/>
-                    </a:solidFill>
-                  </a:tcPr>
-                </a:tc>
-                <a:tc>
-                  <a:txBody>
-                    <a:bodyPr/>
-                    <a:lstStyle/>
-                    <a:p>
-                      <a:pPr algn="l"/>
-                      <a:r>
-                        <a:rPr sz="1000" b="0">
-                          <a:solidFill>
-                            <a:srgbClr val="1D1B43"/>
-                          </a:solidFill>
-                          <a:latin typeface="Calibri"/>
-                        </a:rPr>
-                        <a:t>Excelente</a:t>
-                      </a:r>
-                    </a:p>
-                  </a:txBody>
-                  <a:tcPr>
-                    <a:solidFill>
-                      <a:srgbClr val="F2F2F2"/>
-                    </a:solidFill>
-                  </a:tcPr>
-                </a:tc>
-              </a:tr>
-              <a:tr h="457200">
-                <a:tc>
-                  <a:txBody>
-                    <a:bodyPr/>
-                    <a:lstStyle/>
-                    <a:p>
-                      <a:pPr algn="l"/>
-                      <a:r>
-                        <a:rPr sz="1000" b="0">
-                          <a:solidFill>
-                            <a:srgbClr val="1D1B43"/>
-                          </a:solidFill>
-                          <a:latin typeface="Calibri"/>
-                        </a:rPr>
-                        <a:t>RJ</a:t>
-                      </a:r>
-                    </a:p>
-                  </a:txBody>
-                  <a:tcPr>
-                    <a:solidFill>
-                      <a:srgbClr val="FFFFFF"/>
-                    </a:solidFill>
-                  </a:tcPr>
-                </a:tc>
-                <a:tc>
-                  <a:txBody>
-                    <a:bodyPr/>
-                    <a:lstStyle/>
-                    <a:p>
-                      <a:pPr algn="l"/>
-                      <a:r>
-                        <a:rPr sz="1000" b="0">
-                          <a:solidFill>
-                            <a:srgbClr val="1D1B43"/>
-                          </a:solidFill>
-                          <a:latin typeface="Calibri"/>
-                        </a:rPr>
-                        <a:t>6</a:t>
-                      </a:r>
-                    </a:p>
-                  </a:txBody>
-                  <a:tcPr>
-                    <a:solidFill>
-                      <a:srgbClr val="FFFFFF"/>
-                    </a:solidFill>
-                  </a:tcPr>
-                </a:tc>
-                <a:tc>
-                  <a:txBody>
-                    <a:bodyPr/>
-                    <a:lstStyle/>
-                    <a:p>
-                      <a:pPr algn="l"/>
-                      <a:r>
-                        <a:rPr sz="1000" b="0">
-                          <a:solidFill>
-                            <a:srgbClr val="1D1B43"/>
-                          </a:solidFill>
-                          <a:latin typeface="Calibri"/>
-                        </a:rPr>
-                        <a:t>6</a:t>
-                      </a:r>
-                    </a:p>
-                  </a:txBody>
-                  <a:tcPr>
-                    <a:solidFill>
-                      <a:srgbClr val="FFFFFF"/>
-                    </a:solidFill>
-                  </a:tcPr>
-                </a:tc>
-                <a:tc>
-                  <a:txBody>
-                    <a:bodyPr/>
-                    <a:lstStyle/>
-                    <a:p>
-                      <a:pPr algn="l"/>
-                      <a:r>
-                        <a:rPr sz="1000" b="0">
-                          <a:solidFill>
-                            <a:srgbClr val="1D1B43"/>
-                          </a:solidFill>
-                          <a:latin typeface="Calibri"/>
-                        </a:rPr>
-                        <a:t>0</a:t>
-                      </a:r>
-                    </a:p>
-                  </a:txBody>
-                  <a:tcPr>
-                    <a:solidFill>
-                      <a:srgbClr val="FFFFFF"/>
-                    </a:solidFill>
-                  </a:tcPr>
-                </a:tc>
-                <a:tc>
-                  <a:txBody>
-                    <a:bodyPr/>
-                    <a:lstStyle/>
-                    <a:p>
-                      <a:pPr algn="l"/>
-                      <a:r>
-                        <a:rPr sz="1000" b="0">
-                          <a:solidFill>
-                            <a:srgbClr val="1D1B43"/>
-                          </a:solidFill>
-                          <a:latin typeface="Calibri"/>
-                        </a:rPr>
-                        <a:t>100.0%</a:t>
-                      </a:r>
-                    </a:p>
-                  </a:txBody>
-                  <a:tcPr>
-                    <a:solidFill>
-                      <a:srgbClr val="FFFFFF"/>
-                    </a:solidFill>
-                  </a:tcPr>
-                </a:tc>
-                <a:tc>
-                  <a:txBody>
-                    <a:bodyPr/>
-                    <a:lstStyle/>
-                    <a:p>
-                      <a:pPr algn="l"/>
-                      <a:r>
-                        <a:rPr sz="1000" b="0">
-                          <a:solidFill>
-                            <a:srgbClr val="1D1B43"/>
-                          </a:solidFill>
-                          <a:latin typeface="Calibri"/>
-                        </a:rPr>
-                        <a:t>Excelente</a:t>
-                      </a:r>
-                    </a:p>
-                  </a:txBody>
-                  <a:tcPr>
-                    <a:solidFill>
-                      <a:srgbClr val="FFFFFF"/>
-                    </a:solidFill>
-                  </a:tcPr>
-                </a:tc>
-              </a:tr>
-              <a:tr h="457200">
-                <a:tc>
-                  <a:txBody>
-                    <a:bodyPr/>
-                    <a:lstStyle/>
-                    <a:p>
-                      <a:pPr algn="l"/>
-                      <a:r>
-                        <a:rPr sz="1000" b="0">
-                          <a:solidFill>
-                            <a:srgbClr val="1D1B43"/>
-                          </a:solidFill>
-                          <a:latin typeface="Calibri"/>
-                        </a:rPr>
-                        <a:t>RS</a:t>
                       </a:r>
                     </a:p>
                   </a:txBody>
@@ -9261,7 +8513,7 @@
                 </a:solidFill>
                 <a:latin typeface="Calibri"/>
               </a:rPr>
-              <a:t>TOP DESTINATARIOS (200 pontos)</a:t>
+              <a:t>TOP DESTINATARIOS (132 pontos)</a:t>
             </a:r>
           </a:p>
         </p:txBody>
@@ -9536,7 +8788,7 @@
                           </a:solidFill>
                           <a:latin typeface="Calibri"/>
                         </a:rPr>
-                        <a:t>DIOGO COMERCIO DE CA - SAO PAULO / SP</a:t>
+                        <a:t>VERDEN COMERCIO DE C - SAO PAULO / SP</a:t>
                       </a:r>
                     </a:p>
                   </a:txBody>
@@ -9559,7 +8811,7 @@
                           </a:solidFill>
                           <a:latin typeface="Calibri"/>
                         </a:rPr>
-                        <a:t>4</a:t>
+                        <a:t>5</a:t>
                       </a:r>
                     </a:p>
                   </a:txBody>
@@ -9582,7 +8834,7 @@
                           </a:solidFill>
                           <a:latin typeface="Calibri"/>
                         </a:rPr>
-                        <a:t>4</a:t>
+                        <a:t>5</a:t>
                       </a:r>
                     </a:p>
                   </a:txBody>
@@ -9699,7 +8951,7 @@
                           </a:solidFill>
                           <a:latin typeface="Calibri"/>
                         </a:rPr>
-                        <a:t>UMEKITA SHOES EIRELI - CAMPINAS / SP</a:t>
+                        <a:t>VITTI VITTI LTDA - E - RIO CLARO / SP</a:t>
                       </a:r>
                     </a:p>
                   </a:txBody>
@@ -9722,7 +8974,7 @@
                           </a:solidFill>
                           <a:latin typeface="Calibri"/>
                         </a:rPr>
-                        <a:t>4</a:t>
+                        <a:t>2</a:t>
                       </a:r>
                     </a:p>
                   </a:txBody>
@@ -9745,7 +8997,7 @@
                           </a:solidFill>
                           <a:latin typeface="Calibri"/>
                         </a:rPr>
-                        <a:t>4</a:t>
+                        <a:t>1</a:t>
                       </a:r>
                     </a:p>
                   </a:txBody>
@@ -9768,7 +9020,7 @@
                           </a:solidFill>
                           <a:latin typeface="Calibri"/>
                         </a:rPr>
-                        <a:t>0</a:t>
+                        <a:t>1</a:t>
                       </a:r>
                     </a:p>
                   </a:txBody>
@@ -9791,7 +9043,7 @@
                           </a:solidFill>
                           <a:latin typeface="Calibri"/>
                         </a:rPr>
-                        <a:t>100.0%</a:t>
+                        <a:t>50.0%</a:t>
                       </a:r>
                     </a:p>
                   </a:txBody>
@@ -9814,7 +9066,7 @@
                           </a:solidFill>
                           <a:latin typeface="Calibri"/>
                         </a:rPr>
-                        <a:t>Excelente</a:t>
+                        <a:t>Atencao</a:t>
                       </a:r>
                     </a:p>
                   </a:txBody>
@@ -9862,7 +9114,7 @@
                           </a:solidFill>
                           <a:latin typeface="Calibri"/>
                         </a:rPr>
-                        <a:t>NATYLILLYS COMERCIO - SAO PAULO / SP</a:t>
+                        <a:t>ISABELA MARQUES BISP - PARAPUA / SP</a:t>
                       </a:r>
                     </a:p>
                   </a:txBody>
@@ -9885,7 +9137,7 @@
                           </a:solidFill>
                           <a:latin typeface="Calibri"/>
                         </a:rPr>
-                        <a:t>4</a:t>
+                        <a:t>2</a:t>
                       </a:r>
                     </a:p>
                   </a:txBody>
@@ -9908,7 +9160,7 @@
                           </a:solidFill>
                           <a:latin typeface="Calibri"/>
                         </a:rPr>
-                        <a:t>4</a:t>
+                        <a:t>2</a:t>
                       </a:r>
                     </a:p>
                   </a:txBody>
@@ -10025,7 +9277,7 @@
                           </a:solidFill>
                           <a:latin typeface="Calibri"/>
                         </a:rPr>
-                        <a:t>BLP SAPATOS E BOLSAS - GUARULHOS / SP</a:t>
+                        <a:t>VIPE COMERCIO DE CAL - CATANDUVA / SP</a:t>
                       </a:r>
                     </a:p>
                   </a:txBody>
@@ -10048,7 +9300,7 @@
                           </a:solidFill>
                           <a:latin typeface="Calibri"/>
                         </a:rPr>
-                        <a:t>3</a:t>
+                        <a:t>2</a:t>
                       </a:r>
                     </a:p>
                   </a:txBody>
@@ -10071,7 +9323,7 @@
                           </a:solidFill>
                           <a:latin typeface="Calibri"/>
                         </a:rPr>
-                        <a:t>3</a:t>
+                        <a:t>2</a:t>
                       </a:r>
                     </a:p>
                   </a:txBody>
@@ -10188,7 +9440,7 @@
                           </a:solidFill>
                           <a:latin typeface="Calibri"/>
                         </a:rPr>
-                        <a:t>APONTE COMERCIO DE C - SAO PAULO / SP</a:t>
+                        <a:t>A C DA SILVA MOTA CA - CAMPOS DO JORDAO / SP</a:t>
                       </a:r>
                     </a:p>
                   </a:txBody>
@@ -10211,7 +9463,7 @@
                           </a:solidFill>
                           <a:latin typeface="Calibri"/>
                         </a:rPr>
-                        <a:t>3</a:t>
+                        <a:t>1</a:t>
                       </a:r>
                     </a:p>
                   </a:txBody>
@@ -10234,7 +9486,7 @@
                           </a:solidFill>
                           <a:latin typeface="Calibri"/>
                         </a:rPr>
-                        <a:t>3</a:t>
+                        <a:t>1</a:t>
                       </a:r>
                     </a:p>
                   </a:txBody>
@@ -10351,7 +9603,7 @@
                           </a:solidFill>
                           <a:latin typeface="Calibri"/>
                         </a:rPr>
-                        <a:t>BM FASHION SHOES LTD - AMERICANA / SP</a:t>
+                        <a:t>36.392.973 ANA JULLI - POMPEU / MG</a:t>
                       </a:r>
                     </a:p>
                   </a:txBody>
@@ -10374,7 +9626,7 @@
                           </a:solidFill>
                           <a:latin typeface="Calibri"/>
                         </a:rPr>
-                        <a:t>3</a:t>
+                        <a:t>1</a:t>
                       </a:r>
                     </a:p>
                   </a:txBody>
@@ -10397,7 +9649,7 @@
                           </a:solidFill>
                           <a:latin typeface="Calibri"/>
                         </a:rPr>
-                        <a:t>3</a:t>
+                        <a:t>1</a:t>
                       </a:r>
                     </a:p>
                   </a:txBody>
@@ -10514,7 +9766,7 @@
                           </a:solidFill>
                           <a:latin typeface="Calibri"/>
                         </a:rPr>
-                        <a:t>FENIX COMERCIO DE CA - PRAIA GRANDE / SP</a:t>
+                        <a:t>34.061.313 FABIANA L - CAPIVARI / SP</a:t>
                       </a:r>
                     </a:p>
                   </a:txBody>
@@ -10537,7 +9789,7 @@
                           </a:solidFill>
                           <a:latin typeface="Calibri"/>
                         </a:rPr>
-                        <a:t>3</a:t>
+                        <a:t>1</a:t>
                       </a:r>
                     </a:p>
                   </a:txBody>
@@ -10560,7 +9812,7 @@
                           </a:solidFill>
                           <a:latin typeface="Calibri"/>
                         </a:rPr>
-                        <a:t>3</a:t>
+                        <a:t>1</a:t>
                       </a:r>
                     </a:p>
                   </a:txBody>
@@ -10677,7 +9929,7 @@
                           </a:solidFill>
                           <a:latin typeface="Calibri"/>
                         </a:rPr>
-                        <a:t>CV COMERCIO DE MODAS - BARUERI / SP</a:t>
+                        <a:t>21.462.326 NADIELI B - SANTOPOLIS DO AGUAPEI / S</a:t>
                       </a:r>
                     </a:p>
                   </a:txBody>
@@ -10700,7 +9952,7 @@
                           </a:solidFill>
                           <a:latin typeface="Calibri"/>
                         </a:rPr>
-                        <a:t>3</a:t>
+                        <a:t>1</a:t>
                       </a:r>
                     </a:p>
                   </a:txBody>
@@ -10723,7 +9975,7 @@
                           </a:solidFill>
                           <a:latin typeface="Calibri"/>
                         </a:rPr>
-                        <a:t>3</a:t>
+                        <a:t>1</a:t>
                       </a:r>
                     </a:p>
                   </a:txBody>
@@ -10840,7 +10092,7 @@
                           </a:solidFill>
                           <a:latin typeface="Calibri"/>
                         </a:rPr>
-                        <a:t>LJV COMERCIO DE CALC - SAO PAULO / SP</a:t>
+                        <a:t>AMMIRARE CALCADOS EI - JABOTICABAL / SP</a:t>
                       </a:r>
                     </a:p>
                   </a:txBody>
@@ -10863,7 +10115,7 @@
                           </a:solidFill>
                           <a:latin typeface="Calibri"/>
                         </a:rPr>
-                        <a:t>3</a:t>
+                        <a:t>1</a:t>
                       </a:r>
                     </a:p>
                   </a:txBody>
@@ -10886,7 +10138,7 @@
                           </a:solidFill>
                           <a:latin typeface="Calibri"/>
                         </a:rPr>
-                        <a:t>3</a:t>
+                        <a:t>0</a:t>
                       </a:r>
                     </a:p>
                   </a:txBody>
@@ -10909,7 +10161,7 @@
                           </a:solidFill>
                           <a:latin typeface="Calibri"/>
                         </a:rPr>
-                        <a:t>0</a:t>
+                        <a:t>1</a:t>
                       </a:r>
                     </a:p>
                   </a:txBody>
@@ -10932,7 +10184,7 @@
                           </a:solidFill>
                           <a:latin typeface="Calibri"/>
                         </a:rPr>
-                        <a:t>100.0%</a:t>
+                        <a:t>0.0%</a:t>
                       </a:r>
                     </a:p>
                   </a:txBody>
@@ -10955,7 +10207,7 @@
                           </a:solidFill>
                           <a:latin typeface="Calibri"/>
                         </a:rPr>
-                        <a:t>Excelente</a:t>
+                        <a:t>Atencao</a:t>
                       </a:r>
                     </a:p>
                   </a:txBody>
@@ -11003,7 +10255,7 @@
                           </a:solidFill>
                           <a:latin typeface="Calibri"/>
                         </a:rPr>
-                        <a:t>MANZANO COMERCIO DE - SAO PAULO / SP</a:t>
+                        <a:t>ALANA MODAS LTDA - BRASILANDIA DE MINAS / MG</a:t>
                       </a:r>
                     </a:p>
                   </a:txBody>
@@ -11026,7 +10278,7 @@
                           </a:solidFill>
                           <a:latin typeface="Calibri"/>
                         </a:rPr>
-                        <a:t>3</a:t>
+                        <a:t>1</a:t>
                       </a:r>
                     </a:p>
                   </a:txBody>
@@ -11049,7 +10301,7 @@
                           </a:solidFill>
                           <a:latin typeface="Calibri"/>
                         </a:rPr>
-                        <a:t>3</a:t>
+                        <a:t>1</a:t>
                       </a:r>
                     </a:p>
                   </a:txBody>
@@ -11166,7 +10418,7 @@
                           </a:solidFill>
                           <a:latin typeface="Calibri"/>
                         </a:rPr>
-                        <a:t>RIBEIRO &amp; FONSECA CO - CAMPINAS / SP</a:t>
+                        <a:t>ALICE CALCADOS E ACE - FERNANDOPOLIS / SP</a:t>
                       </a:r>
                     </a:p>
                   </a:txBody>
@@ -11189,7 +10441,7 @@
                           </a:solidFill>
                           <a:latin typeface="Calibri"/>
                         </a:rPr>
-                        <a:t>3</a:t>
+                        <a:t>1</a:t>
                       </a:r>
                     </a:p>
                   </a:txBody>
@@ -11212,7 +10464,7 @@
                           </a:solidFill>
                           <a:latin typeface="Calibri"/>
                         </a:rPr>
-                        <a:t>3</a:t>
+                        <a:t>1</a:t>
                       </a:r>
                     </a:p>
                   </a:txBody>
@@ -11329,7 +10581,7 @@
                           </a:solidFill>
                           <a:latin typeface="Calibri"/>
                         </a:rPr>
-                        <a:t>SALTO ELEGANTE CALCA - SAO PAULO / SP</a:t>
+                        <a:t>ALFA COMERCIO DE CAL - ITAPETININGA / SP</a:t>
                       </a:r>
                     </a:p>
                   </a:txBody>
@@ -11352,7 +10604,7 @@
                           </a:solidFill>
                           <a:latin typeface="Calibri"/>
                         </a:rPr>
-                        <a:t>3</a:t>
+                        <a:t>1</a:t>
                       </a:r>
                     </a:p>
                   </a:txBody>
@@ -11375,7 +10627,7 @@
                           </a:solidFill>
                           <a:latin typeface="Calibri"/>
                         </a:rPr>
-                        <a:t>3</a:t>
+                        <a:t>1</a:t>
                       </a:r>
                     </a:p>
                   </a:txBody>
@@ -11492,7 +10744,7 @@
                           </a:solidFill>
                           <a:latin typeface="Calibri"/>
                         </a:rPr>
-                        <a:t>UNITTA COMERCIO DE C - SAO PAULO / SP</a:t>
+                        <a:t>ANA VICTORIA GUARIEN - NEVES PAULISTA / SP</a:t>
                       </a:r>
                     </a:p>
                   </a:txBody>
@@ -11515,7 +10767,7 @@
                           </a:solidFill>
                           <a:latin typeface="Calibri"/>
                         </a:rPr>
-                        <a:t>3</a:t>
+                        <a:t>1</a:t>
                       </a:r>
                     </a:p>
                   </a:txBody>
@@ -11538,7 +10790,7 @@
                           </a:solidFill>
                           <a:latin typeface="Calibri"/>
                         </a:rPr>
-                        <a:t>3</a:t>
+                        <a:t>0</a:t>
                       </a:r>
                     </a:p>
                   </a:txBody>
@@ -11561,7 +10813,7 @@
                           </a:solidFill>
                           <a:latin typeface="Calibri"/>
                         </a:rPr>
-                        <a:t>0</a:t>
+                        <a:t>1</a:t>
                       </a:r>
                     </a:p>
                   </a:txBody>
@@ -11584,7 +10836,7 @@
                           </a:solidFill>
                           <a:latin typeface="Calibri"/>
                         </a:rPr>
-                        <a:t>100.0%</a:t>
+                        <a:t>0.0%</a:t>
                       </a:r>
                     </a:p>
                   </a:txBody>
@@ -11607,7 +10859,7 @@
                           </a:solidFill>
                           <a:latin typeface="Calibri"/>
                         </a:rPr>
-                        <a:t>Excelente</a:t>
+                        <a:t>Atencao</a:t>
                       </a:r>
                     </a:p>
                   </a:txBody>
@@ -11655,7 +10907,7 @@
                           </a:solidFill>
                           <a:latin typeface="Calibri"/>
                         </a:rPr>
-                        <a:t>VERONICA COMERCIAL C - JUNDIAI / SP</a:t>
+                        <a:t>ARENET COMERCIO DE C - DUARTINA / SP</a:t>
                       </a:r>
                     </a:p>
                   </a:txBody>
@@ -11678,7 +10930,7 @@
                           </a:solidFill>
                           <a:latin typeface="Calibri"/>
                         </a:rPr>
-                        <a:t>3</a:t>
+                        <a:t>1</a:t>
                       </a:r>
                     </a:p>
                   </a:txBody>
@@ -11701,7 +10953,7 @@
                           </a:solidFill>
                           <a:latin typeface="Calibri"/>
                         </a:rPr>
-                        <a:t>3</a:t>
+                        <a:t>1</a:t>
                       </a:r>
                     </a:p>
                   </a:txBody>
